--- a/yassir-maroc/Yassir_Maroc_Plan_Marketing_Nov2026-Fev2027.pptx
+++ b/yassir-maroc/Yassir_Maroc_Plan_Marketing_Nov2026-Fev2027.pptx
@@ -19,9 +19,10 @@
     <p:sldId id="267" r:id="rId13"/>
     <p:sldId id="268" r:id="rId14"/>
     <p:sldId id="269" r:id="rId15"/>
+    <p:sldId id="270" r:id="rId16"/>
   </p:sldIdLst>
   <p:notesMasterIdLst>
-    <p:notesMasterId r:id="rId16"/>
+    <p:notesMasterId r:id="rId17"/>
   </p:notesMasterIdLst>
   <p:sldSz cx="12192000" cy="6858000"/>
   <p:notesSz cx="6858000" cy="12192000"/>
@@ -120,42 +121,43 @@
   <p:extLst>
     <p:ext uri="{521415D9-36F7-43E2-AB2F-B90AF26B5E84}">
       <p14:sectionLst xmlns:p14="http://schemas.microsoft.com/office/powerpoint/2010/main">
-        <p14:section name="Cadrage" id="{327461f7-fd7a-0025-cd64-10a57e1fae67}">
+        <p14:section name="Cadrage" id="{2950e990-0d63-0cb0-807a-91e39884a018}">
           <p14:sldIdLst>
             <p14:sldId id="256"/>
             <p14:sldId id="257"/>
             <p14:sldId id="258"/>
           </p14:sldIdLst>
         </p14:section>
-        <p14:section name="SEO par le marketing" id="{e7a8f6c3-d621-500a-0827-f733a4f3832b}">
+        <p14:section name="SEO par le marketing" id="{17aad2a4-3c7c-002d-d3a9-7ed05a755d33}">
           <p14:sldIdLst>
             <p14:sldId id="259"/>
             <p14:sldId id="260"/>
             <p14:sldId id="261"/>
           </p14:sldIdLst>
         </p14:section>
-        <p14:section name="Campagnes ads" id="{c47653fe-c80d-63d4-4e08-ae8076a2d235}">
+        <p14:section name="Campagnes ads" id="{4126a110-6a6e-0a9f-3d58-85ff3a960dde}">
           <p14:sldIdLst>
             <p14:sldId id="262"/>
             <p14:sldId id="263"/>
-          </p14:sldIdLst>
-        </p14:section>
-        <p14:section name="Calendrier" id="{e386c725-6315-cdf8-9fd4-5af3927708ef}">
-          <p14:sldIdLst>
             <p14:sldId id="264"/>
           </p14:sldIdLst>
         </p14:section>
-        <p14:section name="CRM et influence" id="{3affff67-3e88-56b2-b298-a6410808105a}">
+        <p14:section name="Calendrier" id="{6ca3d49c-3e2d-67b1-7c1e-f0ce15e962f6}">
           <p14:sldIdLst>
             <p14:sldId id="265"/>
-            <p14:sldId id="266"/>
           </p14:sldIdLst>
         </p14:section>
-        <p14:section name="Plan d'action" id="{69ee115a-9e66-a68e-44b6-ef5e8003d050}">
+        <p14:section name="CRM et influence" id="{19220b3a-3ef9-afe3-d23f-9e6baf437b5a}">
           <p14:sldIdLst>
+            <p14:sldId id="266"/>
             <p14:sldId id="267"/>
+          </p14:sldIdLst>
+        </p14:section>
+        <p14:section name="Plan d'action" id="{228f798f-29fb-6e1b-bbcd-fb45cd320366}">
+          <p14:sldIdLst>
             <p14:sldId id="268"/>
             <p14:sldId id="269"/>
+            <p14:sldId id="270"/>
           </p14:sldIdLst>
         </p14:section>
       </p14:sectionLst>
@@ -193,7 +195,7 @@
                 </a:solidFill>
                 <a:latin typeface="+mj-lt"/>
               </a:rPr>
-              <a:t>Répartition du budget marketing (hypothèse)</a:t>
+              <a:t>Répartition des 200 000 DH par poste</a:t>
             </a:r>
           </a:p>
         </c:rich>
@@ -248,7 +250,7 @@
             <c:bubble3D val="0"/>
             <c:spPr>
               <a:solidFill>
-                <a:srgbClr val="0E7F59"/>
+                <a:srgbClr val="B86E00"/>
               </a:solidFill>
               <a:effectLst/>
             </c:spPr>
@@ -258,7 +260,7 @@
             <c:bubble3D val="0"/>
             <c:spPr>
               <a:solidFill>
-                <a:srgbClr val="B86E00"/>
+                <a:srgbClr val="2B0F66"/>
               </a:solidFill>
               <a:effectLst/>
             </c:spPr>
@@ -268,7 +270,7 @@
             <c:bubble3D val="0"/>
             <c:spPr>
               <a:solidFill>
-                <a:srgbClr val="2B0F66"/>
+                <a:srgbClr val="0E7F59"/>
               </a:solidFill>
               <a:effectLst/>
             </c:spPr>
@@ -293,7 +295,7 @@
                 <a:lstStyle/>
                 <a:p>
                   <a:pPr>
-                    <a:defRPr sz="1300" b="0" i="0" u="none" strike="noStrike">
+                    <a:defRPr sz="1200" b="0" i="0" u="none" strike="noStrike">
                       <a:solidFill>
                         <a:srgbClr val="FFFFFF"/>
                       </a:solidFill>
@@ -318,7 +320,7 @@
                 <a:lstStyle/>
                 <a:p>
                   <a:pPr>
-                    <a:defRPr sz="1300" b="0" i="0" u="none" strike="noStrike">
+                    <a:defRPr sz="1200" b="0" i="0" u="none" strike="noStrike">
                       <a:solidFill>
                         <a:srgbClr val="FFFFFF"/>
                       </a:solidFill>
@@ -343,7 +345,7 @@
                 <a:lstStyle/>
                 <a:p>
                   <a:pPr>
-                    <a:defRPr sz="1300" b="0" i="0" u="none" strike="noStrike">
+                    <a:defRPr sz="1200" b="0" i="0" u="none" strike="noStrike">
                       <a:solidFill>
                         <a:srgbClr val="FFFFFF"/>
                       </a:solidFill>
@@ -368,7 +370,7 @@
                 <a:lstStyle/>
                 <a:p>
                   <a:pPr>
-                    <a:defRPr sz="1300" b="0" i="0" u="none" strike="noStrike">
+                    <a:defRPr sz="1200" b="0" i="0" u="none" strike="noStrike">
                       <a:solidFill>
                         <a:srgbClr val="FFFFFF"/>
                       </a:solidFill>
@@ -393,7 +395,7 @@
                 <a:lstStyle/>
                 <a:p>
                   <a:pPr>
-                    <a:defRPr sz="1300" b="0" i="0" u="none" strike="noStrike">
+                    <a:defRPr sz="1200" b="0" i="0" u="none" strike="noStrike">
                       <a:solidFill>
                         <a:srgbClr val="FFFFFF"/>
                       </a:solidFill>
@@ -438,19 +440,19 @@
               <c:strCache>
                 <c:ptCount val="5"/>
                 <c:pt idx="0">
-                  <c:v>Ads acquisition</c:v>
+                  <c:v>Ads : 130 000</c:v>
                 </c:pt>
                 <c:pt idx="1">
-                  <c:v>CRM et parrainage</c:v>
+                  <c:v>Influence : 30 000</c:v>
                 </c:pt>
                 <c:pt idx="2">
-                  <c:v>Influence</c:v>
+                  <c:v>Contenu et RP : 20 000</c:v>
                 </c:pt>
                 <c:pt idx="3">
-                  <c:v>Contenu SEO et RP</c:v>
+                  <c:v>CRM : 15 000</c:v>
                 </c:pt>
                 <c:pt idx="4">
-                  <c:v>Réserve de test</c:v>
+                  <c:v>Réserve : 5 000</c:v>
                 </c:pt>
               </c:strCache>
             </c:strRef>
@@ -461,19 +463,19 @@
               <c:numCache>
                 <c:ptCount val="5"/>
                 <c:pt idx="0">
-                  <c:v>55</c:v>
+                  <c:v>130000</c:v>
                 </c:pt>
                 <c:pt idx="1">
-                  <c:v>15</c:v>
+                  <c:v>30000</c:v>
                 </c:pt>
                 <c:pt idx="2">
-                  <c:v>15</c:v>
+                  <c:v>20000</c:v>
                 </c:pt>
                 <c:pt idx="3">
-                  <c:v>10</c:v>
+                  <c:v>15000</c:v>
                 </c:pt>
                 <c:pt idx="4">
-                  <c:v>5</c:v>
+                  <c:v>5000</c:v>
                 </c:pt>
               </c:numCache>
             </c:numRef>
@@ -491,7 +493,7 @@
       </c:spPr>
     </c:plotArea>
     <c:legend>
-      <c:legendPos val="b"/>
+      <c:legendPos val="r"/>
       <c:overlay val="0"/>
       <c:txPr>
         <a:bodyPr/>
@@ -510,6 +512,270 @@
         </a:p>
       </c:txPr>
     </c:legend>
+    <c:plotVisOnly val="1"/>
+    <c:dispBlanksAs val="span"/>
+  </c:chart>
+  <c:spPr>
+    <a:noFill/>
+    <a:ln>
+      <a:noFill/>
+    </a:ln>
+    <a:effectLst/>
+  </c:spPr>
+  <c:externalData r:id="rId1">
+    <c:autoUpdate val="0"/>
+  </c:externalData>
+</c:chartSpace>
+</file>
+
+<file path=ppt/charts/chart2.xml><?xml version="1.0" encoding="utf-8"?>
+<c:chartSpace xmlns:c="http://schemas.openxmlformats.org/drawingml/2006/chart" xmlns:a="http://schemas.openxmlformats.org/drawingml/2006/main" xmlns:r="http://schemas.openxmlformats.org/officeDocument/2006/relationships">
+  <c:date1904 val="0"/>
+  <c:roundedCorners val="1"/>
+  <c:chart>
+    <c:title>
+      <c:tx>
+        <c:rich>
+          <a:bodyPr/>
+          <a:lstStyle/>
+          <a:p>
+            <a:pPr>
+              <a:defRPr sz="1400" b="0" i="0" u="none" strike="noStrike">
+                <a:solidFill>
+                  <a:srgbClr val="2B0F66"/>
+                </a:solidFill>
+                <a:latin typeface="+mj-lt"/>
+              </a:defRPr>
+            </a:pPr>
+            <a:r>
+              <a:rPr sz="1400" b="0" i="0" u="none" strike="noStrike">
+                <a:solidFill>
+                  <a:srgbClr val="2B0F66"/>
+                </a:solidFill>
+                <a:latin typeface="+mj-lt"/>
+              </a:rPr>
+              <a:t>Phasage mensuel (milliers de DH)</a:t>
+            </a:r>
+          </a:p>
+        </c:rich>
+      </c:tx>
+      <c:layout/>
+      <c:overlay val="0"/>
+    </c:title>
+    <c:autoTitleDeleted val="0"/>
+    <c:plotArea>
+      <c:layout/>
+      <c:barChart>
+        <c:barDir val="col"/>
+        <c:grouping val="clustered"/>
+        <c:varyColors val="0"/>
+        <c:ser>
+          <c:idx val="0"/>
+          <c:order val="0"/>
+          <c:tx>
+            <c:strRef>
+              <c:f>Sheet1!$B$1</c:f>
+              <c:strCache>
+                <c:ptCount val="1"/>
+                <c:pt idx="0">
+                  <c:v>Budget mensuel (DH)</c:v>
+                </c:pt>
+              </c:strCache>
+            </c:strRef>
+          </c:tx>
+          <c:spPr>
+            <a:solidFill>
+              <a:srgbClr val="6D28D9"/>
+            </a:solidFill>
+            <a:effectLst/>
+          </c:spPr>
+          <c:invertIfNegative val="0"/>
+          <c:dLbls>
+            <c:numFmt formatCode="#,##0" sourceLinked="0"/>
+            <c:txPr>
+              <a:bodyPr/>
+              <a:lstStyle/>
+              <a:p>
+                <a:pPr>
+                  <a:defRPr b="0" i="0" strike="noStrike" sz="1200" u="none">
+                    <a:solidFill>
+                      <a:srgbClr val="1B1530"/>
+                    </a:solidFill>
+                    <a:latin typeface="+mn-lt"/>
+                  </a:defRPr>
+                </a:pPr>
+              </a:p>
+            </c:txPr>
+            <c:showLegendKey val="0"/>
+            <c:showVal val="1"/>
+            <c:showCatName val="0"/>
+            <c:showSerName val="0"/>
+            <c:showPercent val="0"/>
+            <c:showBubbleSize val="0"/>
+            <c:showLeaderLines val="0"/>
+          </c:dLbls>
+          <c:cat>
+            <c:multiLvlStrRef>
+              <c:f>Sheet1!$A$2:$A$5</c:f>
+              <c:multiLvlStrCache>
+                <c:ptCount val="4"/>
+                <c:lvl>
+                  <c:pt idx="0">
+                    <c:v>Novembre</c:v>
+                  </c:pt>
+                  <c:pt idx="1">
+                    <c:v>Décembre</c:v>
+                  </c:pt>
+                  <c:pt idx="2">
+                    <c:v>Janvier</c:v>
+                  </c:pt>
+                  <c:pt idx="3">
+                    <c:v>Février</c:v>
+                  </c:pt>
+                </c:lvl>
+              </c:multiLvlStrCache>
+            </c:multiLvlStrRef>
+          </c:cat>
+          <c:val>
+            <c:numRef>
+              <c:f>Sheet1!$B$2:$B$5</c:f>
+              <c:numCache>
+                <c:formatCode>General</c:formatCode>
+                <c:ptCount val="4"/>
+                <c:pt idx="0">
+                  <c:v>50</c:v>
+                </c:pt>
+                <c:pt idx="1">
+                  <c:v>40</c:v>
+                </c:pt>
+                <c:pt idx="2">
+                  <c:v>40</c:v>
+                </c:pt>
+                <c:pt idx="3">
+                  <c:v>70</c:v>
+                </c:pt>
+              </c:numCache>
+            </c:numRef>
+          </c:val>
+        </c:ser>
+        <c:dLbls>
+          <c:numFmt formatCode="#,##0" sourceLinked="0"/>
+          <c:txPr>
+            <a:bodyPr/>
+            <a:lstStyle/>
+            <a:p>
+              <a:pPr>
+                <a:defRPr b="0" i="0" strike="noStrike" sz="1200" u="none">
+                  <a:solidFill>
+                    <a:srgbClr val="1B1530"/>
+                  </a:solidFill>
+                  <a:latin typeface="+mn-lt"/>
+                </a:defRPr>
+              </a:pPr>
+            </a:p>
+          </c:txPr>
+          <c:showLegendKey val="0"/>
+          <c:showVal val="1"/>
+          <c:showCatName val="0"/>
+          <c:showSerName val="0"/>
+          <c:showPercent val="0"/>
+          <c:showBubbleSize val="0"/>
+          <c:showLeaderLines val="0"/>
+        </c:dLbls>
+        <c:gapWidth val="150"/>
+        <c:overlap val="0"/>
+        <c:axId val="2094734554"/>
+        <c:axId val="2094734552"/>
+        <c:axId val="2094734556"/>
+      </c:barChart>
+      <c:catAx>
+        <c:axId val="2094734554"/>
+        <c:scaling>
+          <c:orientation val="minMax"/>
+        </c:scaling>
+        <c:delete val="0"/>
+        <c:axPos val="b"/>
+        <c:numFmt formatCode="General" sourceLinked="1"/>
+        <c:majorTickMark val="out"/>
+        <c:minorTickMark val="none"/>
+        <c:tickLblPos val="low"/>
+        <c:spPr>
+          <a:ln w="12700" cap="flat">
+            <a:solidFill>
+              <a:srgbClr val="888888"/>
+            </a:solidFill>
+            <a:prstDash val="solid"/>
+            <a:round/>
+          </a:ln>
+        </c:spPr>
+        <c:txPr>
+          <a:bodyPr/>
+          <a:lstStyle/>
+          <a:p>
+            <a:pPr>
+              <a:defRPr sz="1200" b="0" i="0" u="none" strike="noStrike">
+                <a:solidFill>
+                  <a:srgbClr val="6B6385"/>
+                </a:solidFill>
+                <a:latin typeface="+mn-lt"/>
+              </a:defRPr>
+            </a:pPr>
+            <a:endParaRPr lang="en-US"/>
+          </a:p>
+        </c:txPr>
+        <c:crossAx val="2094734552"/>
+        <c:crosses val="autoZero"/>
+        <c:auto val="1"/>
+        <c:lblAlgn val="ctr"/>
+        <c:noMultiLvlLbl val="1"/>
+      </c:catAx>
+      <c:valAx>
+        <c:axId val="2094734552"/>
+        <c:scaling>
+          <c:orientation val="minMax"/>
+        </c:scaling>
+        <c:delete val="1"/>
+        <c:axPos val="l"/>
+        <c:numFmt formatCode="General" sourceLinked="0"/>
+        <c:majorTickMark val="out"/>
+        <c:minorTickMark val="none"/>
+        <c:tickLblPos val="nextTo"/>
+        <c:spPr>
+          <a:ln w="12700" cap="flat">
+            <a:solidFill>
+              <a:srgbClr val="888888"/>
+            </a:solidFill>
+            <a:prstDash val="solid"/>
+            <a:round/>
+          </a:ln>
+        </c:spPr>
+        <c:txPr>
+          <a:bodyPr/>
+          <a:lstStyle/>
+          <a:p>
+            <a:pPr>
+              <a:defRPr sz="1200" b="0" i="0" u="none" strike="noStrike">
+                <a:solidFill>
+                  <a:srgbClr val="000000"/>
+                </a:solidFill>
+                <a:latin typeface="Arial"/>
+              </a:defRPr>
+            </a:pPr>
+            <a:endParaRPr lang="en-US"/>
+          </a:p>
+        </c:txPr>
+        <c:crossAx val="2094734554"/>
+        <c:crosses val="autoZero"/>
+        <c:crossBetween val="between"/>
+      </c:valAx>
+      <c:spPr>
+        <a:noFill/>
+        <a:ln>
+          <a:noFill/>
+        </a:ln>
+        <a:effectLst/>
+      </c:spPr>
+    </c:plotArea>
     <c:plotVisOnly val="1"/>
     <c:dispBlanksAs val="span"/>
   </c:chart>
@@ -1009,7 +1275,7 @@
           <a:p>
             <a:r>
               <a:rPr lang="en-US" dirty="0"/>
-              <a:t>Sans rétention, chaque dirham d'acquisition est perdu au bout d'un mois. Le groupe témoin permet de prouver que la relance rapporte vraiment.</a:t>
+              <a:t>Le Ramadan est le temps fort à ne pas rater : les habitudes de commande changent complètement (ftour, shour). Les créatifs doivent être tournés en janvier.</a:t>
             </a:r>
             <a:endParaRPr lang="en-US" dirty="0"/>
           </a:p>
@@ -1097,7 +1363,7 @@
           <a:p>
             <a:r>
               <a:rPr lang="en-US" dirty="0"/>
-              <a:t>Le code promo par créateur est indispensable : sans lui, impossible de savoir quel influenceur rapporte des commandes.</a:t>
+              <a:t>Sans rétention, chaque dirham d'acquisition est perdu au bout d'un mois. Le groupe témoin permet de prouver que la relance rapporte vraiment.</a:t>
             </a:r>
             <a:endParaRPr lang="en-US" dirty="0"/>
           </a:p>
@@ -1185,7 +1451,7 @@
           <a:p>
             <a:r>
               <a:rPr lang="en-US" dirty="0"/>
-              <a:t>Chaque phase se termine par une décision : ce qui marche reçoit plus de budget, ce qui ne marche pas est coupé.</a:t>
+              <a:t>Le code promo par créateur est indispensable : sans lui, impossible de savoir quel influenceur rapporte des commandes.</a:t>
             </a:r>
             <a:endParaRPr lang="en-US" dirty="0"/>
           </a:p>
@@ -1273,7 +1539,7 @@
           <a:p>
             <a:r>
               <a:rPr lang="en-US" dirty="0"/>
-              <a:t>La répartition est un point de départ. Le pilotage hebdomadaire et la règle de coupe comptent plus que la répartition initiale.</a:t>
+              <a:t>Chaque phase se termine par une décision : ce qui marche reçoit plus de budget, ce qui ne marche pas est coupé.</a:t>
             </a:r>
             <a:endParaRPr lang="en-US" dirty="0"/>
           </a:p>
@@ -1361,7 +1627,7 @@
           <a:p>
             <a:r>
               <a:rPr lang="en-US" dirty="0"/>
-              <a:t>Sans budget ni coût cible, le plan reste théorique. Ces trois décisions débloquent tout le reste.</a:t>
+              <a:t>Novembre inclut Black Friday ; février concentre le Ramadan. Le budget doit pouvoir passer d'une plateforme à l'autre chaque semaine selon le coût par première commande.</a:t>
             </a:r>
             <a:endParaRPr lang="en-US" dirty="0"/>
           </a:p>
@@ -1385,6 +1651,94 @@
             <a:fld id="{F7021451-1387-4CA6-816F-3879F97B5CBC}" type="slidenum">
               <a:rPr lang="en-US"/>
               <a:t>14</a:t>
+            </a:fld>
+            <a:endParaRPr lang="en-US"/>
+          </a:p>
+        </p:txBody>
+      </p:sp>
+    </p:spTree>
+    <p:extLst>
+      <p:ext uri="{BB962C8B-B14F-4D97-AF65-F5344CB8AC3E}">
+        <p14:creationId xmlns:p14="http://schemas.microsoft.com/office/powerpoint/2010/main" val="1024086991"/>
+      </p:ext>
+    </p:extLst>
+  </p:cSld>
+  <p:clrMapOvr>
+    <a:masterClrMapping/>
+  </p:clrMapOvr>
+</p:notes>
+</file>
+
+<file path=ppt/notesSlides/notesSlide15.xml><?xml version="1.0" encoding="utf-8"?>
+<p:notes xmlns:a="http://schemas.openxmlformats.org/drawingml/2006/main" xmlns:r="http://schemas.openxmlformats.org/officeDocument/2006/relationships" xmlns:p="http://schemas.openxmlformats.org/presentationml/2006/main">
+  <p:cSld>
+    <p:spTree>
+      <p:nvGrpSpPr>
+        <p:cNvPr id="1" name=""/>
+        <p:cNvGrpSpPr/>
+        <p:nvPr/>
+      </p:nvGrpSpPr>
+      <p:grpSpPr>
+        <a:xfrm>
+          <a:off x="0" y="0"/>
+          <a:ext cx="0" cy="0"/>
+          <a:chOff x="0" y="0"/>
+          <a:chExt cx="0" cy="0"/>
+        </a:xfrm>
+      </p:grpSpPr>
+      <p:sp>
+        <p:nvSpPr>
+          <p:cNvPr id="2" name="Slide Image Placeholder 1"/>
+          <p:cNvSpPr>
+            <a:spLocks noGrp="1" noRot="1" noChangeAspect="1"/>
+          </p:cNvSpPr>
+          <p:nvPr>
+            <p:ph type="sldImg"/>
+          </p:nvPr>
+        </p:nvSpPr>
+        <p:spPr/>
+      </p:sp>
+      <p:sp>
+        <p:nvSpPr>
+          <p:cNvPr id="3" name="Notes Placeholder 2"/>
+          <p:cNvSpPr>
+            <a:spLocks noGrp="1"/>
+          </p:cNvSpPr>
+          <p:nvPr>
+            <p:ph type="body" idx="1"/>
+          </p:nvPr>
+        </p:nvSpPr>
+        <p:spPr/>
+        <p:txBody>
+          <a:bodyPr/>
+          <a:lstStyle/>
+          <a:p>
+            <a:r>
+              <a:rPr lang="en-US" dirty="0"/>
+              <a:t>Le budget est fixé ; il reste le coût cible, le financement des promos et la couverture de mars. La mesure de référence doit démarrer cette semaine, avant Black Friday.</a:t>
+            </a:r>
+            <a:endParaRPr lang="en-US" dirty="0"/>
+          </a:p>
+        </p:txBody>
+      </p:sp>
+      <p:sp>
+        <p:nvSpPr>
+          <p:cNvPr id="4" name="Slide Number Placeholder 3"/>
+          <p:cNvSpPr>
+            <a:spLocks noGrp="1"/>
+          </p:cNvSpPr>
+          <p:nvPr>
+            <p:ph type="sldNum" sz="quarter" idx="10"/>
+          </p:nvPr>
+        </p:nvSpPr>
+        <p:spPr/>
+        <p:txBody>
+          <a:bodyPr/>
+          <a:lstStyle/>
+          <a:p>
+            <a:fld id="{F7021451-1387-4CA6-816F-3879F97B5CBC}" type="slidenum">
+              <a:rPr lang="en-US"/>
+              <a:t>15</a:t>
             </a:fld>
             <a:endParaRPr lang="en-US"/>
           </a:p>
@@ -1889,7 +2243,7 @@
           <a:p>
             <a:r>
               <a:rPr lang="en-US" dirty="0"/>
-              <a:t>Optimiser sur la première commande, pas sur l'installation : l'algorithme cherchera des gens qui commandent, pas des gens qui téléchargent. Il faut que l'événement « première commande » remonte bien dans Adjust et dans chaque plateforme.</a:t>
+              <a:t>Optimiser sur la première commande, pas sur l'installation. Avec ce budget, mieux vaut 3 plateformes bien alimentées que 6 sous-alimentées : chaque ensemble de pubs a besoin d'un volume minimum de conversions par semaine pour sortir de la phase d'apprentissage.</a:t>
             </a:r>
             <a:endParaRPr lang="en-US" dirty="0"/>
           </a:p>
@@ -1977,7 +2331,7 @@
           <a:p>
             <a:r>
               <a:rPr lang="en-US" dirty="0"/>
-              <a:t>L'angle MRE (« Commandez pour vos proches ») s'appuie sur une fonctionnalité qui existe déjà dans l'app. C'est une cible à fort pouvoir d'achat et peu disputée par les concurrents locaux.</a:t>
+              <a:t>Le tableau sert à cadrer les attentes : selon le coût réel par première commande, le même budget donne entre 1 300 et 3 250 nouveaux clients. C'est la rétention de ces clients qui décidera de la rentabilité.</a:t>
             </a:r>
             <a:endParaRPr lang="en-US" dirty="0"/>
           </a:p>
@@ -2065,7 +2419,7 @@
           <a:p>
             <a:r>
               <a:rPr lang="en-US" dirty="0"/>
-              <a:t>Le Ramadan est le temps fort à ne pas rater : les habitudes de commande changent complètement (ftour, shour). Les créatifs doivent être tournés en janvier.</a:t>
+              <a:t>L'angle MRE (« Commandez pour vos proches ») s'appuie sur une fonctionnalité qui existe déjà dans l'app. C'est une cible à fort pouvoir d'achat et peu disputée par les concurrents locaux.</a:t>
             </a:r>
             <a:endParaRPr lang="en-US" dirty="0"/>
           </a:p>
@@ -2943,7 +3297,7 @@
                 <a:ea typeface="Arial" pitchFamily="34" charset="-122"/>
                 <a:cs typeface="Arial" pitchFamily="34" charset="-120"/>
               </a:rPr>
-              <a:t>CRM : faire revenir les clients</a:t>
+              <a:t>Calendrier des temps forts</a:t>
             </a:r>
             <a:endParaRPr lang="en-US" sz="3600" dirty="0"/>
           </a:p>
@@ -2951,18 +3305,54 @@
       </p:sp>
       <p:sp>
         <p:nvSpPr>
-          <p:cNvPr id="3" name="Parrainage"/>
+          <p:cNvPr id="3" name="Text 1"/>
+          <p:cNvSpPr txBox="1"/>
+          <p:nvPr/>
+        </p:nvSpPr>
+        <p:spPr>
+          <a:xfrm>
+            <a:off x="548640" y="1371600"/>
+            <a:ext cx="2606040" cy="365760"/>
+          </a:xfrm>
+          <a:prstGeom prst="rect">
+            <a:avLst/>
+          </a:prstGeom>
+          <a:noFill/>
+          <a:ln/>
+        </p:spPr>
+        <p:txBody>
+          <a:bodyPr wrap="square" lIns="0" tIns="0" rIns="0" bIns="0" rtlCol="0" anchor="t"/>
+          <a:lstStyle/>
+          <a:p>
+            <a:pPr indent="0" marL="0">
+              <a:buNone/>
+            </a:pPr>
+            <a:r>
+              <a:rPr lang="en-US" sz="1600" b="1" dirty="0">
+                <a:solidFill>
+                  <a:schemeClr val="accent5"/>
+                </a:solidFill>
+              </a:rPr>
+              <a:t>Novembre</a:t>
+            </a:r>
+            <a:endParaRPr lang="en-US" sz="1600" dirty="0"/>
+          </a:p>
+        </p:txBody>
+      </p:sp>
+      <p:sp>
+        <p:nvSpPr>
+          <p:cNvPr id="4" name="Novembre"/>
           <p:cNvSpPr/>
           <p:nvPr/>
         </p:nvSpPr>
         <p:spPr>
           <a:xfrm>
-            <a:off x="548640" y="1417320"/>
-            <a:ext cx="5417820" cy="2194560"/>
+            <a:off x="548640" y="1783080"/>
+            <a:ext cx="2606040" cy="4114800"/>
           </a:xfrm>
           <a:prstGeom prst="roundRect">
             <a:avLst>
-              <a:gd name="adj" fmla="val 5000"/>
+              <a:gd name="adj" fmla="val 4211"/>
             </a:avLst>
           </a:prstGeom>
           <a:solidFill>
@@ -2973,27 +3363,27 @@
       </p:sp>
       <p:sp>
         <p:nvSpPr>
-          <p:cNvPr id="4" name="Parrainage circle"/>
+          <p:cNvPr id="5" name="Black Friday circle"/>
           <p:cNvSpPr/>
           <p:nvPr/>
         </p:nvSpPr>
         <p:spPr>
           <a:xfrm>
-            <a:off x="822960" y="1691640"/>
-            <a:ext cx="548640" cy="548640"/>
+            <a:off x="822960" y="2011680"/>
+            <a:ext cx="594360" cy="594360"/>
           </a:xfrm>
           <a:prstGeom prst="ellipse">
             <a:avLst/>
           </a:prstGeom>
           <a:solidFill>
-            <a:schemeClr val="accent2"/>
+            <a:schemeClr val="accent1"/>
           </a:solidFill>
           <a:ln/>
         </p:spPr>
       </p:sp>
       <p:pic>
         <p:nvPicPr>
-          <p:cNvPr id="5" name="Parrainage icon" descr="Parrainage">    </p:cNvPr>
+          <p:cNvPr id="6" name="Black Friday icon" descr="Black Friday">    </p:cNvPr>
           <p:cNvPicPr>
             <a:picLocks noChangeAspect="1"/>
           </p:cNvPicPr>
@@ -3007,8 +3397,8 @@
         </p:blipFill>
         <p:spPr>
           <a:xfrm>
-            <a:off x="965606" y="1834286"/>
-            <a:ext cx="263347" cy="263347"/>
+            <a:off x="977494" y="2166214"/>
+            <a:ext cx="285293" cy="285293"/>
           </a:xfrm>
           <a:prstGeom prst="rect">
             <a:avLst/>
@@ -3017,14 +3407,14 @@
       </p:pic>
       <p:sp>
         <p:nvSpPr>
-          <p:cNvPr id="6" name="Text 3"/>
+          <p:cNvPr id="7" name="Text 4"/>
           <p:cNvSpPr txBox="1"/>
           <p:nvPr/>
         </p:nvSpPr>
         <p:spPr>
           <a:xfrm>
-            <a:off x="1508760" y="1645920"/>
-            <a:ext cx="4229100" cy="640080"/>
+            <a:off x="822960" y="2743200"/>
+            <a:ext cx="2103120" cy="685800"/>
           </a:xfrm>
           <a:prstGeom prst="rect">
             <a:avLst/>
@@ -3033,34 +3423,34 @@
           <a:ln/>
         </p:spPr>
         <p:txBody>
-          <a:bodyPr wrap="square" lIns="0" tIns="0" rIns="0" bIns="0" rtlCol="0" anchor="ctr"/>
+          <a:bodyPr wrap="square" lIns="0" tIns="0" rIns="0" bIns="0" rtlCol="0" anchor="t"/>
           <a:lstStyle/>
           <a:p>
             <a:pPr indent="0" marL="0">
               <a:buNone/>
             </a:pPr>
             <a:r>
-              <a:rPr lang="en-US" sz="1700" b="1" dirty="0">
+              <a:rPr lang="en-US" sz="1800" b="1" dirty="0">
                 <a:solidFill>
                   <a:schemeClr val="tx2"/>
                 </a:solidFill>
               </a:rPr>
-              <a:t>Parrainage</a:t>
-            </a:r>
-            <a:endParaRPr lang="en-US" sz="1700" dirty="0"/>
-          </a:p>
-        </p:txBody>
-      </p:sp>
-      <p:sp>
-        <p:nvSpPr>
-          <p:cNvPr id="7" name="Text 4"/>
+              <a:t>Black Friday</a:t>
+            </a:r>
+            <a:endParaRPr lang="en-US" sz="1800" dirty="0"/>
+          </a:p>
+        </p:txBody>
+      </p:sp>
+      <p:sp>
+        <p:nvSpPr>
+          <p:cNvPr id="8" name="Text 5"/>
           <p:cNvSpPr txBox="1"/>
           <p:nvPr/>
         </p:nvSpPr>
         <p:spPr>
           <a:xfrm>
-            <a:off x="822960" y="2377440"/>
-            <a:ext cx="4869180" cy="1097280"/>
+            <a:off x="822960" y="3474720"/>
+            <a:ext cx="2103120" cy="2286000"/>
           </a:xfrm>
           <a:prstGeom prst="rect">
             <a:avLst/>
@@ -3081,7 +3471,7 @@
                   <a:schemeClr val="tx1"/>
                 </a:solidFill>
               </a:rPr>
-              <a:t>Un code par client : une réduction pour le parrain et pour le filleul. Le canal d'acquisition le moins cher à mettre en place.</a:t>
+              <a:t>« Yassir Friday » : une semaine d'offres Food et Market autour du 27/11. Longs week-ends : offres génériques, sans thème national.</a:t>
             </a:r>
             <a:endParaRPr lang="en-US" sz="1400" dirty="0"/>
           </a:p>
@@ -3089,18 +3479,54 @@
       </p:sp>
       <p:sp>
         <p:nvSpPr>
-          <p:cNvPr id="8" name="Relance des inactifs"/>
+          <p:cNvPr id="9" name="Text 6"/>
+          <p:cNvSpPr txBox="1"/>
+          <p:nvPr/>
+        </p:nvSpPr>
+        <p:spPr>
+          <a:xfrm>
+            <a:off x="3360420" y="1371600"/>
+            <a:ext cx="2606040" cy="365760"/>
+          </a:xfrm>
+          <a:prstGeom prst="rect">
+            <a:avLst/>
+          </a:prstGeom>
+          <a:noFill/>
+          <a:ln/>
+        </p:spPr>
+        <p:txBody>
+          <a:bodyPr wrap="square" lIns="0" tIns="0" rIns="0" bIns="0" rtlCol="0" anchor="t"/>
+          <a:lstStyle/>
+          <a:p>
+            <a:pPr indent="0" marL="0">
+              <a:buNone/>
+            </a:pPr>
+            <a:r>
+              <a:rPr lang="en-US" sz="1600" b="1" dirty="0">
+                <a:solidFill>
+                  <a:schemeClr val="accent5"/>
+                </a:solidFill>
+              </a:rPr>
+              <a:t>Décembre</a:t>
+            </a:r>
+            <a:endParaRPr lang="en-US" sz="1600" dirty="0"/>
+          </a:p>
+        </p:txBody>
+      </p:sp>
+      <p:sp>
+        <p:nvSpPr>
+          <p:cNvPr id="10" name="Décembre"/>
           <p:cNvSpPr/>
           <p:nvPr/>
         </p:nvSpPr>
         <p:spPr>
           <a:xfrm>
-            <a:off x="6195060" y="1417320"/>
-            <a:ext cx="5417820" cy="2194560"/>
+            <a:off x="3360420" y="1783080"/>
+            <a:ext cx="2606040" cy="4114800"/>
           </a:xfrm>
           <a:prstGeom prst="roundRect">
             <a:avLst>
-              <a:gd name="adj" fmla="val 5000"/>
+              <a:gd name="adj" fmla="val 4211"/>
             </a:avLst>
           </a:prstGeom>
           <a:solidFill>
@@ -3111,27 +3537,27 @@
       </p:sp>
       <p:sp>
         <p:nvSpPr>
-          <p:cNvPr id="9" name="Relance des inactifs circle"/>
+          <p:cNvPr id="11" name="Pluie et fin d'année circle"/>
           <p:cNvSpPr/>
           <p:nvPr/>
         </p:nvSpPr>
         <p:spPr>
           <a:xfrm>
-            <a:off x="6469380" y="1691640"/>
-            <a:ext cx="548640" cy="548640"/>
+            <a:off x="3634740" y="2011680"/>
+            <a:ext cx="594360" cy="594360"/>
           </a:xfrm>
           <a:prstGeom prst="ellipse">
             <a:avLst/>
           </a:prstGeom>
           <a:solidFill>
-            <a:schemeClr val="accent2"/>
+            <a:schemeClr val="accent1"/>
           </a:solidFill>
           <a:ln/>
         </p:spPr>
       </p:sp>
       <p:pic>
         <p:nvPicPr>
-          <p:cNvPr id="10" name="Relance des inactifs icon" descr="Relance des inactifs">    </p:cNvPr>
+          <p:cNvPr id="12" name="Pluie et fin d'année icon" descr="Pluie et fin d'année">    </p:cNvPr>
           <p:cNvPicPr>
             <a:picLocks noChangeAspect="1"/>
           </p:cNvPicPr>
@@ -3145,8 +3571,8 @@
         </p:blipFill>
         <p:spPr>
           <a:xfrm>
-            <a:off x="6612026" y="1834286"/>
-            <a:ext cx="263347" cy="263347"/>
+            <a:off x="3789274" y="2166214"/>
+            <a:ext cx="285293" cy="285293"/>
           </a:xfrm>
           <a:prstGeom prst="rect">
             <a:avLst/>
@@ -3155,14 +3581,14 @@
       </p:pic>
       <p:sp>
         <p:nvSpPr>
-          <p:cNvPr id="11" name="Text 7"/>
+          <p:cNvPr id="13" name="Text 9"/>
           <p:cNvSpPr txBox="1"/>
           <p:nvPr/>
         </p:nvSpPr>
         <p:spPr>
           <a:xfrm>
-            <a:off x="7155180" y="1645920"/>
-            <a:ext cx="4229100" cy="640080"/>
+            <a:off x="3634740" y="2743200"/>
+            <a:ext cx="2103120" cy="685800"/>
           </a:xfrm>
           <a:prstGeom prst="rect">
             <a:avLst/>
@@ -3171,34 +3597,34 @@
           <a:ln/>
         </p:spPr>
         <p:txBody>
-          <a:bodyPr wrap="square" lIns="0" tIns="0" rIns="0" bIns="0" rtlCol="0" anchor="ctr"/>
+          <a:bodyPr wrap="square" lIns="0" tIns="0" rIns="0" bIns="0" rtlCol="0" anchor="t"/>
           <a:lstStyle/>
           <a:p>
             <a:pPr indent="0" marL="0">
               <a:buNone/>
             </a:pPr>
             <a:r>
-              <a:rPr lang="en-US" sz="1700" b="1" dirty="0">
+              <a:rPr lang="en-US" sz="1800" b="1" dirty="0">
                 <a:solidFill>
                   <a:schemeClr val="tx2"/>
                 </a:solidFill>
               </a:rPr>
-              <a:t>Relance des inactifs</a:t>
-            </a:r>
-            <a:endParaRPr lang="en-US" sz="1700" dirty="0"/>
-          </a:p>
-        </p:txBody>
-      </p:sp>
-      <p:sp>
-        <p:nvSpPr>
-          <p:cNvPr id="12" name="Text 8"/>
+              <a:t>Pluie et fin d'année</a:t>
+            </a:r>
+            <a:endParaRPr lang="en-US" sz="1800" dirty="0"/>
+          </a:p>
+        </p:txBody>
+      </p:sp>
+      <p:sp>
+        <p:nvSpPr>
+          <p:cNvPr id="14" name="Text 10"/>
           <p:cNvSpPr txBox="1"/>
           <p:nvPr/>
         </p:nvSpPr>
         <p:spPr>
           <a:xfrm>
-            <a:off x="6469380" y="2377440"/>
-            <a:ext cx="4869180" cy="1097280"/>
+            <a:off x="3634740" y="3474720"/>
+            <a:ext cx="2103120" cy="2286000"/>
           </a:xfrm>
           <a:prstGeom prst="rect">
             <a:avLst/>
@@ -3219,7 +3645,7 @@
                   <a:schemeClr val="tx1"/>
                 </a:solidFill>
               </a:rPr>
-              <a:t>Notification ou SMS à J+14 et J+30 sans commande, avec une offre progressive. Mesurer contre un groupe témoin sans relance.</a:t>
+              <a:t>Campagnes déclenchées par la météo (« Il pleut ? On livre »). Soirées du 31/12 : livraison tardive et courses.</a:t>
             </a:r>
             <a:endParaRPr lang="en-US" sz="1400" dirty="0"/>
           </a:p>
@@ -3227,18 +3653,54 @@
       </p:sp>
       <p:sp>
         <p:nvSpPr>
-          <p:cNvPr id="13" name="WhatsApp Business"/>
+          <p:cNvPr id="15" name="Text 11"/>
+          <p:cNvSpPr txBox="1"/>
+          <p:nvPr/>
+        </p:nvSpPr>
+        <p:spPr>
+          <a:xfrm>
+            <a:off x="6172200" y="1371600"/>
+            <a:ext cx="2606040" cy="365760"/>
+          </a:xfrm>
+          <a:prstGeom prst="rect">
+            <a:avLst/>
+          </a:prstGeom>
+          <a:noFill/>
+          <a:ln/>
+        </p:spPr>
+        <p:txBody>
+          <a:bodyPr wrap="square" lIns="0" tIns="0" rIns="0" bIns="0" rtlCol="0" anchor="t"/>
+          <a:lstStyle/>
+          <a:p>
+            <a:pPr indent="0" marL="0">
+              <a:buNone/>
+            </a:pPr>
+            <a:r>
+              <a:rPr lang="en-US" sz="1600" b="1" dirty="0">
+                <a:solidFill>
+                  <a:schemeClr val="accent5"/>
+                </a:solidFill>
+              </a:rPr>
+              <a:t>Janvier</a:t>
+            </a:r>
+            <a:endParaRPr lang="en-US" sz="1600" dirty="0"/>
+          </a:p>
+        </p:txBody>
+      </p:sp>
+      <p:sp>
+        <p:nvSpPr>
+          <p:cNvPr id="16" name="Janvier"/>
           <p:cNvSpPr/>
           <p:nvPr/>
         </p:nvSpPr>
         <p:spPr>
           <a:xfrm>
-            <a:off x="548640" y="3840480"/>
-            <a:ext cx="5417820" cy="2194560"/>
+            <a:off x="6172200" y="1783080"/>
+            <a:ext cx="2606040" cy="4114800"/>
           </a:xfrm>
           <a:prstGeom prst="roundRect">
             <a:avLst>
-              <a:gd name="adj" fmla="val 5000"/>
+              <a:gd name="adj" fmla="val 4211"/>
             </a:avLst>
           </a:prstGeom>
           <a:solidFill>
@@ -3249,27 +3711,27 @@
       </p:sp>
       <p:sp>
         <p:nvSpPr>
-          <p:cNvPr id="14" name="WhatsApp Business circle"/>
+          <p:cNvPr id="17" name="Rentrée et Yennayer circle"/>
           <p:cNvSpPr/>
           <p:nvPr/>
         </p:nvSpPr>
         <p:spPr>
           <a:xfrm>
-            <a:off x="822960" y="4114800"/>
-            <a:ext cx="548640" cy="548640"/>
+            <a:off x="6446520" y="2011680"/>
+            <a:ext cx="594360" cy="594360"/>
           </a:xfrm>
           <a:prstGeom prst="ellipse">
             <a:avLst/>
           </a:prstGeom>
           <a:solidFill>
-            <a:schemeClr val="accent2"/>
+            <a:schemeClr val="accent1"/>
           </a:solidFill>
           <a:ln/>
         </p:spPr>
       </p:sp>
       <p:pic>
         <p:nvPicPr>
-          <p:cNvPr id="15" name="WhatsApp Business icon" descr="WhatsApp Business">    </p:cNvPr>
+          <p:cNvPr id="18" name="Rentrée et Yennayer icon" descr="Rentrée et Yennayer">    </p:cNvPr>
           <p:cNvPicPr>
             <a:picLocks noChangeAspect="1"/>
           </p:cNvPicPr>
@@ -3283,8 +3745,8 @@
         </p:blipFill>
         <p:spPr>
           <a:xfrm>
-            <a:off x="965606" y="4257446"/>
-            <a:ext cx="263347" cy="263347"/>
+            <a:off x="6601054" y="2166214"/>
+            <a:ext cx="285293" cy="285293"/>
           </a:xfrm>
           <a:prstGeom prst="rect">
             <a:avLst/>
@@ -3293,14 +3755,14 @@
       </p:pic>
       <p:sp>
         <p:nvSpPr>
-          <p:cNvPr id="16" name="Text 11"/>
+          <p:cNvPr id="19" name="Text 14"/>
           <p:cNvSpPr txBox="1"/>
           <p:nvPr/>
         </p:nvSpPr>
         <p:spPr>
           <a:xfrm>
-            <a:off x="1508760" y="4069080"/>
-            <a:ext cx="4229100" cy="640080"/>
+            <a:off x="6446520" y="2743200"/>
+            <a:ext cx="2103120" cy="685800"/>
           </a:xfrm>
           <a:prstGeom prst="rect">
             <a:avLst/>
@@ -3309,34 +3771,34 @@
           <a:ln/>
         </p:spPr>
         <p:txBody>
-          <a:bodyPr wrap="square" lIns="0" tIns="0" rIns="0" bIns="0" rtlCol="0" anchor="ctr"/>
+          <a:bodyPr wrap="square" lIns="0" tIns="0" rIns="0" bIns="0" rtlCol="0" anchor="t"/>
           <a:lstStyle/>
           <a:p>
             <a:pPr indent="0" marL="0">
               <a:buNone/>
             </a:pPr>
             <a:r>
-              <a:rPr lang="en-US" sz="1700" b="1" dirty="0">
+              <a:rPr lang="en-US" sz="1800" b="1" dirty="0">
                 <a:solidFill>
                   <a:schemeClr val="tx2"/>
                 </a:solidFill>
               </a:rPr>
-              <a:t>WhatsApp Business</a:t>
-            </a:r>
-            <a:endParaRPr lang="en-US" sz="1700" dirty="0"/>
-          </a:p>
-        </p:txBody>
-      </p:sp>
-      <p:sp>
-        <p:nvSpPr>
-          <p:cNvPr id="17" name="Text 12"/>
+              <a:t>Rentrée et Yennayer</a:t>
+            </a:r>
+            <a:endParaRPr lang="en-US" sz="1800" dirty="0"/>
+          </a:p>
+        </p:txBody>
+      </p:sp>
+      <p:sp>
+        <p:nvSpPr>
+          <p:cNvPr id="20" name="Text 15"/>
           <p:cNvSpPr txBox="1"/>
           <p:nvPr/>
         </p:nvSpPr>
         <p:spPr>
           <a:xfrm>
-            <a:off x="822960" y="4800600"/>
-            <a:ext cx="4869180" cy="1097280"/>
+            <a:off x="6446520" y="3474720"/>
+            <a:ext cx="2103120" cy="2286000"/>
           </a:xfrm>
           <a:prstGeom prst="rect">
             <a:avLst/>
@@ -3357,7 +3819,7 @@
                   <a:schemeClr val="tx1"/>
                 </a:solidFill>
               </a:rPr>
-              <a:t>Canal le plus utilisé au Maroc : suivi de commande, offres ciblées sur abonnement, service client.</a:t>
+              <a:t>Bonnes résolutions : offres healthy. Nouvel An amazigh (14/01) : sélection de plats régionaux. Tournage des créatifs Ramadan.</a:t>
             </a:r>
             <a:endParaRPr lang="en-US" sz="1400" dirty="0"/>
           </a:p>
@@ -3365,18 +3827,54 @@
       </p:sp>
       <p:sp>
         <p:nvSpPr>
-          <p:cNvPr id="18" name="Passer de Ride à Food"/>
+          <p:cNvPr id="21" name="Text 16"/>
+          <p:cNvSpPr txBox="1"/>
+          <p:nvPr/>
+        </p:nvSpPr>
+        <p:spPr>
+          <a:xfrm>
+            <a:off x="8983980" y="1371600"/>
+            <a:ext cx="2606040" cy="365760"/>
+          </a:xfrm>
+          <a:prstGeom prst="rect">
+            <a:avLst/>
+          </a:prstGeom>
+          <a:noFill/>
+          <a:ln/>
+        </p:spPr>
+        <p:txBody>
+          <a:bodyPr wrap="square" lIns="0" tIns="0" rIns="0" bIns="0" rtlCol="0" anchor="t"/>
+          <a:lstStyle/>
+          <a:p>
+            <a:pPr indent="0" marL="0">
+              <a:buNone/>
+            </a:pPr>
+            <a:r>
+              <a:rPr lang="en-US" sz="1600" b="1" dirty="0">
+                <a:solidFill>
+                  <a:schemeClr val="accent5"/>
+                </a:solidFill>
+              </a:rPr>
+              <a:t>Février</a:t>
+            </a:r>
+            <a:endParaRPr lang="en-US" sz="1600" dirty="0"/>
+          </a:p>
+        </p:txBody>
+      </p:sp>
+      <p:sp>
+        <p:nvSpPr>
+          <p:cNvPr id="22" name="Février"/>
           <p:cNvSpPr/>
           <p:nvPr/>
         </p:nvSpPr>
         <p:spPr>
           <a:xfrm>
-            <a:off x="6195060" y="3840480"/>
-            <a:ext cx="5417820" cy="2194560"/>
+            <a:off x="8983980" y="1783080"/>
+            <a:ext cx="2606040" cy="4114800"/>
           </a:xfrm>
           <a:prstGeom prst="roundRect">
             <a:avLst>
-              <a:gd name="adj" fmla="val 5000"/>
+              <a:gd name="adj" fmla="val 4211"/>
             </a:avLst>
           </a:prstGeom>
           <a:solidFill>
@@ -3387,27 +3885,27 @@
       </p:sp>
       <p:sp>
         <p:nvSpPr>
-          <p:cNvPr id="19" name="Passer de Ride à Food circle"/>
+          <p:cNvPr id="23" name="Ramadan (≈ 8-9/02) circle"/>
           <p:cNvSpPr/>
           <p:nvPr/>
         </p:nvSpPr>
         <p:spPr>
           <a:xfrm>
-            <a:off x="6469380" y="4114800"/>
-            <a:ext cx="548640" cy="548640"/>
+            <a:off x="9258300" y="2011680"/>
+            <a:ext cx="594360" cy="594360"/>
           </a:xfrm>
           <a:prstGeom prst="ellipse">
             <a:avLst/>
           </a:prstGeom>
           <a:solidFill>
-            <a:schemeClr val="accent2"/>
+            <a:schemeClr val="accent4"/>
           </a:solidFill>
           <a:ln/>
         </p:spPr>
       </p:sp>
       <p:pic>
         <p:nvPicPr>
-          <p:cNvPr id="20" name="Passer de Ride à Food icon" descr="Passer de Ride à Food">    </p:cNvPr>
+          <p:cNvPr id="24" name="Ramadan (≈ 8-9/02) icon" descr="Ramadan (≈ 8-9/02)">    </p:cNvPr>
           <p:cNvPicPr>
             <a:picLocks noChangeAspect="1"/>
           </p:cNvPicPr>
@@ -3421,8 +3919,8 @@
         </p:blipFill>
         <p:spPr>
           <a:xfrm>
-            <a:off x="6612026" y="4257446"/>
-            <a:ext cx="263347" cy="263347"/>
+            <a:off x="9412834" y="2166214"/>
+            <a:ext cx="285293" cy="285293"/>
           </a:xfrm>
           <a:prstGeom prst="rect">
             <a:avLst/>
@@ -3431,14 +3929,14 @@
       </p:pic>
       <p:sp>
         <p:nvSpPr>
-          <p:cNvPr id="21" name="Text 15"/>
+          <p:cNvPr id="25" name="Text 19"/>
           <p:cNvSpPr txBox="1"/>
           <p:nvPr/>
         </p:nvSpPr>
         <p:spPr>
           <a:xfrm>
-            <a:off x="7155180" y="4069080"/>
-            <a:ext cx="4229100" cy="640080"/>
+            <a:off x="9258300" y="2743200"/>
+            <a:ext cx="2103120" cy="685800"/>
           </a:xfrm>
           <a:prstGeom prst="rect">
             <a:avLst/>
@@ -3447,34 +3945,34 @@
           <a:ln/>
         </p:spPr>
         <p:txBody>
-          <a:bodyPr wrap="square" lIns="0" tIns="0" rIns="0" bIns="0" rtlCol="0" anchor="ctr"/>
+          <a:bodyPr wrap="square" lIns="0" tIns="0" rIns="0" bIns="0" rtlCol="0" anchor="t"/>
           <a:lstStyle/>
           <a:p>
             <a:pPr indent="0" marL="0">
               <a:buNone/>
             </a:pPr>
             <a:r>
-              <a:rPr lang="en-US" sz="1700" b="1" dirty="0">
+              <a:rPr lang="en-US" sz="1800" b="1" dirty="0">
                 <a:solidFill>
                   <a:schemeClr val="tx2"/>
                 </a:solidFill>
               </a:rPr>
-              <a:t>Passer de Ride à Food</a:t>
-            </a:r>
-            <a:endParaRPr lang="en-US" sz="1700" dirty="0"/>
-          </a:p>
-        </p:txBody>
-      </p:sp>
-      <p:sp>
-        <p:nvSpPr>
-          <p:cNvPr id="22" name="Text 16"/>
+              <a:t>Ramadan (≈ 8-9/02)</a:t>
+            </a:r>
+            <a:endParaRPr lang="en-US" sz="1800" dirty="0"/>
+          </a:p>
+        </p:txBody>
+      </p:sp>
+      <p:sp>
+        <p:nvSpPr>
+          <p:cNvPr id="26" name="Text 20"/>
           <p:cNvSpPr txBox="1"/>
           <p:nvPr/>
         </p:nvSpPr>
         <p:spPr>
           <a:xfrm>
-            <a:off x="6469380" y="4800600"/>
-            <a:ext cx="4869180" cy="1097280"/>
+            <a:off x="9258300" y="3474720"/>
+            <a:ext cx="2103120" cy="2286000"/>
           </a:xfrm>
           <a:prstGeom prst="rect">
             <a:avLst/>
@@ -3495,9 +3993,45 @@
                   <a:schemeClr val="tx1"/>
                 </a:solidFill>
               </a:rPr>
-              <a:t>Proposer Food aux clients Ride et inversement : un client multi-services commande plus souvent et reste plus longtemps.</a:t>
+              <a:t>Le temps fort de l'année : ftour et shour livrés, courses avant la rupture du jeûne. Campagnes prêtes dès fin janvier.</a:t>
             </a:r>
             <a:endParaRPr lang="en-US" sz="1400" dirty="0"/>
+          </a:p>
+        </p:txBody>
+      </p:sp>
+      <p:sp>
+        <p:nvSpPr>
+          <p:cNvPr id="27" name="Text 21"/>
+          <p:cNvSpPr txBox="1"/>
+          <p:nvPr/>
+        </p:nvSpPr>
+        <p:spPr>
+          <a:xfrm>
+            <a:off x="548640" y="6035040"/>
+            <a:ext cx="11064240" cy="274320"/>
+          </a:xfrm>
+          <a:prstGeom prst="rect">
+            <a:avLst/>
+          </a:prstGeom>
+          <a:noFill/>
+          <a:ln/>
+        </p:spPr>
+        <p:txBody>
+          <a:bodyPr wrap="square" lIns="0" tIns="0" rIns="0" bIns="0" rtlCol="0" anchor="t"/>
+          <a:lstStyle/>
+          <a:p>
+            <a:pPr indent="0" marL="0">
+              <a:buNone/>
+            </a:pPr>
+            <a:r>
+              <a:rPr lang="en-US" sz="1100" dirty="0">
+                <a:solidFill>
+                  <a:schemeClr val="accent5"/>
+                </a:solidFill>
+              </a:rPr>
+              <a:t>Date de début du Ramadan 1448 estimée : à confirmer selon l'annonce officielle au Maroc.</a:t>
+            </a:r>
+            <a:endParaRPr lang="en-US" sz="1100" dirty="0"/>
           </a:p>
         </p:txBody>
       </p:sp>
@@ -3606,7 +4140,7 @@
                 <a:ea typeface="Arial" pitchFamily="34" charset="-122"/>
                 <a:cs typeface="Arial" pitchFamily="34" charset="-120"/>
               </a:rPr>
-              <a:t>Influence et communauté</a:t>
+              <a:t>CRM : faire revenir les clients</a:t>
             </a:r>
             <a:endParaRPr lang="en-US" sz="3600" dirty="0"/>
           </a:p>
@@ -3614,18 +4148,18 @@
       </p:sp>
       <p:sp>
         <p:nvSpPr>
-          <p:cNvPr id="3" name="Micro-influenceurs food"/>
+          <p:cNvPr id="3" name="Parrainage"/>
           <p:cNvSpPr/>
           <p:nvPr/>
         </p:nvSpPr>
         <p:spPr>
           <a:xfrm>
             <a:off x="548640" y="1417320"/>
-            <a:ext cx="3535680" cy="2743200"/>
+            <a:ext cx="5417820" cy="2194560"/>
           </a:xfrm>
           <a:prstGeom prst="roundRect">
             <a:avLst>
-              <a:gd name="adj" fmla="val 4000"/>
+              <a:gd name="adj" fmla="val 5000"/>
             </a:avLst>
           </a:prstGeom>
           <a:solidFill>
@@ -3636,7 +4170,7 @@
       </p:sp>
       <p:sp>
         <p:nvSpPr>
-          <p:cNvPr id="4" name="Micro-influenceurs food circle"/>
+          <p:cNvPr id="4" name="Parrainage circle"/>
           <p:cNvSpPr/>
           <p:nvPr/>
         </p:nvSpPr>
@@ -3649,14 +4183,14 @@
             <a:avLst/>
           </a:prstGeom>
           <a:solidFill>
-            <a:schemeClr val="accent1"/>
+            <a:schemeClr val="accent2"/>
           </a:solidFill>
           <a:ln/>
         </p:spPr>
       </p:sp>
       <p:pic>
         <p:nvPicPr>
-          <p:cNvPr id="5" name="Micro-influenceurs food icon" descr="Micro-influenceurs food">    </p:cNvPr>
+          <p:cNvPr id="5" name="Parrainage icon" descr="Parrainage">    </p:cNvPr>
           <p:cNvPicPr>
             <a:picLocks noChangeAspect="1"/>
           </p:cNvPicPr>
@@ -3687,7 +4221,7 @@
         <p:spPr>
           <a:xfrm>
             <a:off x="1508760" y="1645920"/>
-            <a:ext cx="2346960" cy="640080"/>
+            <a:ext cx="4229100" cy="640080"/>
           </a:xfrm>
           <a:prstGeom prst="rect">
             <a:avLst/>
@@ -3708,7 +4242,7 @@
                   <a:schemeClr val="tx2"/>
                 </a:solidFill>
               </a:rPr>
-              <a:t>Micro-influenceurs food</a:t>
+              <a:t>Parrainage</a:t>
             </a:r>
             <a:endParaRPr lang="en-US" sz="1700" dirty="0"/>
           </a:p>
@@ -3723,7 +4257,7 @@
         <p:spPr>
           <a:xfrm>
             <a:off x="822960" y="2377440"/>
-            <a:ext cx="2987040" cy="1645920"/>
+            <a:ext cx="4869180" cy="1097280"/>
           </a:xfrm>
           <a:prstGeom prst="rect">
             <a:avLst/>
@@ -3744,7 +4278,7 @@
                   <a:schemeClr val="tx1"/>
                 </a:solidFill>
               </a:rPr>
-              <a:t>10 à 15 créateurs de 10K à 100K abonnés à Casablanca, Rabat et Marrakech, chacun avec son code promo pour mesurer les ventes.</a:t>
+              <a:t>Un code par client : une réduction pour le parrain et pour le filleul. Le canal d'acquisition le moins cher à mettre en place.</a:t>
             </a:r>
             <a:endParaRPr lang="en-US" sz="1400" dirty="0"/>
           </a:p>
@@ -3752,18 +4286,18 @@
       </p:sp>
       <p:sp>
         <p:nvSpPr>
-          <p:cNvPr id="8" name="Contenus créateurs boostés"/>
+          <p:cNvPr id="8" name="Relance des inactifs"/>
           <p:cNvSpPr/>
           <p:nvPr/>
         </p:nvSpPr>
         <p:spPr>
           <a:xfrm>
-            <a:off x="4312920" y="1417320"/>
-            <a:ext cx="3535680" cy="2743200"/>
+            <a:off x="6195060" y="1417320"/>
+            <a:ext cx="5417820" cy="2194560"/>
           </a:xfrm>
           <a:prstGeom prst="roundRect">
             <a:avLst>
-              <a:gd name="adj" fmla="val 4000"/>
+              <a:gd name="adj" fmla="val 5000"/>
             </a:avLst>
           </a:prstGeom>
           <a:solidFill>
@@ -3774,27 +4308,27 @@
       </p:sp>
       <p:sp>
         <p:nvSpPr>
-          <p:cNvPr id="9" name="Contenus créateurs boostés circle"/>
+          <p:cNvPr id="9" name="Relance des inactifs circle"/>
           <p:cNvSpPr/>
           <p:nvPr/>
         </p:nvSpPr>
         <p:spPr>
           <a:xfrm>
-            <a:off x="4587240" y="1691640"/>
+            <a:off x="6469380" y="1691640"/>
             <a:ext cx="548640" cy="548640"/>
           </a:xfrm>
           <a:prstGeom prst="ellipse">
             <a:avLst/>
           </a:prstGeom>
           <a:solidFill>
-            <a:schemeClr val="accent1"/>
+            <a:schemeClr val="accent2"/>
           </a:solidFill>
           <a:ln/>
         </p:spPr>
       </p:sp>
       <p:pic>
         <p:nvPicPr>
-          <p:cNvPr id="10" name="Contenus créateurs boostés icon" descr="Contenus créateurs boostés">    </p:cNvPr>
+          <p:cNvPr id="10" name="Relance des inactifs icon" descr="Relance des inactifs">    </p:cNvPr>
           <p:cNvPicPr>
             <a:picLocks noChangeAspect="1"/>
           </p:cNvPicPr>
@@ -3808,7 +4342,7 @@
         </p:blipFill>
         <p:spPr>
           <a:xfrm>
-            <a:off x="4729886" y="1834286"/>
+            <a:off x="6612026" y="1834286"/>
             <a:ext cx="263347" cy="263347"/>
           </a:xfrm>
           <a:prstGeom prst="rect">
@@ -3824,8 +4358,8 @@
         </p:nvSpPr>
         <p:spPr>
           <a:xfrm>
-            <a:off x="5273040" y="1645920"/>
-            <a:ext cx="2346960" cy="640080"/>
+            <a:off x="7155180" y="1645920"/>
+            <a:ext cx="4229100" cy="640080"/>
           </a:xfrm>
           <a:prstGeom prst="rect">
             <a:avLst/>
@@ -3846,7 +4380,7 @@
                   <a:schemeClr val="tx2"/>
                 </a:solidFill>
               </a:rPr>
-              <a:t>Contenus créateurs boostés</a:t>
+              <a:t>Relance des inactifs</a:t>
             </a:r>
             <a:endParaRPr lang="en-US" sz="1700" dirty="0"/>
           </a:p>
@@ -3860,8 +4394,8 @@
         </p:nvSpPr>
         <p:spPr>
           <a:xfrm>
-            <a:off x="4587240" y="2377440"/>
-            <a:ext cx="2987040" cy="1645920"/>
+            <a:off x="6469380" y="2377440"/>
+            <a:ext cx="4869180" cy="1097280"/>
           </a:xfrm>
           <a:prstGeom prst="rect">
             <a:avLst/>
@@ -3882,7 +4416,7 @@
                   <a:schemeClr val="tx1"/>
                 </a:solidFill>
               </a:rPr>
-              <a:t>Republier les meilleures vidéos de créateurs comme pubs TikTok et Meta : souvent moins chères qu'un créatif produit en interne.</a:t>
+              <a:t>Notification ou SMS à J+14 et J+30 sans commande, avec une offre progressive. Mesurer contre un groupe témoin sans relance.</a:t>
             </a:r>
             <a:endParaRPr lang="en-US" sz="1400" dirty="0"/>
           </a:p>
@@ -3890,18 +4424,18 @@
       </p:sp>
       <p:sp>
         <p:nvSpPr>
-          <p:cNvPr id="13" name="Livreurs et chauffeurs ambassadeurs"/>
+          <p:cNvPr id="13" name="WhatsApp Business"/>
           <p:cNvSpPr/>
           <p:nvPr/>
         </p:nvSpPr>
         <p:spPr>
           <a:xfrm>
-            <a:off x="8077200" y="1417320"/>
-            <a:ext cx="3535680" cy="2743200"/>
+            <a:off x="548640" y="3840480"/>
+            <a:ext cx="5417820" cy="2194560"/>
           </a:xfrm>
           <a:prstGeom prst="roundRect">
             <a:avLst>
-              <a:gd name="adj" fmla="val 4000"/>
+              <a:gd name="adj" fmla="val 5000"/>
             </a:avLst>
           </a:prstGeom>
           <a:solidFill>
@@ -3912,27 +4446,27 @@
       </p:sp>
       <p:sp>
         <p:nvSpPr>
-          <p:cNvPr id="14" name="Livreurs et chauffeurs ambassadeurs circle"/>
+          <p:cNvPr id="14" name="WhatsApp Business circle"/>
           <p:cNvSpPr/>
           <p:nvPr/>
         </p:nvSpPr>
         <p:spPr>
           <a:xfrm>
-            <a:off x="8351520" y="1691640"/>
+            <a:off x="822960" y="4114800"/>
             <a:ext cx="548640" cy="548640"/>
           </a:xfrm>
           <a:prstGeom prst="ellipse">
             <a:avLst/>
           </a:prstGeom>
           <a:solidFill>
-            <a:schemeClr val="accent1"/>
+            <a:schemeClr val="accent2"/>
           </a:solidFill>
           <a:ln/>
         </p:spPr>
       </p:sp>
       <p:pic>
         <p:nvPicPr>
-          <p:cNvPr id="15" name="Livreurs et chauffeurs ambassadeurs icon" descr="Livreurs et chauffeurs ambassadeurs">    </p:cNvPr>
+          <p:cNvPr id="15" name="WhatsApp Business icon" descr="WhatsApp Business">    </p:cNvPr>
           <p:cNvPicPr>
             <a:picLocks noChangeAspect="1"/>
           </p:cNvPicPr>
@@ -3946,7 +4480,7 @@
         </p:blipFill>
         <p:spPr>
           <a:xfrm>
-            <a:off x="8494166" y="1834286"/>
+            <a:off x="965606" y="4257446"/>
             <a:ext cx="263347" cy="263347"/>
           </a:xfrm>
           <a:prstGeom prst="rect">
@@ -3962,8 +4496,8 @@
         </p:nvSpPr>
         <p:spPr>
           <a:xfrm>
-            <a:off x="9037320" y="1645920"/>
-            <a:ext cx="2346960" cy="640080"/>
+            <a:off x="1508760" y="4069080"/>
+            <a:ext cx="4229100" cy="640080"/>
           </a:xfrm>
           <a:prstGeom prst="rect">
             <a:avLst/>
@@ -3984,7 +4518,7 @@
                   <a:schemeClr val="tx2"/>
                 </a:solidFill>
               </a:rPr>
-              <a:t>Livreurs et chauffeurs ambassadeurs</a:t>
+              <a:t>WhatsApp Business</a:t>
             </a:r>
             <a:endParaRPr lang="en-US" sz="1700" dirty="0"/>
           </a:p>
@@ -3998,8 +4532,8 @@
         </p:nvSpPr>
         <p:spPr>
           <a:xfrm>
-            <a:off x="8351520" y="2377440"/>
-            <a:ext cx="2987040" cy="1645920"/>
+            <a:off x="822960" y="4800600"/>
+            <a:ext cx="4869180" cy="1097280"/>
           </a:xfrm>
           <a:prstGeom prst="rect">
             <a:avLst/>
@@ -4020,7 +4554,7 @@
                   <a:schemeClr val="tx1"/>
                 </a:solidFill>
               </a:rPr>
-              <a:t>Témoignages vidéo pour le recrutement et pour la confiance des clients. Sert aussi la marque employeur.</a:t>
+              <a:t>Canal le plus utilisé au Maroc : suivi de commande, offres ciblées sur abonnement, service client.</a:t>
             </a:r>
             <a:endParaRPr lang="en-US" sz="1400" dirty="0"/>
           </a:p>
@@ -4028,18 +4562,18 @@
       </p:sp>
       <p:sp>
         <p:nvSpPr>
-          <p:cNvPr id="18" name="Règle influence"/>
+          <p:cNvPr id="18" name="Passer de Ride à Food"/>
           <p:cNvSpPr/>
           <p:nvPr/>
         </p:nvSpPr>
         <p:spPr>
           <a:xfrm>
-            <a:off x="548640" y="4434840"/>
-            <a:ext cx="11064240" cy="1371600"/>
+            <a:off x="6195060" y="3840480"/>
+            <a:ext cx="5417820" cy="2194560"/>
           </a:xfrm>
           <a:prstGeom prst="roundRect">
             <a:avLst>
-              <a:gd name="adj" fmla="val 8000"/>
+              <a:gd name="adj" fmla="val 5000"/>
             </a:avLst>
           </a:prstGeom>
           <a:solidFill>
@@ -4050,27 +4584,27 @@
       </p:sp>
       <p:sp>
         <p:nvSpPr>
-          <p:cNvPr id="19" name="Règle circle"/>
+          <p:cNvPr id="19" name="Passer de Ride à Food circle"/>
           <p:cNvSpPr/>
           <p:nvPr/>
         </p:nvSpPr>
         <p:spPr>
           <a:xfrm>
-            <a:off x="822960" y="4800600"/>
-            <a:ext cx="594360" cy="594360"/>
+            <a:off x="6469380" y="4114800"/>
+            <a:ext cx="548640" cy="548640"/>
           </a:xfrm>
           <a:prstGeom prst="ellipse">
             <a:avLst/>
           </a:prstGeom>
           <a:solidFill>
-            <a:schemeClr val="accent3"/>
+            <a:schemeClr val="accent2"/>
           </a:solidFill>
           <a:ln/>
         </p:spPr>
       </p:sp>
       <p:pic>
         <p:nvPicPr>
-          <p:cNvPr id="20" name="Règle icon" descr="Règle">    </p:cNvPr>
+          <p:cNvPr id="20" name="Passer de Ride à Food icon" descr="Passer de Ride à Food">    </p:cNvPr>
           <p:cNvPicPr>
             <a:picLocks noChangeAspect="1"/>
           </p:cNvPicPr>
@@ -4084,8 +4618,8 @@
         </p:blipFill>
         <p:spPr>
           <a:xfrm>
-            <a:off x="977494" y="4955134"/>
-            <a:ext cx="285293" cy="285293"/>
+            <a:off x="6612026" y="4257446"/>
+            <a:ext cx="263347" cy="263347"/>
           </a:xfrm>
           <a:prstGeom prst="rect">
             <a:avLst/>
@@ -4100,8 +4634,8 @@
         </p:nvSpPr>
         <p:spPr>
           <a:xfrm>
-            <a:off x="1645920" y="4526280"/>
-            <a:ext cx="9692640" cy="1188720"/>
+            <a:off x="7155180" y="4069080"/>
+            <a:ext cx="4229100" cy="640080"/>
           </a:xfrm>
           <a:prstGeom prst="rect">
             <a:avLst/>
@@ -4117,25 +4651,50 @@
               <a:buNone/>
             </a:pPr>
             <a:r>
-              <a:rPr lang="en-US" sz="1600" b="1" dirty="0">
-                <a:solidFill>
-                  <a:schemeClr val="tx1"/>
+              <a:rPr lang="en-US" sz="1700" b="1" dirty="0">
+                <a:solidFill>
+                  <a:schemeClr val="tx2"/>
                 </a:solidFill>
               </a:rPr>
-              <a:t>Règle : </a:t>
-            </a:r>
+              <a:t>Passer de Ride à Food</a:t>
+            </a:r>
+            <a:endParaRPr lang="en-US" sz="1700" dirty="0"/>
+          </a:p>
+        </p:txBody>
+      </p:sp>
+      <p:sp>
+        <p:nvSpPr>
+          <p:cNvPr id="22" name="Text 16"/>
+          <p:cNvSpPr txBox="1"/>
+          <p:nvPr/>
+        </p:nvSpPr>
+        <p:spPr>
+          <a:xfrm>
+            <a:off x="6469380" y="4800600"/>
+            <a:ext cx="4869180" cy="1097280"/>
+          </a:xfrm>
+          <a:prstGeom prst="rect">
+            <a:avLst/>
+          </a:prstGeom>
+          <a:noFill/>
+          <a:ln/>
+        </p:spPr>
+        <p:txBody>
+          <a:bodyPr wrap="square" lIns="0" tIns="0" rIns="0" bIns="0" rtlCol="0" anchor="t"/>
+          <a:lstStyle/>
+          <a:p>
             <a:pPr indent="0" marL="0">
               <a:buNone/>
             </a:pPr>
             <a:r>
-              <a:rPr lang="en-US" sz="1600" dirty="0">
+              <a:rPr lang="en-US" sz="1400" dirty="0">
                 <a:solidFill>
                   <a:schemeClr val="tx1"/>
                 </a:solidFill>
               </a:rPr>
-              <a:t>payer à la performance (code promo, commission) plutôt qu'au forfait, et valider chaque contenu avant publication, notamment sur les mentions « VTC » et les promesses de délai.</a:t>
-            </a:r>
-            <a:endParaRPr lang="en-US" sz="1600" dirty="0"/>
+              <a:t>Proposer Food aux clients Ride et inversement : un client multi-services commande plus souvent et reste plus longtemps.</a:t>
+            </a:r>
+            <a:endParaRPr lang="en-US" sz="1400" dirty="0"/>
           </a:p>
         </p:txBody>
       </p:sp>
@@ -4244,7 +4803,7 @@
                 <a:ea typeface="Arial" pitchFamily="34" charset="-122"/>
                 <a:cs typeface="Arial" pitchFamily="34" charset="-120"/>
               </a:rPr>
-              <a:t>Plan à 30, 60 et 90 jours</a:t>
+              <a:t>Influence et communauté</a:t>
             </a:r>
             <a:endParaRPr lang="en-US" sz="3600" dirty="0"/>
           </a:p>
@@ -4252,18 +4811,18 @@
       </p:sp>
       <p:sp>
         <p:nvSpPr>
-          <p:cNvPr id="3" name="30 jours"/>
+          <p:cNvPr id="3" name="Micro-influenceurs food"/>
           <p:cNvSpPr/>
           <p:nvPr/>
         </p:nvSpPr>
         <p:spPr>
           <a:xfrm>
             <a:off x="548640" y="1417320"/>
-            <a:ext cx="3520440" cy="4572000"/>
+            <a:ext cx="3535680" cy="2743200"/>
           </a:xfrm>
           <a:prstGeom prst="roundRect">
             <a:avLst>
-              <a:gd name="adj" fmla="val 3117"/>
+              <a:gd name="adj" fmla="val 4000"/>
             </a:avLst>
           </a:prstGeom>
           <a:solidFill>
@@ -4274,72 +4833,58 @@
       </p:sp>
       <p:sp>
         <p:nvSpPr>
-          <p:cNvPr id="4" name="30 jours pastille"/>
+          <p:cNvPr id="4" name="Micro-influenceurs food circle"/>
           <p:cNvSpPr/>
           <p:nvPr/>
         </p:nvSpPr>
         <p:spPr>
           <a:xfrm>
-            <a:off x="822960" y="1645920"/>
-            <a:ext cx="1463040" cy="457200"/>
-          </a:xfrm>
-          <a:prstGeom prst="roundRect">
-            <a:avLst>
-              <a:gd name="adj" fmla="val 50000"/>
-            </a:avLst>
+            <a:off x="822960" y="1691640"/>
+            <a:ext cx="548640" cy="548640"/>
+          </a:xfrm>
+          <a:prstGeom prst="ellipse">
+            <a:avLst/>
           </a:prstGeom>
           <a:solidFill>
-            <a:schemeClr val="accent2"/>
+            <a:schemeClr val="accent1"/>
           </a:solidFill>
           <a:ln/>
         </p:spPr>
       </p:sp>
-      <p:sp>
-        <p:nvSpPr>
-          <p:cNvPr id="5" name="Text 3"/>
+      <p:pic>
+        <p:nvPicPr>
+          <p:cNvPr id="5" name="Micro-influenceurs food icon" descr="Micro-influenceurs food">    </p:cNvPr>
+          <p:cNvPicPr>
+            <a:picLocks noChangeAspect="1"/>
+          </p:cNvPicPr>
+          <p:nvPr/>
+        </p:nvPicPr>
+        <p:blipFill>
+          <a:blip r:embed="rId1"/>
+          <a:stretch>
+            <a:fillRect/>
+          </a:stretch>
+        </p:blipFill>
+        <p:spPr>
+          <a:xfrm>
+            <a:off x="965606" y="1834286"/>
+            <a:ext cx="263347" cy="263347"/>
+          </a:xfrm>
+          <a:prstGeom prst="rect">
+            <a:avLst/>
+          </a:prstGeom>
+        </p:spPr>
+      </p:pic>
+      <p:sp>
+        <p:nvSpPr>
+          <p:cNvPr id="6" name="Text 3"/>
           <p:cNvSpPr txBox="1"/>
           <p:nvPr/>
         </p:nvSpPr>
         <p:spPr>
           <a:xfrm>
-            <a:off x="822960" y="1645920"/>
-            <a:ext cx="1463040" cy="457200"/>
-          </a:xfrm>
-          <a:prstGeom prst="rect">
-            <a:avLst/>
-          </a:prstGeom>
-          <a:noFill/>
-          <a:ln/>
-        </p:spPr>
-        <p:txBody>
-          <a:bodyPr wrap="square" lIns="0" tIns="0" rIns="0" bIns="0" rtlCol="0" anchor="ctr"/>
-          <a:lstStyle/>
-          <a:p>
-            <a:pPr algn="ctr" indent="0" marL="0">
-              <a:buNone/>
-            </a:pPr>
-            <a:r>
-              <a:rPr lang="en-US" sz="1500" b="1" dirty="0">
-                <a:solidFill>
-                  <a:schemeClr val="bg1"/>
-                </a:solidFill>
-              </a:rPr>
-              <a:t>30 jours</a:t>
-            </a:r>
-            <a:endParaRPr lang="en-US" sz="1500" dirty="0"/>
-          </a:p>
-        </p:txBody>
-      </p:sp>
-      <p:sp>
-        <p:nvSpPr>
-          <p:cNvPr id="6" name="Text 4"/>
-          <p:cNvSpPr txBox="1"/>
-          <p:nvPr/>
-        </p:nvSpPr>
-        <p:spPr>
-          <a:xfrm>
-            <a:off x="2423160" y="1645920"/>
-            <a:ext cx="1463040" cy="457200"/>
+            <a:off x="1508760" y="1645920"/>
+            <a:ext cx="2346960" cy="640080"/>
           </a:xfrm>
           <a:prstGeom prst="rect">
             <a:avLst/>
@@ -4355,27 +4900,27 @@
               <a:buNone/>
             </a:pPr>
             <a:r>
-              <a:rPr lang="en-US" sz="1800" b="1" dirty="0">
+              <a:rPr lang="en-US" sz="1700" b="1" dirty="0">
                 <a:solidFill>
                   <a:schemeClr val="tx2"/>
                 </a:solidFill>
               </a:rPr>
-              <a:t>Lancer</a:t>
-            </a:r>
-            <a:endParaRPr lang="en-US" sz="1800" dirty="0"/>
-          </a:p>
-        </p:txBody>
-      </p:sp>
-      <p:sp>
-        <p:nvSpPr>
-          <p:cNvPr id="7" name="Text 5"/>
+              <a:t>Micro-influenceurs food</a:t>
+            </a:r>
+            <a:endParaRPr lang="en-US" sz="1700" dirty="0"/>
+          </a:p>
+        </p:txBody>
+      </p:sp>
+      <p:sp>
+        <p:nvSpPr>
+          <p:cNvPr id="7" name="Text 4"/>
           <p:cNvSpPr txBox="1"/>
           <p:nvPr/>
         </p:nvSpPr>
         <p:spPr>
           <a:xfrm>
             <a:off x="822960" y="2377440"/>
-            <a:ext cx="3017520" cy="3474720"/>
+            <a:ext cx="2987040" cy="1645920"/>
           </a:xfrm>
           <a:prstGeom prst="rect">
             <a:avLst/>
@@ -4387,111 +4932,35 @@
           <a:bodyPr wrap="square" lIns="0" tIns="0" rIns="0" bIns="0" rtlCol="0" anchor="t"/>
           <a:lstStyle/>
           <a:p>
-            <a:pPr marL="342900" indent="-342900">
-              <a:spcAft>
-                <a:spcPts val="800"/>
-              </a:spcAft>
-              <a:buSzPct val="100000"/>
-              <a:buChar char="•"/>
+            <a:pPr indent="0" marL="0">
+              <a:buNone/>
             </a:pPr>
             <a:r>
-              <a:rPr lang="en-US" sz="1500" dirty="0">
+              <a:rPr lang="en-US" sz="1400" dirty="0">
                 <a:solidFill>
                   <a:schemeClr val="tx1"/>
                 </a:solidFill>
               </a:rPr>
-              <a:t>Mesure de référence : coût par commande, rétention</a:t>
-            </a:r>
-            <a:endParaRPr lang="en-US" sz="1500" dirty="0"/>
-          </a:p>
-          <a:p>
-            <a:pPr marL="342900" indent="-342900">
-              <a:spcAft>
-                <a:spcPts val="800"/>
-              </a:spcAft>
-              <a:buSzPct val="100000"/>
-              <a:buChar char="•"/>
-            </a:pPr>
-            <a:r>
-              <a:rPr lang="en-US" sz="1500" dirty="0">
-                <a:solidFill>
-                  <a:schemeClr val="tx1"/>
-                </a:solidFill>
-              </a:rPr>
-              <a:t>Campagnes Meta, TikTok et Google sur la 1re commande</a:t>
-            </a:r>
-            <a:endParaRPr lang="en-US" sz="1500" dirty="0"/>
-          </a:p>
-          <a:p>
-            <a:pPr marL="342900" indent="-342900">
-              <a:spcAft>
-                <a:spcPts val="800"/>
-              </a:spcAft>
-              <a:buSzPct val="100000"/>
-              <a:buChar char="•"/>
-            </a:pPr>
-            <a:r>
-              <a:rPr lang="en-US" sz="1500" dirty="0">
-                <a:solidFill>
-                  <a:schemeClr val="tx1"/>
-                </a:solidFill>
-              </a:rPr>
-              <a:t>Yassir Friday (Black Friday)</a:t>
-            </a:r>
-            <a:endParaRPr lang="en-US" sz="1500" dirty="0"/>
-          </a:p>
-          <a:p>
-            <a:pPr marL="342900" indent="-342900">
-              <a:spcAft>
-                <a:spcPts val="800"/>
-              </a:spcAft>
-              <a:buSzPct val="100000"/>
-              <a:buChar char="•"/>
-            </a:pPr>
-            <a:r>
-              <a:rPr lang="en-US" sz="1500" dirty="0">
-                <a:solidFill>
-                  <a:schemeClr val="tx1"/>
-                </a:solidFill>
-              </a:rPr>
-              <a:t>Page ville Casablanca et 2 guides food</a:t>
-            </a:r>
-            <a:endParaRPr lang="en-US" sz="1500" dirty="0"/>
-          </a:p>
-          <a:p>
-            <a:pPr marL="342900" indent="-342900">
-              <a:spcAft>
-                <a:spcPts val="800"/>
-              </a:spcAft>
-              <a:buSzPct val="100000"/>
-              <a:buChar char="•"/>
-            </a:pPr>
-            <a:r>
-              <a:rPr lang="en-US" sz="1500" dirty="0">
-                <a:solidFill>
-                  <a:schemeClr val="tx1"/>
-                </a:solidFill>
-              </a:rPr>
-              <a:t>Parrainage et relance des inactifs</a:t>
-            </a:r>
-            <a:endParaRPr lang="en-US" sz="1500" dirty="0"/>
-          </a:p>
-        </p:txBody>
-      </p:sp>
-      <p:sp>
-        <p:nvSpPr>
-          <p:cNvPr id="8" name="60 jours"/>
+              <a:t>8 à 10 créateurs de 10K à 100K abonnés, d'abord à Casablanca, chacun avec son code promo pour mesurer les ventes.</a:t>
+            </a:r>
+            <a:endParaRPr lang="en-US" sz="1400" dirty="0"/>
+          </a:p>
+        </p:txBody>
+      </p:sp>
+      <p:sp>
+        <p:nvSpPr>
+          <p:cNvPr id="8" name="Contenus créateurs boostés"/>
           <p:cNvSpPr/>
           <p:nvPr/>
         </p:nvSpPr>
         <p:spPr>
           <a:xfrm>
-            <a:off x="4297680" y="1417320"/>
-            <a:ext cx="3520440" cy="4572000"/>
+            <a:off x="4312920" y="1417320"/>
+            <a:ext cx="3535680" cy="2743200"/>
           </a:xfrm>
           <a:prstGeom prst="roundRect">
             <a:avLst>
-              <a:gd name="adj" fmla="val 3117"/>
+              <a:gd name="adj" fmla="val 4000"/>
             </a:avLst>
           </a:prstGeom>
           <a:solidFill>
@@ -4502,19 +4971,17 @@
       </p:sp>
       <p:sp>
         <p:nvSpPr>
-          <p:cNvPr id="9" name="60 jours pastille"/>
+          <p:cNvPr id="9" name="Contenus créateurs boostés circle"/>
           <p:cNvSpPr/>
           <p:nvPr/>
         </p:nvSpPr>
         <p:spPr>
           <a:xfrm>
-            <a:off x="4572000" y="1645920"/>
-            <a:ext cx="1463040" cy="457200"/>
-          </a:xfrm>
-          <a:prstGeom prst="roundRect">
-            <a:avLst>
-              <a:gd name="adj" fmla="val 50000"/>
-            </a:avLst>
+            <a:off x="4587240" y="1691640"/>
+            <a:ext cx="548640" cy="548640"/>
+          </a:xfrm>
+          <a:prstGeom prst="ellipse">
+            <a:avLst/>
           </a:prstGeom>
           <a:solidFill>
             <a:schemeClr val="accent1"/>
@@ -4522,52 +4989,40 @@
           <a:ln/>
         </p:spPr>
       </p:sp>
-      <p:sp>
-        <p:nvSpPr>
-          <p:cNvPr id="10" name="Text 8"/>
+      <p:pic>
+        <p:nvPicPr>
+          <p:cNvPr id="10" name="Contenus créateurs boostés icon" descr="Contenus créateurs boostés">    </p:cNvPr>
+          <p:cNvPicPr>
+            <a:picLocks noChangeAspect="1"/>
+          </p:cNvPicPr>
+          <p:nvPr/>
+        </p:nvPicPr>
+        <p:blipFill>
+          <a:blip r:embed="rId2"/>
+          <a:stretch>
+            <a:fillRect/>
+          </a:stretch>
+        </p:blipFill>
+        <p:spPr>
+          <a:xfrm>
+            <a:off x="4729886" y="1834286"/>
+            <a:ext cx="263347" cy="263347"/>
+          </a:xfrm>
+          <a:prstGeom prst="rect">
+            <a:avLst/>
+          </a:prstGeom>
+        </p:spPr>
+      </p:pic>
+      <p:sp>
+        <p:nvSpPr>
+          <p:cNvPr id="11" name="Text 7"/>
           <p:cNvSpPr txBox="1"/>
           <p:nvPr/>
         </p:nvSpPr>
         <p:spPr>
           <a:xfrm>
-            <a:off x="4572000" y="1645920"/>
-            <a:ext cx="1463040" cy="457200"/>
-          </a:xfrm>
-          <a:prstGeom prst="rect">
-            <a:avLst/>
-          </a:prstGeom>
-          <a:noFill/>
-          <a:ln/>
-        </p:spPr>
-        <p:txBody>
-          <a:bodyPr wrap="square" lIns="0" tIns="0" rIns="0" bIns="0" rtlCol="0" anchor="ctr"/>
-          <a:lstStyle/>
-          <a:p>
-            <a:pPr algn="ctr" indent="0" marL="0">
-              <a:buNone/>
-            </a:pPr>
-            <a:r>
-              <a:rPr lang="en-US" sz="1500" b="1" dirty="0">
-                <a:solidFill>
-                  <a:schemeClr val="bg1"/>
-                </a:solidFill>
-              </a:rPr>
-              <a:t>60 jours</a:t>
-            </a:r>
-            <a:endParaRPr lang="en-US" sz="1500" dirty="0"/>
-          </a:p>
-        </p:txBody>
-      </p:sp>
-      <p:sp>
-        <p:nvSpPr>
-          <p:cNvPr id="11" name="Text 9"/>
-          <p:cNvSpPr txBox="1"/>
-          <p:nvPr/>
-        </p:nvSpPr>
-        <p:spPr>
-          <a:xfrm>
-            <a:off x="6172200" y="1645920"/>
-            <a:ext cx="1463040" cy="457200"/>
+            <a:off x="5273040" y="1645920"/>
+            <a:ext cx="2346960" cy="640080"/>
           </a:xfrm>
           <a:prstGeom prst="rect">
             <a:avLst/>
@@ -4583,27 +5038,27 @@
               <a:buNone/>
             </a:pPr>
             <a:r>
-              <a:rPr lang="en-US" sz="1800" b="1" dirty="0">
+              <a:rPr lang="en-US" sz="1700" b="1" dirty="0">
                 <a:solidFill>
                   <a:schemeClr val="tx2"/>
                 </a:solidFill>
               </a:rPr>
-              <a:t>Optimiser</a:t>
-            </a:r>
-            <a:endParaRPr lang="en-US" sz="1800" dirty="0"/>
-          </a:p>
-        </p:txBody>
-      </p:sp>
-      <p:sp>
-        <p:nvSpPr>
-          <p:cNvPr id="12" name="Text 10"/>
+              <a:t>Contenus créateurs boostés</a:t>
+            </a:r>
+            <a:endParaRPr lang="en-US" sz="1700" dirty="0"/>
+          </a:p>
+        </p:txBody>
+      </p:sp>
+      <p:sp>
+        <p:nvSpPr>
+          <p:cNvPr id="12" name="Text 8"/>
           <p:cNvSpPr txBox="1"/>
           <p:nvPr/>
         </p:nvSpPr>
         <p:spPr>
           <a:xfrm>
-            <a:off x="4572000" y="2377440"/>
-            <a:ext cx="3017520" cy="3474720"/>
+            <a:off x="4587240" y="2377440"/>
+            <a:ext cx="2987040" cy="1645920"/>
           </a:xfrm>
           <a:prstGeom prst="rect">
             <a:avLst/>
@@ -4615,111 +5070,35 @@
           <a:bodyPr wrap="square" lIns="0" tIns="0" rIns="0" bIns="0" rtlCol="0" anchor="t"/>
           <a:lstStyle/>
           <a:p>
-            <a:pPr marL="342900" indent="-342900">
-              <a:spcAft>
-                <a:spcPts val="800"/>
-              </a:spcAft>
-              <a:buSzPct val="100000"/>
-              <a:buChar char="•"/>
+            <a:pPr indent="0" marL="0">
+              <a:buNone/>
             </a:pPr>
             <a:r>
-              <a:rPr lang="en-US" sz="1500" dirty="0">
+              <a:rPr lang="en-US" sz="1400" dirty="0">
                 <a:solidFill>
                   <a:schemeClr val="tx1"/>
                 </a:solidFill>
               </a:rPr>
-              <a:t>Réallouer le budget selon le coût par commande</a:t>
-            </a:r>
-            <a:endParaRPr lang="en-US" sz="1500" dirty="0"/>
-          </a:p>
-          <a:p>
-            <a:pPr marL="342900" indent="-342900">
-              <a:spcAft>
-                <a:spcPts val="800"/>
-              </a:spcAft>
-              <a:buSzPct val="100000"/>
-              <a:buChar char="•"/>
-            </a:pPr>
-            <a:r>
-              <a:rPr lang="en-US" sz="1500" dirty="0">
-                <a:solidFill>
-                  <a:schemeClr val="tx1"/>
-                </a:solidFill>
-              </a:rPr>
-              <a:t>Baromètre data et premier communiqué</a:t>
-            </a:r>
-            <a:endParaRPr lang="en-US" sz="1500" dirty="0"/>
-          </a:p>
-          <a:p>
-            <a:pPr marL="342900" indent="-342900">
-              <a:spcAft>
-                <a:spcPts val="800"/>
-              </a:spcAft>
-              <a:buSzPct val="100000"/>
-              <a:buChar char="•"/>
-            </a:pPr>
-            <a:r>
-              <a:rPr lang="en-US" sz="1500" dirty="0">
-                <a:solidFill>
-                  <a:schemeClr val="tx1"/>
-                </a:solidFill>
-              </a:rPr>
-              <a:t>Kit « Commandez sur Yassir » aux restaurants</a:t>
-            </a:r>
-            <a:endParaRPr lang="en-US" sz="1500" dirty="0"/>
-          </a:p>
-          <a:p>
-            <a:pPr marL="342900" indent="-342900">
-              <a:spcAft>
-                <a:spcPts val="800"/>
-              </a:spcAft>
-              <a:buSzPct val="100000"/>
-              <a:buChar char="•"/>
-            </a:pPr>
-            <a:r>
-              <a:rPr lang="en-US" sz="1500" dirty="0">
-                <a:solidFill>
-                  <a:schemeClr val="tx1"/>
-                </a:solidFill>
-              </a:rPr>
-              <a:t>Campagne pluie et fin d'année</a:t>
-            </a:r>
-            <a:endParaRPr lang="en-US" sz="1500" dirty="0"/>
-          </a:p>
-          <a:p>
-            <a:pPr marL="342900" indent="-342900">
-              <a:spcAft>
-                <a:spcPts val="800"/>
-              </a:spcAft>
-              <a:buSzPct val="100000"/>
-              <a:buChar char="•"/>
-            </a:pPr>
-            <a:r>
-              <a:rPr lang="en-US" sz="1500" dirty="0">
-                <a:solidFill>
-                  <a:schemeClr val="tx1"/>
-                </a:solidFill>
-              </a:rPr>
-              <a:t>Test de l'angle MRE</a:t>
-            </a:r>
-            <a:endParaRPr lang="en-US" sz="1500" dirty="0"/>
-          </a:p>
-        </p:txBody>
-      </p:sp>
-      <p:sp>
-        <p:nvSpPr>
-          <p:cNvPr id="13" name="90 jours"/>
+              <a:t>Republier les meilleures vidéos de créateurs comme pubs TikTok et Meta : souvent moins chères qu'un créatif produit en interne.</a:t>
+            </a:r>
+            <a:endParaRPr lang="en-US" sz="1400" dirty="0"/>
+          </a:p>
+        </p:txBody>
+      </p:sp>
+      <p:sp>
+        <p:nvSpPr>
+          <p:cNvPr id="13" name="Livreurs et chauffeurs ambassadeurs"/>
           <p:cNvSpPr/>
           <p:nvPr/>
         </p:nvSpPr>
         <p:spPr>
           <a:xfrm>
-            <a:off x="8046720" y="1417320"/>
-            <a:ext cx="3520440" cy="4572000"/>
+            <a:off x="8077200" y="1417320"/>
+            <a:ext cx="3535680" cy="2743200"/>
           </a:xfrm>
           <a:prstGeom prst="roundRect">
             <a:avLst>
-              <a:gd name="adj" fmla="val 3117"/>
+              <a:gd name="adj" fmla="val 4000"/>
             </a:avLst>
           </a:prstGeom>
           <a:solidFill>
@@ -4730,72 +5109,58 @@
       </p:sp>
       <p:sp>
         <p:nvSpPr>
-          <p:cNvPr id="14" name="90 jours pastille"/>
+          <p:cNvPr id="14" name="Livreurs et chauffeurs ambassadeurs circle"/>
           <p:cNvSpPr/>
           <p:nvPr/>
         </p:nvSpPr>
         <p:spPr>
           <a:xfrm>
-            <a:off x="8321040" y="1645920"/>
-            <a:ext cx="1463040" cy="457200"/>
-          </a:xfrm>
-          <a:prstGeom prst="roundRect">
-            <a:avLst>
-              <a:gd name="adj" fmla="val 50000"/>
-            </a:avLst>
+            <a:off x="8351520" y="1691640"/>
+            <a:ext cx="548640" cy="548640"/>
+          </a:xfrm>
+          <a:prstGeom prst="ellipse">
+            <a:avLst/>
           </a:prstGeom>
           <a:solidFill>
-            <a:schemeClr val="accent4"/>
+            <a:schemeClr val="accent1"/>
           </a:solidFill>
           <a:ln/>
         </p:spPr>
       </p:sp>
-      <p:sp>
-        <p:nvSpPr>
-          <p:cNvPr id="15" name="Text 13"/>
+      <p:pic>
+        <p:nvPicPr>
+          <p:cNvPr id="15" name="Livreurs et chauffeurs ambassadeurs icon" descr="Livreurs et chauffeurs ambassadeurs">    </p:cNvPr>
+          <p:cNvPicPr>
+            <a:picLocks noChangeAspect="1"/>
+          </p:cNvPicPr>
+          <p:nvPr/>
+        </p:nvPicPr>
+        <p:blipFill>
+          <a:blip r:embed="rId3"/>
+          <a:stretch>
+            <a:fillRect/>
+          </a:stretch>
+        </p:blipFill>
+        <p:spPr>
+          <a:xfrm>
+            <a:off x="8494166" y="1834286"/>
+            <a:ext cx="263347" cy="263347"/>
+          </a:xfrm>
+          <a:prstGeom prst="rect">
+            <a:avLst/>
+          </a:prstGeom>
+        </p:spPr>
+      </p:pic>
+      <p:sp>
+        <p:nvSpPr>
+          <p:cNvPr id="16" name="Text 11"/>
           <p:cNvSpPr txBox="1"/>
           <p:nvPr/>
         </p:nvSpPr>
         <p:spPr>
           <a:xfrm>
-            <a:off x="8321040" y="1645920"/>
-            <a:ext cx="1463040" cy="457200"/>
-          </a:xfrm>
-          <a:prstGeom prst="rect">
-            <a:avLst/>
-          </a:prstGeom>
-          <a:noFill/>
-          <a:ln/>
-        </p:spPr>
-        <p:txBody>
-          <a:bodyPr wrap="square" lIns="0" tIns="0" rIns="0" bIns="0" rtlCol="0" anchor="ctr"/>
-          <a:lstStyle/>
-          <a:p>
-            <a:pPr algn="ctr" indent="0" marL="0">
-              <a:buNone/>
-            </a:pPr>
-            <a:r>
-              <a:rPr lang="en-US" sz="1500" b="1" dirty="0">
-                <a:solidFill>
-                  <a:schemeClr val="bg1"/>
-                </a:solidFill>
-              </a:rPr>
-              <a:t>90 jours</a:t>
-            </a:r>
-            <a:endParaRPr lang="en-US" sz="1500" dirty="0"/>
-          </a:p>
-        </p:txBody>
-      </p:sp>
-      <p:sp>
-        <p:nvSpPr>
-          <p:cNvPr id="16" name="Text 14"/>
-          <p:cNvSpPr txBox="1"/>
-          <p:nvPr/>
-        </p:nvSpPr>
-        <p:spPr>
-          <a:xfrm>
-            <a:off x="9921240" y="1645920"/>
-            <a:ext cx="1463040" cy="457200"/>
+            <a:off x="9037320" y="1645920"/>
+            <a:ext cx="2346960" cy="640080"/>
           </a:xfrm>
           <a:prstGeom prst="rect">
             <a:avLst/>
@@ -4811,27 +5176,27 @@
               <a:buNone/>
             </a:pPr>
             <a:r>
-              <a:rPr lang="en-US" sz="1800" b="1" dirty="0">
+              <a:rPr lang="en-US" sz="1700" b="1" dirty="0">
                 <a:solidFill>
                   <a:schemeClr val="tx2"/>
                 </a:solidFill>
               </a:rPr>
-              <a:t>Accélérer</a:t>
-            </a:r>
-            <a:endParaRPr lang="en-US" sz="1800" dirty="0"/>
-          </a:p>
-        </p:txBody>
-      </p:sp>
-      <p:sp>
-        <p:nvSpPr>
-          <p:cNvPr id="17" name="Text 15"/>
+              <a:t>Livreurs et chauffeurs ambassadeurs</a:t>
+            </a:r>
+            <a:endParaRPr lang="en-US" sz="1700" dirty="0"/>
+          </a:p>
+        </p:txBody>
+      </p:sp>
+      <p:sp>
+        <p:nvSpPr>
+          <p:cNvPr id="17" name="Text 12"/>
           <p:cNvSpPr txBox="1"/>
           <p:nvPr/>
         </p:nvSpPr>
         <p:spPr>
           <a:xfrm>
-            <a:off x="8321040" y="2377440"/>
-            <a:ext cx="3017520" cy="3474720"/>
+            <a:off x="8351520" y="2377440"/>
+            <a:ext cx="2987040" cy="1645920"/>
           </a:xfrm>
           <a:prstGeom prst="rect">
             <a:avLst/>
@@ -4843,94 +5208,131 @@
           <a:bodyPr wrap="square" lIns="0" tIns="0" rIns="0" bIns="0" rtlCol="0" anchor="t"/>
           <a:lstStyle/>
           <a:p>
-            <a:pPr marL="342900" indent="-342900">
-              <a:spcAft>
-                <a:spcPts val="800"/>
-              </a:spcAft>
-              <a:buSzPct val="100000"/>
-              <a:buChar char="•"/>
+            <a:pPr indent="0" marL="0">
+              <a:buNone/>
             </a:pPr>
             <a:r>
-              <a:rPr lang="en-US" sz="1500" dirty="0">
+              <a:rPr lang="en-US" sz="1400" dirty="0">
                 <a:solidFill>
                   <a:schemeClr val="tx1"/>
                 </a:solidFill>
               </a:rPr>
-              <a:t>Campagnes Ramadan prêtes et validées</a:t>
-            </a:r>
-            <a:endParaRPr lang="en-US" sz="1500" dirty="0"/>
-          </a:p>
-          <a:p>
-            <a:pPr marL="342900" indent="-342900">
-              <a:spcAft>
-                <a:spcPts val="800"/>
-              </a:spcAft>
-              <a:buSzPct val="100000"/>
-              <a:buChar char="•"/>
+              <a:t>Témoignages vidéo pour le recrutement et pour la confiance des clients. Sert aussi la marque employeur.</a:t>
+            </a:r>
+            <a:endParaRPr lang="en-US" sz="1400" dirty="0"/>
+          </a:p>
+        </p:txBody>
+      </p:sp>
+      <p:sp>
+        <p:nvSpPr>
+          <p:cNvPr id="18" name="Règle influence"/>
+          <p:cNvSpPr/>
+          <p:nvPr/>
+        </p:nvSpPr>
+        <p:spPr>
+          <a:xfrm>
+            <a:off x="548640" y="4434840"/>
+            <a:ext cx="11064240" cy="1371600"/>
+          </a:xfrm>
+          <a:prstGeom prst="roundRect">
+            <a:avLst>
+              <a:gd name="adj" fmla="val 8000"/>
+            </a:avLst>
+          </a:prstGeom>
+          <a:solidFill>
+            <a:schemeClr val="bg2"/>
+          </a:solidFill>
+          <a:ln/>
+        </p:spPr>
+      </p:sp>
+      <p:sp>
+        <p:nvSpPr>
+          <p:cNvPr id="19" name="Règle circle"/>
+          <p:cNvSpPr/>
+          <p:nvPr/>
+        </p:nvSpPr>
+        <p:spPr>
+          <a:xfrm>
+            <a:off x="822960" y="4800600"/>
+            <a:ext cx="594360" cy="594360"/>
+          </a:xfrm>
+          <a:prstGeom prst="ellipse">
+            <a:avLst/>
+          </a:prstGeom>
+          <a:solidFill>
+            <a:schemeClr val="accent3"/>
+          </a:solidFill>
+          <a:ln/>
+        </p:spPr>
+      </p:sp>
+      <p:pic>
+        <p:nvPicPr>
+          <p:cNvPr id="20" name="Règle icon" descr="Règle">    </p:cNvPr>
+          <p:cNvPicPr>
+            <a:picLocks noChangeAspect="1"/>
+          </p:cNvPicPr>
+          <p:nvPr/>
+        </p:nvPicPr>
+        <p:blipFill>
+          <a:blip r:embed="rId4"/>
+          <a:stretch>
+            <a:fillRect/>
+          </a:stretch>
+        </p:blipFill>
+        <p:spPr>
+          <a:xfrm>
+            <a:off x="977494" y="4955134"/>
+            <a:ext cx="285293" cy="285293"/>
+          </a:xfrm>
+          <a:prstGeom prst="rect">
+            <a:avLst/>
+          </a:prstGeom>
+        </p:spPr>
+      </p:pic>
+      <p:sp>
+        <p:nvSpPr>
+          <p:cNvPr id="21" name="Text 15"/>
+          <p:cNvSpPr txBox="1"/>
+          <p:nvPr/>
+        </p:nvSpPr>
+        <p:spPr>
+          <a:xfrm>
+            <a:off x="1645920" y="4526280"/>
+            <a:ext cx="9692640" cy="1188720"/>
+          </a:xfrm>
+          <a:prstGeom prst="rect">
+            <a:avLst/>
+          </a:prstGeom>
+          <a:noFill/>
+          <a:ln/>
+        </p:spPr>
+        <p:txBody>
+          <a:bodyPr wrap="square" lIns="0" tIns="0" rIns="0" bIns="0" rtlCol="0" anchor="ctr"/>
+          <a:lstStyle/>
+          <a:p>
+            <a:pPr indent="0" marL="0">
+              <a:buNone/>
             </a:pPr>
             <a:r>
-              <a:rPr lang="en-US" sz="1500" dirty="0">
+              <a:rPr lang="en-US" sz="1600" b="1" dirty="0">
                 <a:solidFill>
                   <a:schemeClr val="tx1"/>
                 </a:solidFill>
               </a:rPr>
-              <a:t>Pages Rabat et Marrakech</a:t>
-            </a:r>
-            <a:endParaRPr lang="en-US" sz="1500" dirty="0"/>
-          </a:p>
-          <a:p>
-            <a:pPr marL="342900" indent="-342900">
-              <a:spcAft>
-                <a:spcPts val="800"/>
-              </a:spcAft>
-              <a:buSzPct val="100000"/>
-              <a:buChar char="•"/>
+              <a:t>Règle : </a:t>
+            </a:r>
+            <a:pPr indent="0" marL="0">
+              <a:buNone/>
             </a:pPr>
             <a:r>
-              <a:rPr lang="en-US" sz="1500" dirty="0">
+              <a:rPr lang="en-US" sz="1600" dirty="0">
                 <a:solidFill>
                   <a:schemeClr val="tx1"/>
                 </a:solidFill>
               </a:rPr>
-              <a:t>Programme micro-influenceurs en place</a:t>
-            </a:r>
-            <a:endParaRPr lang="en-US" sz="1500" dirty="0"/>
-          </a:p>
-          <a:p>
-            <a:pPr marL="342900" indent="-342900">
-              <a:spcAft>
-                <a:spcPts val="800"/>
-              </a:spcAft>
-              <a:buSzPct val="100000"/>
-              <a:buChar char="•"/>
-            </a:pPr>
-            <a:r>
-              <a:rPr lang="en-US" sz="1500" dirty="0">
-                <a:solidFill>
-                  <a:schemeClr val="tx1"/>
-                </a:solidFill>
-              </a:rPr>
-              <a:t>Fiches stores optimisées FR et AR</a:t>
-            </a:r>
-            <a:endParaRPr lang="en-US" sz="1500" dirty="0"/>
-          </a:p>
-          <a:p>
-            <a:pPr marL="342900" indent="-342900">
-              <a:spcAft>
-                <a:spcPts val="800"/>
-              </a:spcAft>
-              <a:buSzPct val="100000"/>
-              <a:buChar char="•"/>
-            </a:pPr>
-            <a:r>
-              <a:rPr lang="en-US" sz="1500" dirty="0">
-                <a:solidFill>
-                  <a:schemeClr val="tx1"/>
-                </a:solidFill>
-              </a:rPr>
-              <a:t>Bilan : ce qu'on garde, ce qu'on coupe</a:t>
-            </a:r>
-            <a:endParaRPr lang="en-US" sz="1500" dirty="0"/>
+              <a:t>payer à la performance (code promo, commission) plutôt qu'au forfait, et valider chaque contenu avant publication, notamment sur les mentions « VTC » et les promesses de délai.</a:t>
+            </a:r>
+            <a:endParaRPr lang="en-US" sz="1600" dirty="0"/>
           </a:p>
         </p:txBody>
       </p:sp>
@@ -5039,41 +5441,277 @@
                 <a:ea typeface="Arial" pitchFamily="34" charset="-122"/>
                 <a:cs typeface="Arial" pitchFamily="34" charset="-120"/>
               </a:rPr>
-              <a:t>Budget et pilotage</a:t>
+              <a:t>Plan à 30, 60 et 90 jours</a:t>
             </a:r>
             <a:endParaRPr lang="en-US" sz="3600" dirty="0"/>
           </a:p>
         </p:txBody>
       </p:sp>
-      <p:graphicFrame>
-        <p:nvGraphicFramePr>
-          <p:cNvPr id="3" name="Chart 0" descr=""/>
-          <p:cNvGraphicFramePr/>
-          <p:nvPr/>
-        </p:nvGraphicFramePr>
-        <p:xfrm>
-          <a:off x="365760" y="1280160"/>
-          <a:ext cx="5669280" cy="4754880"/>
-        </p:xfrm>
-        <a:graphic xmlns:a="http://schemas.openxmlformats.org/drawingml/2006/main">
-          <a:graphicData uri="http://schemas.openxmlformats.org/drawingml/2006/chart">
-            <c:chart xmlns:c="http://schemas.openxmlformats.org/drawingml/2006/chart" r:id="rId1"/>
-          </a:graphicData>
-        </a:graphic>
-      </p:graphicFrame>
-      <p:sp>
-        <p:nvSpPr>
-          <p:cNvPr id="4" name="Un tableau de bord hebdomadaire circle"/>
+      <p:sp>
+        <p:nvSpPr>
+          <p:cNvPr id="3" name="30 jours"/>
           <p:cNvSpPr/>
           <p:nvPr/>
         </p:nvSpPr>
         <p:spPr>
           <a:xfrm>
-            <a:off x="6400800" y="1463040"/>
-            <a:ext cx="594360" cy="594360"/>
-          </a:xfrm>
-          <a:prstGeom prst="ellipse">
-            <a:avLst/>
+            <a:off x="548640" y="1417320"/>
+            <a:ext cx="3520440" cy="4572000"/>
+          </a:xfrm>
+          <a:prstGeom prst="roundRect">
+            <a:avLst>
+              <a:gd name="adj" fmla="val 3117"/>
+            </a:avLst>
+          </a:prstGeom>
+          <a:solidFill>
+            <a:schemeClr val="bg2"/>
+          </a:solidFill>
+          <a:ln/>
+        </p:spPr>
+      </p:sp>
+      <p:sp>
+        <p:nvSpPr>
+          <p:cNvPr id="4" name="30 jours pastille"/>
+          <p:cNvSpPr/>
+          <p:nvPr/>
+        </p:nvSpPr>
+        <p:spPr>
+          <a:xfrm>
+            <a:off x="822960" y="1645920"/>
+            <a:ext cx="1463040" cy="457200"/>
+          </a:xfrm>
+          <a:prstGeom prst="roundRect">
+            <a:avLst>
+              <a:gd name="adj" fmla="val 50000"/>
+            </a:avLst>
+          </a:prstGeom>
+          <a:solidFill>
+            <a:schemeClr val="accent2"/>
+          </a:solidFill>
+          <a:ln/>
+        </p:spPr>
+      </p:sp>
+      <p:sp>
+        <p:nvSpPr>
+          <p:cNvPr id="5" name="Text 3"/>
+          <p:cNvSpPr txBox="1"/>
+          <p:nvPr/>
+        </p:nvSpPr>
+        <p:spPr>
+          <a:xfrm>
+            <a:off x="822960" y="1645920"/>
+            <a:ext cx="1463040" cy="457200"/>
+          </a:xfrm>
+          <a:prstGeom prst="rect">
+            <a:avLst/>
+          </a:prstGeom>
+          <a:noFill/>
+          <a:ln/>
+        </p:spPr>
+        <p:txBody>
+          <a:bodyPr wrap="square" lIns="0" tIns="0" rIns="0" bIns="0" rtlCol="0" anchor="ctr"/>
+          <a:lstStyle/>
+          <a:p>
+            <a:pPr algn="ctr" indent="0" marL="0">
+              <a:buNone/>
+            </a:pPr>
+            <a:r>
+              <a:rPr lang="en-US" sz="1500" b="1" dirty="0">
+                <a:solidFill>
+                  <a:schemeClr val="bg1"/>
+                </a:solidFill>
+              </a:rPr>
+              <a:t>30 jours</a:t>
+            </a:r>
+            <a:endParaRPr lang="en-US" sz="1500" dirty="0"/>
+          </a:p>
+        </p:txBody>
+      </p:sp>
+      <p:sp>
+        <p:nvSpPr>
+          <p:cNvPr id="6" name="Text 4"/>
+          <p:cNvSpPr txBox="1"/>
+          <p:nvPr/>
+        </p:nvSpPr>
+        <p:spPr>
+          <a:xfrm>
+            <a:off x="2423160" y="1645920"/>
+            <a:ext cx="1463040" cy="457200"/>
+          </a:xfrm>
+          <a:prstGeom prst="rect">
+            <a:avLst/>
+          </a:prstGeom>
+          <a:noFill/>
+          <a:ln/>
+        </p:spPr>
+        <p:txBody>
+          <a:bodyPr wrap="square" lIns="0" tIns="0" rIns="0" bIns="0" rtlCol="0" anchor="ctr"/>
+          <a:lstStyle/>
+          <a:p>
+            <a:pPr indent="0" marL="0">
+              <a:buNone/>
+            </a:pPr>
+            <a:r>
+              <a:rPr lang="en-US" sz="1800" b="1" dirty="0">
+                <a:solidFill>
+                  <a:schemeClr val="tx2"/>
+                </a:solidFill>
+              </a:rPr>
+              <a:t>Lancer</a:t>
+            </a:r>
+            <a:endParaRPr lang="en-US" sz="1800" dirty="0"/>
+          </a:p>
+        </p:txBody>
+      </p:sp>
+      <p:sp>
+        <p:nvSpPr>
+          <p:cNvPr id="7" name="Text 5"/>
+          <p:cNvSpPr txBox="1"/>
+          <p:nvPr/>
+        </p:nvSpPr>
+        <p:spPr>
+          <a:xfrm>
+            <a:off x="822960" y="2377440"/>
+            <a:ext cx="3017520" cy="3474720"/>
+          </a:xfrm>
+          <a:prstGeom prst="rect">
+            <a:avLst/>
+          </a:prstGeom>
+          <a:noFill/>
+          <a:ln/>
+        </p:spPr>
+        <p:txBody>
+          <a:bodyPr wrap="square" lIns="0" tIns="0" rIns="0" bIns="0" rtlCol="0" anchor="t"/>
+          <a:lstStyle/>
+          <a:p>
+            <a:pPr marL="342900" indent="-342900">
+              <a:spcAft>
+                <a:spcPts val="800"/>
+              </a:spcAft>
+              <a:buSzPct val="100000"/>
+              <a:buChar char="•"/>
+            </a:pPr>
+            <a:r>
+              <a:rPr lang="en-US" sz="1500" dirty="0">
+                <a:solidFill>
+                  <a:schemeClr val="tx1"/>
+                </a:solidFill>
+              </a:rPr>
+              <a:t>Mesure de référence : coût par commande, rétention</a:t>
+            </a:r>
+            <a:endParaRPr lang="en-US" sz="1500" dirty="0"/>
+          </a:p>
+          <a:p>
+            <a:pPr marL="342900" indent="-342900">
+              <a:spcAft>
+                <a:spcPts val="800"/>
+              </a:spcAft>
+              <a:buSzPct val="100000"/>
+              <a:buChar char="•"/>
+            </a:pPr>
+            <a:r>
+              <a:rPr lang="en-US" sz="1500" dirty="0">
+                <a:solidFill>
+                  <a:schemeClr val="tx1"/>
+                </a:solidFill>
+              </a:rPr>
+              <a:t>Campagnes Meta, TikTok et Google sur la 1re commande</a:t>
+            </a:r>
+            <a:endParaRPr lang="en-US" sz="1500" dirty="0"/>
+          </a:p>
+          <a:p>
+            <a:pPr marL="342900" indent="-342900">
+              <a:spcAft>
+                <a:spcPts val="800"/>
+              </a:spcAft>
+              <a:buSzPct val="100000"/>
+              <a:buChar char="•"/>
+            </a:pPr>
+            <a:r>
+              <a:rPr lang="en-US" sz="1500" dirty="0">
+                <a:solidFill>
+                  <a:schemeClr val="tx1"/>
+                </a:solidFill>
+              </a:rPr>
+              <a:t>Yassir Friday (Black Friday)</a:t>
+            </a:r>
+            <a:endParaRPr lang="en-US" sz="1500" dirty="0"/>
+          </a:p>
+          <a:p>
+            <a:pPr marL="342900" indent="-342900">
+              <a:spcAft>
+                <a:spcPts val="800"/>
+              </a:spcAft>
+              <a:buSzPct val="100000"/>
+              <a:buChar char="•"/>
+            </a:pPr>
+            <a:r>
+              <a:rPr lang="en-US" sz="1500" dirty="0">
+                <a:solidFill>
+                  <a:schemeClr val="tx1"/>
+                </a:solidFill>
+              </a:rPr>
+              <a:t>Page ville Casablanca et 2 guides food</a:t>
+            </a:r>
+            <a:endParaRPr lang="en-US" sz="1500" dirty="0"/>
+          </a:p>
+          <a:p>
+            <a:pPr marL="342900" indent="-342900">
+              <a:spcAft>
+                <a:spcPts val="800"/>
+              </a:spcAft>
+              <a:buSzPct val="100000"/>
+              <a:buChar char="•"/>
+            </a:pPr>
+            <a:r>
+              <a:rPr lang="en-US" sz="1500" dirty="0">
+                <a:solidFill>
+                  <a:schemeClr val="tx1"/>
+                </a:solidFill>
+              </a:rPr>
+              <a:t>Parrainage et relance des inactifs</a:t>
+            </a:r>
+            <a:endParaRPr lang="en-US" sz="1500" dirty="0"/>
+          </a:p>
+        </p:txBody>
+      </p:sp>
+      <p:sp>
+        <p:nvSpPr>
+          <p:cNvPr id="8" name="60 jours"/>
+          <p:cNvSpPr/>
+          <p:nvPr/>
+        </p:nvSpPr>
+        <p:spPr>
+          <a:xfrm>
+            <a:off x="4297680" y="1417320"/>
+            <a:ext cx="3520440" cy="4572000"/>
+          </a:xfrm>
+          <a:prstGeom prst="roundRect">
+            <a:avLst>
+              <a:gd name="adj" fmla="val 3117"/>
+            </a:avLst>
+          </a:prstGeom>
+          <a:solidFill>
+            <a:schemeClr val="bg2"/>
+          </a:solidFill>
+          <a:ln/>
+        </p:spPr>
+      </p:sp>
+      <p:sp>
+        <p:nvSpPr>
+          <p:cNvPr id="9" name="60 jours pastille"/>
+          <p:cNvSpPr/>
+          <p:nvPr/>
+        </p:nvSpPr>
+        <p:spPr>
+          <a:xfrm>
+            <a:off x="4572000" y="1645920"/>
+            <a:ext cx="1463040" cy="457200"/>
+          </a:xfrm>
+          <a:prstGeom prst="roundRect">
+            <a:avLst>
+              <a:gd name="adj" fmla="val 50000"/>
+            </a:avLst>
           </a:prstGeom>
           <a:solidFill>
             <a:schemeClr val="accent1"/>
@@ -5081,40 +5719,16 @@
           <a:ln/>
         </p:spPr>
       </p:sp>
-      <p:pic>
-        <p:nvPicPr>
-          <p:cNvPr id="5" name="Un tableau de bord hebdomadaire icon" descr="Un tableau de bord hebdomadaire">    </p:cNvPr>
-          <p:cNvPicPr>
-            <a:picLocks noChangeAspect="1"/>
-          </p:cNvPicPr>
-          <p:nvPr/>
-        </p:nvPicPr>
-        <p:blipFill>
-          <a:blip r:embed="rId2"/>
-          <a:stretch>
-            <a:fillRect/>
-          </a:stretch>
-        </p:blipFill>
-        <p:spPr>
-          <a:xfrm>
-            <a:off x="6555334" y="1617574"/>
-            <a:ext cx="285293" cy="285293"/>
-          </a:xfrm>
-          <a:prstGeom prst="rect">
-            <a:avLst/>
-          </a:prstGeom>
-        </p:spPr>
-      </p:pic>
-      <p:sp>
-        <p:nvSpPr>
-          <p:cNvPr id="6" name="Text 2"/>
+      <p:sp>
+        <p:nvSpPr>
+          <p:cNvPr id="10" name="Text 8"/>
           <p:cNvSpPr txBox="1"/>
           <p:nvPr/>
         </p:nvSpPr>
         <p:spPr>
           <a:xfrm>
-            <a:off x="7178040" y="1463040"/>
-            <a:ext cx="4434840" cy="411480"/>
+            <a:off x="4572000" y="1645920"/>
+            <a:ext cx="1463040" cy="457200"/>
           </a:xfrm>
           <a:prstGeom prst="rect">
             <a:avLst/>
@@ -5123,7 +5737,43 @@
           <a:ln/>
         </p:spPr>
         <p:txBody>
-          <a:bodyPr wrap="square" lIns="0" tIns="0" rIns="0" bIns="0" rtlCol="0" anchor="t"/>
+          <a:bodyPr wrap="square" lIns="0" tIns="0" rIns="0" bIns="0" rtlCol="0" anchor="ctr"/>
+          <a:lstStyle/>
+          <a:p>
+            <a:pPr algn="ctr" indent="0" marL="0">
+              <a:buNone/>
+            </a:pPr>
+            <a:r>
+              <a:rPr lang="en-US" sz="1500" b="1" dirty="0">
+                <a:solidFill>
+                  <a:schemeClr val="bg1"/>
+                </a:solidFill>
+              </a:rPr>
+              <a:t>60 jours</a:t>
+            </a:r>
+            <a:endParaRPr lang="en-US" sz="1500" dirty="0"/>
+          </a:p>
+        </p:txBody>
+      </p:sp>
+      <p:sp>
+        <p:nvSpPr>
+          <p:cNvPr id="11" name="Text 9"/>
+          <p:cNvSpPr txBox="1"/>
+          <p:nvPr/>
+        </p:nvSpPr>
+        <p:spPr>
+          <a:xfrm>
+            <a:off x="6172200" y="1645920"/>
+            <a:ext cx="1463040" cy="457200"/>
+          </a:xfrm>
+          <a:prstGeom prst="rect">
+            <a:avLst/>
+          </a:prstGeom>
+          <a:noFill/>
+          <a:ln/>
+        </p:spPr>
+        <p:txBody>
+          <a:bodyPr wrap="square" lIns="0" tIns="0" rIns="0" bIns="0" rtlCol="0" anchor="ctr"/>
           <a:lstStyle/>
           <a:p>
             <a:pPr indent="0" marL="0">
@@ -5135,7 +5785,7 @@
                   <a:schemeClr val="tx2"/>
                 </a:solidFill>
               </a:rPr>
-              <a:t>Un tableau de bord hebdomadaire</a:t>
+              <a:t>Optimiser</a:t>
             </a:r>
             <a:endParaRPr lang="en-US" sz="1800" dirty="0"/>
           </a:p>
@@ -5143,14 +5793,14 @@
       </p:sp>
       <p:sp>
         <p:nvSpPr>
-          <p:cNvPr id="7" name="Text 3"/>
+          <p:cNvPr id="12" name="Text 10"/>
           <p:cNvSpPr txBox="1"/>
           <p:nvPr/>
         </p:nvSpPr>
         <p:spPr>
           <a:xfrm>
-            <a:off x="7178040" y="1920240"/>
-            <a:ext cx="4434840" cy="731520"/>
+            <a:off x="4572000" y="2377440"/>
+            <a:ext cx="3017520" cy="3474720"/>
           </a:xfrm>
           <a:prstGeom prst="rect">
             <a:avLst/>
@@ -5160,252 +5810,324 @@
         </p:spPr>
         <p:txBody>
           <a:bodyPr wrap="square" lIns="0" tIns="0" rIns="0" bIns="0" rtlCol="0" anchor="t"/>
+          <a:lstStyle/>
+          <a:p>
+            <a:pPr marL="342900" indent="-342900">
+              <a:spcAft>
+                <a:spcPts val="800"/>
+              </a:spcAft>
+              <a:buSzPct val="100000"/>
+              <a:buChar char="•"/>
+            </a:pPr>
+            <a:r>
+              <a:rPr lang="en-US" sz="1500" dirty="0">
+                <a:solidFill>
+                  <a:schemeClr val="tx1"/>
+                </a:solidFill>
+              </a:rPr>
+              <a:t>Réallouer le budget selon le coût par commande</a:t>
+            </a:r>
+            <a:endParaRPr lang="en-US" sz="1500" dirty="0"/>
+          </a:p>
+          <a:p>
+            <a:pPr marL="342900" indent="-342900">
+              <a:spcAft>
+                <a:spcPts val="800"/>
+              </a:spcAft>
+              <a:buSzPct val="100000"/>
+              <a:buChar char="•"/>
+            </a:pPr>
+            <a:r>
+              <a:rPr lang="en-US" sz="1500" dirty="0">
+                <a:solidFill>
+                  <a:schemeClr val="tx1"/>
+                </a:solidFill>
+              </a:rPr>
+              <a:t>Baromètre data et premier communiqué</a:t>
+            </a:r>
+            <a:endParaRPr lang="en-US" sz="1500" dirty="0"/>
+          </a:p>
+          <a:p>
+            <a:pPr marL="342900" indent="-342900">
+              <a:spcAft>
+                <a:spcPts val="800"/>
+              </a:spcAft>
+              <a:buSzPct val="100000"/>
+              <a:buChar char="•"/>
+            </a:pPr>
+            <a:r>
+              <a:rPr lang="en-US" sz="1500" dirty="0">
+                <a:solidFill>
+                  <a:schemeClr val="tx1"/>
+                </a:solidFill>
+              </a:rPr>
+              <a:t>Kit « Commandez sur Yassir » aux restaurants</a:t>
+            </a:r>
+            <a:endParaRPr lang="en-US" sz="1500" dirty="0"/>
+          </a:p>
+          <a:p>
+            <a:pPr marL="342900" indent="-342900">
+              <a:spcAft>
+                <a:spcPts val="800"/>
+              </a:spcAft>
+              <a:buSzPct val="100000"/>
+              <a:buChar char="•"/>
+            </a:pPr>
+            <a:r>
+              <a:rPr lang="en-US" sz="1500" dirty="0">
+                <a:solidFill>
+                  <a:schemeClr val="tx1"/>
+                </a:solidFill>
+              </a:rPr>
+              <a:t>Campagne pluie et fin d'année</a:t>
+            </a:r>
+            <a:endParaRPr lang="en-US" sz="1500" dirty="0"/>
+          </a:p>
+          <a:p>
+            <a:pPr marL="342900" indent="-342900">
+              <a:spcAft>
+                <a:spcPts val="800"/>
+              </a:spcAft>
+              <a:buSzPct val="100000"/>
+              <a:buChar char="•"/>
+            </a:pPr>
+            <a:r>
+              <a:rPr lang="en-US" sz="1500" dirty="0">
+                <a:solidFill>
+                  <a:schemeClr val="tx1"/>
+                </a:solidFill>
+              </a:rPr>
+              <a:t>Test de l'angle MRE</a:t>
+            </a:r>
+            <a:endParaRPr lang="en-US" sz="1500" dirty="0"/>
+          </a:p>
+        </p:txBody>
+      </p:sp>
+      <p:sp>
+        <p:nvSpPr>
+          <p:cNvPr id="13" name="90 jours"/>
+          <p:cNvSpPr/>
+          <p:nvPr/>
+        </p:nvSpPr>
+        <p:spPr>
+          <a:xfrm>
+            <a:off x="8046720" y="1417320"/>
+            <a:ext cx="3520440" cy="4572000"/>
+          </a:xfrm>
+          <a:prstGeom prst="roundRect">
+            <a:avLst>
+              <a:gd name="adj" fmla="val 3117"/>
+            </a:avLst>
+          </a:prstGeom>
+          <a:solidFill>
+            <a:schemeClr val="bg2"/>
+          </a:solidFill>
+          <a:ln/>
+        </p:spPr>
+      </p:sp>
+      <p:sp>
+        <p:nvSpPr>
+          <p:cNvPr id="14" name="90 jours pastille"/>
+          <p:cNvSpPr/>
+          <p:nvPr/>
+        </p:nvSpPr>
+        <p:spPr>
+          <a:xfrm>
+            <a:off x="8321040" y="1645920"/>
+            <a:ext cx="1463040" cy="457200"/>
+          </a:xfrm>
+          <a:prstGeom prst="roundRect">
+            <a:avLst>
+              <a:gd name="adj" fmla="val 50000"/>
+            </a:avLst>
+          </a:prstGeom>
+          <a:solidFill>
+            <a:schemeClr val="accent4"/>
+          </a:solidFill>
+          <a:ln/>
+        </p:spPr>
+      </p:sp>
+      <p:sp>
+        <p:nvSpPr>
+          <p:cNvPr id="15" name="Text 13"/>
+          <p:cNvSpPr txBox="1"/>
+          <p:nvPr/>
+        </p:nvSpPr>
+        <p:spPr>
+          <a:xfrm>
+            <a:off x="8321040" y="1645920"/>
+            <a:ext cx="1463040" cy="457200"/>
+          </a:xfrm>
+          <a:prstGeom prst="rect">
+            <a:avLst/>
+          </a:prstGeom>
+          <a:noFill/>
+          <a:ln/>
+        </p:spPr>
+        <p:txBody>
+          <a:bodyPr wrap="square" lIns="0" tIns="0" rIns="0" bIns="0" rtlCol="0" anchor="ctr"/>
+          <a:lstStyle/>
+          <a:p>
+            <a:pPr algn="ctr" indent="0" marL="0">
+              <a:buNone/>
+            </a:pPr>
+            <a:r>
+              <a:rPr lang="en-US" sz="1500" b="1" dirty="0">
+                <a:solidFill>
+                  <a:schemeClr val="bg1"/>
+                </a:solidFill>
+              </a:rPr>
+              <a:t>90 jours</a:t>
+            </a:r>
+            <a:endParaRPr lang="en-US" sz="1500" dirty="0"/>
+          </a:p>
+        </p:txBody>
+      </p:sp>
+      <p:sp>
+        <p:nvSpPr>
+          <p:cNvPr id="16" name="Text 14"/>
+          <p:cNvSpPr txBox="1"/>
+          <p:nvPr/>
+        </p:nvSpPr>
+        <p:spPr>
+          <a:xfrm>
+            <a:off x="9921240" y="1645920"/>
+            <a:ext cx="1463040" cy="457200"/>
+          </a:xfrm>
+          <a:prstGeom prst="rect">
+            <a:avLst/>
+          </a:prstGeom>
+          <a:noFill/>
+          <a:ln/>
+        </p:spPr>
+        <p:txBody>
+          <a:bodyPr wrap="square" lIns="0" tIns="0" rIns="0" bIns="0" rtlCol="0" anchor="ctr"/>
           <a:lstStyle/>
           <a:p>
             <a:pPr indent="0" marL="0">
               <a:buNone/>
             </a:pPr>
             <a:r>
-              <a:rPr lang="en-US" sz="1400" dirty="0">
+              <a:rPr lang="en-US" sz="1800" b="1" dirty="0">
+                <a:solidFill>
+                  <a:schemeClr val="tx2"/>
+                </a:solidFill>
+              </a:rPr>
+              <a:t>Accélérer</a:t>
+            </a:r>
+            <a:endParaRPr lang="en-US" sz="1800" dirty="0"/>
+          </a:p>
+        </p:txBody>
+      </p:sp>
+      <p:sp>
+        <p:nvSpPr>
+          <p:cNvPr id="17" name="Text 15"/>
+          <p:cNvSpPr txBox="1"/>
+          <p:nvPr/>
+        </p:nvSpPr>
+        <p:spPr>
+          <a:xfrm>
+            <a:off x="8321040" y="2377440"/>
+            <a:ext cx="3017520" cy="3474720"/>
+          </a:xfrm>
+          <a:prstGeom prst="rect">
+            <a:avLst/>
+          </a:prstGeom>
+          <a:noFill/>
+          <a:ln/>
+        </p:spPr>
+        <p:txBody>
+          <a:bodyPr wrap="square" lIns="0" tIns="0" rIns="0" bIns="0" rtlCol="0" anchor="t"/>
+          <a:lstStyle/>
+          <a:p>
+            <a:pPr marL="342900" indent="-342900">
+              <a:spcAft>
+                <a:spcPts val="800"/>
+              </a:spcAft>
+              <a:buSzPct val="100000"/>
+              <a:buChar char="•"/>
+            </a:pPr>
+            <a:r>
+              <a:rPr lang="en-US" sz="1500" dirty="0">
                 <a:solidFill>
                   <a:schemeClr val="tx1"/>
                 </a:solidFill>
               </a:rPr>
-              <a:t>Coût par 1re commande et rétention, par plateforme et par ville.</a:t>
-            </a:r>
-            <a:endParaRPr lang="en-US" sz="1400" dirty="0"/>
-          </a:p>
-        </p:txBody>
-      </p:sp>
-      <p:sp>
-        <p:nvSpPr>
-          <p:cNvPr id="8" name="Un nommage de campagnes propre circle"/>
-          <p:cNvSpPr/>
-          <p:nvPr/>
-        </p:nvSpPr>
-        <p:spPr>
-          <a:xfrm>
-            <a:off x="6400800" y="2926080"/>
-            <a:ext cx="594360" cy="594360"/>
-          </a:xfrm>
-          <a:prstGeom prst="ellipse">
-            <a:avLst/>
-          </a:prstGeom>
-          <a:solidFill>
-            <a:schemeClr val="accent1"/>
-          </a:solidFill>
-          <a:ln/>
-        </p:spPr>
-      </p:sp>
-      <p:pic>
-        <p:nvPicPr>
-          <p:cNvPr id="9" name="Un nommage de campagnes propre icon" descr="Un nommage de campagnes propre">    </p:cNvPr>
-          <p:cNvPicPr>
-            <a:picLocks noChangeAspect="1"/>
-          </p:cNvPicPr>
-          <p:nvPr/>
-        </p:nvPicPr>
-        <p:blipFill>
-          <a:blip r:embed="rId3"/>
-          <a:stretch>
-            <a:fillRect/>
-          </a:stretch>
-        </p:blipFill>
-        <p:spPr>
-          <a:xfrm>
-            <a:off x="6555334" y="3080614"/>
-            <a:ext cx="285293" cy="285293"/>
-          </a:xfrm>
-          <a:prstGeom prst="rect">
-            <a:avLst/>
-          </a:prstGeom>
-        </p:spPr>
-      </p:pic>
-      <p:sp>
-        <p:nvSpPr>
-          <p:cNvPr id="10" name="Text 5"/>
-          <p:cNvSpPr txBox="1"/>
-          <p:nvPr/>
-        </p:nvSpPr>
-        <p:spPr>
-          <a:xfrm>
-            <a:off x="7178040" y="2926080"/>
-            <a:ext cx="4434840" cy="411480"/>
-          </a:xfrm>
-          <a:prstGeom prst="rect">
-            <a:avLst/>
-          </a:prstGeom>
-          <a:noFill/>
-          <a:ln/>
-        </p:spPr>
-        <p:txBody>
-          <a:bodyPr wrap="square" lIns="0" tIns="0" rIns="0" bIns="0" rtlCol="0" anchor="t"/>
-          <a:lstStyle/>
-          <a:p>
-            <a:pPr indent="0" marL="0">
-              <a:buNone/>
+              <a:t>Campagnes Ramadan prêtes et validées</a:t>
+            </a:r>
+            <a:endParaRPr lang="en-US" sz="1500" dirty="0"/>
+          </a:p>
+          <a:p>
+            <a:pPr marL="342900" indent="-342900">
+              <a:spcAft>
+                <a:spcPts val="800"/>
+              </a:spcAft>
+              <a:buSzPct val="100000"/>
+              <a:buChar char="•"/>
             </a:pPr>
             <a:r>
-              <a:rPr lang="en-US" sz="1800" b="1" dirty="0">
-                <a:solidFill>
-                  <a:schemeClr val="tx2"/>
+              <a:rPr lang="en-US" sz="1500" dirty="0">
+                <a:solidFill>
+                  <a:schemeClr val="tx1"/>
                 </a:solidFill>
               </a:rPr>
-              <a:t>Un nommage de campagnes propre</a:t>
-            </a:r>
-            <a:endParaRPr lang="en-US" sz="1800" dirty="0"/>
-          </a:p>
-        </p:txBody>
-      </p:sp>
-      <p:sp>
-        <p:nvSpPr>
-          <p:cNvPr id="11" name="Text 6"/>
-          <p:cNvSpPr txBox="1"/>
-          <p:nvPr/>
-        </p:nvSpPr>
-        <p:spPr>
-          <a:xfrm>
-            <a:off x="7178040" y="3383280"/>
-            <a:ext cx="4434840" cy="731520"/>
-          </a:xfrm>
-          <a:prstGeom prst="rect">
-            <a:avLst/>
-          </a:prstGeom>
-          <a:noFill/>
-          <a:ln/>
-        </p:spPr>
-        <p:txBody>
-          <a:bodyPr wrap="square" lIns="0" tIns="0" rIns="0" bIns="0" rtlCol="0" anchor="t"/>
-          <a:lstStyle/>
-          <a:p>
-            <a:pPr indent="0" marL="0">
-              <a:buNone/>
+              <a:t>Pages Rabat et Marrakech</a:t>
+            </a:r>
+            <a:endParaRPr lang="en-US" sz="1500" dirty="0"/>
+          </a:p>
+          <a:p>
+            <a:pPr marL="342900" indent="-342900">
+              <a:spcAft>
+                <a:spcPts val="800"/>
+              </a:spcAft>
+              <a:buSzPct val="100000"/>
+              <a:buChar char="•"/>
             </a:pPr>
             <a:r>
-              <a:rPr lang="en-US" sz="1400" dirty="0">
+              <a:rPr lang="en-US" sz="1500" dirty="0">
                 <a:solidFill>
                   <a:schemeClr val="tx1"/>
                 </a:solidFill>
               </a:rPr>
-              <a:t>Corriger « genreic_download_button » dans Adjust et fixer une convention de noms.</a:t>
-            </a:r>
-            <a:endParaRPr lang="en-US" sz="1400" dirty="0"/>
-          </a:p>
-        </p:txBody>
-      </p:sp>
-      <p:sp>
-        <p:nvSpPr>
-          <p:cNvPr id="12" name="Une règle de coupe circle"/>
-          <p:cNvSpPr/>
-          <p:nvPr/>
-        </p:nvSpPr>
-        <p:spPr>
-          <a:xfrm>
-            <a:off x="6400800" y="4389120"/>
-            <a:ext cx="594360" cy="594360"/>
-          </a:xfrm>
-          <a:prstGeom prst="ellipse">
-            <a:avLst/>
-          </a:prstGeom>
-          <a:solidFill>
-            <a:schemeClr val="accent1"/>
-          </a:solidFill>
-          <a:ln/>
-        </p:spPr>
-      </p:sp>
-      <p:pic>
-        <p:nvPicPr>
-          <p:cNvPr id="13" name="Une règle de coupe icon" descr="Une règle de coupe">    </p:cNvPr>
-          <p:cNvPicPr>
-            <a:picLocks noChangeAspect="1"/>
-          </p:cNvPicPr>
-          <p:nvPr/>
-        </p:nvPicPr>
-        <p:blipFill>
-          <a:blip r:embed="rId4"/>
-          <a:stretch>
-            <a:fillRect/>
-          </a:stretch>
-        </p:blipFill>
-        <p:spPr>
-          <a:xfrm>
-            <a:off x="6555334" y="4543654"/>
-            <a:ext cx="285293" cy="285293"/>
-          </a:xfrm>
-          <a:prstGeom prst="rect">
-            <a:avLst/>
-          </a:prstGeom>
-        </p:spPr>
-      </p:pic>
-      <p:sp>
-        <p:nvSpPr>
-          <p:cNvPr id="14" name="Text 8"/>
-          <p:cNvSpPr txBox="1"/>
-          <p:nvPr/>
-        </p:nvSpPr>
-        <p:spPr>
-          <a:xfrm>
-            <a:off x="7178040" y="4389120"/>
-            <a:ext cx="4434840" cy="411480"/>
-          </a:xfrm>
-          <a:prstGeom prst="rect">
-            <a:avLst/>
-          </a:prstGeom>
-          <a:noFill/>
-          <a:ln/>
-        </p:spPr>
-        <p:txBody>
-          <a:bodyPr wrap="square" lIns="0" tIns="0" rIns="0" bIns="0" rtlCol="0" anchor="t"/>
-          <a:lstStyle/>
-          <a:p>
-            <a:pPr indent="0" marL="0">
-              <a:buNone/>
+              <a:t>Programme micro-influenceurs en place</a:t>
+            </a:r>
+            <a:endParaRPr lang="en-US" sz="1500" dirty="0"/>
+          </a:p>
+          <a:p>
+            <a:pPr marL="342900" indent="-342900">
+              <a:spcAft>
+                <a:spcPts val="800"/>
+              </a:spcAft>
+              <a:buSzPct val="100000"/>
+              <a:buChar char="•"/>
             </a:pPr>
             <a:r>
-              <a:rPr lang="en-US" sz="1800" b="1" dirty="0">
-                <a:solidFill>
-                  <a:schemeClr val="tx2"/>
+              <a:rPr lang="en-US" sz="1500" dirty="0">
+                <a:solidFill>
+                  <a:schemeClr val="tx1"/>
                 </a:solidFill>
               </a:rPr>
-              <a:t>Une règle de coupe</a:t>
-            </a:r>
-            <a:endParaRPr lang="en-US" sz="1800" dirty="0"/>
-          </a:p>
-        </p:txBody>
-      </p:sp>
-      <p:sp>
-        <p:nvSpPr>
-          <p:cNvPr id="15" name="Text 9"/>
-          <p:cNvSpPr txBox="1"/>
-          <p:nvPr/>
-        </p:nvSpPr>
-        <p:spPr>
-          <a:xfrm>
-            <a:off x="7178040" y="4846320"/>
-            <a:ext cx="4434840" cy="731520"/>
-          </a:xfrm>
-          <a:prstGeom prst="rect">
-            <a:avLst/>
-          </a:prstGeom>
-          <a:noFill/>
-          <a:ln/>
-        </p:spPr>
-        <p:txBody>
-          <a:bodyPr wrap="square" lIns="0" tIns="0" rIns="0" bIns="0" rtlCol="0" anchor="t"/>
-          <a:lstStyle/>
-          <a:p>
-            <a:pPr indent="0" marL="0">
-              <a:buNone/>
+              <a:t>Fiches stores optimisées FR et AR</a:t>
+            </a:r>
+            <a:endParaRPr lang="en-US" sz="1500" dirty="0"/>
+          </a:p>
+          <a:p>
+            <a:pPr marL="342900" indent="-342900">
+              <a:spcAft>
+                <a:spcPts val="800"/>
+              </a:spcAft>
+              <a:buSzPct val="100000"/>
+              <a:buChar char="•"/>
             </a:pPr>
             <a:r>
-              <a:rPr lang="en-US" sz="1400" dirty="0">
+              <a:rPr lang="en-US" sz="1500" dirty="0">
                 <a:solidFill>
                   <a:schemeClr val="tx1"/>
                 </a:solidFill>
               </a:rPr>
-              <a:t>Toute campagne au-dessus du coût cible pendant 7 jours perd son budget.</a:t>
-            </a:r>
-            <a:endParaRPr lang="en-US" sz="1400" dirty="0"/>
+              <a:t>Bilan : ce qu'on garde, ce qu'on coupe</a:t>
+            </a:r>
+            <a:endParaRPr lang="en-US" sz="1500" dirty="0"/>
           </a:p>
         </p:txBody>
       </p:sp>
@@ -5489,6 +6211,497 @@
         </p:nvSpPr>
         <p:spPr>
           <a:xfrm>
+            <a:off x="548640" y="320040"/>
+            <a:ext cx="11064240" cy="868680"/>
+          </a:xfrm>
+          <a:prstGeom prst="rect">
+            <a:avLst/>
+          </a:prstGeom>
+          <a:noFill/>
+          <a:ln/>
+        </p:spPr>
+        <p:txBody>
+          <a:bodyPr wrap="square" lIns="0" tIns="0" rIns="0" bIns="0" rtlCol="0" anchor="ctr"/>
+          <a:lstStyle/>
+          <a:p>
+            <a:pPr algn="l" indent="0" marL="0">
+              <a:buNone/>
+            </a:pPr>
+            <a:r>
+              <a:rPr lang="en-US" sz="3600" b="1" dirty="0">
+                <a:solidFill>
+                  <a:schemeClr val="tx2"/>
+                </a:solidFill>
+                <a:latin typeface="Arial" pitchFamily="34" charset="0"/>
+                <a:ea typeface="Arial" pitchFamily="34" charset="-122"/>
+                <a:cs typeface="Arial" pitchFamily="34" charset="-120"/>
+              </a:rPr>
+              <a:t>Budget et pilotage</a:t>
+            </a:r>
+            <a:endParaRPr lang="en-US" sz="3600" dirty="0"/>
+          </a:p>
+        </p:txBody>
+      </p:sp>
+      <p:graphicFrame>
+        <p:nvGraphicFramePr>
+          <p:cNvPr id="3" name="Chart 0" descr=""/>
+          <p:cNvGraphicFramePr/>
+          <p:nvPr/>
+        </p:nvGraphicFramePr>
+        <p:xfrm>
+          <a:off x="365760" y="1280160"/>
+          <a:ext cx="5486400" cy="3657600"/>
+        </p:xfrm>
+        <a:graphic xmlns:a="http://schemas.openxmlformats.org/drawingml/2006/main">
+          <a:graphicData uri="http://schemas.openxmlformats.org/drawingml/2006/chart">
+            <c:chart xmlns:c="http://schemas.openxmlformats.org/drawingml/2006/chart" r:id="rId1"/>
+          </a:graphicData>
+        </a:graphic>
+      </p:graphicFrame>
+      <p:graphicFrame>
+        <p:nvGraphicFramePr>
+          <p:cNvPr id="4" name="Chart 1" descr=""/>
+          <p:cNvGraphicFramePr/>
+          <p:nvPr/>
+        </p:nvGraphicFramePr>
+        <p:xfrm>
+          <a:off x="6126480" y="1280160"/>
+          <a:ext cx="5486400" cy="3657600"/>
+        </p:xfrm>
+        <a:graphic xmlns:a="http://schemas.openxmlformats.org/drawingml/2006/main">
+          <a:graphicData uri="http://schemas.openxmlformats.org/drawingml/2006/chart">
+            <c:chart xmlns:c="http://schemas.openxmlformats.org/drawingml/2006/chart" r:id="rId2"/>
+          </a:graphicData>
+        </a:graphic>
+      </p:graphicFrame>
+      <p:sp>
+        <p:nvSpPr>
+          <p:cNvPr id="5" name="Tableau de bord hebdo circle"/>
+          <p:cNvSpPr/>
+          <p:nvPr/>
+        </p:nvSpPr>
+        <p:spPr>
+          <a:xfrm>
+            <a:off x="548640" y="5166360"/>
+            <a:ext cx="548640" cy="548640"/>
+          </a:xfrm>
+          <a:prstGeom prst="ellipse">
+            <a:avLst/>
+          </a:prstGeom>
+          <a:solidFill>
+            <a:schemeClr val="accent1"/>
+          </a:solidFill>
+          <a:ln/>
+        </p:spPr>
+      </p:sp>
+      <p:pic>
+        <p:nvPicPr>
+          <p:cNvPr id="6" name="Tableau de bord hebdo icon" descr="Tableau de bord hebdo">    </p:cNvPr>
+          <p:cNvPicPr>
+            <a:picLocks noChangeAspect="1"/>
+          </p:cNvPicPr>
+          <p:nvPr/>
+        </p:nvPicPr>
+        <p:blipFill>
+          <a:blip r:embed="rId3"/>
+          <a:stretch>
+            <a:fillRect/>
+          </a:stretch>
+        </p:blipFill>
+        <p:spPr>
+          <a:xfrm>
+            <a:off x="691286" y="5309006"/>
+            <a:ext cx="263347" cy="263347"/>
+          </a:xfrm>
+          <a:prstGeom prst="rect">
+            <a:avLst/>
+          </a:prstGeom>
+        </p:spPr>
+      </p:pic>
+      <p:sp>
+        <p:nvSpPr>
+          <p:cNvPr id="7" name="Text 2"/>
+          <p:cNvSpPr txBox="1"/>
+          <p:nvPr/>
+        </p:nvSpPr>
+        <p:spPr>
+          <a:xfrm>
+            <a:off x="1234440" y="5120640"/>
+            <a:ext cx="2880360" cy="365760"/>
+          </a:xfrm>
+          <a:prstGeom prst="rect">
+            <a:avLst/>
+          </a:prstGeom>
+          <a:noFill/>
+          <a:ln/>
+        </p:spPr>
+        <p:txBody>
+          <a:bodyPr wrap="square" lIns="0" tIns="0" rIns="0" bIns="0" rtlCol="0" anchor="t"/>
+          <a:lstStyle/>
+          <a:p>
+            <a:pPr indent="0" marL="0">
+              <a:buNone/>
+            </a:pPr>
+            <a:r>
+              <a:rPr lang="en-US" sz="1600" b="1" dirty="0">
+                <a:solidFill>
+                  <a:schemeClr val="tx2"/>
+                </a:solidFill>
+              </a:rPr>
+              <a:t>Tableau de bord hebdo</a:t>
+            </a:r>
+            <a:endParaRPr lang="en-US" sz="1600" dirty="0"/>
+          </a:p>
+        </p:txBody>
+      </p:sp>
+      <p:sp>
+        <p:nvSpPr>
+          <p:cNvPr id="8" name="Text 3"/>
+          <p:cNvSpPr txBox="1"/>
+          <p:nvPr/>
+        </p:nvSpPr>
+        <p:spPr>
+          <a:xfrm>
+            <a:off x="1234440" y="5486400"/>
+            <a:ext cx="2880360" cy="594360"/>
+          </a:xfrm>
+          <a:prstGeom prst="rect">
+            <a:avLst/>
+          </a:prstGeom>
+          <a:noFill/>
+          <a:ln/>
+        </p:spPr>
+        <p:txBody>
+          <a:bodyPr wrap="square" lIns="0" tIns="0" rIns="0" bIns="0" rtlCol="0" anchor="t"/>
+          <a:lstStyle/>
+          <a:p>
+            <a:pPr indent="0" marL="0">
+              <a:buNone/>
+            </a:pPr>
+            <a:r>
+              <a:rPr lang="en-US" sz="1300" dirty="0">
+                <a:solidFill>
+                  <a:schemeClr val="tx1"/>
+                </a:solidFill>
+              </a:rPr>
+              <a:t>Coût par 1re commande et rétention, par plateforme.</a:t>
+            </a:r>
+            <a:endParaRPr lang="en-US" sz="1300" dirty="0"/>
+          </a:p>
+        </p:txBody>
+      </p:sp>
+      <p:sp>
+        <p:nvSpPr>
+          <p:cNvPr id="9" name="Nommage propre circle"/>
+          <p:cNvSpPr/>
+          <p:nvPr/>
+        </p:nvSpPr>
+        <p:spPr>
+          <a:xfrm>
+            <a:off x="4297680" y="5166360"/>
+            <a:ext cx="548640" cy="548640"/>
+          </a:xfrm>
+          <a:prstGeom prst="ellipse">
+            <a:avLst/>
+          </a:prstGeom>
+          <a:solidFill>
+            <a:schemeClr val="accent1"/>
+          </a:solidFill>
+          <a:ln/>
+        </p:spPr>
+      </p:sp>
+      <p:pic>
+        <p:nvPicPr>
+          <p:cNvPr id="10" name="Nommage propre icon" descr="Nommage propre">    </p:cNvPr>
+          <p:cNvPicPr>
+            <a:picLocks noChangeAspect="1"/>
+          </p:cNvPicPr>
+          <p:nvPr/>
+        </p:nvPicPr>
+        <p:blipFill>
+          <a:blip r:embed="rId4"/>
+          <a:stretch>
+            <a:fillRect/>
+          </a:stretch>
+        </p:blipFill>
+        <p:spPr>
+          <a:xfrm>
+            <a:off x="4440326" y="5309006"/>
+            <a:ext cx="263347" cy="263347"/>
+          </a:xfrm>
+          <a:prstGeom prst="rect">
+            <a:avLst/>
+          </a:prstGeom>
+        </p:spPr>
+      </p:pic>
+      <p:sp>
+        <p:nvSpPr>
+          <p:cNvPr id="11" name="Text 5"/>
+          <p:cNvSpPr txBox="1"/>
+          <p:nvPr/>
+        </p:nvSpPr>
+        <p:spPr>
+          <a:xfrm>
+            <a:off x="4983480" y="5120640"/>
+            <a:ext cx="2880360" cy="365760"/>
+          </a:xfrm>
+          <a:prstGeom prst="rect">
+            <a:avLst/>
+          </a:prstGeom>
+          <a:noFill/>
+          <a:ln/>
+        </p:spPr>
+        <p:txBody>
+          <a:bodyPr wrap="square" lIns="0" tIns="0" rIns="0" bIns="0" rtlCol="0" anchor="t"/>
+          <a:lstStyle/>
+          <a:p>
+            <a:pPr indent="0" marL="0">
+              <a:buNone/>
+            </a:pPr>
+            <a:r>
+              <a:rPr lang="en-US" sz="1600" b="1" dirty="0">
+                <a:solidFill>
+                  <a:schemeClr val="tx2"/>
+                </a:solidFill>
+              </a:rPr>
+              <a:t>Nommage propre</a:t>
+            </a:r>
+            <a:endParaRPr lang="en-US" sz="1600" dirty="0"/>
+          </a:p>
+        </p:txBody>
+      </p:sp>
+      <p:sp>
+        <p:nvSpPr>
+          <p:cNvPr id="12" name="Text 6"/>
+          <p:cNvSpPr txBox="1"/>
+          <p:nvPr/>
+        </p:nvSpPr>
+        <p:spPr>
+          <a:xfrm>
+            <a:off x="4983480" y="5486400"/>
+            <a:ext cx="2880360" cy="594360"/>
+          </a:xfrm>
+          <a:prstGeom prst="rect">
+            <a:avLst/>
+          </a:prstGeom>
+          <a:noFill/>
+          <a:ln/>
+        </p:spPr>
+        <p:txBody>
+          <a:bodyPr wrap="square" lIns="0" tIns="0" rIns="0" bIns="0" rtlCol="0" anchor="t"/>
+          <a:lstStyle/>
+          <a:p>
+            <a:pPr indent="0" marL="0">
+              <a:buNone/>
+            </a:pPr>
+            <a:r>
+              <a:rPr lang="en-US" sz="1300" dirty="0">
+                <a:solidFill>
+                  <a:schemeClr val="tx1"/>
+                </a:solidFill>
+              </a:rPr>
+              <a:t>Corriger « genreic » dans Adjust, fixer une convention.</a:t>
+            </a:r>
+            <a:endParaRPr lang="en-US" sz="1300" dirty="0"/>
+          </a:p>
+        </p:txBody>
+      </p:sp>
+      <p:sp>
+        <p:nvSpPr>
+          <p:cNvPr id="13" name="Règle de coupe circle"/>
+          <p:cNvSpPr/>
+          <p:nvPr/>
+        </p:nvSpPr>
+        <p:spPr>
+          <a:xfrm>
+            <a:off x="8046720" y="5166360"/>
+            <a:ext cx="548640" cy="548640"/>
+          </a:xfrm>
+          <a:prstGeom prst="ellipse">
+            <a:avLst/>
+          </a:prstGeom>
+          <a:solidFill>
+            <a:schemeClr val="accent1"/>
+          </a:solidFill>
+          <a:ln/>
+        </p:spPr>
+      </p:sp>
+      <p:pic>
+        <p:nvPicPr>
+          <p:cNvPr id="14" name="Règle de coupe icon" descr="Règle de coupe">    </p:cNvPr>
+          <p:cNvPicPr>
+            <a:picLocks noChangeAspect="1"/>
+          </p:cNvPicPr>
+          <p:nvPr/>
+        </p:nvPicPr>
+        <p:blipFill>
+          <a:blip r:embed="rId5"/>
+          <a:stretch>
+            <a:fillRect/>
+          </a:stretch>
+        </p:blipFill>
+        <p:spPr>
+          <a:xfrm>
+            <a:off x="8189366" y="5309006"/>
+            <a:ext cx="263347" cy="263347"/>
+          </a:xfrm>
+          <a:prstGeom prst="rect">
+            <a:avLst/>
+          </a:prstGeom>
+        </p:spPr>
+      </p:pic>
+      <p:sp>
+        <p:nvSpPr>
+          <p:cNvPr id="15" name="Text 8"/>
+          <p:cNvSpPr txBox="1"/>
+          <p:nvPr/>
+        </p:nvSpPr>
+        <p:spPr>
+          <a:xfrm>
+            <a:off x="8732520" y="5120640"/>
+            <a:ext cx="2880360" cy="365760"/>
+          </a:xfrm>
+          <a:prstGeom prst="rect">
+            <a:avLst/>
+          </a:prstGeom>
+          <a:noFill/>
+          <a:ln/>
+        </p:spPr>
+        <p:txBody>
+          <a:bodyPr wrap="square" lIns="0" tIns="0" rIns="0" bIns="0" rtlCol="0" anchor="t"/>
+          <a:lstStyle/>
+          <a:p>
+            <a:pPr indent="0" marL="0">
+              <a:buNone/>
+            </a:pPr>
+            <a:r>
+              <a:rPr lang="en-US" sz="1600" b="1" dirty="0">
+                <a:solidFill>
+                  <a:schemeClr val="tx2"/>
+                </a:solidFill>
+              </a:rPr>
+              <a:t>Règle de coupe</a:t>
+            </a:r>
+            <a:endParaRPr lang="en-US" sz="1600" dirty="0"/>
+          </a:p>
+        </p:txBody>
+      </p:sp>
+      <p:sp>
+        <p:nvSpPr>
+          <p:cNvPr id="16" name="Text 9"/>
+          <p:cNvSpPr txBox="1"/>
+          <p:nvPr/>
+        </p:nvSpPr>
+        <p:spPr>
+          <a:xfrm>
+            <a:off x="8732520" y="5486400"/>
+            <a:ext cx="2880360" cy="594360"/>
+          </a:xfrm>
+          <a:prstGeom prst="rect">
+            <a:avLst/>
+          </a:prstGeom>
+          <a:noFill/>
+          <a:ln/>
+        </p:spPr>
+        <p:txBody>
+          <a:bodyPr wrap="square" lIns="0" tIns="0" rIns="0" bIns="0" rtlCol="0" anchor="t"/>
+          <a:lstStyle/>
+          <a:p>
+            <a:pPr indent="0" marL="0">
+              <a:buNone/>
+            </a:pPr>
+            <a:r>
+              <a:rPr lang="en-US" sz="1300" dirty="0">
+                <a:solidFill>
+                  <a:schemeClr val="tx1"/>
+                </a:solidFill>
+              </a:rPr>
+              <a:t>Au-dessus du coût cible 7 jours de suite : budget retiré.</a:t>
+            </a:r>
+            <a:endParaRPr lang="en-US" sz="1300" dirty="0"/>
+          </a:p>
+        </p:txBody>
+      </p:sp>
+      <p:sp>
+        <p:nvSpPr>
+          <p:cNvPr id="25" name="Slide Number Placeholder 0"/>
+          <p:cNvSpPr>
+            <a:spLocks noGrp="1"/>
+          </p:cNvSpPr>
+          <p:nvPr>
+            <p:ph type="sldNum" sz="quarter" idx="4294967295"/>
+          </p:nvPr>
+        </p:nvSpPr>
+        <p:spPr>
+          <a:xfrm>
+            <a:off x="11155680" y="6400800"/>
+            <a:ext cx="457200" cy="274320"/>
+          </a:xfrm>
+          <a:prstGeom prst="rect">
+            <a:avLst/>
+          </a:prstGeom>
+          <a:extLst>
+            <a:ext uri="{C572A759-6A51-4108-AA02-DFA0A04FC94B}">
+              <ma14:wrappingTextBoxFlag xmlns:ma14="http://schemas.microsoft.com/office/mac/drawingml/2011/main" val="0"/>
+            </a:ext>
+          </a:extLst>
+        </p:spPr>
+        <p:txBody>
+          <a:bodyPr/>
+          <a:lstStyle>
+            <a:lvl1pPr>
+              <a:defRPr sz="1000">
+                <a:solidFill>
+                  <a:schemeClr val="accent5"/>
+                </a:solidFill>
+              </a:defRPr>
+            </a:lvl1pPr>
+          </a:lstStyle>
+          <a:p>
+            <a:pPr algn="r"/>
+            <a:fld id="{F7021451-1387-4CA6-816F-3879F97B5CBC}" type="slidenum">
+              <a:rPr b="0" lang="en-US"/>
+              <a:t>14</a:t>
+            </a:fld>
+            <a:endParaRPr lang="en-US"/>
+          </a:p>
+        </p:txBody>
+      </p:sp>
+    </p:spTree>
+  </p:cSld>
+  <p:clrMapOvr>
+    <a:masterClrMapping/>
+  </p:clrMapOvr>
+</p:sld>
+</file>
+
+<file path=ppt/slides/slide15.xml><?xml version="1.0" encoding="utf-8"?>
+<p:sld xmlns:a="http://schemas.openxmlformats.org/drawingml/2006/main" xmlns:r="http://schemas.openxmlformats.org/officeDocument/2006/relationships" xmlns:p="http://schemas.openxmlformats.org/presentationml/2006/main">
+  <p:cSld name="Slide 15">
+    <p:spTree>
+      <p:nvGrpSpPr>
+        <p:cNvPr id="1" name=""/>
+        <p:cNvGrpSpPr/>
+        <p:nvPr/>
+      </p:nvGrpSpPr>
+      <p:grpSpPr>
+        <a:xfrm>
+          <a:off x="0" y="0"/>
+          <a:ext cx="0" cy="0"/>
+          <a:chOff x="0" y="0"/>
+          <a:chExt cx="0" cy="0"/>
+        </a:xfrm>
+      </p:grpSpPr>
+      <p:sp>
+        <p:nvSpPr>
+          <p:cNvPr id="2" name="Text 0"/>
+          <p:cNvSpPr/>
+          <p:nvPr>
+            <p:ph idx="100" type="title" hasCustomPrompt="1"/>
+          </p:nvPr>
+        </p:nvSpPr>
+        <p:spPr>
+          <a:xfrm>
             <a:off x="731520" y="1920240"/>
             <a:ext cx="10698480" cy="1645920"/>
           </a:xfrm>
@@ -5552,7 +6765,7 @@
                   <a:schemeClr val="accent6"/>
                 </a:solidFill>
               </a:rPr>
-              <a:t>1. Le budget marketing sur 4 mois et le coût cible par première commande</a:t>
+              <a:t>1. Le coût cible par première commande, et qui finance les codes promo</a:t>
             </a:r>
             <a:endParaRPr lang="en-US" sz="1800" dirty="0"/>
           </a:p>
@@ -5580,7 +6793,7 @@
                   <a:schemeClr val="accent6"/>
                 </a:solidFill>
               </a:rPr>
-              <a:t>3. Lancement de la mesure de référence dès cette semaine, avant Black Friday</a:t>
+              <a:t>3. Un budget pour la fin du Ramadan en mars, hors des 200 000 DH</a:t>
             </a:r>
             <a:endParaRPr lang="en-US" sz="1800" dirty="0"/>
           </a:p>
@@ -5836,7 +7049,7 @@
       </p:sp>
       <p:sp>
         <p:nvSpPr>
-          <p:cNvPr id="8" name="Les budgets ci-après sont des hypothèses"/>
+          <p:cNvPr id="8" name="Le coût par commande reste inconnu"/>
           <p:cNvSpPr/>
           <p:nvPr/>
         </p:nvSpPr>
@@ -5858,7 +7071,7 @@
       </p:sp>
       <p:sp>
         <p:nvSpPr>
-          <p:cNvPr id="9" name="Les budgets ci-après sont des hypothèses circle"/>
+          <p:cNvPr id="9" name="Le coût par commande reste inconnu circle"/>
           <p:cNvSpPr/>
           <p:nvPr/>
         </p:nvSpPr>
@@ -5878,7 +7091,7 @@
       </p:sp>
       <p:pic>
         <p:nvPicPr>
-          <p:cNvPr id="10" name="Les budgets ci-après sont des hypothèses icon" descr="Les budgets ci-après sont des hypothèses">    </p:cNvPr>
+          <p:cNvPr id="10" name="Le coût par commande reste inconnu icon" descr="Le coût par commande reste inconnu">    </p:cNvPr>
           <p:cNvPicPr>
             <a:picLocks noChangeAspect="1"/>
           </p:cNvPicPr>
@@ -5930,7 +7143,7 @@
                   <a:schemeClr val="tx2"/>
                 </a:solidFill>
               </a:rPr>
-              <a:t>Les budgets ci-après sont des hypothèses</a:t>
+              <a:t>Le coût par commande reste inconnu</a:t>
             </a:r>
             <a:endParaRPr lang="en-US" sz="1700" dirty="0"/>
           </a:p>
@@ -5966,7 +7179,7 @@
                   <a:schemeClr val="tx1"/>
                 </a:solidFill>
               </a:rPr>
-              <a:t>Sans le budget, le coût par commande cible et l'historique des comptes ads, les répartitions sont un point de départ à recalibrer après 2 semaines.</a:t>
+              <a:t>Le budget est fixé (200 000 DH), mais sans coût cible ni historique des comptes ads, la répartition est un point de départ à recalibrer après 2 semaines.</a:t>
             </a:r>
             <a:endParaRPr lang="en-US" sz="1400" dirty="0"/>
           </a:p>
@@ -9847,10 +11060,10 @@
               <a:tblGrid>
                 <a:gridCol w="2926080"/>
                 <a:gridCol w="2926080"/>
-                <a:gridCol w="3840480"/>
-                <a:gridCol w="1371600"/>
+                <a:gridCol w="3657600"/>
+                <a:gridCol w="1554480"/>
               </a:tblGrid>
-              <a:tr h="548640">
+              <a:tr h="566928">
                 <a:tc>
                   <a:txBody>
                     <a:bodyPr/>
@@ -10048,7 +11261,7 @@
                             <a:schemeClr val="bg1"/>
                           </a:solidFill>
                         </a:rPr>
-                        <a:t>Part du budget</a:t>
+                        <a:t>Budget 4 mois</a:t>
                       </a:r>
                       <a:endParaRPr lang="en-US" sz="1400" dirty="0"/>
                     </a:p>
@@ -10096,7 +11309,7 @@
                   </a:tcPr>
                 </a:tc>
               </a:tr>
-              <a:tr h="548640">
+              <a:tr h="566928">
                 <a:tc>
                   <a:txBody>
                     <a:bodyPr/>
@@ -10169,7 +11382,7 @@
                             <a:schemeClr val="tx1"/>
                           </a:solidFill>
                         </a:rPr>
-                        <a:t>Acquisition à grande échelle</a:t>
+                        <a:t>Acquisition principale</a:t>
                       </a:r>
                       <a:endParaRPr lang="en-US" sz="1400" dirty="0"/>
                     </a:p>
@@ -10227,7 +11440,7 @@
                             <a:schemeClr val="tx1"/>
                           </a:solidFill>
                         </a:rPr>
-                        <a:t>Campagnes app optimisées sur la 1re commande</a:t>
+                        <a:t>App, optimisée sur la 1re commande</a:t>
                       </a:r>
                       <a:endParaRPr lang="en-US" sz="1400" dirty="0"/>
                     </a:p>
@@ -10285,7 +11498,7 @@
                             <a:schemeClr val="tx1"/>
                           </a:solidFill>
                         </a:rPr>
-                        <a:t>35 %</a:t>
+                        <a:t>65 000 DH</a:t>
                       </a:r>
                       <a:endParaRPr lang="en-US" sz="1400" dirty="0"/>
                     </a:p>
@@ -10330,7 +11543,7 @@
                   </a:tcPr>
                 </a:tc>
               </a:tr>
-              <a:tr h="548640">
+              <a:tr h="566928">
                 <a:tc>
                   <a:txBody>
                     <a:bodyPr/>
@@ -10461,7 +11674,7 @@
                             <a:schemeClr val="tx1"/>
                           </a:solidFill>
                         </a:rPr>
-                        <a:t>Campagnes app + contenus de créateurs boostés</a:t>
+                        <a:t>App + contenus de créateurs boostés</a:t>
                       </a:r>
                       <a:endParaRPr lang="en-US" sz="1400" dirty="0"/>
                     </a:p>
@@ -10519,7 +11732,7 @@
                             <a:schemeClr val="tx1"/>
                           </a:solidFill>
                         </a:rPr>
-                        <a:t>25 %</a:t>
+                        <a:t>40 000 DH</a:t>
                       </a:r>
                       <a:endParaRPr lang="en-US" sz="1400" dirty="0"/>
                     </a:p>
@@ -10564,7 +11777,7 @@
                   </a:tcPr>
                 </a:tc>
               </a:tr>
-              <a:tr h="548640">
+              <a:tr h="566928">
                 <a:tc>
                   <a:txBody>
                     <a:bodyPr/>
@@ -10637,7 +11850,7 @@
                             <a:schemeClr val="tx1"/>
                           </a:solidFill>
                         </a:rPr>
-                        <a:t>Couvrir Play Store, YouTube, Search</a:t>
+                        <a:t>Android : Play Store, YouTube</a:t>
                       </a:r>
                       <a:endParaRPr lang="en-US" sz="1400" dirty="0"/>
                     </a:p>
@@ -10695,7 +11908,7 @@
                             <a:schemeClr val="tx1"/>
                           </a:solidFill>
                         </a:rPr>
-                        <a:t>Optimisation sur la 1re commande</a:t>
+                        <a:t>Optimisée sur la 1re commande</a:t>
                       </a:r>
                       <a:endParaRPr lang="en-US" sz="1400" dirty="0"/>
                     </a:p>
@@ -10753,7 +11966,7 @@
                             <a:schemeClr val="tx1"/>
                           </a:solidFill>
                         </a:rPr>
-                        <a:t>20 %</a:t>
+                        <a:t>15 000 DH</a:t>
                       </a:r>
                       <a:endParaRPr lang="en-US" sz="1400" dirty="0"/>
                     </a:p>
@@ -10798,7 +12011,7 @@
                   </a:tcPr>
                 </a:tc>
               </a:tr>
-              <a:tr h="548640">
+              <a:tr h="566928">
                 <a:tc>
                   <a:txBody>
                     <a:bodyPr/>
@@ -10929,7 +12142,7 @@
                             <a:schemeClr val="tx1"/>
                           </a:solidFill>
                         </a:rPr>
-                        <a:t>Marque + « livraison repas [ville] »</a:t>
+                        <a:t>Marque + « livraison repas Casablanca »</a:t>
                       </a:r>
                       <a:endParaRPr lang="en-US" sz="1400" dirty="0"/>
                     </a:p>
@@ -10987,7 +12200,7 @@
                             <a:schemeClr val="tx1"/>
                           </a:solidFill>
                         </a:rPr>
-                        <a:t>10 %</a:t>
+                        <a:t>10 000 DH</a:t>
                       </a:r>
                       <a:endParaRPr lang="en-US" sz="1400" dirty="0"/>
                     </a:p>
@@ -11032,7 +12245,7 @@
                   </a:tcPr>
                 </a:tc>
               </a:tr>
-              <a:tr h="548640">
+              <a:tr h="566928">
                 <a:tc>
                   <a:txBody>
                     <a:bodyPr/>
@@ -11042,13 +12255,113 @@
                         <a:buNone/>
                       </a:pPr>
                       <a:r>
-                        <a:rPr lang="en-US" sz="1400" dirty="0">
+                        <a:rPr lang="en-US" sz="1400" b="1" dirty="0">
                           <a:solidFill>
                             <a:schemeClr val="tx1"/>
                           </a:solidFill>
                         </a:rPr>
-                        <a:t>Apple Search Ads</a:t>
+                        <a:t>Total ads</a:t>
                       </a:r>
+                      <a:endParaRPr lang="en-US" sz="1400" dirty="0"/>
+                    </a:p>
+                  </a:txBody>
+                  <a:tcPr marL="91440" marR="91440" marT="0" marB="0" anchor="ctr">
+                    <a:lnL w="9525" cap="flat" cmpd="sng" algn="ctr">
+                      <a:solidFill>
+                        <a:srgbClr val="C9B8F5"/>
+                      </a:solidFill>
+                      <a:prstDash val="solid"/>
+                      <a:round/>
+                      <a:headEnd type="none" w="med" len="med"/>
+                      <a:tailEnd type="none" w="med" len="med"/>
+                    </a:lnL>
+                    <a:lnR w="9525" cap="flat" cmpd="sng" algn="ctr">
+                      <a:solidFill>
+                        <a:srgbClr val="C9B8F5"/>
+                      </a:solidFill>
+                      <a:prstDash val="solid"/>
+                      <a:round/>
+                      <a:headEnd type="none" w="med" len="med"/>
+                      <a:tailEnd type="none" w="med" len="med"/>
+                    </a:lnR>
+                    <a:lnT w="9525" cap="flat" cmpd="sng" algn="ctr">
+                      <a:solidFill>
+                        <a:srgbClr val="C9B8F5"/>
+                      </a:solidFill>
+                      <a:prstDash val="solid"/>
+                      <a:round/>
+                      <a:headEnd type="none" w="med" len="med"/>
+                      <a:tailEnd type="none" w="med" len="med"/>
+                    </a:lnT>
+                    <a:lnB w="9525" cap="flat" cmpd="sng" algn="ctr">
+                      <a:solidFill>
+                        <a:srgbClr val="C9B8F5"/>
+                      </a:solidFill>
+                      <a:prstDash val="solid"/>
+                      <a:round/>
+                      <a:headEnd type="none" w="med" len="med"/>
+                      <a:tailEnd type="none" w="med" len="med"/>
+                    </a:lnB>
+                  </a:tcPr>
+                </a:tc>
+                <a:tc>
+                  <a:txBody>
+                    <a:bodyPr/>
+                    <a:lstStyle/>
+                    <a:p>
+                      <a:pPr indent="0" marL="0">
+                        <a:buNone/>
+                      </a:pPr>
+                      <a:endParaRPr lang="en-US" sz="1400" dirty="0"/>
+                    </a:p>
+                  </a:txBody>
+                  <a:tcPr marL="91440" marR="91440" marT="0" marB="0" anchor="ctr">
+                    <a:lnL w="9525" cap="flat" cmpd="sng" algn="ctr">
+                      <a:solidFill>
+                        <a:srgbClr val="C9B8F5"/>
+                      </a:solidFill>
+                      <a:prstDash val="solid"/>
+                      <a:round/>
+                      <a:headEnd type="none" w="med" len="med"/>
+                      <a:tailEnd type="none" w="med" len="med"/>
+                    </a:lnL>
+                    <a:lnR w="9525" cap="flat" cmpd="sng" algn="ctr">
+                      <a:solidFill>
+                        <a:srgbClr val="C9B8F5"/>
+                      </a:solidFill>
+                      <a:prstDash val="solid"/>
+                      <a:round/>
+                      <a:headEnd type="none" w="med" len="med"/>
+                      <a:tailEnd type="none" w="med" len="med"/>
+                    </a:lnR>
+                    <a:lnT w="9525" cap="flat" cmpd="sng" algn="ctr">
+                      <a:solidFill>
+                        <a:srgbClr val="C9B8F5"/>
+                      </a:solidFill>
+                      <a:prstDash val="solid"/>
+                      <a:round/>
+                      <a:headEnd type="none" w="med" len="med"/>
+                      <a:tailEnd type="none" w="med" len="med"/>
+                    </a:lnT>
+                    <a:lnB w="9525" cap="flat" cmpd="sng" algn="ctr">
+                      <a:solidFill>
+                        <a:srgbClr val="C9B8F5"/>
+                      </a:solidFill>
+                      <a:prstDash val="solid"/>
+                      <a:round/>
+                      <a:headEnd type="none" w="med" len="med"/>
+                      <a:tailEnd type="none" w="med" len="med"/>
+                    </a:lnB>
+                  </a:tcPr>
+                </a:tc>
+                <a:tc>
+                  <a:txBody>
+                    <a:bodyPr/>
+                    <a:lstStyle/>
+                    <a:p>
+                      <a:pPr indent="0" marL="0">
+                        <a:buNone/>
+                      </a:pPr>
                       <a:endParaRPr lang="en-US" sz="1400" dirty="0"/>
                     </a:p>
                   </a:txBody>
@@ -11100,362 +12413,12 @@
                         <a:buNone/>
                       </a:pPr>
                       <a:r>
-                        <a:rPr lang="en-US" sz="1400" dirty="0">
+                        <a:rPr lang="en-US" sz="1400" b="1" dirty="0">
                           <a:solidFill>
                             <a:schemeClr val="tx1"/>
                           </a:solidFill>
                         </a:rPr>
-                        <a:t>Capter les recherches iPhone</a:t>
-                      </a:r>
-                      <a:endParaRPr lang="en-US" sz="1400" dirty="0"/>
-                    </a:p>
-                  </a:txBody>
-                  <a:tcPr marL="91440" marR="91440" marT="0" marB="0" anchor="ctr">
-                    <a:lnL w="9525" cap="flat" cmpd="sng" algn="ctr">
-                      <a:solidFill>
-                        <a:srgbClr val="C9B8F5"/>
-                      </a:solidFill>
-                      <a:prstDash val="solid"/>
-                      <a:round/>
-                      <a:headEnd type="none" w="med" len="med"/>
-                      <a:tailEnd type="none" w="med" len="med"/>
-                    </a:lnL>
-                    <a:lnR w="9525" cap="flat" cmpd="sng" algn="ctr">
-                      <a:solidFill>
-                        <a:srgbClr val="C9B8F5"/>
-                      </a:solidFill>
-                      <a:prstDash val="solid"/>
-                      <a:round/>
-                      <a:headEnd type="none" w="med" len="med"/>
-                      <a:tailEnd type="none" w="med" len="med"/>
-                    </a:lnR>
-                    <a:lnT w="9525" cap="flat" cmpd="sng" algn="ctr">
-                      <a:solidFill>
-                        <a:srgbClr val="C9B8F5"/>
-                      </a:solidFill>
-                      <a:prstDash val="solid"/>
-                      <a:round/>
-                      <a:headEnd type="none" w="med" len="med"/>
-                      <a:tailEnd type="none" w="med" len="med"/>
-                    </a:lnT>
-                    <a:lnB w="9525" cap="flat" cmpd="sng" algn="ctr">
-                      <a:solidFill>
-                        <a:srgbClr val="C9B8F5"/>
-                      </a:solidFill>
-                      <a:prstDash val="solid"/>
-                      <a:round/>
-                      <a:headEnd type="none" w="med" len="med"/>
-                      <a:tailEnd type="none" w="med" len="med"/>
-                    </a:lnB>
-                  </a:tcPr>
-                </a:tc>
-                <a:tc>
-                  <a:txBody>
-                    <a:bodyPr/>
-                    <a:lstStyle/>
-                    <a:p>
-                      <a:pPr indent="0" marL="0">
-                        <a:buNone/>
-                      </a:pPr>
-                      <a:r>
-                        <a:rPr lang="en-US" sz="1400" dirty="0">
-                          <a:solidFill>
-                            <a:schemeClr val="tx1"/>
-                          </a:solidFill>
-                        </a:rPr>
-                        <a:t>Mots-clés marque et catégorie</a:t>
-                      </a:r>
-                      <a:endParaRPr lang="en-US" sz="1400" dirty="0"/>
-                    </a:p>
-                  </a:txBody>
-                  <a:tcPr marL="91440" marR="91440" marT="0" marB="0" anchor="ctr">
-                    <a:lnL w="9525" cap="flat" cmpd="sng" algn="ctr">
-                      <a:solidFill>
-                        <a:srgbClr val="C9B8F5"/>
-                      </a:solidFill>
-                      <a:prstDash val="solid"/>
-                      <a:round/>
-                      <a:headEnd type="none" w="med" len="med"/>
-                      <a:tailEnd type="none" w="med" len="med"/>
-                    </a:lnL>
-                    <a:lnR w="9525" cap="flat" cmpd="sng" algn="ctr">
-                      <a:solidFill>
-                        <a:srgbClr val="C9B8F5"/>
-                      </a:solidFill>
-                      <a:prstDash val="solid"/>
-                      <a:round/>
-                      <a:headEnd type="none" w="med" len="med"/>
-                      <a:tailEnd type="none" w="med" len="med"/>
-                    </a:lnR>
-                    <a:lnT w="9525" cap="flat" cmpd="sng" algn="ctr">
-                      <a:solidFill>
-                        <a:srgbClr val="C9B8F5"/>
-                      </a:solidFill>
-                      <a:prstDash val="solid"/>
-                      <a:round/>
-                      <a:headEnd type="none" w="med" len="med"/>
-                      <a:tailEnd type="none" w="med" len="med"/>
-                    </a:lnT>
-                    <a:lnB w="9525" cap="flat" cmpd="sng" algn="ctr">
-                      <a:solidFill>
-                        <a:srgbClr val="C9B8F5"/>
-                      </a:solidFill>
-                      <a:prstDash val="solid"/>
-                      <a:round/>
-                      <a:headEnd type="none" w="med" len="med"/>
-                      <a:tailEnd type="none" w="med" len="med"/>
-                    </a:lnB>
-                  </a:tcPr>
-                </a:tc>
-                <a:tc>
-                  <a:txBody>
-                    <a:bodyPr/>
-                    <a:lstStyle/>
-                    <a:p>
-                      <a:pPr indent="0" marL="0">
-                        <a:buNone/>
-                      </a:pPr>
-                      <a:r>
-                        <a:rPr lang="en-US" sz="1400" dirty="0">
-                          <a:solidFill>
-                            <a:schemeClr val="tx1"/>
-                          </a:solidFill>
-                        </a:rPr>
-                        <a:t>5 %</a:t>
-                      </a:r>
-                      <a:endParaRPr lang="en-US" sz="1400" dirty="0"/>
-                    </a:p>
-                  </a:txBody>
-                  <a:tcPr marL="91440" marR="91440" marT="0" marB="0" anchor="ctr">
-                    <a:lnL w="9525" cap="flat" cmpd="sng" algn="ctr">
-                      <a:solidFill>
-                        <a:srgbClr val="C9B8F5"/>
-                      </a:solidFill>
-                      <a:prstDash val="solid"/>
-                      <a:round/>
-                      <a:headEnd type="none" w="med" len="med"/>
-                      <a:tailEnd type="none" w="med" len="med"/>
-                    </a:lnL>
-                    <a:lnR w="9525" cap="flat" cmpd="sng" algn="ctr">
-                      <a:solidFill>
-                        <a:srgbClr val="C9B8F5"/>
-                      </a:solidFill>
-                      <a:prstDash val="solid"/>
-                      <a:round/>
-                      <a:headEnd type="none" w="med" len="med"/>
-                      <a:tailEnd type="none" w="med" len="med"/>
-                    </a:lnR>
-                    <a:lnT w="9525" cap="flat" cmpd="sng" algn="ctr">
-                      <a:solidFill>
-                        <a:srgbClr val="C9B8F5"/>
-                      </a:solidFill>
-                      <a:prstDash val="solid"/>
-                      <a:round/>
-                      <a:headEnd type="none" w="med" len="med"/>
-                      <a:tailEnd type="none" w="med" len="med"/>
-                    </a:lnT>
-                    <a:lnB w="9525" cap="flat" cmpd="sng" algn="ctr">
-                      <a:solidFill>
-                        <a:srgbClr val="C9B8F5"/>
-                      </a:solidFill>
-                      <a:prstDash val="solid"/>
-                      <a:round/>
-                      <a:headEnd type="none" w="med" len="med"/>
-                      <a:tailEnd type="none" w="med" len="med"/>
-                    </a:lnB>
-                  </a:tcPr>
-                </a:tc>
-              </a:tr>
-              <a:tr h="548640">
-                <a:tc>
-                  <a:txBody>
-                    <a:bodyPr/>
-                    <a:lstStyle/>
-                    <a:p>
-                      <a:pPr indent="0" marL="0">
-                        <a:buNone/>
-                      </a:pPr>
-                      <a:r>
-                        <a:rPr lang="en-US" sz="1400" dirty="0">
-                          <a:solidFill>
-                            <a:schemeClr val="tx1"/>
-                          </a:solidFill>
-                        </a:rPr>
-                        <a:t>Réserve de test</a:t>
-                      </a:r>
-                      <a:endParaRPr lang="en-US" sz="1400" dirty="0"/>
-                    </a:p>
-                  </a:txBody>
-                  <a:tcPr marL="91440" marR="91440" marT="0" marB="0" anchor="ctr">
-                    <a:lnL w="9525" cap="flat" cmpd="sng" algn="ctr">
-                      <a:solidFill>
-                        <a:srgbClr val="C9B8F5"/>
-                      </a:solidFill>
-                      <a:prstDash val="solid"/>
-                      <a:round/>
-                      <a:headEnd type="none" w="med" len="med"/>
-                      <a:tailEnd type="none" w="med" len="med"/>
-                    </a:lnL>
-                    <a:lnR w="9525" cap="flat" cmpd="sng" algn="ctr">
-                      <a:solidFill>
-                        <a:srgbClr val="C9B8F5"/>
-                      </a:solidFill>
-                      <a:prstDash val="solid"/>
-                      <a:round/>
-                      <a:headEnd type="none" w="med" len="med"/>
-                      <a:tailEnd type="none" w="med" len="med"/>
-                    </a:lnR>
-                    <a:lnT w="9525" cap="flat" cmpd="sng" algn="ctr">
-                      <a:solidFill>
-                        <a:srgbClr val="C9B8F5"/>
-                      </a:solidFill>
-                      <a:prstDash val="solid"/>
-                      <a:round/>
-                      <a:headEnd type="none" w="med" len="med"/>
-                      <a:tailEnd type="none" w="med" len="med"/>
-                    </a:lnT>
-                    <a:lnB w="9525" cap="flat" cmpd="sng" algn="ctr">
-                      <a:solidFill>
-                        <a:srgbClr val="C9B8F5"/>
-                      </a:solidFill>
-                      <a:prstDash val="solid"/>
-                      <a:round/>
-                      <a:headEnd type="none" w="med" len="med"/>
-                      <a:tailEnd type="none" w="med" len="med"/>
-                    </a:lnB>
-                  </a:tcPr>
-                </a:tc>
-                <a:tc>
-                  <a:txBody>
-                    <a:bodyPr/>
-                    <a:lstStyle/>
-                    <a:p>
-                      <a:pPr indent="0" marL="0">
-                        <a:buNone/>
-                      </a:pPr>
-                      <a:r>
-                        <a:rPr lang="en-US" sz="1400" dirty="0">
-                          <a:solidFill>
-                            <a:schemeClr val="tx1"/>
-                          </a:solidFill>
-                        </a:rPr>
-                        <a:t>Tester de nouveaux formats</a:t>
-                      </a:r>
-                      <a:endParaRPr lang="en-US" sz="1400" dirty="0"/>
-                    </a:p>
-                  </a:txBody>
-                  <a:tcPr marL="91440" marR="91440" marT="0" marB="0" anchor="ctr">
-                    <a:lnL w="9525" cap="flat" cmpd="sng" algn="ctr">
-                      <a:solidFill>
-                        <a:srgbClr val="C9B8F5"/>
-                      </a:solidFill>
-                      <a:prstDash val="solid"/>
-                      <a:round/>
-                      <a:headEnd type="none" w="med" len="med"/>
-                      <a:tailEnd type="none" w="med" len="med"/>
-                    </a:lnL>
-                    <a:lnR w="9525" cap="flat" cmpd="sng" algn="ctr">
-                      <a:solidFill>
-                        <a:srgbClr val="C9B8F5"/>
-                      </a:solidFill>
-                      <a:prstDash val="solid"/>
-                      <a:round/>
-                      <a:headEnd type="none" w="med" len="med"/>
-                      <a:tailEnd type="none" w="med" len="med"/>
-                    </a:lnR>
-                    <a:lnT w="9525" cap="flat" cmpd="sng" algn="ctr">
-                      <a:solidFill>
-                        <a:srgbClr val="C9B8F5"/>
-                      </a:solidFill>
-                      <a:prstDash val="solid"/>
-                      <a:round/>
-                      <a:headEnd type="none" w="med" len="med"/>
-                      <a:tailEnd type="none" w="med" len="med"/>
-                    </a:lnT>
-                    <a:lnB w="9525" cap="flat" cmpd="sng" algn="ctr">
-                      <a:solidFill>
-                        <a:srgbClr val="C9B8F5"/>
-                      </a:solidFill>
-                      <a:prstDash val="solid"/>
-                      <a:round/>
-                      <a:headEnd type="none" w="med" len="med"/>
-                      <a:tailEnd type="none" w="med" len="med"/>
-                    </a:lnB>
-                  </a:tcPr>
-                </a:tc>
-                <a:tc>
-                  <a:txBody>
-                    <a:bodyPr/>
-                    <a:lstStyle/>
-                    <a:p>
-                      <a:pPr indent="0" marL="0">
-                        <a:buNone/>
-                      </a:pPr>
-                      <a:r>
-                        <a:rPr lang="en-US" sz="1400" dirty="0">
-                          <a:solidFill>
-                            <a:schemeClr val="tx1"/>
-                          </a:solidFill>
-                        </a:rPr>
-                        <a:t>Snapchat, YouTube, influence</a:t>
-                      </a:r>
-                      <a:endParaRPr lang="en-US" sz="1400" dirty="0"/>
-                    </a:p>
-                  </a:txBody>
-                  <a:tcPr marL="91440" marR="91440" marT="0" marB="0" anchor="ctr">
-                    <a:lnL w="9525" cap="flat" cmpd="sng" algn="ctr">
-                      <a:solidFill>
-                        <a:srgbClr val="C9B8F5"/>
-                      </a:solidFill>
-                      <a:prstDash val="solid"/>
-                      <a:round/>
-                      <a:headEnd type="none" w="med" len="med"/>
-                      <a:tailEnd type="none" w="med" len="med"/>
-                    </a:lnL>
-                    <a:lnR w="9525" cap="flat" cmpd="sng" algn="ctr">
-                      <a:solidFill>
-                        <a:srgbClr val="C9B8F5"/>
-                      </a:solidFill>
-                      <a:prstDash val="solid"/>
-                      <a:round/>
-                      <a:headEnd type="none" w="med" len="med"/>
-                      <a:tailEnd type="none" w="med" len="med"/>
-                    </a:lnR>
-                    <a:lnT w="9525" cap="flat" cmpd="sng" algn="ctr">
-                      <a:solidFill>
-                        <a:srgbClr val="C9B8F5"/>
-                      </a:solidFill>
-                      <a:prstDash val="solid"/>
-                      <a:round/>
-                      <a:headEnd type="none" w="med" len="med"/>
-                      <a:tailEnd type="none" w="med" len="med"/>
-                    </a:lnT>
-                    <a:lnB w="9525" cap="flat" cmpd="sng" algn="ctr">
-                      <a:solidFill>
-                        <a:srgbClr val="C9B8F5"/>
-                      </a:solidFill>
-                      <a:prstDash val="solid"/>
-                      <a:round/>
-                      <a:headEnd type="none" w="med" len="med"/>
-                      <a:tailEnd type="none" w="med" len="med"/>
-                    </a:lnB>
-                  </a:tcPr>
-                </a:tc>
-                <a:tc>
-                  <a:txBody>
-                    <a:bodyPr/>
-                    <a:lstStyle/>
-                    <a:p>
-                      <a:pPr indent="0" marL="0">
-                        <a:buNone/>
-                      </a:pPr>
-                      <a:r>
-                        <a:rPr lang="en-US" sz="1400" dirty="0">
-                          <a:solidFill>
-                            <a:schemeClr val="tx1"/>
-                          </a:solidFill>
-                        </a:rPr>
-                        <a:t>5 %</a:t>
+                        <a:t>130 000 DH</a:t>
                       </a:r>
                       <a:endParaRPr lang="en-US" sz="1400" dirty="0"/>
                     </a:p>
@@ -11506,14 +12469,80 @@
       </p:graphicFrame>
       <p:sp>
         <p:nvSpPr>
-          <p:cNvPr id="4" name="Text 1"/>
+          <p:cNvPr id="4" name="Plateformes écartées"/>
+          <p:cNvSpPr/>
+          <p:nvPr/>
+        </p:nvSpPr>
+        <p:spPr>
+          <a:xfrm>
+            <a:off x="548640" y="5029200"/>
+            <a:ext cx="11064240" cy="960120"/>
+          </a:xfrm>
+          <a:prstGeom prst="roundRect">
+            <a:avLst>
+              <a:gd name="adj" fmla="val 11429"/>
+            </a:avLst>
+          </a:prstGeom>
+          <a:solidFill>
+            <a:schemeClr val="bg2"/>
+          </a:solidFill>
+          <a:ln/>
+        </p:spPr>
+      </p:sp>
+      <p:sp>
+        <p:nvSpPr>
+          <p:cNvPr id="5" name="Écartées circle"/>
+          <p:cNvSpPr/>
+          <p:nvPr/>
+        </p:nvSpPr>
+        <p:spPr>
+          <a:xfrm>
+            <a:off x="777240" y="5212080"/>
+            <a:ext cx="548640" cy="548640"/>
+          </a:xfrm>
+          <a:prstGeom prst="ellipse">
+            <a:avLst/>
+          </a:prstGeom>
+          <a:solidFill>
+            <a:schemeClr val="accent3"/>
+          </a:solidFill>
+          <a:ln/>
+        </p:spPr>
+      </p:sp>
+      <p:pic>
+        <p:nvPicPr>
+          <p:cNvPr id="6" name="Écartées icon" descr="Écartées">    </p:cNvPr>
+          <p:cNvPicPr>
+            <a:picLocks noChangeAspect="1"/>
+          </p:cNvPicPr>
+          <p:nvPr/>
+        </p:nvPicPr>
+        <p:blipFill>
+          <a:blip r:embed="rId1"/>
+          <a:stretch>
+            <a:fillRect/>
+          </a:stretch>
+        </p:blipFill>
+        <p:spPr>
+          <a:xfrm>
+            <a:off x="919886" y="5354726"/>
+            <a:ext cx="263347" cy="263347"/>
+          </a:xfrm>
+          <a:prstGeom prst="rect">
+            <a:avLst/>
+          </a:prstGeom>
+        </p:spPr>
+      </p:pic>
+      <p:sp>
+        <p:nvSpPr>
+          <p:cNvPr id="7" name="Text 3"/>
           <p:cNvSpPr txBox="1"/>
           <p:nvPr/>
         </p:nvSpPr>
         <p:spPr>
           <a:xfrm>
-            <a:off x="548640" y="5532120"/>
-            <a:ext cx="11064240" cy="457200"/>
+            <a:off x="1508760" y="5074920"/>
+            <a:ext cx="9875520" cy="868680"/>
           </a:xfrm>
           <a:prstGeom prst="rect">
             <a:avLst/>
@@ -11522,21 +12551,32 @@
           <a:ln/>
         </p:spPr>
         <p:txBody>
-          <a:bodyPr wrap="square" lIns="0" tIns="0" rIns="0" bIns="0" rtlCol="0" anchor="t"/>
+          <a:bodyPr wrap="square" lIns="0" tIns="0" rIns="0" bIns="0" rtlCol="0" anchor="ctr"/>
           <a:lstStyle/>
           <a:p>
             <a:pPr indent="0" marL="0">
               <a:buNone/>
             </a:pPr>
             <a:r>
-              <a:rPr lang="en-US" sz="1200" dirty="0">
-                <a:solidFill>
-                  <a:schemeClr val="accent5"/>
+              <a:rPr lang="en-US" sz="1500" b="1" dirty="0">
+                <a:solidFill>
+                  <a:schemeClr val="tx1"/>
                 </a:solidFill>
               </a:rPr>
-              <a:t>Répartition de départ (hypothèse), à réallouer chaque semaine vers les plateformes au meilleur coût par première commande.</a:t>
-            </a:r>
-            <a:endParaRPr lang="en-US" sz="1200" dirty="0"/>
+              <a:t>Écartés : </a:t>
+            </a:r>
+            <a:pPr indent="0" marL="0">
+              <a:buNone/>
+            </a:pPr>
+            <a:r>
+              <a:rPr lang="en-US" sz="1500" dirty="0">
+                <a:solidFill>
+                  <a:schemeClr val="tx1"/>
+                </a:solidFill>
+              </a:rPr>
+              <a:t>Apple Search Ads, Snapchat, YouTube seul. À 32 500 DH d'ads par mois, chaque plateforme en plus divise les conversions dont les algorithmes ont besoin pour apprendre.</a:t>
+            </a:r>
+            <a:endParaRPr lang="en-US" sz="1500" dirty="0"/>
           </a:p>
         </p:txBody>
       </p:sp>
@@ -11645,7 +12685,7 @@
                 <a:ea typeface="Arial" pitchFamily="34" charset="-122"/>
                 <a:cs typeface="Arial" pitchFamily="34" charset="-120"/>
               </a:rPr>
-              <a:t>Créatifs : quatre angles à tester</a:t>
+              <a:t>200 000 DH : ce que ça impose</a:t>
             </a:r>
             <a:endParaRPr lang="en-US" sz="3600" dirty="0"/>
           </a:p>
@@ -11653,18 +12693,18 @@
       </p:sp>
       <p:sp>
         <p:nvSpPr>
-          <p:cNvPr id="3" name="Prix : la première commande offerte"/>
+          <p:cNvPr id="3" name="Casablanca d'abord"/>
           <p:cNvSpPr/>
           <p:nvPr/>
         </p:nvSpPr>
         <p:spPr>
           <a:xfrm>
             <a:off x="548640" y="1417320"/>
-            <a:ext cx="5417820" cy="2057400"/>
+            <a:ext cx="5486400" cy="1325880"/>
           </a:xfrm>
           <a:prstGeom prst="roundRect">
             <a:avLst>
-              <a:gd name="adj" fmla="val 5333"/>
+              <a:gd name="adj" fmla="val 8276"/>
             </a:avLst>
           </a:prstGeom>
           <a:solidFill>
@@ -11675,13 +12715,13 @@
       </p:sp>
       <p:sp>
         <p:nvSpPr>
-          <p:cNvPr id="4" name="Prix : la première commande offerte circle"/>
+          <p:cNvPr id="4" name="Casablanca d'abord circle"/>
           <p:cNvSpPr/>
           <p:nvPr/>
         </p:nvSpPr>
         <p:spPr>
           <a:xfrm>
-            <a:off x="822960" y="1691640"/>
+            <a:off x="777240" y="1645920"/>
             <a:ext cx="548640" cy="548640"/>
           </a:xfrm>
           <a:prstGeom prst="ellipse">
@@ -11695,7 +12735,7 @@
       </p:sp>
       <p:pic>
         <p:nvPicPr>
-          <p:cNvPr id="5" name="Prix : la première commande offerte icon" descr="Prix : la première commande offerte">    </p:cNvPr>
+          <p:cNvPr id="5" name="Casablanca d'abord icon" descr="Casablanca d'abord">    </p:cNvPr>
           <p:cNvPicPr>
             <a:picLocks noChangeAspect="1"/>
           </p:cNvPicPr>
@@ -11709,7 +12749,7 @@
         </p:blipFill>
         <p:spPr>
           <a:xfrm>
-            <a:off x="965606" y="1834286"/>
+            <a:off x="919886" y="1788566"/>
             <a:ext cx="263347" cy="263347"/>
           </a:xfrm>
           <a:prstGeom prst="rect">
@@ -11725,8 +12765,8 @@
         </p:nvSpPr>
         <p:spPr>
           <a:xfrm>
-            <a:off x="1508760" y="1645920"/>
-            <a:ext cx="4229100" cy="640080"/>
+            <a:off x="1508760" y="1600200"/>
+            <a:ext cx="4343400" cy="365760"/>
           </a:xfrm>
           <a:prstGeom prst="rect">
             <a:avLst/>
@@ -11735,7 +12775,7 @@
           <a:ln/>
         </p:spPr>
         <p:txBody>
-          <a:bodyPr wrap="square" lIns="0" tIns="0" rIns="0" bIns="0" rtlCol="0" anchor="ctr"/>
+          <a:bodyPr wrap="square" lIns="0" tIns="0" rIns="0" bIns="0" rtlCol="0" anchor="t"/>
           <a:lstStyle/>
           <a:p>
             <a:pPr indent="0" marL="0">
@@ -11747,7 +12787,7 @@
                   <a:schemeClr val="tx2"/>
                 </a:solidFill>
               </a:rPr>
-              <a:t>Prix : la première commande offerte</a:t>
+              <a:t>Casablanca d'abord</a:t>
             </a:r>
             <a:endParaRPr lang="en-US" sz="1700" dirty="0"/>
           </a:p>
@@ -11761,8 +12801,8 @@
         </p:nvSpPr>
         <p:spPr>
           <a:xfrm>
-            <a:off x="822960" y="2377440"/>
-            <a:ext cx="4869180" cy="960120"/>
+            <a:off x="1508760" y="1984248"/>
+            <a:ext cx="4343400" cy="731520"/>
           </a:xfrm>
           <a:prstGeom prst="rect">
             <a:avLst/>
@@ -11783,7 +12823,7 @@
                   <a:schemeClr val="tx1"/>
                 </a:solidFill>
               </a:rPr>
-              <a:t>Code promo de bienvenue, livraison gratuite. Le levier le plus direct pour l'acquisition, à limiter dans le temps.</a:t>
+              <a:t>Novembre et décembre sur Casablanca seule. Rabat et Marrakech en janvier si le coût par commande tient.</a:t>
             </a:r>
             <a:endParaRPr lang="en-US" sz="1400" dirty="0"/>
           </a:p>
@@ -11791,18 +12831,18 @@
       </p:sp>
       <p:sp>
         <p:nvSpPr>
-          <p:cNvPr id="8" name="Humour en darija, format UGC"/>
+          <p:cNvPr id="8" name="Trois plateformes, pas six"/>
           <p:cNvSpPr/>
           <p:nvPr/>
         </p:nvSpPr>
         <p:spPr>
           <a:xfrm>
-            <a:off x="6195060" y="1417320"/>
-            <a:ext cx="5417820" cy="2057400"/>
+            <a:off x="548640" y="2898648"/>
+            <a:ext cx="5486400" cy="1325880"/>
           </a:xfrm>
           <a:prstGeom prst="roundRect">
             <a:avLst>
-              <a:gd name="adj" fmla="val 5333"/>
+              <a:gd name="adj" fmla="val 8276"/>
             </a:avLst>
           </a:prstGeom>
           <a:solidFill>
@@ -11813,13 +12853,13 @@
       </p:sp>
       <p:sp>
         <p:nvSpPr>
-          <p:cNvPr id="9" name="Humour en darija, format UGC circle"/>
+          <p:cNvPr id="9" name="Trois plateformes, pas six circle"/>
           <p:cNvSpPr/>
           <p:nvPr/>
         </p:nvSpPr>
         <p:spPr>
           <a:xfrm>
-            <a:off x="6469380" y="1691640"/>
+            <a:off x="777240" y="3127248"/>
             <a:ext cx="548640" cy="548640"/>
           </a:xfrm>
           <a:prstGeom prst="ellipse">
@@ -11833,7 +12873,7 @@
       </p:sp>
       <p:pic>
         <p:nvPicPr>
-          <p:cNvPr id="10" name="Humour en darija, format UGC icon" descr="Humour en darija, format UGC">    </p:cNvPr>
+          <p:cNvPr id="10" name="Trois plateformes, pas six icon" descr="Trois plateformes, pas six">    </p:cNvPr>
           <p:cNvPicPr>
             <a:picLocks noChangeAspect="1"/>
           </p:cNvPicPr>
@@ -11847,7 +12887,7 @@
         </p:blipFill>
         <p:spPr>
           <a:xfrm>
-            <a:off x="6612026" y="1834286"/>
+            <a:off x="919886" y="3269894"/>
             <a:ext cx="263347" cy="263347"/>
           </a:xfrm>
           <a:prstGeom prst="rect">
@@ -11863,8 +12903,8 @@
         </p:nvSpPr>
         <p:spPr>
           <a:xfrm>
-            <a:off x="7155180" y="1645920"/>
-            <a:ext cx="4229100" cy="640080"/>
+            <a:off x="1508760" y="3081528"/>
+            <a:ext cx="4343400" cy="365760"/>
           </a:xfrm>
           <a:prstGeom prst="rect">
             <a:avLst/>
@@ -11873,7 +12913,7 @@
           <a:ln/>
         </p:spPr>
         <p:txBody>
-          <a:bodyPr wrap="square" lIns="0" tIns="0" rIns="0" bIns="0" rtlCol="0" anchor="ctr"/>
+          <a:bodyPr wrap="square" lIns="0" tIns="0" rIns="0" bIns="0" rtlCol="0" anchor="t"/>
           <a:lstStyle/>
           <a:p>
             <a:pPr indent="0" marL="0">
@@ -11885,7 +12925,7 @@
                   <a:schemeClr val="tx2"/>
                 </a:solidFill>
               </a:rPr>
-              <a:t>Humour en darija, format UGC</a:t>
+              <a:t>Trois plateformes, pas six</a:t>
             </a:r>
             <a:endParaRPr lang="en-US" sz="1700" dirty="0"/>
           </a:p>
@@ -11899,8 +12939,8 @@
         </p:nvSpPr>
         <p:spPr>
           <a:xfrm>
-            <a:off x="6469380" y="2377440"/>
-            <a:ext cx="4869180" cy="960120"/>
+            <a:off x="1508760" y="3465576"/>
+            <a:ext cx="4343400" cy="731520"/>
           </a:xfrm>
           <a:prstGeom prst="rect">
             <a:avLst/>
@@ -11921,7 +12961,7 @@
                   <a:schemeClr val="tx1"/>
                 </a:solidFill>
               </a:rPr>
-              <a:t>Vidéos tournées au téléphone par des créateurs : la faim à minuit, le match entre amis, la pluie. Plus crédible qu'une pub studio.</a:t>
+              <a:t>Meta, TikTok et Google concentrent 130 000 DH ; le reste va à l'influence, au CRM et au contenu.</a:t>
             </a:r>
             <a:endParaRPr lang="en-US" sz="1400" dirty="0"/>
           </a:p>
@@ -11929,18 +12969,18 @@
       </p:sp>
       <p:sp>
         <p:nvSpPr>
-          <p:cNvPr id="13" name="« Commandez pour vos proches »"/>
+          <p:cNvPr id="13" name="Garder 35 % pour février"/>
           <p:cNvSpPr/>
           <p:nvPr/>
         </p:nvSpPr>
         <p:spPr>
           <a:xfrm>
-            <a:off x="548640" y="3703320"/>
-            <a:ext cx="5417820" cy="2057400"/>
+            <a:off x="548640" y="4379976"/>
+            <a:ext cx="5486400" cy="1325880"/>
           </a:xfrm>
           <a:prstGeom prst="roundRect">
             <a:avLst>
-              <a:gd name="adj" fmla="val 5333"/>
+              <a:gd name="adj" fmla="val 8276"/>
             </a:avLst>
           </a:prstGeom>
           <a:solidFill>
@@ -11951,13 +12991,13 @@
       </p:sp>
       <p:sp>
         <p:nvSpPr>
-          <p:cNvPr id="14" name="« Commandez pour vos proches » circle"/>
+          <p:cNvPr id="14" name="Garder 35 % pour février circle"/>
           <p:cNvSpPr/>
           <p:nvPr/>
         </p:nvSpPr>
         <p:spPr>
           <a:xfrm>
-            <a:off x="822960" y="3977640"/>
+            <a:off x="777240" y="4608576"/>
             <a:ext cx="548640" cy="548640"/>
           </a:xfrm>
           <a:prstGeom prst="ellipse">
@@ -11971,7 +13011,7 @@
       </p:sp>
       <p:pic>
         <p:nvPicPr>
-          <p:cNvPr id="15" name="« Commandez pour vos proches » icon" descr="« Commandez pour vos proches »">    </p:cNvPr>
+          <p:cNvPr id="15" name="Garder 35 % pour février icon" descr="Garder 35 % pour février">    </p:cNvPr>
           <p:cNvPicPr>
             <a:picLocks noChangeAspect="1"/>
           </p:cNvPicPr>
@@ -11985,7 +13025,7 @@
         </p:blipFill>
         <p:spPr>
           <a:xfrm>
-            <a:off x="965606" y="4120286"/>
+            <a:off x="919886" y="4751222"/>
             <a:ext cx="263347" cy="263347"/>
           </a:xfrm>
           <a:prstGeom prst="rect">
@@ -12001,8 +13041,8 @@
         </p:nvSpPr>
         <p:spPr>
           <a:xfrm>
-            <a:off x="1508760" y="3931920"/>
-            <a:ext cx="4229100" cy="640080"/>
+            <a:off x="1508760" y="4562856"/>
+            <a:ext cx="4343400" cy="365760"/>
           </a:xfrm>
           <a:prstGeom prst="rect">
             <a:avLst/>
@@ -12011,7 +13051,7 @@
           <a:ln/>
         </p:spPr>
         <p:txBody>
-          <a:bodyPr wrap="square" lIns="0" tIns="0" rIns="0" bIns="0" rtlCol="0" anchor="ctr"/>
+          <a:bodyPr wrap="square" lIns="0" tIns="0" rIns="0" bIns="0" rtlCol="0" anchor="t"/>
           <a:lstStyle/>
           <a:p>
             <a:pPr indent="0" marL="0">
@@ -12023,7 +13063,7 @@
                   <a:schemeClr val="tx2"/>
                 </a:solidFill>
               </a:rPr>
-              <a:t>« Commandez pour vos proches »</a:t>
+              <a:t>Garder 35 % pour février</a:t>
             </a:r>
             <a:endParaRPr lang="en-US" sz="1700" dirty="0"/>
           </a:p>
@@ -12037,8 +13077,8 @@
         </p:nvSpPr>
         <p:spPr>
           <a:xfrm>
-            <a:off x="822960" y="4663440"/>
-            <a:ext cx="4869180" cy="960120"/>
+            <a:off x="1508760" y="4946904"/>
+            <a:ext cx="4343400" cy="731520"/>
           </a:xfrm>
           <a:prstGeom prst="rect">
             <a:avLst/>
@@ -12059,7 +13099,7 @@
                   <a:schemeClr val="tx1"/>
                 </a:solidFill>
               </a:rPr>
-              <a:t>Ciblage MRE en France, Belgique, Espagne, Italie : commander un repas ou une course pour la famille au Maroc. Angle peu exploité.</a:t>
+              <a:t>70 000 DH en février pour le Ramadan. Attention : le Ramadan continue jusqu'à début mars, hors budget.</a:t>
             </a:r>
             <a:endParaRPr lang="en-US" sz="1400" dirty="0"/>
           </a:p>
@@ -12067,80 +13107,14 @@
       </p:sp>
       <p:sp>
         <p:nvSpPr>
-          <p:cNvPr id="18" name="Rapidité, sans promesse chiffrée"/>
-          <p:cNvSpPr/>
-          <p:nvPr/>
-        </p:nvSpPr>
-        <p:spPr>
-          <a:xfrm>
-            <a:off x="6195060" y="3703320"/>
-            <a:ext cx="5417820" cy="2057400"/>
-          </a:xfrm>
-          <a:prstGeom prst="roundRect">
-            <a:avLst>
-              <a:gd name="adj" fmla="val 5333"/>
-            </a:avLst>
-          </a:prstGeom>
-          <a:solidFill>
-            <a:schemeClr val="bg2"/>
-          </a:solidFill>
-          <a:ln/>
-        </p:spPr>
-      </p:sp>
-      <p:sp>
-        <p:nvSpPr>
-          <p:cNvPr id="19" name="Rapidité, sans promesse chiffrée circle"/>
-          <p:cNvSpPr/>
-          <p:nvPr/>
-        </p:nvSpPr>
-        <p:spPr>
-          <a:xfrm>
-            <a:off x="6469380" y="3977640"/>
-            <a:ext cx="548640" cy="548640"/>
-          </a:xfrm>
-          <a:prstGeom prst="ellipse">
-            <a:avLst/>
-          </a:prstGeom>
-          <a:solidFill>
-            <a:schemeClr val="accent1"/>
-          </a:solidFill>
-          <a:ln/>
-        </p:spPr>
-      </p:sp>
-      <p:pic>
-        <p:nvPicPr>
-          <p:cNvPr id="20" name="Rapidité, sans promesse chiffrée icon" descr="Rapidité, sans promesse chiffrée">    </p:cNvPr>
-          <p:cNvPicPr>
-            <a:picLocks noChangeAspect="1"/>
-          </p:cNvPicPr>
-          <p:nvPr/>
-        </p:nvPicPr>
-        <p:blipFill>
-          <a:blip r:embed="rId4"/>
-          <a:stretch>
-            <a:fillRect/>
-          </a:stretch>
-        </p:blipFill>
-        <p:spPr>
-          <a:xfrm>
-            <a:off x="6612026" y="4120286"/>
-            <a:ext cx="263347" cy="263347"/>
-          </a:xfrm>
-          <a:prstGeom prst="rect">
-            <a:avLst/>
-          </a:prstGeom>
-        </p:spPr>
-      </p:pic>
-      <p:sp>
-        <p:nvSpPr>
-          <p:cNvPr id="21" name="Text 15"/>
+          <p:cNvPr id="18" name="Text 13"/>
           <p:cNvSpPr txBox="1"/>
           <p:nvPr/>
         </p:nvSpPr>
         <p:spPr>
           <a:xfrm>
-            <a:off x="7155180" y="3931920"/>
-            <a:ext cx="4229100" cy="640080"/>
+            <a:off x="6400800" y="1417320"/>
+            <a:ext cx="5212080" cy="365760"/>
           </a:xfrm>
           <a:prstGeom prst="rect">
             <a:avLst/>
@@ -12149,7 +13123,7 @@
           <a:ln/>
         </p:spPr>
         <p:txBody>
-          <a:bodyPr wrap="square" lIns="0" tIns="0" rIns="0" bIns="0" rtlCol="0" anchor="ctr"/>
+          <a:bodyPr wrap="square" lIns="0" tIns="0" rIns="0" bIns="0" rtlCol="0" anchor="t"/>
           <a:lstStyle/>
           <a:p>
             <a:pPr indent="0" marL="0">
@@ -12161,22 +13135,530 @@
                   <a:schemeClr val="tx2"/>
                 </a:solidFill>
               </a:rPr>
-              <a:t>Rapidité, sans promesse chiffrée</a:t>
+              <a:t>Ordres de grandeur avec 130 000 DH d'ads</a:t>
             </a:r>
             <a:endParaRPr lang="en-US" sz="1700" dirty="0"/>
           </a:p>
         </p:txBody>
       </p:sp>
-      <p:sp>
-        <p:nvSpPr>
-          <p:cNvPr id="22" name="Text 16"/>
+      <p:graphicFrame>
+        <p:nvGraphicFramePr>
+          <p:cNvPr id="9" name="Table 0"/>
+          <p:cNvGraphicFramePr>
+            <a:graphicFrameLocks noGrp="1"/>
+          </p:cNvGraphicFramePr>
+          <p:nvPr>
+            <p:extLst>
+              <p:ext uri="{D42A27DB-BD31-4B8C-83A1-F6EECF244321}">
+                <p14:modId xmlns:p14="http://schemas.microsoft.com/office/powerpoint/2010/main" val="1579011935"/>
+              </p:ext>
+            </p:extLst>
+          </p:nvPr>
+        </p:nvGraphicFramePr>
+        <p:xfrm>
+          <a:off x="6400800" y="1920240"/>
+          <a:ext cx="5212080" cy="914400"/>
+        </p:xfrm>
+        <a:graphic>
+          <a:graphicData uri="http://schemas.openxmlformats.org/drawingml/2006/table">
+            <a:tbl>
+              <a:tblPr/>
+              <a:tblGrid>
+                <a:gridCol w="2743200"/>
+                <a:gridCol w="2468880"/>
+              </a:tblGrid>
+              <a:tr h="548640">
+                <a:tc>
+                  <a:txBody>
+                    <a:bodyPr/>
+                    <a:lstStyle/>
+                    <a:p>
+                      <a:pPr indent="0" marL="0">
+                        <a:buNone/>
+                      </a:pPr>
+                      <a:r>
+                        <a:rPr lang="en-US" sz="1600" b="1" dirty="0">
+                          <a:solidFill>
+                            <a:schemeClr val="bg1"/>
+                          </a:solidFill>
+                        </a:rPr>
+                        <a:t>Coût par 1re commande</a:t>
+                      </a:r>
+                      <a:endParaRPr lang="en-US" sz="1600" dirty="0"/>
+                    </a:p>
+                  </a:txBody>
+                  <a:tcPr marL="137160" marR="137160" marT="0" marB="0" anchor="ctr">
+                    <a:lnL w="9525" cap="flat" cmpd="sng" algn="ctr">
+                      <a:solidFill>
+                        <a:srgbClr val="C9B8F5"/>
+                      </a:solidFill>
+                      <a:prstDash val="solid"/>
+                      <a:round/>
+                      <a:headEnd type="none" w="med" len="med"/>
+                      <a:tailEnd type="none" w="med" len="med"/>
+                    </a:lnL>
+                    <a:lnR w="9525" cap="flat" cmpd="sng" algn="ctr">
+                      <a:solidFill>
+                        <a:srgbClr val="C9B8F5"/>
+                      </a:solidFill>
+                      <a:prstDash val="solid"/>
+                      <a:round/>
+                      <a:headEnd type="none" w="med" len="med"/>
+                      <a:tailEnd type="none" w="med" len="med"/>
+                    </a:lnR>
+                    <a:lnT w="9525" cap="flat" cmpd="sng" algn="ctr">
+                      <a:solidFill>
+                        <a:srgbClr val="C9B8F5"/>
+                      </a:solidFill>
+                      <a:prstDash val="solid"/>
+                      <a:round/>
+                      <a:headEnd type="none" w="med" len="med"/>
+                      <a:tailEnd type="none" w="med" len="med"/>
+                    </a:lnT>
+                    <a:lnB w="9525" cap="flat" cmpd="sng" algn="ctr">
+                      <a:solidFill>
+                        <a:srgbClr val="C9B8F5"/>
+                      </a:solidFill>
+                      <a:prstDash val="solid"/>
+                      <a:round/>
+                      <a:headEnd type="none" w="med" len="med"/>
+                      <a:tailEnd type="none" w="med" len="med"/>
+                    </a:lnB>
+                    <a:solidFill>
+                      <a:schemeClr val="tx2"/>
+                    </a:solidFill>
+                  </a:tcPr>
+                </a:tc>
+                <a:tc>
+                  <a:txBody>
+                    <a:bodyPr/>
+                    <a:lstStyle/>
+                    <a:p>
+                      <a:pPr indent="0" marL="0">
+                        <a:buNone/>
+                      </a:pPr>
+                      <a:r>
+                        <a:rPr lang="en-US" sz="1600" b="1" dirty="0">
+                          <a:solidFill>
+                            <a:schemeClr val="bg1"/>
+                          </a:solidFill>
+                        </a:rPr>
+                        <a:t>1res commandes</a:t>
+                      </a:r>
+                      <a:endParaRPr lang="en-US" sz="1600" dirty="0"/>
+                    </a:p>
+                  </a:txBody>
+                  <a:tcPr marL="137160" marR="137160" marT="0" marB="0" anchor="ctr">
+                    <a:lnL w="9525" cap="flat" cmpd="sng" algn="ctr">
+                      <a:solidFill>
+                        <a:srgbClr val="C9B8F5"/>
+                      </a:solidFill>
+                      <a:prstDash val="solid"/>
+                      <a:round/>
+                      <a:headEnd type="none" w="med" len="med"/>
+                      <a:tailEnd type="none" w="med" len="med"/>
+                    </a:lnL>
+                    <a:lnR w="9525" cap="flat" cmpd="sng" algn="ctr">
+                      <a:solidFill>
+                        <a:srgbClr val="C9B8F5"/>
+                      </a:solidFill>
+                      <a:prstDash val="solid"/>
+                      <a:round/>
+                      <a:headEnd type="none" w="med" len="med"/>
+                      <a:tailEnd type="none" w="med" len="med"/>
+                    </a:lnR>
+                    <a:lnT w="9525" cap="flat" cmpd="sng" algn="ctr">
+                      <a:solidFill>
+                        <a:srgbClr val="C9B8F5"/>
+                      </a:solidFill>
+                      <a:prstDash val="solid"/>
+                      <a:round/>
+                      <a:headEnd type="none" w="med" len="med"/>
+                      <a:tailEnd type="none" w="med" len="med"/>
+                    </a:lnT>
+                    <a:lnB w="9525" cap="flat" cmpd="sng" algn="ctr">
+                      <a:solidFill>
+                        <a:srgbClr val="C9B8F5"/>
+                      </a:solidFill>
+                      <a:prstDash val="solid"/>
+                      <a:round/>
+                      <a:headEnd type="none" w="med" len="med"/>
+                      <a:tailEnd type="none" w="med" len="med"/>
+                    </a:lnB>
+                    <a:solidFill>
+                      <a:schemeClr val="tx2"/>
+                    </a:solidFill>
+                  </a:tcPr>
+                </a:tc>
+              </a:tr>
+              <a:tr h="548640">
+                <a:tc>
+                  <a:txBody>
+                    <a:bodyPr/>
+                    <a:lstStyle/>
+                    <a:p>
+                      <a:pPr indent="0" marL="0">
+                        <a:buNone/>
+                      </a:pPr>
+                      <a:r>
+                        <a:rPr lang="en-US" sz="1600" dirty="0">
+                          <a:solidFill>
+                            <a:schemeClr val="tx1"/>
+                          </a:solidFill>
+                        </a:rPr>
+                        <a:t>40 DH</a:t>
+                      </a:r>
+                      <a:endParaRPr lang="en-US" sz="1600" dirty="0"/>
+                    </a:p>
+                  </a:txBody>
+                  <a:tcPr marL="137160" marR="137160" marT="0" marB="0" anchor="ctr">
+                    <a:lnL w="9525" cap="flat" cmpd="sng" algn="ctr">
+                      <a:solidFill>
+                        <a:srgbClr val="C9B8F5"/>
+                      </a:solidFill>
+                      <a:prstDash val="solid"/>
+                      <a:round/>
+                      <a:headEnd type="none" w="med" len="med"/>
+                      <a:tailEnd type="none" w="med" len="med"/>
+                    </a:lnL>
+                    <a:lnR w="9525" cap="flat" cmpd="sng" algn="ctr">
+                      <a:solidFill>
+                        <a:srgbClr val="C9B8F5"/>
+                      </a:solidFill>
+                      <a:prstDash val="solid"/>
+                      <a:round/>
+                      <a:headEnd type="none" w="med" len="med"/>
+                      <a:tailEnd type="none" w="med" len="med"/>
+                    </a:lnR>
+                    <a:lnT w="9525" cap="flat" cmpd="sng" algn="ctr">
+                      <a:solidFill>
+                        <a:srgbClr val="C9B8F5"/>
+                      </a:solidFill>
+                      <a:prstDash val="solid"/>
+                      <a:round/>
+                      <a:headEnd type="none" w="med" len="med"/>
+                      <a:tailEnd type="none" w="med" len="med"/>
+                    </a:lnT>
+                    <a:lnB w="9525" cap="flat" cmpd="sng" algn="ctr">
+                      <a:solidFill>
+                        <a:srgbClr val="C9B8F5"/>
+                      </a:solidFill>
+                      <a:prstDash val="solid"/>
+                      <a:round/>
+                      <a:headEnd type="none" w="med" len="med"/>
+                      <a:tailEnd type="none" w="med" len="med"/>
+                    </a:lnB>
+                  </a:tcPr>
+                </a:tc>
+                <a:tc>
+                  <a:txBody>
+                    <a:bodyPr/>
+                    <a:lstStyle/>
+                    <a:p>
+                      <a:pPr indent="0" marL="0">
+                        <a:buNone/>
+                      </a:pPr>
+                      <a:r>
+                        <a:rPr lang="en-US" sz="1600" dirty="0">
+                          <a:solidFill>
+                            <a:schemeClr val="tx1"/>
+                          </a:solidFill>
+                        </a:rPr>
+                        <a:t>≈ 3 250</a:t>
+                      </a:r>
+                      <a:endParaRPr lang="en-US" sz="1600" dirty="0"/>
+                    </a:p>
+                  </a:txBody>
+                  <a:tcPr marL="137160" marR="137160" marT="0" marB="0" anchor="ctr">
+                    <a:lnL w="9525" cap="flat" cmpd="sng" algn="ctr">
+                      <a:solidFill>
+                        <a:srgbClr val="C9B8F5"/>
+                      </a:solidFill>
+                      <a:prstDash val="solid"/>
+                      <a:round/>
+                      <a:headEnd type="none" w="med" len="med"/>
+                      <a:tailEnd type="none" w="med" len="med"/>
+                    </a:lnL>
+                    <a:lnR w="9525" cap="flat" cmpd="sng" algn="ctr">
+                      <a:solidFill>
+                        <a:srgbClr val="C9B8F5"/>
+                      </a:solidFill>
+                      <a:prstDash val="solid"/>
+                      <a:round/>
+                      <a:headEnd type="none" w="med" len="med"/>
+                      <a:tailEnd type="none" w="med" len="med"/>
+                    </a:lnR>
+                    <a:lnT w="9525" cap="flat" cmpd="sng" algn="ctr">
+                      <a:solidFill>
+                        <a:srgbClr val="C9B8F5"/>
+                      </a:solidFill>
+                      <a:prstDash val="solid"/>
+                      <a:round/>
+                      <a:headEnd type="none" w="med" len="med"/>
+                      <a:tailEnd type="none" w="med" len="med"/>
+                    </a:lnT>
+                    <a:lnB w="9525" cap="flat" cmpd="sng" algn="ctr">
+                      <a:solidFill>
+                        <a:srgbClr val="C9B8F5"/>
+                      </a:solidFill>
+                      <a:prstDash val="solid"/>
+                      <a:round/>
+                      <a:headEnd type="none" w="med" len="med"/>
+                      <a:tailEnd type="none" w="med" len="med"/>
+                    </a:lnB>
+                  </a:tcPr>
+                </a:tc>
+              </a:tr>
+              <a:tr h="548640">
+                <a:tc>
+                  <a:txBody>
+                    <a:bodyPr/>
+                    <a:lstStyle/>
+                    <a:p>
+                      <a:pPr indent="0" marL="0">
+                        <a:buNone/>
+                      </a:pPr>
+                      <a:r>
+                        <a:rPr lang="en-US" sz="1600" dirty="0">
+                          <a:solidFill>
+                            <a:schemeClr val="tx1"/>
+                          </a:solidFill>
+                        </a:rPr>
+                        <a:t>70 DH</a:t>
+                      </a:r>
+                      <a:endParaRPr lang="en-US" sz="1600" dirty="0"/>
+                    </a:p>
+                  </a:txBody>
+                  <a:tcPr marL="137160" marR="137160" marT="0" marB="0" anchor="ctr">
+                    <a:lnL w="9525" cap="flat" cmpd="sng" algn="ctr">
+                      <a:solidFill>
+                        <a:srgbClr val="C9B8F5"/>
+                      </a:solidFill>
+                      <a:prstDash val="solid"/>
+                      <a:round/>
+                      <a:headEnd type="none" w="med" len="med"/>
+                      <a:tailEnd type="none" w="med" len="med"/>
+                    </a:lnL>
+                    <a:lnR w="9525" cap="flat" cmpd="sng" algn="ctr">
+                      <a:solidFill>
+                        <a:srgbClr val="C9B8F5"/>
+                      </a:solidFill>
+                      <a:prstDash val="solid"/>
+                      <a:round/>
+                      <a:headEnd type="none" w="med" len="med"/>
+                      <a:tailEnd type="none" w="med" len="med"/>
+                    </a:lnR>
+                    <a:lnT w="9525" cap="flat" cmpd="sng" algn="ctr">
+                      <a:solidFill>
+                        <a:srgbClr val="C9B8F5"/>
+                      </a:solidFill>
+                      <a:prstDash val="solid"/>
+                      <a:round/>
+                      <a:headEnd type="none" w="med" len="med"/>
+                      <a:tailEnd type="none" w="med" len="med"/>
+                    </a:lnT>
+                    <a:lnB w="9525" cap="flat" cmpd="sng" algn="ctr">
+                      <a:solidFill>
+                        <a:srgbClr val="C9B8F5"/>
+                      </a:solidFill>
+                      <a:prstDash val="solid"/>
+                      <a:round/>
+                      <a:headEnd type="none" w="med" len="med"/>
+                      <a:tailEnd type="none" w="med" len="med"/>
+                    </a:lnB>
+                  </a:tcPr>
+                </a:tc>
+                <a:tc>
+                  <a:txBody>
+                    <a:bodyPr/>
+                    <a:lstStyle/>
+                    <a:p>
+                      <a:pPr indent="0" marL="0">
+                        <a:buNone/>
+                      </a:pPr>
+                      <a:r>
+                        <a:rPr lang="en-US" sz="1600" dirty="0">
+                          <a:solidFill>
+                            <a:schemeClr val="tx1"/>
+                          </a:solidFill>
+                        </a:rPr>
+                        <a:t>≈ 1 860</a:t>
+                      </a:r>
+                      <a:endParaRPr lang="en-US" sz="1600" dirty="0"/>
+                    </a:p>
+                  </a:txBody>
+                  <a:tcPr marL="137160" marR="137160" marT="0" marB="0" anchor="ctr">
+                    <a:lnL w="9525" cap="flat" cmpd="sng" algn="ctr">
+                      <a:solidFill>
+                        <a:srgbClr val="C9B8F5"/>
+                      </a:solidFill>
+                      <a:prstDash val="solid"/>
+                      <a:round/>
+                      <a:headEnd type="none" w="med" len="med"/>
+                      <a:tailEnd type="none" w="med" len="med"/>
+                    </a:lnL>
+                    <a:lnR w="9525" cap="flat" cmpd="sng" algn="ctr">
+                      <a:solidFill>
+                        <a:srgbClr val="C9B8F5"/>
+                      </a:solidFill>
+                      <a:prstDash val="solid"/>
+                      <a:round/>
+                      <a:headEnd type="none" w="med" len="med"/>
+                      <a:tailEnd type="none" w="med" len="med"/>
+                    </a:lnR>
+                    <a:lnT w="9525" cap="flat" cmpd="sng" algn="ctr">
+                      <a:solidFill>
+                        <a:srgbClr val="C9B8F5"/>
+                      </a:solidFill>
+                      <a:prstDash val="solid"/>
+                      <a:round/>
+                      <a:headEnd type="none" w="med" len="med"/>
+                      <a:tailEnd type="none" w="med" len="med"/>
+                    </a:lnT>
+                    <a:lnB w="9525" cap="flat" cmpd="sng" algn="ctr">
+                      <a:solidFill>
+                        <a:srgbClr val="C9B8F5"/>
+                      </a:solidFill>
+                      <a:prstDash val="solid"/>
+                      <a:round/>
+                      <a:headEnd type="none" w="med" len="med"/>
+                      <a:tailEnd type="none" w="med" len="med"/>
+                    </a:lnB>
+                  </a:tcPr>
+                </a:tc>
+              </a:tr>
+              <a:tr h="548640">
+                <a:tc>
+                  <a:txBody>
+                    <a:bodyPr/>
+                    <a:lstStyle/>
+                    <a:p>
+                      <a:pPr indent="0" marL="0">
+                        <a:buNone/>
+                      </a:pPr>
+                      <a:r>
+                        <a:rPr lang="en-US" sz="1600" dirty="0">
+                          <a:solidFill>
+                            <a:schemeClr val="tx1"/>
+                          </a:solidFill>
+                        </a:rPr>
+                        <a:t>100 DH</a:t>
+                      </a:r>
+                      <a:endParaRPr lang="en-US" sz="1600" dirty="0"/>
+                    </a:p>
+                  </a:txBody>
+                  <a:tcPr marL="137160" marR="137160" marT="0" marB="0" anchor="ctr">
+                    <a:lnL w="9525" cap="flat" cmpd="sng" algn="ctr">
+                      <a:solidFill>
+                        <a:srgbClr val="C9B8F5"/>
+                      </a:solidFill>
+                      <a:prstDash val="solid"/>
+                      <a:round/>
+                      <a:headEnd type="none" w="med" len="med"/>
+                      <a:tailEnd type="none" w="med" len="med"/>
+                    </a:lnL>
+                    <a:lnR w="9525" cap="flat" cmpd="sng" algn="ctr">
+                      <a:solidFill>
+                        <a:srgbClr val="C9B8F5"/>
+                      </a:solidFill>
+                      <a:prstDash val="solid"/>
+                      <a:round/>
+                      <a:headEnd type="none" w="med" len="med"/>
+                      <a:tailEnd type="none" w="med" len="med"/>
+                    </a:lnR>
+                    <a:lnT w="9525" cap="flat" cmpd="sng" algn="ctr">
+                      <a:solidFill>
+                        <a:srgbClr val="C9B8F5"/>
+                      </a:solidFill>
+                      <a:prstDash val="solid"/>
+                      <a:round/>
+                      <a:headEnd type="none" w="med" len="med"/>
+                      <a:tailEnd type="none" w="med" len="med"/>
+                    </a:lnT>
+                    <a:lnB w="9525" cap="flat" cmpd="sng" algn="ctr">
+                      <a:solidFill>
+                        <a:srgbClr val="C9B8F5"/>
+                      </a:solidFill>
+                      <a:prstDash val="solid"/>
+                      <a:round/>
+                      <a:headEnd type="none" w="med" len="med"/>
+                      <a:tailEnd type="none" w="med" len="med"/>
+                    </a:lnB>
+                  </a:tcPr>
+                </a:tc>
+                <a:tc>
+                  <a:txBody>
+                    <a:bodyPr/>
+                    <a:lstStyle/>
+                    <a:p>
+                      <a:pPr indent="0" marL="0">
+                        <a:buNone/>
+                      </a:pPr>
+                      <a:r>
+                        <a:rPr lang="en-US" sz="1600" dirty="0">
+                          <a:solidFill>
+                            <a:schemeClr val="tx1"/>
+                          </a:solidFill>
+                        </a:rPr>
+                        <a:t>≈ 1 300</a:t>
+                      </a:r>
+                      <a:endParaRPr lang="en-US" sz="1600" dirty="0"/>
+                    </a:p>
+                  </a:txBody>
+                  <a:tcPr marL="137160" marR="137160" marT="0" marB="0" anchor="ctr">
+                    <a:lnL w="9525" cap="flat" cmpd="sng" algn="ctr">
+                      <a:solidFill>
+                        <a:srgbClr val="C9B8F5"/>
+                      </a:solidFill>
+                      <a:prstDash val="solid"/>
+                      <a:round/>
+                      <a:headEnd type="none" w="med" len="med"/>
+                      <a:tailEnd type="none" w="med" len="med"/>
+                    </a:lnL>
+                    <a:lnR w="9525" cap="flat" cmpd="sng" algn="ctr">
+                      <a:solidFill>
+                        <a:srgbClr val="C9B8F5"/>
+                      </a:solidFill>
+                      <a:prstDash val="solid"/>
+                      <a:round/>
+                      <a:headEnd type="none" w="med" len="med"/>
+                      <a:tailEnd type="none" w="med" len="med"/>
+                    </a:lnR>
+                    <a:lnT w="9525" cap="flat" cmpd="sng" algn="ctr">
+                      <a:solidFill>
+                        <a:srgbClr val="C9B8F5"/>
+                      </a:solidFill>
+                      <a:prstDash val="solid"/>
+                      <a:round/>
+                      <a:headEnd type="none" w="med" len="med"/>
+                      <a:tailEnd type="none" w="med" len="med"/>
+                    </a:lnT>
+                    <a:lnB w="9525" cap="flat" cmpd="sng" algn="ctr">
+                      <a:solidFill>
+                        <a:srgbClr val="C9B8F5"/>
+                      </a:solidFill>
+                      <a:prstDash val="solid"/>
+                      <a:round/>
+                      <a:headEnd type="none" w="med" len="med"/>
+                      <a:tailEnd type="none" w="med" len="med"/>
+                    </a:lnB>
+                  </a:tcPr>
+                </a:tc>
+              </a:tr>
+            </a:tbl>
+          </a:graphicData>
+        </a:graphic>
+      </p:graphicFrame>
+      <p:sp>
+        <p:nvSpPr>
+          <p:cNvPr id="20" name="Text 14"/>
           <p:cNvSpPr txBox="1"/>
           <p:nvPr/>
         </p:nvSpPr>
         <p:spPr>
           <a:xfrm>
-            <a:off x="6469380" y="4663440"/>
-            <a:ext cx="4869180" cy="960120"/>
+            <a:off x="6400800" y="4343400"/>
+            <a:ext cx="5212080" cy="914400"/>
           </a:xfrm>
           <a:prstGeom prst="rect">
             <a:avLst/>
@@ -12192,61 +13674,14 @@
               <a:buNone/>
             </a:pPr>
             <a:r>
-              <a:rPr lang="en-US" sz="1400" dirty="0">
-                <a:solidFill>
-                  <a:schemeClr val="tx1"/>
+              <a:rPr lang="en-US" sz="1300" dirty="0">
+                <a:solidFill>
+                  <a:schemeClr val="accent5"/>
                 </a:solidFill>
               </a:rPr>
-              <a:t>« Livré pendant que vous mettez la table » plutôt que « en 35 minutes », tant que la promesse n'est pas sourcée.</a:t>
-            </a:r>
-            <a:endParaRPr lang="en-US" sz="1400" dirty="0"/>
-          </a:p>
-        </p:txBody>
-      </p:sp>
-      <p:sp>
-        <p:nvSpPr>
-          <p:cNvPr id="23" name="Text 17"/>
-          <p:cNvSpPr txBox="1"/>
-          <p:nvPr/>
-        </p:nvSpPr>
-        <p:spPr>
-          <a:xfrm>
-            <a:off x="548640" y="5852160"/>
-            <a:ext cx="11064240" cy="411480"/>
-          </a:xfrm>
-          <a:prstGeom prst="rect">
-            <a:avLst/>
-          </a:prstGeom>
-          <a:noFill/>
-          <a:ln/>
-        </p:spPr>
-        <p:txBody>
-          <a:bodyPr wrap="square" lIns="0" tIns="0" rIns="0" bIns="0" rtlCol="0" anchor="t"/>
-          <a:lstStyle/>
-          <a:p>
-            <a:pPr indent="0" marL="0">
-              <a:buNone/>
-            </a:pPr>
-            <a:r>
-              <a:rPr lang="en-US" sz="1500" b="1" dirty="0">
-                <a:solidFill>
-                  <a:schemeClr val="accent1"/>
-                </a:solidFill>
-              </a:rPr>
-              <a:t>Règle de test : </a:t>
-            </a:r>
-            <a:pPr indent="0" marL="0">
-              <a:buNone/>
-            </a:pPr>
-            <a:r>
-              <a:rPr lang="en-US" sz="1500" dirty="0">
-                <a:solidFill>
-                  <a:schemeClr val="tx1"/>
-                </a:solidFill>
-              </a:rPr>
-              <a:t>3 accroches par angle, renouvelées toutes les 2 semaines. Couper une pub après un budget de test sans première commande.</a:t>
-            </a:r>
-            <a:endParaRPr lang="en-US" sz="1500" dirty="0"/>
+              <a:t>Scénarios illustratifs, pas une prévision : le vrai coût sera connu après 2 semaines de campagne. Hors coût des codes promo, s'ils sont financés à part.</a:t>
+            </a:r>
+            <a:endParaRPr lang="en-US" sz="1300" dirty="0"/>
           </a:p>
         </p:txBody>
       </p:sp>
@@ -12355,7 +13790,7 @@
                 <a:ea typeface="Arial" pitchFamily="34" charset="-122"/>
                 <a:cs typeface="Arial" pitchFamily="34" charset="-120"/>
               </a:rPr>
-              <a:t>Calendrier des temps forts</a:t>
+              <a:t>Créatifs : quatre angles à tester</a:t>
             </a:r>
             <a:endParaRPr lang="en-US" sz="3600" dirty="0"/>
           </a:p>
@@ -12363,54 +13798,18 @@
       </p:sp>
       <p:sp>
         <p:nvSpPr>
-          <p:cNvPr id="3" name="Text 1"/>
-          <p:cNvSpPr txBox="1"/>
-          <p:nvPr/>
-        </p:nvSpPr>
-        <p:spPr>
-          <a:xfrm>
-            <a:off x="548640" y="1371600"/>
-            <a:ext cx="2606040" cy="365760"/>
-          </a:xfrm>
-          <a:prstGeom prst="rect">
-            <a:avLst/>
-          </a:prstGeom>
-          <a:noFill/>
-          <a:ln/>
-        </p:spPr>
-        <p:txBody>
-          <a:bodyPr wrap="square" lIns="0" tIns="0" rIns="0" bIns="0" rtlCol="0" anchor="t"/>
-          <a:lstStyle/>
-          <a:p>
-            <a:pPr indent="0" marL="0">
-              <a:buNone/>
-            </a:pPr>
-            <a:r>
-              <a:rPr lang="en-US" sz="1600" b="1" dirty="0">
-                <a:solidFill>
-                  <a:schemeClr val="accent5"/>
-                </a:solidFill>
-              </a:rPr>
-              <a:t>Novembre</a:t>
-            </a:r>
-            <a:endParaRPr lang="en-US" sz="1600" dirty="0"/>
-          </a:p>
-        </p:txBody>
-      </p:sp>
-      <p:sp>
-        <p:nvSpPr>
-          <p:cNvPr id="4" name="Novembre"/>
+          <p:cNvPr id="3" name="Prix : la première commande offerte"/>
           <p:cNvSpPr/>
           <p:nvPr/>
         </p:nvSpPr>
         <p:spPr>
           <a:xfrm>
-            <a:off x="548640" y="1783080"/>
-            <a:ext cx="2606040" cy="4114800"/>
+            <a:off x="548640" y="1417320"/>
+            <a:ext cx="5417820" cy="2057400"/>
           </a:xfrm>
           <a:prstGeom prst="roundRect">
             <a:avLst>
-              <a:gd name="adj" fmla="val 4211"/>
+              <a:gd name="adj" fmla="val 5333"/>
             </a:avLst>
           </a:prstGeom>
           <a:solidFill>
@@ -12421,14 +13820,14 @@
       </p:sp>
       <p:sp>
         <p:nvSpPr>
-          <p:cNvPr id="5" name="Black Friday circle"/>
+          <p:cNvPr id="4" name="Prix : la première commande offerte circle"/>
           <p:cNvSpPr/>
           <p:nvPr/>
         </p:nvSpPr>
         <p:spPr>
           <a:xfrm>
-            <a:off x="822960" y="2011680"/>
-            <a:ext cx="594360" cy="594360"/>
+            <a:off x="822960" y="1691640"/>
+            <a:ext cx="548640" cy="548640"/>
           </a:xfrm>
           <a:prstGeom prst="ellipse">
             <a:avLst/>
@@ -12441,7 +13840,7 @@
       </p:sp>
       <p:pic>
         <p:nvPicPr>
-          <p:cNvPr id="6" name="Black Friday icon" descr="Black Friday">    </p:cNvPr>
+          <p:cNvPr id="5" name="Prix : la première commande offerte icon" descr="Prix : la première commande offerte">    </p:cNvPr>
           <p:cNvPicPr>
             <a:picLocks noChangeAspect="1"/>
           </p:cNvPicPr>
@@ -12455,8 +13854,8 @@
         </p:blipFill>
         <p:spPr>
           <a:xfrm>
-            <a:off x="977494" y="2166214"/>
-            <a:ext cx="285293" cy="285293"/>
+            <a:off x="965606" y="1834286"/>
+            <a:ext cx="263347" cy="263347"/>
           </a:xfrm>
           <a:prstGeom prst="rect">
             <a:avLst/>
@@ -12465,14 +13864,14 @@
       </p:pic>
       <p:sp>
         <p:nvSpPr>
-          <p:cNvPr id="7" name="Text 4"/>
+          <p:cNvPr id="6" name="Text 3"/>
           <p:cNvSpPr txBox="1"/>
           <p:nvPr/>
         </p:nvSpPr>
         <p:spPr>
           <a:xfrm>
-            <a:off x="822960" y="2743200"/>
-            <a:ext cx="2103120" cy="685800"/>
+            <a:off x="1508760" y="1645920"/>
+            <a:ext cx="4229100" cy="640080"/>
           </a:xfrm>
           <a:prstGeom prst="rect">
             <a:avLst/>
@@ -12481,34 +13880,34 @@
           <a:ln/>
         </p:spPr>
         <p:txBody>
-          <a:bodyPr wrap="square" lIns="0" tIns="0" rIns="0" bIns="0" rtlCol="0" anchor="t"/>
+          <a:bodyPr wrap="square" lIns="0" tIns="0" rIns="0" bIns="0" rtlCol="0" anchor="ctr"/>
           <a:lstStyle/>
           <a:p>
             <a:pPr indent="0" marL="0">
               <a:buNone/>
             </a:pPr>
             <a:r>
-              <a:rPr lang="en-US" sz="1800" b="1" dirty="0">
+              <a:rPr lang="en-US" sz="1700" b="1" dirty="0">
                 <a:solidFill>
                   <a:schemeClr val="tx2"/>
                 </a:solidFill>
               </a:rPr>
-              <a:t>Black Friday</a:t>
-            </a:r>
-            <a:endParaRPr lang="en-US" sz="1800" dirty="0"/>
-          </a:p>
-        </p:txBody>
-      </p:sp>
-      <p:sp>
-        <p:nvSpPr>
-          <p:cNvPr id="8" name="Text 5"/>
+              <a:t>Prix : la première commande offerte</a:t>
+            </a:r>
+            <a:endParaRPr lang="en-US" sz="1700" dirty="0"/>
+          </a:p>
+        </p:txBody>
+      </p:sp>
+      <p:sp>
+        <p:nvSpPr>
+          <p:cNvPr id="7" name="Text 4"/>
           <p:cNvSpPr txBox="1"/>
           <p:nvPr/>
         </p:nvSpPr>
         <p:spPr>
           <a:xfrm>
-            <a:off x="822960" y="3474720"/>
-            <a:ext cx="2103120" cy="2286000"/>
+            <a:off x="822960" y="2377440"/>
+            <a:ext cx="4869180" cy="960120"/>
           </a:xfrm>
           <a:prstGeom prst="rect">
             <a:avLst/>
@@ -12529,7 +13928,7 @@
                   <a:schemeClr val="tx1"/>
                 </a:solidFill>
               </a:rPr>
-              <a:t>« Yassir Friday » : une semaine d'offres Food et Market autour du 27/11. Longs week-ends : offres génériques, sans thème national.</a:t>
+              <a:t>Code promo de bienvenue, livraison gratuite. Le levier le plus direct pour l'acquisition, à limiter dans le temps.</a:t>
             </a:r>
             <a:endParaRPr lang="en-US" sz="1400" dirty="0"/>
           </a:p>
@@ -12537,54 +13936,18 @@
       </p:sp>
       <p:sp>
         <p:nvSpPr>
-          <p:cNvPr id="9" name="Text 6"/>
-          <p:cNvSpPr txBox="1"/>
-          <p:nvPr/>
-        </p:nvSpPr>
-        <p:spPr>
-          <a:xfrm>
-            <a:off x="3360420" y="1371600"/>
-            <a:ext cx="2606040" cy="365760"/>
-          </a:xfrm>
-          <a:prstGeom prst="rect">
-            <a:avLst/>
-          </a:prstGeom>
-          <a:noFill/>
-          <a:ln/>
-        </p:spPr>
-        <p:txBody>
-          <a:bodyPr wrap="square" lIns="0" tIns="0" rIns="0" bIns="0" rtlCol="0" anchor="t"/>
-          <a:lstStyle/>
-          <a:p>
-            <a:pPr indent="0" marL="0">
-              <a:buNone/>
-            </a:pPr>
-            <a:r>
-              <a:rPr lang="en-US" sz="1600" b="1" dirty="0">
-                <a:solidFill>
-                  <a:schemeClr val="accent5"/>
-                </a:solidFill>
-              </a:rPr>
-              <a:t>Décembre</a:t>
-            </a:r>
-            <a:endParaRPr lang="en-US" sz="1600" dirty="0"/>
-          </a:p>
-        </p:txBody>
-      </p:sp>
-      <p:sp>
-        <p:nvSpPr>
-          <p:cNvPr id="10" name="Décembre"/>
+          <p:cNvPr id="8" name="Humour en darija, format UGC"/>
           <p:cNvSpPr/>
           <p:nvPr/>
         </p:nvSpPr>
         <p:spPr>
           <a:xfrm>
-            <a:off x="3360420" y="1783080"/>
-            <a:ext cx="2606040" cy="4114800"/>
+            <a:off x="6195060" y="1417320"/>
+            <a:ext cx="5417820" cy="2057400"/>
           </a:xfrm>
           <a:prstGeom prst="roundRect">
             <a:avLst>
-              <a:gd name="adj" fmla="val 4211"/>
+              <a:gd name="adj" fmla="val 5333"/>
             </a:avLst>
           </a:prstGeom>
           <a:solidFill>
@@ -12595,14 +13958,14 @@
       </p:sp>
       <p:sp>
         <p:nvSpPr>
-          <p:cNvPr id="11" name="Pluie et fin d'année circle"/>
+          <p:cNvPr id="9" name="Humour en darija, format UGC circle"/>
           <p:cNvSpPr/>
           <p:nvPr/>
         </p:nvSpPr>
         <p:spPr>
           <a:xfrm>
-            <a:off x="3634740" y="2011680"/>
-            <a:ext cx="594360" cy="594360"/>
+            <a:off x="6469380" y="1691640"/>
+            <a:ext cx="548640" cy="548640"/>
           </a:xfrm>
           <a:prstGeom prst="ellipse">
             <a:avLst/>
@@ -12615,7 +13978,7 @@
       </p:sp>
       <p:pic>
         <p:nvPicPr>
-          <p:cNvPr id="12" name="Pluie et fin d'année icon" descr="Pluie et fin d'année">    </p:cNvPr>
+          <p:cNvPr id="10" name="Humour en darija, format UGC icon" descr="Humour en darija, format UGC">    </p:cNvPr>
           <p:cNvPicPr>
             <a:picLocks noChangeAspect="1"/>
           </p:cNvPicPr>
@@ -12629,8 +13992,8 @@
         </p:blipFill>
         <p:spPr>
           <a:xfrm>
-            <a:off x="3789274" y="2166214"/>
-            <a:ext cx="285293" cy="285293"/>
+            <a:off x="6612026" y="1834286"/>
+            <a:ext cx="263347" cy="263347"/>
           </a:xfrm>
           <a:prstGeom prst="rect">
             <a:avLst/>
@@ -12639,14 +14002,14 @@
       </p:pic>
       <p:sp>
         <p:nvSpPr>
-          <p:cNvPr id="13" name="Text 9"/>
+          <p:cNvPr id="11" name="Text 7"/>
           <p:cNvSpPr txBox="1"/>
           <p:nvPr/>
         </p:nvSpPr>
         <p:spPr>
           <a:xfrm>
-            <a:off x="3634740" y="2743200"/>
-            <a:ext cx="2103120" cy="685800"/>
+            <a:off x="7155180" y="1645920"/>
+            <a:ext cx="4229100" cy="640080"/>
           </a:xfrm>
           <a:prstGeom prst="rect">
             <a:avLst/>
@@ -12655,34 +14018,34 @@
           <a:ln/>
         </p:spPr>
         <p:txBody>
-          <a:bodyPr wrap="square" lIns="0" tIns="0" rIns="0" bIns="0" rtlCol="0" anchor="t"/>
+          <a:bodyPr wrap="square" lIns="0" tIns="0" rIns="0" bIns="0" rtlCol="0" anchor="ctr"/>
           <a:lstStyle/>
           <a:p>
             <a:pPr indent="0" marL="0">
               <a:buNone/>
             </a:pPr>
             <a:r>
-              <a:rPr lang="en-US" sz="1800" b="1" dirty="0">
+              <a:rPr lang="en-US" sz="1700" b="1" dirty="0">
                 <a:solidFill>
                   <a:schemeClr val="tx2"/>
                 </a:solidFill>
               </a:rPr>
-              <a:t>Pluie et fin d'année</a:t>
-            </a:r>
-            <a:endParaRPr lang="en-US" sz="1800" dirty="0"/>
-          </a:p>
-        </p:txBody>
-      </p:sp>
-      <p:sp>
-        <p:nvSpPr>
-          <p:cNvPr id="14" name="Text 10"/>
+              <a:t>Humour en darija, format UGC</a:t>
+            </a:r>
+            <a:endParaRPr lang="en-US" sz="1700" dirty="0"/>
+          </a:p>
+        </p:txBody>
+      </p:sp>
+      <p:sp>
+        <p:nvSpPr>
+          <p:cNvPr id="12" name="Text 8"/>
           <p:cNvSpPr txBox="1"/>
           <p:nvPr/>
         </p:nvSpPr>
         <p:spPr>
           <a:xfrm>
-            <a:off x="3634740" y="3474720"/>
-            <a:ext cx="2103120" cy="2286000"/>
+            <a:off x="6469380" y="2377440"/>
+            <a:ext cx="4869180" cy="960120"/>
           </a:xfrm>
           <a:prstGeom prst="rect">
             <a:avLst/>
@@ -12703,7 +14066,7 @@
                   <a:schemeClr val="tx1"/>
                 </a:solidFill>
               </a:rPr>
-              <a:t>Campagnes déclenchées par la météo (« Il pleut ? On livre »). Soirées du 31/12 : livraison tardive et courses.</a:t>
+              <a:t>Vidéos tournées au téléphone par des créateurs : la faim à minuit, le match entre amis, la pluie. Plus crédible qu'une pub studio.</a:t>
             </a:r>
             <a:endParaRPr lang="en-US" sz="1400" dirty="0"/>
           </a:p>
@@ -12711,54 +14074,18 @@
       </p:sp>
       <p:sp>
         <p:nvSpPr>
-          <p:cNvPr id="15" name="Text 11"/>
-          <p:cNvSpPr txBox="1"/>
-          <p:nvPr/>
-        </p:nvSpPr>
-        <p:spPr>
-          <a:xfrm>
-            <a:off x="6172200" y="1371600"/>
-            <a:ext cx="2606040" cy="365760"/>
-          </a:xfrm>
-          <a:prstGeom prst="rect">
-            <a:avLst/>
-          </a:prstGeom>
-          <a:noFill/>
-          <a:ln/>
-        </p:spPr>
-        <p:txBody>
-          <a:bodyPr wrap="square" lIns="0" tIns="0" rIns="0" bIns="0" rtlCol="0" anchor="t"/>
-          <a:lstStyle/>
-          <a:p>
-            <a:pPr indent="0" marL="0">
-              <a:buNone/>
-            </a:pPr>
-            <a:r>
-              <a:rPr lang="en-US" sz="1600" b="1" dirty="0">
-                <a:solidFill>
-                  <a:schemeClr val="accent5"/>
-                </a:solidFill>
-              </a:rPr>
-              <a:t>Janvier</a:t>
-            </a:r>
-            <a:endParaRPr lang="en-US" sz="1600" dirty="0"/>
-          </a:p>
-        </p:txBody>
-      </p:sp>
-      <p:sp>
-        <p:nvSpPr>
-          <p:cNvPr id="16" name="Janvier"/>
+          <p:cNvPr id="13" name="« Commandez pour vos proches »"/>
           <p:cNvSpPr/>
           <p:nvPr/>
         </p:nvSpPr>
         <p:spPr>
           <a:xfrm>
-            <a:off x="6172200" y="1783080"/>
-            <a:ext cx="2606040" cy="4114800"/>
+            <a:off x="548640" y="3703320"/>
+            <a:ext cx="5417820" cy="2057400"/>
           </a:xfrm>
           <a:prstGeom prst="roundRect">
             <a:avLst>
-              <a:gd name="adj" fmla="val 4211"/>
+              <a:gd name="adj" fmla="val 5333"/>
             </a:avLst>
           </a:prstGeom>
           <a:solidFill>
@@ -12769,14 +14096,14 @@
       </p:sp>
       <p:sp>
         <p:nvSpPr>
-          <p:cNvPr id="17" name="Rentrée et Yennayer circle"/>
+          <p:cNvPr id="14" name="« Commandez pour vos proches » circle"/>
           <p:cNvSpPr/>
           <p:nvPr/>
         </p:nvSpPr>
         <p:spPr>
           <a:xfrm>
-            <a:off x="6446520" y="2011680"/>
-            <a:ext cx="594360" cy="594360"/>
+            <a:off x="822960" y="3977640"/>
+            <a:ext cx="548640" cy="548640"/>
           </a:xfrm>
           <a:prstGeom prst="ellipse">
             <a:avLst/>
@@ -12789,7 +14116,7 @@
       </p:sp>
       <p:pic>
         <p:nvPicPr>
-          <p:cNvPr id="18" name="Rentrée et Yennayer icon" descr="Rentrée et Yennayer">    </p:cNvPr>
+          <p:cNvPr id="15" name="« Commandez pour vos proches » icon" descr="« Commandez pour vos proches »">    </p:cNvPr>
           <p:cNvPicPr>
             <a:picLocks noChangeAspect="1"/>
           </p:cNvPicPr>
@@ -12803,8 +14130,8 @@
         </p:blipFill>
         <p:spPr>
           <a:xfrm>
-            <a:off x="6601054" y="2166214"/>
-            <a:ext cx="285293" cy="285293"/>
+            <a:off x="965606" y="4120286"/>
+            <a:ext cx="263347" cy="263347"/>
           </a:xfrm>
           <a:prstGeom prst="rect">
             <a:avLst/>
@@ -12813,14 +14140,14 @@
       </p:pic>
       <p:sp>
         <p:nvSpPr>
-          <p:cNvPr id="19" name="Text 14"/>
+          <p:cNvPr id="16" name="Text 11"/>
           <p:cNvSpPr txBox="1"/>
           <p:nvPr/>
         </p:nvSpPr>
         <p:spPr>
           <a:xfrm>
-            <a:off x="6446520" y="2743200"/>
-            <a:ext cx="2103120" cy="685800"/>
+            <a:off x="1508760" y="3931920"/>
+            <a:ext cx="4229100" cy="640080"/>
           </a:xfrm>
           <a:prstGeom prst="rect">
             <a:avLst/>
@@ -12829,34 +14156,34 @@
           <a:ln/>
         </p:spPr>
         <p:txBody>
-          <a:bodyPr wrap="square" lIns="0" tIns="0" rIns="0" bIns="0" rtlCol="0" anchor="t"/>
+          <a:bodyPr wrap="square" lIns="0" tIns="0" rIns="0" bIns="0" rtlCol="0" anchor="ctr"/>
           <a:lstStyle/>
           <a:p>
             <a:pPr indent="0" marL="0">
               <a:buNone/>
             </a:pPr>
             <a:r>
-              <a:rPr lang="en-US" sz="1800" b="1" dirty="0">
+              <a:rPr lang="en-US" sz="1700" b="1" dirty="0">
                 <a:solidFill>
                   <a:schemeClr val="tx2"/>
                 </a:solidFill>
               </a:rPr>
-              <a:t>Rentrée et Yennayer</a:t>
-            </a:r>
-            <a:endParaRPr lang="en-US" sz="1800" dirty="0"/>
-          </a:p>
-        </p:txBody>
-      </p:sp>
-      <p:sp>
-        <p:nvSpPr>
-          <p:cNvPr id="20" name="Text 15"/>
+              <a:t>« Commandez pour vos proches »</a:t>
+            </a:r>
+            <a:endParaRPr lang="en-US" sz="1700" dirty="0"/>
+          </a:p>
+        </p:txBody>
+      </p:sp>
+      <p:sp>
+        <p:nvSpPr>
+          <p:cNvPr id="17" name="Text 12"/>
           <p:cNvSpPr txBox="1"/>
           <p:nvPr/>
         </p:nvSpPr>
         <p:spPr>
           <a:xfrm>
-            <a:off x="6446520" y="3474720"/>
-            <a:ext cx="2103120" cy="2286000"/>
+            <a:off x="822960" y="4663440"/>
+            <a:ext cx="4869180" cy="960120"/>
           </a:xfrm>
           <a:prstGeom prst="rect">
             <a:avLst/>
@@ -12877,7 +14204,7 @@
                   <a:schemeClr val="tx1"/>
                 </a:solidFill>
               </a:rPr>
-              <a:t>Bonnes résolutions : offres healthy. Nouvel An amazigh (14/01) : sélection de plats régionaux. Tournage des créatifs Ramadan.</a:t>
+              <a:t>Ciblage MRE en France, Belgique, Espagne, Italie : commander un repas ou une course pour la famille au Maroc. Angle peu exploité.</a:t>
             </a:r>
             <a:endParaRPr lang="en-US" sz="1400" dirty="0"/>
           </a:p>
@@ -12885,54 +14212,18 @@
       </p:sp>
       <p:sp>
         <p:nvSpPr>
-          <p:cNvPr id="21" name="Text 16"/>
-          <p:cNvSpPr txBox="1"/>
-          <p:nvPr/>
-        </p:nvSpPr>
-        <p:spPr>
-          <a:xfrm>
-            <a:off x="8983980" y="1371600"/>
-            <a:ext cx="2606040" cy="365760"/>
-          </a:xfrm>
-          <a:prstGeom prst="rect">
-            <a:avLst/>
-          </a:prstGeom>
-          <a:noFill/>
-          <a:ln/>
-        </p:spPr>
-        <p:txBody>
-          <a:bodyPr wrap="square" lIns="0" tIns="0" rIns="0" bIns="0" rtlCol="0" anchor="t"/>
-          <a:lstStyle/>
-          <a:p>
-            <a:pPr indent="0" marL="0">
-              <a:buNone/>
-            </a:pPr>
-            <a:r>
-              <a:rPr lang="en-US" sz="1600" b="1" dirty="0">
-                <a:solidFill>
-                  <a:schemeClr val="accent5"/>
-                </a:solidFill>
-              </a:rPr>
-              <a:t>Février</a:t>
-            </a:r>
-            <a:endParaRPr lang="en-US" sz="1600" dirty="0"/>
-          </a:p>
-        </p:txBody>
-      </p:sp>
-      <p:sp>
-        <p:nvSpPr>
-          <p:cNvPr id="22" name="Février"/>
+          <p:cNvPr id="18" name="Rapidité, sans promesse chiffrée"/>
           <p:cNvSpPr/>
           <p:nvPr/>
         </p:nvSpPr>
         <p:spPr>
           <a:xfrm>
-            <a:off x="8983980" y="1783080"/>
-            <a:ext cx="2606040" cy="4114800"/>
+            <a:off x="6195060" y="3703320"/>
+            <a:ext cx="5417820" cy="2057400"/>
           </a:xfrm>
           <a:prstGeom prst="roundRect">
             <a:avLst>
-              <a:gd name="adj" fmla="val 4211"/>
+              <a:gd name="adj" fmla="val 5333"/>
             </a:avLst>
           </a:prstGeom>
           <a:solidFill>
@@ -12943,27 +14234,27 @@
       </p:sp>
       <p:sp>
         <p:nvSpPr>
-          <p:cNvPr id="23" name="Ramadan (≈ 8-9/02) circle"/>
+          <p:cNvPr id="19" name="Rapidité, sans promesse chiffrée circle"/>
           <p:cNvSpPr/>
           <p:nvPr/>
         </p:nvSpPr>
         <p:spPr>
           <a:xfrm>
-            <a:off x="9258300" y="2011680"/>
-            <a:ext cx="594360" cy="594360"/>
+            <a:off x="6469380" y="3977640"/>
+            <a:ext cx="548640" cy="548640"/>
           </a:xfrm>
           <a:prstGeom prst="ellipse">
             <a:avLst/>
           </a:prstGeom>
           <a:solidFill>
-            <a:schemeClr val="accent4"/>
+            <a:schemeClr val="accent1"/>
           </a:solidFill>
           <a:ln/>
         </p:spPr>
       </p:sp>
       <p:pic>
         <p:nvPicPr>
-          <p:cNvPr id="24" name="Ramadan (≈ 8-9/02) icon" descr="Ramadan (≈ 8-9/02)">    </p:cNvPr>
+          <p:cNvPr id="20" name="Rapidité, sans promesse chiffrée icon" descr="Rapidité, sans promesse chiffrée">    </p:cNvPr>
           <p:cNvPicPr>
             <a:picLocks noChangeAspect="1"/>
           </p:cNvPicPr>
@@ -12977,8 +14268,8 @@
         </p:blipFill>
         <p:spPr>
           <a:xfrm>
-            <a:off x="9412834" y="2166214"/>
-            <a:ext cx="285293" cy="285293"/>
+            <a:off x="6612026" y="4120286"/>
+            <a:ext cx="263347" cy="263347"/>
           </a:xfrm>
           <a:prstGeom prst="rect">
             <a:avLst/>
@@ -12987,14 +14278,14 @@
       </p:pic>
       <p:sp>
         <p:nvSpPr>
-          <p:cNvPr id="25" name="Text 19"/>
+          <p:cNvPr id="21" name="Text 15"/>
           <p:cNvSpPr txBox="1"/>
           <p:nvPr/>
         </p:nvSpPr>
         <p:spPr>
           <a:xfrm>
-            <a:off x="9258300" y="2743200"/>
-            <a:ext cx="2103120" cy="685800"/>
+            <a:off x="7155180" y="3931920"/>
+            <a:ext cx="4229100" cy="640080"/>
           </a:xfrm>
           <a:prstGeom prst="rect">
             <a:avLst/>
@@ -13003,34 +14294,34 @@
           <a:ln/>
         </p:spPr>
         <p:txBody>
-          <a:bodyPr wrap="square" lIns="0" tIns="0" rIns="0" bIns="0" rtlCol="0" anchor="t"/>
+          <a:bodyPr wrap="square" lIns="0" tIns="0" rIns="0" bIns="0" rtlCol="0" anchor="ctr"/>
           <a:lstStyle/>
           <a:p>
             <a:pPr indent="0" marL="0">
               <a:buNone/>
             </a:pPr>
             <a:r>
-              <a:rPr lang="en-US" sz="1800" b="1" dirty="0">
+              <a:rPr lang="en-US" sz="1700" b="1" dirty="0">
                 <a:solidFill>
                   <a:schemeClr val="tx2"/>
                 </a:solidFill>
               </a:rPr>
-              <a:t>Ramadan (≈ 8-9/02)</a:t>
-            </a:r>
-            <a:endParaRPr lang="en-US" sz="1800" dirty="0"/>
-          </a:p>
-        </p:txBody>
-      </p:sp>
-      <p:sp>
-        <p:nvSpPr>
-          <p:cNvPr id="26" name="Text 20"/>
+              <a:t>Rapidité, sans promesse chiffrée</a:t>
+            </a:r>
+            <a:endParaRPr lang="en-US" sz="1700" dirty="0"/>
+          </a:p>
+        </p:txBody>
+      </p:sp>
+      <p:sp>
+        <p:nvSpPr>
+          <p:cNvPr id="22" name="Text 16"/>
           <p:cNvSpPr txBox="1"/>
           <p:nvPr/>
         </p:nvSpPr>
         <p:spPr>
           <a:xfrm>
-            <a:off x="9258300" y="3474720"/>
-            <a:ext cx="2103120" cy="2286000"/>
+            <a:off x="6469380" y="4663440"/>
+            <a:ext cx="4869180" cy="960120"/>
           </a:xfrm>
           <a:prstGeom prst="rect">
             <a:avLst/>
@@ -13051,7 +14342,7 @@
                   <a:schemeClr val="tx1"/>
                 </a:solidFill>
               </a:rPr>
-              <a:t>Le temps fort de l'année : ftour et shour livrés, courses avant la rupture du jeûne. Campagnes prêtes dès fin janvier.</a:t>
+              <a:t>« Livré pendant que vous mettez la table » plutôt que « en 35 minutes », tant que la promesse n'est pas sourcée.</a:t>
             </a:r>
             <a:endParaRPr lang="en-US" sz="1400" dirty="0"/>
           </a:p>
@@ -13059,14 +14350,14 @@
       </p:sp>
       <p:sp>
         <p:nvSpPr>
-          <p:cNvPr id="27" name="Text 21"/>
+          <p:cNvPr id="23" name="Text 17"/>
           <p:cNvSpPr txBox="1"/>
           <p:nvPr/>
         </p:nvSpPr>
         <p:spPr>
           <a:xfrm>
-            <a:off x="548640" y="6035040"/>
-            <a:ext cx="11064240" cy="274320"/>
+            <a:off x="548640" y="5852160"/>
+            <a:ext cx="11064240" cy="411480"/>
           </a:xfrm>
           <a:prstGeom prst="rect">
             <a:avLst/>
@@ -13082,14 +14373,25 @@
               <a:buNone/>
             </a:pPr>
             <a:r>
-              <a:rPr lang="en-US" sz="1100" dirty="0">
-                <a:solidFill>
-                  <a:schemeClr val="accent5"/>
+              <a:rPr lang="en-US" sz="1500" b="1" dirty="0">
+                <a:solidFill>
+                  <a:schemeClr val="accent1"/>
                 </a:solidFill>
               </a:rPr>
-              <a:t>Date de début du Ramadan 1448 estimée : à confirmer selon l'annonce officielle au Maroc.</a:t>
-            </a:r>
-            <a:endParaRPr lang="en-US" sz="1100" dirty="0"/>
+              <a:t>Règle de test : </a:t>
+            </a:r>
+            <a:pPr indent="0" marL="0">
+              <a:buNone/>
+            </a:pPr>
+            <a:r>
+              <a:rPr lang="en-US" sz="1500" dirty="0">
+                <a:solidFill>
+                  <a:schemeClr val="tx1"/>
+                </a:solidFill>
+              </a:rPr>
+              <a:t>3 accroches par angle, renouvelées toutes les 2 semaines. Couper une pub après un budget de test sans première commande.</a:t>
+            </a:r>
+            <a:endParaRPr lang="en-US" sz="1500" dirty="0"/>
           </a:p>
         </p:txBody>
       </p:sp>

--- a/yassir-maroc/Yassir_Maroc_Plan_Marketing_Nov2026-Fev2027.pptx
+++ b/yassir-maroc/Yassir_Maroc_Plan_Marketing_Nov2026-Fev2027.pptx
@@ -20,9 +20,10 @@
     <p:sldId id="268" r:id="rId14"/>
     <p:sldId id="269" r:id="rId15"/>
     <p:sldId id="270" r:id="rId16"/>
+    <p:sldId id="271" r:id="rId17"/>
   </p:sldIdLst>
   <p:notesMasterIdLst>
-    <p:notesMasterId r:id="rId17"/>
+    <p:notesMasterId r:id="rId18"/>
   </p:notesMasterIdLst>
   <p:sldSz cx="12192000" cy="6858000"/>
   <p:notesSz cx="6858000" cy="12192000"/>
@@ -121,43 +122,44 @@
   <p:extLst>
     <p:ext uri="{521415D9-36F7-43E2-AB2F-B90AF26B5E84}">
       <p14:sectionLst xmlns:p14="http://schemas.microsoft.com/office/powerpoint/2010/main">
-        <p14:section name="Cadrage" id="{2950e990-0d63-0cb0-807a-91e39884a018}">
+        <p14:section name="Cadrage" id="{881956c2-f76a-93a9-9889-b2830945b15d}">
           <p14:sldIdLst>
             <p14:sldId id="256"/>
             <p14:sldId id="257"/>
             <p14:sldId id="258"/>
           </p14:sldIdLst>
         </p14:section>
-        <p14:section name="SEO par le marketing" id="{17aad2a4-3c7c-002d-d3a9-7ed05a755d33}">
+        <p14:section name="SEO par le marketing" id="{74e8a250-f8bc-db7e-42a2-2277f76bb427}">
           <p14:sldIdLst>
             <p14:sldId id="259"/>
             <p14:sldId id="260"/>
             <p14:sldId id="261"/>
           </p14:sldIdLst>
         </p14:section>
-        <p14:section name="Campagnes ads" id="{4126a110-6a6e-0a9f-3d58-85ff3a960dde}">
+        <p14:section name="Campagnes ads" id="{94321f08-8541-bdc1-1e6d-7578012941fa}">
           <p14:sldIdLst>
             <p14:sldId id="262"/>
             <p14:sldId id="263"/>
             <p14:sldId id="264"/>
           </p14:sldIdLst>
         </p14:section>
-        <p14:section name="Calendrier" id="{6ca3d49c-3e2d-67b1-7c1e-f0ce15e962f6}">
+        <p14:section name="Calendrier" id="{aebf9ca3-6284-7753-3b25-531f12a821c1}">
           <p14:sldIdLst>
             <p14:sldId id="265"/>
+            <p14:sldId id="266"/>
           </p14:sldIdLst>
         </p14:section>
-        <p14:section name="CRM et influence" id="{19220b3a-3ef9-afe3-d23f-9e6baf437b5a}">
+        <p14:section name="CRM et influence" id="{2a295b4d-8a1f-6d35-3ea6-067b9e5648b1}">
           <p14:sldIdLst>
-            <p14:sldId id="266"/>
             <p14:sldId id="267"/>
+            <p14:sldId id="268"/>
           </p14:sldIdLst>
         </p14:section>
-        <p14:section name="Plan d'action" id="{228f798f-29fb-6e1b-bbcd-fb45cd320366}">
+        <p14:section name="Plan d'action" id="{91cfd7c0-1979-d1e7-b77d-132b83e7aad0}">
           <p14:sldIdLst>
-            <p14:sldId id="268"/>
             <p14:sldId id="269"/>
             <p14:sldId id="270"/>
+            <p14:sldId id="271"/>
           </p14:sldIdLst>
         </p14:section>
       </p14:sectionLst>
@@ -250,7 +252,7 @@
             <c:bubble3D val="0"/>
             <c:spPr>
               <a:solidFill>
-                <a:srgbClr val="B86E00"/>
+                <a:srgbClr val="C62F2F"/>
               </a:solidFill>
               <a:effectLst/>
             </c:spPr>
@@ -260,7 +262,7 @@
             <c:bubble3D val="0"/>
             <c:spPr>
               <a:solidFill>
-                <a:srgbClr val="2B0F66"/>
+                <a:srgbClr val="B86E00"/>
               </a:solidFill>
               <a:effectLst/>
             </c:spPr>
@@ -277,6 +279,16 @@
           </c:dPt>
           <c:dPt>
             <c:idx val="4"/>
+            <c:bubble3D val="0"/>
+            <c:spPr>
+              <a:solidFill>
+                <a:srgbClr val="2B0F66"/>
+              </a:solidFill>
+              <a:effectLst/>
+            </c:spPr>
+          </c:dPt>
+          <c:dPt>
+            <c:idx val="5"/>
             <c:bubble3D val="0"/>
             <c:spPr>
               <a:solidFill>
@@ -388,6 +400,31 @@
             </c:dLbl>
             <c:dLbl>
               <c:idx val="4"/>
+              <c:numFmt formatCode="0%" sourceLinked="0"/>
+              <c:spPr/>
+              <c:txPr>
+                <a:bodyPr/>
+                <a:lstStyle/>
+                <a:p>
+                  <a:pPr>
+                    <a:defRPr sz="1200" b="0" i="0" u="none" strike="noStrike">
+                      <a:solidFill>
+                        <a:srgbClr val="FFFFFF"/>
+                      </a:solidFill>
+                      <a:latin typeface="+mn-lt"/>
+                    </a:defRPr>
+                  </a:pPr>
+                </a:p>
+              </c:txPr>
+              <c:showLegendKey val="0"/>
+              <c:showVal val="0"/>
+              <c:showCatName val="0"/>
+              <c:showSerName val="0"/>
+              <c:showPercent val="1"/>
+              <c:showBubbleSize val="0"/>
+            </c:dLbl>
+            <c:dLbl>
+              <c:idx val="5"/>
               <c:numFmt formatCode="0%" sourceLinked="0"/>
               <c:spPr/>
               <c:txPr>
@@ -436,22 +473,25 @@
           </c:dLbls>
           <c:cat>
             <c:strRef>
-              <c:f>Sheet1!$A$2:$A$6</c:f>
+              <c:f>Sheet1!$A$2:$A$7</c:f>
               <c:strCache>
-                <c:ptCount val="5"/>
+                <c:ptCount val="6"/>
                 <c:pt idx="0">
-                  <c:v>Ads : 130 000</c:v>
+                  <c:v>Média ads : 90 000</c:v>
                 </c:pt>
                 <c:pt idx="1">
-                  <c:v>Influence : 30 000</c:v>
+                  <c:v>Codes bienvenue : 50 000</c:v>
                 </c:pt>
                 <c:pt idx="2">
-                  <c:v>Contenu et RP : 20 000</c:v>
+                  <c:v>Influence : 25 000</c:v>
                 </c:pt>
                 <c:pt idx="3">
-                  <c:v>CRM : 15 000</c:v>
+                  <c:v>CRM : 20 000</c:v>
                 </c:pt>
                 <c:pt idx="4">
+                  <c:v>Contenu et RP : 10 000</c:v>
+                </c:pt>
+                <c:pt idx="5">
                   <c:v>Réserve : 5 000</c:v>
                 </c:pt>
               </c:strCache>
@@ -459,22 +499,25 @@
           </c:cat>
           <c:val>
             <c:numRef>
-              <c:f>Sheet1!$B$2:$B$6</c:f>
+              <c:f>Sheet1!$B$2:$B$7</c:f>
               <c:numCache>
-                <c:ptCount val="5"/>
+                <c:ptCount val="6"/>
                 <c:pt idx="0">
-                  <c:v>130000</c:v>
+                  <c:v>90000</c:v>
                 </c:pt>
                 <c:pt idx="1">
-                  <c:v>30000</c:v>
+                  <c:v>50000</c:v>
                 </c:pt>
                 <c:pt idx="2">
+                  <c:v>25000</c:v>
+                </c:pt>
+                <c:pt idx="3">
                   <c:v>20000</c:v>
                 </c:pt>
-                <c:pt idx="3">
-                  <c:v>15000</c:v>
+                <c:pt idx="4">
+                  <c:v>10000</c:v>
                 </c:pt>
-                <c:pt idx="4">
+                <c:pt idx="5">
                   <c:v>5000</c:v>
                 </c:pt>
               </c:numCache>
@@ -1363,7 +1406,7 @@
           <a:p>
             <a:r>
               <a:rPr lang="en-US" dirty="0"/>
-              <a:t>Sans rétention, chaque dirham d'acquisition est perdu au bout d'un mois. Le groupe témoin permet de prouver que la relance rapporte vraiment.</a:t>
+              <a:t>Le pic Black Friday reçoit la moitié du budget de novembre. Pour le Ramadan, la moitié du budget de février va aux deux premières semaines, quand les habitudes se forment.</a:t>
             </a:r>
             <a:endParaRPr lang="en-US" dirty="0"/>
           </a:p>
@@ -1451,7 +1494,7 @@
           <a:p>
             <a:r>
               <a:rPr lang="en-US" dirty="0"/>
-              <a:t>Le code promo par créateur est indispensable : sans lui, impossible de savoir quel influenceur rapporte des commandes.</a:t>
+              <a:t>Sans rétention, chaque dirham d'acquisition est perdu au bout d'un mois. Le groupe témoin permet de prouver que la relance rapporte vraiment.</a:t>
             </a:r>
             <a:endParaRPr lang="en-US" dirty="0"/>
           </a:p>
@@ -1539,7 +1582,7 @@
           <a:p>
             <a:r>
               <a:rPr lang="en-US" dirty="0"/>
-              <a:t>Chaque phase se termine par une décision : ce qui marche reçoit plus de budget, ce qui ne marche pas est coupé.</a:t>
+              <a:t>Le code promo par créateur est indispensable : sans lui, impossible de savoir quel influenceur rapporte des commandes.</a:t>
             </a:r>
             <a:endParaRPr lang="en-US" dirty="0"/>
           </a:p>
@@ -1627,7 +1670,7 @@
           <a:p>
             <a:r>
               <a:rPr lang="en-US" dirty="0"/>
-              <a:t>Novembre inclut Black Friday ; février concentre le Ramadan. Le budget doit pouvoir passer d'une plateforme à l'autre chaque semaine selon le coût par première commande.</a:t>
+              <a:t>Chaque phase se termine par une décision : ce qui marche reçoit plus de budget, ce qui ne marche pas est coupé.</a:t>
             </a:r>
             <a:endParaRPr lang="en-US" dirty="0"/>
           </a:p>
@@ -1715,7 +1758,7 @@
           <a:p>
             <a:r>
               <a:rPr lang="en-US" dirty="0"/>
-              <a:t>Le budget est fixé ; il reste le coût cible, le financement des promos et la couverture de mars. La mesure de référence doit démarrer cette semaine, avant Black Friday.</a:t>
+              <a:t>Novembre inclut Black Friday ; février concentre le Ramadan. Le budget doit pouvoir passer d'une plateforme à l'autre chaque semaine selon le coût par première commande.</a:t>
             </a:r>
             <a:endParaRPr lang="en-US" dirty="0"/>
           </a:p>
@@ -1739,6 +1782,94 @@
             <a:fld id="{F7021451-1387-4CA6-816F-3879F97B5CBC}" type="slidenum">
               <a:rPr lang="en-US"/>
               <a:t>15</a:t>
+            </a:fld>
+            <a:endParaRPr lang="en-US"/>
+          </a:p>
+        </p:txBody>
+      </p:sp>
+    </p:spTree>
+    <p:extLst>
+      <p:ext uri="{BB962C8B-B14F-4D97-AF65-F5344CB8AC3E}">
+        <p14:creationId xmlns:p14="http://schemas.microsoft.com/office/powerpoint/2010/main" val="1024086991"/>
+      </p:ext>
+    </p:extLst>
+  </p:cSld>
+  <p:clrMapOvr>
+    <a:masterClrMapping/>
+  </p:clrMapOvr>
+</p:notes>
+</file>
+
+<file path=ppt/notesSlides/notesSlide16.xml><?xml version="1.0" encoding="utf-8"?>
+<p:notes xmlns:a="http://schemas.openxmlformats.org/drawingml/2006/main" xmlns:r="http://schemas.openxmlformats.org/officeDocument/2006/relationships" xmlns:p="http://schemas.openxmlformats.org/presentationml/2006/main">
+  <p:cSld>
+    <p:spTree>
+      <p:nvGrpSpPr>
+        <p:cNvPr id="1" name=""/>
+        <p:cNvGrpSpPr/>
+        <p:nvPr/>
+      </p:nvGrpSpPr>
+      <p:grpSpPr>
+        <a:xfrm>
+          <a:off x="0" y="0"/>
+          <a:ext cx="0" cy="0"/>
+          <a:chOff x="0" y="0"/>
+          <a:chExt cx="0" cy="0"/>
+        </a:xfrm>
+      </p:grpSpPr>
+      <p:sp>
+        <p:nvSpPr>
+          <p:cNvPr id="2" name="Slide Image Placeholder 1"/>
+          <p:cNvSpPr>
+            <a:spLocks noGrp="1" noRot="1" noChangeAspect="1"/>
+          </p:cNvSpPr>
+          <p:nvPr>
+            <p:ph type="sldImg"/>
+          </p:nvPr>
+        </p:nvSpPr>
+        <p:spPr/>
+      </p:sp>
+      <p:sp>
+        <p:nvSpPr>
+          <p:cNvPr id="3" name="Notes Placeholder 2"/>
+          <p:cNvSpPr>
+            <a:spLocks noGrp="1"/>
+          </p:cNvSpPr>
+          <p:nvPr>
+            <p:ph type="body" idx="1"/>
+          </p:nvPr>
+        </p:nvSpPr>
+        <p:spPr/>
+        <p:txBody>
+          <a:bodyPr/>
+          <a:lstStyle/>
+          <a:p>
+            <a:r>
+              <a:rPr lang="en-US" dirty="0"/>
+              <a:t>Budget et coût cible fixés. Il reste le montant du code, le cofinancement des promos et la couverture de mars. Les tournages Black Friday doivent commencer début novembre.</a:t>
+            </a:r>
+            <a:endParaRPr lang="en-US" dirty="0"/>
+          </a:p>
+        </p:txBody>
+      </p:sp>
+      <p:sp>
+        <p:nvSpPr>
+          <p:cNvPr id="4" name="Slide Number Placeholder 3"/>
+          <p:cNvSpPr>
+            <a:spLocks noGrp="1"/>
+          </p:cNvSpPr>
+          <p:nvPr>
+            <p:ph type="sldNum" sz="quarter" idx="10"/>
+          </p:nvPr>
+        </p:nvSpPr>
+        <p:spPr/>
+        <p:txBody>
+          <a:bodyPr/>
+          <a:lstStyle/>
+          <a:p>
+            <a:fld id="{F7021451-1387-4CA6-816F-3879F97B5CBC}" type="slidenum">
+              <a:rPr lang="en-US"/>
+              <a:t>16</a:t>
             </a:fld>
             <a:endParaRPr lang="en-US"/>
           </a:p>
@@ -2243,7 +2374,7 @@
           <a:p>
             <a:r>
               <a:rPr lang="en-US" dirty="0"/>
-              <a:t>Optimiser sur la première commande, pas sur l'installation. Avec ce budget, mieux vaut 3 plateformes bien alimentées que 6 sous-alimentées : chaque ensemble de pubs a besoin d'un volume minimum de conversions par semaine pour sortir de la phase d'apprentissage.</a:t>
+              <a:t>Avec 90 000 DH de média, Meta peut nourrir un seul ensemble de pubs optimisé sur la 1re commande. TikTok démarre sur l'inscription, un événement plus fréquent, puis bascule sur la 1re commande quand le volume le permet.</a:t>
             </a:r>
             <a:endParaRPr lang="en-US" dirty="0"/>
           </a:p>
@@ -2331,7 +2462,7 @@
           <a:p>
             <a:r>
               <a:rPr lang="en-US" dirty="0"/>
-              <a:t>Le tableau sert à cadrer les attentes : selon le coût réel par première commande, le même budget donne entre 1 300 et 3 250 nouveaux clients. C'est la rétention de ces clients qui décidera de la rentabilité.</a:t>
+              <a:t>Le coût cible de 80 DH inclut le code de bienvenue puisque les promos sont dans le budget. Le partage 50/30 est une proposition : on peut jouer sur le montant du code pour garder les ads dans le cadre.</a:t>
             </a:r>
             <a:endParaRPr lang="en-US" dirty="0"/>
           </a:p>
@@ -3471,7 +3602,7 @@
                   <a:schemeClr val="tx1"/>
                 </a:solidFill>
               </a:rPr>
-              <a:t>« Yassir Friday » : une semaine d'offres Food et Market autour du 27/11. Longs week-ends : offres génériques, sans thème national.</a:t>
+              <a:t>« Yassir Friday » : une semaine d'offres Food et Market autour du 27/11, cofinancées par les restaurants. Longs week-ends : offres génériques, sans thème national.</a:t>
             </a:r>
             <a:endParaRPr lang="en-US" sz="1400" dirty="0"/>
           </a:p>
@@ -4140,7 +4271,7 @@
                 <a:ea typeface="Arial" pitchFamily="34" charset="-122"/>
                 <a:cs typeface="Arial" pitchFamily="34" charset="-120"/>
               </a:rPr>
-              <a:t>CRM : faire revenir les clients</a:t>
+              <a:t>Black Friday et Ramadan, semaine par semaine</a:t>
             </a:r>
             <a:endParaRPr lang="en-US" sz="3600" dirty="0"/>
           </a:p>
@@ -4148,49 +4279,27 @@
       </p:sp>
       <p:sp>
         <p:nvSpPr>
-          <p:cNvPr id="3" name="Parrainage"/>
+          <p:cNvPr id="3" name="Black Friday (novembre : 50 000 DH) circle"/>
           <p:cNvSpPr/>
           <p:nvPr/>
         </p:nvSpPr>
         <p:spPr>
           <a:xfrm>
-            <a:off x="548640" y="1417320"/>
-            <a:ext cx="5417820" cy="2194560"/>
-          </a:xfrm>
-          <a:prstGeom prst="roundRect">
-            <a:avLst>
-              <a:gd name="adj" fmla="val 5000"/>
-            </a:avLst>
+            <a:off x="548640" y="1371600"/>
+            <a:ext cx="502920" cy="502920"/>
+          </a:xfrm>
+          <a:prstGeom prst="ellipse">
+            <a:avLst/>
           </a:prstGeom>
           <a:solidFill>
-            <a:schemeClr val="bg2"/>
-          </a:solidFill>
-          <a:ln/>
-        </p:spPr>
-      </p:sp>
-      <p:sp>
-        <p:nvSpPr>
-          <p:cNvPr id="4" name="Parrainage circle"/>
-          <p:cNvSpPr/>
-          <p:nvPr/>
-        </p:nvSpPr>
-        <p:spPr>
-          <a:xfrm>
-            <a:off x="822960" y="1691640"/>
-            <a:ext cx="548640" cy="548640"/>
-          </a:xfrm>
-          <a:prstGeom prst="ellipse">
-            <a:avLst/>
-          </a:prstGeom>
-          <a:solidFill>
-            <a:schemeClr val="accent2"/>
+            <a:schemeClr val="accent1"/>
           </a:solidFill>
           <a:ln/>
         </p:spPr>
       </p:sp>
       <p:pic>
         <p:nvPicPr>
-          <p:cNvPr id="5" name="Parrainage icon" descr="Parrainage">    </p:cNvPr>
+          <p:cNvPr id="4" name="Black Friday (novembre : 50 000 DH) icon" descr="Black Friday (novembre : 50 000 DH)">    </p:cNvPr>
           <p:cNvPicPr>
             <a:picLocks noChangeAspect="1"/>
           </p:cNvPicPr>
@@ -4204,8 +4313,8 @@
         </p:blipFill>
         <p:spPr>
           <a:xfrm>
-            <a:off x="965606" y="1834286"/>
-            <a:ext cx="263347" cy="263347"/>
+            <a:off x="679399" y="1502359"/>
+            <a:ext cx="241402" cy="241402"/>
           </a:xfrm>
           <a:prstGeom prst="rect">
             <a:avLst/>
@@ -4214,14 +4323,14 @@
       </p:pic>
       <p:sp>
         <p:nvSpPr>
-          <p:cNvPr id="6" name="Text 3"/>
+          <p:cNvPr id="5" name="Text 2"/>
           <p:cNvSpPr txBox="1"/>
           <p:nvPr/>
         </p:nvSpPr>
         <p:spPr>
           <a:xfrm>
-            <a:off x="1508760" y="1645920"/>
-            <a:ext cx="4229100" cy="640080"/>
+            <a:off x="1188720" y="1371600"/>
+            <a:ext cx="4663440" cy="502920"/>
           </a:xfrm>
           <a:prstGeom prst="rect">
             <a:avLst/>
@@ -4237,98 +4346,960 @@
               <a:buNone/>
             </a:pPr>
             <a:r>
-              <a:rPr lang="en-US" sz="1700" b="1" dirty="0">
+              <a:rPr lang="en-US" sz="1800" b="1" dirty="0">
                 <a:solidFill>
                   <a:schemeClr val="tx2"/>
                 </a:solidFill>
               </a:rPr>
-              <a:t>Parrainage</a:t>
+              <a:t>Black Friday (novembre : 50 000 DH)</a:t>
             </a:r>
-            <a:endParaRPr lang="en-US" sz="1700" dirty="0"/>
-          </a:p>
-        </p:txBody>
-      </p:sp>
-      <p:sp>
-        <p:nvSpPr>
-          <p:cNvPr id="7" name="Text 4"/>
-          <p:cNvSpPr txBox="1"/>
-          <p:nvPr/>
-        </p:nvSpPr>
-        <p:spPr>
-          <a:xfrm>
-            <a:off x="822960" y="2377440"/>
-            <a:ext cx="4869180" cy="1097280"/>
-          </a:xfrm>
-          <a:prstGeom prst="rect">
-            <a:avLst/>
-          </a:prstGeom>
-          <a:noFill/>
-          <a:ln/>
-        </p:spPr>
-        <p:txBody>
-          <a:bodyPr wrap="square" lIns="0" tIns="0" rIns="0" bIns="0" rtlCol="0" anchor="t"/>
-          <a:lstStyle/>
-          <a:p>
-            <a:pPr indent="0" marL="0">
-              <a:buNone/>
-            </a:pPr>
-            <a:r>
-              <a:rPr lang="en-US" sz="1400" dirty="0">
-                <a:solidFill>
-                  <a:schemeClr val="tx1"/>
-                </a:solidFill>
-              </a:rPr>
-              <a:t>Un code par client : une réduction pour le parrain et pour le filleul. Le canal d'acquisition le moins cher à mettre en place.</a:t>
-            </a:r>
-            <a:endParaRPr lang="en-US" sz="1400" dirty="0"/>
-          </a:p>
-        </p:txBody>
-      </p:sp>
-      <p:sp>
-        <p:nvSpPr>
-          <p:cNvPr id="8" name="Relance des inactifs"/>
+            <a:endParaRPr lang="en-US" sz="1800" dirty="0"/>
+          </a:p>
+        </p:txBody>
+      </p:sp>
+      <p:graphicFrame>
+        <p:nvGraphicFramePr>
+          <p:cNvPr id="12" name="Table 0"/>
+          <p:cNvGraphicFramePr>
+            <a:graphicFrameLocks noGrp="1"/>
+          </p:cNvGraphicFramePr>
+          <p:nvPr>
+            <p:extLst>
+              <p:ext uri="{D42A27DB-BD31-4B8C-83A1-F6EECF244321}">
+                <p14:modId xmlns:p14="http://schemas.microsoft.com/office/powerpoint/2010/main" val="1579011935"/>
+              </p:ext>
+            </p:extLst>
+          </p:nvPr>
+        </p:nvGraphicFramePr>
+        <p:xfrm>
+          <a:off x="548640" y="2011680"/>
+          <a:ext cx="5394960" cy="914400"/>
+        </p:xfrm>
+        <a:graphic>
+          <a:graphicData uri="http://schemas.openxmlformats.org/drawingml/2006/table">
+            <a:tbl>
+              <a:tblPr/>
+              <a:tblGrid>
+                <a:gridCol w="1417320"/>
+                <a:gridCol w="2880360"/>
+                <a:gridCol w="1097280"/>
+              </a:tblGrid>
+              <a:tr h="566928">
+                <a:tc>
+                  <a:txBody>
+                    <a:bodyPr/>
+                    <a:lstStyle/>
+                    <a:p>
+                      <a:pPr indent="0" marL="0">
+                        <a:buNone/>
+                      </a:pPr>
+                      <a:r>
+                        <a:rPr lang="en-US" sz="1300" b="1" dirty="0">
+                          <a:solidFill>
+                            <a:schemeClr val="bg1"/>
+                          </a:solidFill>
+                        </a:rPr>
+                        <a:t>Période</a:t>
+                      </a:r>
+                      <a:endParaRPr lang="en-US" sz="1300" dirty="0"/>
+                    </a:p>
+                  </a:txBody>
+                  <a:tcPr marL="73152" marR="73152" marT="0" marB="0" anchor="ctr">
+                    <a:lnL w="9525" cap="flat" cmpd="sng" algn="ctr">
+                      <a:solidFill>
+                        <a:srgbClr val="C9B8F5"/>
+                      </a:solidFill>
+                      <a:prstDash val="solid"/>
+                      <a:round/>
+                      <a:headEnd type="none" w="med" len="med"/>
+                      <a:tailEnd type="none" w="med" len="med"/>
+                    </a:lnL>
+                    <a:lnR w="9525" cap="flat" cmpd="sng" algn="ctr">
+                      <a:solidFill>
+                        <a:srgbClr val="C9B8F5"/>
+                      </a:solidFill>
+                      <a:prstDash val="solid"/>
+                      <a:round/>
+                      <a:headEnd type="none" w="med" len="med"/>
+                      <a:tailEnd type="none" w="med" len="med"/>
+                    </a:lnR>
+                    <a:lnT w="9525" cap="flat" cmpd="sng" algn="ctr">
+                      <a:solidFill>
+                        <a:srgbClr val="C9B8F5"/>
+                      </a:solidFill>
+                      <a:prstDash val="solid"/>
+                      <a:round/>
+                      <a:headEnd type="none" w="med" len="med"/>
+                      <a:tailEnd type="none" w="med" len="med"/>
+                    </a:lnT>
+                    <a:lnB w="9525" cap="flat" cmpd="sng" algn="ctr">
+                      <a:solidFill>
+                        <a:srgbClr val="C9B8F5"/>
+                      </a:solidFill>
+                      <a:prstDash val="solid"/>
+                      <a:round/>
+                      <a:headEnd type="none" w="med" len="med"/>
+                      <a:tailEnd type="none" w="med" len="med"/>
+                    </a:lnB>
+                    <a:solidFill>
+                      <a:schemeClr val="tx2"/>
+                    </a:solidFill>
+                  </a:tcPr>
+                </a:tc>
+                <a:tc>
+                  <a:txBody>
+                    <a:bodyPr/>
+                    <a:lstStyle/>
+                    <a:p>
+                      <a:pPr indent="0" marL="0">
+                        <a:buNone/>
+                      </a:pPr>
+                      <a:r>
+                        <a:rPr lang="en-US" sz="1300" b="1" dirty="0">
+                          <a:solidFill>
+                            <a:schemeClr val="bg1"/>
+                          </a:solidFill>
+                        </a:rPr>
+                        <a:t>Action</a:t>
+                      </a:r>
+                      <a:endParaRPr lang="en-US" sz="1300" dirty="0"/>
+                    </a:p>
+                  </a:txBody>
+                  <a:tcPr marL="73152" marR="73152" marT="0" marB="0" anchor="ctr">
+                    <a:lnL w="9525" cap="flat" cmpd="sng" algn="ctr">
+                      <a:solidFill>
+                        <a:srgbClr val="C9B8F5"/>
+                      </a:solidFill>
+                      <a:prstDash val="solid"/>
+                      <a:round/>
+                      <a:headEnd type="none" w="med" len="med"/>
+                      <a:tailEnd type="none" w="med" len="med"/>
+                    </a:lnL>
+                    <a:lnR w="9525" cap="flat" cmpd="sng" algn="ctr">
+                      <a:solidFill>
+                        <a:srgbClr val="C9B8F5"/>
+                      </a:solidFill>
+                      <a:prstDash val="solid"/>
+                      <a:round/>
+                      <a:headEnd type="none" w="med" len="med"/>
+                      <a:tailEnd type="none" w="med" len="med"/>
+                    </a:lnR>
+                    <a:lnT w="9525" cap="flat" cmpd="sng" algn="ctr">
+                      <a:solidFill>
+                        <a:srgbClr val="C9B8F5"/>
+                      </a:solidFill>
+                      <a:prstDash val="solid"/>
+                      <a:round/>
+                      <a:headEnd type="none" w="med" len="med"/>
+                      <a:tailEnd type="none" w="med" len="med"/>
+                    </a:lnT>
+                    <a:lnB w="9525" cap="flat" cmpd="sng" algn="ctr">
+                      <a:solidFill>
+                        <a:srgbClr val="C9B8F5"/>
+                      </a:solidFill>
+                      <a:prstDash val="solid"/>
+                      <a:round/>
+                      <a:headEnd type="none" w="med" len="med"/>
+                      <a:tailEnd type="none" w="med" len="med"/>
+                    </a:lnB>
+                    <a:solidFill>
+                      <a:schemeClr val="tx2"/>
+                    </a:solidFill>
+                  </a:tcPr>
+                </a:tc>
+                <a:tc>
+                  <a:txBody>
+                    <a:bodyPr/>
+                    <a:lstStyle/>
+                    <a:p>
+                      <a:pPr indent="0" marL="0">
+                        <a:buNone/>
+                      </a:pPr>
+                      <a:r>
+                        <a:rPr lang="en-US" sz="1300" b="1" dirty="0">
+                          <a:solidFill>
+                            <a:schemeClr val="bg1"/>
+                          </a:solidFill>
+                        </a:rPr>
+                        <a:t>Budget</a:t>
+                      </a:r>
+                      <a:endParaRPr lang="en-US" sz="1300" dirty="0"/>
+                    </a:p>
+                  </a:txBody>
+                  <a:tcPr marL="73152" marR="73152" marT="0" marB="0" anchor="ctr">
+                    <a:lnL w="9525" cap="flat" cmpd="sng" algn="ctr">
+                      <a:solidFill>
+                        <a:srgbClr val="C9B8F5"/>
+                      </a:solidFill>
+                      <a:prstDash val="solid"/>
+                      <a:round/>
+                      <a:headEnd type="none" w="med" len="med"/>
+                      <a:tailEnd type="none" w="med" len="med"/>
+                    </a:lnL>
+                    <a:lnR w="9525" cap="flat" cmpd="sng" algn="ctr">
+                      <a:solidFill>
+                        <a:srgbClr val="C9B8F5"/>
+                      </a:solidFill>
+                      <a:prstDash val="solid"/>
+                      <a:round/>
+                      <a:headEnd type="none" w="med" len="med"/>
+                      <a:tailEnd type="none" w="med" len="med"/>
+                    </a:lnR>
+                    <a:lnT w="9525" cap="flat" cmpd="sng" algn="ctr">
+                      <a:solidFill>
+                        <a:srgbClr val="C9B8F5"/>
+                      </a:solidFill>
+                      <a:prstDash val="solid"/>
+                      <a:round/>
+                      <a:headEnd type="none" w="med" len="med"/>
+                      <a:tailEnd type="none" w="med" len="med"/>
+                    </a:lnT>
+                    <a:lnB w="9525" cap="flat" cmpd="sng" algn="ctr">
+                      <a:solidFill>
+                        <a:srgbClr val="C9B8F5"/>
+                      </a:solidFill>
+                      <a:prstDash val="solid"/>
+                      <a:round/>
+                      <a:headEnd type="none" w="med" len="med"/>
+                      <a:tailEnd type="none" w="med" len="med"/>
+                    </a:lnB>
+                    <a:solidFill>
+                      <a:schemeClr val="tx2"/>
+                    </a:solidFill>
+                  </a:tcPr>
+                </a:tc>
+              </a:tr>
+              <a:tr h="566928">
+                <a:tc>
+                  <a:txBody>
+                    <a:bodyPr/>
+                    <a:lstStyle/>
+                    <a:p>
+                      <a:pPr indent="0" marL="0">
+                        <a:buNone/>
+                      </a:pPr>
+                      <a:r>
+                        <a:rPr lang="en-US" sz="1300" dirty="0">
+                          <a:solidFill>
+                            <a:schemeClr val="tx1"/>
+                          </a:solidFill>
+                        </a:rPr>
+                        <a:t>2-15 nov.</a:t>
+                      </a:r>
+                      <a:endParaRPr lang="en-US" sz="1300" dirty="0"/>
+                    </a:p>
+                  </a:txBody>
+                  <a:tcPr marL="73152" marR="73152" marT="0" marB="0" anchor="ctr">
+                    <a:lnL w="9525" cap="flat" cmpd="sng" algn="ctr">
+                      <a:solidFill>
+                        <a:srgbClr val="C9B8F5"/>
+                      </a:solidFill>
+                      <a:prstDash val="solid"/>
+                      <a:round/>
+                      <a:headEnd type="none" w="med" len="med"/>
+                      <a:tailEnd type="none" w="med" len="med"/>
+                    </a:lnL>
+                    <a:lnR w="9525" cap="flat" cmpd="sng" algn="ctr">
+                      <a:solidFill>
+                        <a:srgbClr val="C9B8F5"/>
+                      </a:solidFill>
+                      <a:prstDash val="solid"/>
+                      <a:round/>
+                      <a:headEnd type="none" w="med" len="med"/>
+                      <a:tailEnd type="none" w="med" len="med"/>
+                    </a:lnR>
+                    <a:lnT w="9525" cap="flat" cmpd="sng" algn="ctr">
+                      <a:solidFill>
+                        <a:srgbClr val="C9B8F5"/>
+                      </a:solidFill>
+                      <a:prstDash val="solid"/>
+                      <a:round/>
+                      <a:headEnd type="none" w="med" len="med"/>
+                      <a:tailEnd type="none" w="med" len="med"/>
+                    </a:lnT>
+                    <a:lnB w="9525" cap="flat" cmpd="sng" algn="ctr">
+                      <a:solidFill>
+                        <a:srgbClr val="C9B8F5"/>
+                      </a:solidFill>
+                      <a:prstDash val="solid"/>
+                      <a:round/>
+                      <a:headEnd type="none" w="med" len="med"/>
+                      <a:tailEnd type="none" w="med" len="med"/>
+                    </a:lnB>
+                  </a:tcPr>
+                </a:tc>
+                <a:tc>
+                  <a:txBody>
+                    <a:bodyPr/>
+                    <a:lstStyle/>
+                    <a:p>
+                      <a:pPr indent="0" marL="0">
+                        <a:buNone/>
+                      </a:pPr>
+                      <a:r>
+                        <a:rPr lang="en-US" sz="1300" dirty="0">
+                          <a:solidFill>
+                            <a:schemeClr val="tx1"/>
+                          </a:solidFill>
+                        </a:rPr>
+                        <a:t>Tournage des vidéos créateurs, accords de cofinancement restaurants</a:t>
+                      </a:r>
+                      <a:endParaRPr lang="en-US" sz="1300" dirty="0"/>
+                    </a:p>
+                  </a:txBody>
+                  <a:tcPr marL="73152" marR="73152" marT="0" marB="0" anchor="ctr">
+                    <a:lnL w="9525" cap="flat" cmpd="sng" algn="ctr">
+                      <a:solidFill>
+                        <a:srgbClr val="C9B8F5"/>
+                      </a:solidFill>
+                      <a:prstDash val="solid"/>
+                      <a:round/>
+                      <a:headEnd type="none" w="med" len="med"/>
+                      <a:tailEnd type="none" w="med" len="med"/>
+                    </a:lnL>
+                    <a:lnR w="9525" cap="flat" cmpd="sng" algn="ctr">
+                      <a:solidFill>
+                        <a:srgbClr val="C9B8F5"/>
+                      </a:solidFill>
+                      <a:prstDash val="solid"/>
+                      <a:round/>
+                      <a:headEnd type="none" w="med" len="med"/>
+                      <a:tailEnd type="none" w="med" len="med"/>
+                    </a:lnR>
+                    <a:lnT w="9525" cap="flat" cmpd="sng" algn="ctr">
+                      <a:solidFill>
+                        <a:srgbClr val="C9B8F5"/>
+                      </a:solidFill>
+                      <a:prstDash val="solid"/>
+                      <a:round/>
+                      <a:headEnd type="none" w="med" len="med"/>
+                      <a:tailEnd type="none" w="med" len="med"/>
+                    </a:lnT>
+                    <a:lnB w="9525" cap="flat" cmpd="sng" algn="ctr">
+                      <a:solidFill>
+                        <a:srgbClr val="C9B8F5"/>
+                      </a:solidFill>
+                      <a:prstDash val="solid"/>
+                      <a:round/>
+                      <a:headEnd type="none" w="med" len="med"/>
+                      <a:tailEnd type="none" w="med" len="med"/>
+                    </a:lnB>
+                  </a:tcPr>
+                </a:tc>
+                <a:tc>
+                  <a:txBody>
+                    <a:bodyPr/>
+                    <a:lstStyle/>
+                    <a:p>
+                      <a:pPr indent="0" marL="0">
+                        <a:buNone/>
+                      </a:pPr>
+                      <a:r>
+                        <a:rPr lang="en-US" sz="1300" dirty="0">
+                          <a:solidFill>
+                            <a:schemeClr val="tx1"/>
+                          </a:solidFill>
+                        </a:rPr>
+                        <a:t>8 000 DH</a:t>
+                      </a:r>
+                      <a:endParaRPr lang="en-US" sz="1300" dirty="0"/>
+                    </a:p>
+                  </a:txBody>
+                  <a:tcPr marL="73152" marR="73152" marT="0" marB="0" anchor="ctr">
+                    <a:lnL w="9525" cap="flat" cmpd="sng" algn="ctr">
+                      <a:solidFill>
+                        <a:srgbClr val="C9B8F5"/>
+                      </a:solidFill>
+                      <a:prstDash val="solid"/>
+                      <a:round/>
+                      <a:headEnd type="none" w="med" len="med"/>
+                      <a:tailEnd type="none" w="med" len="med"/>
+                    </a:lnL>
+                    <a:lnR w="9525" cap="flat" cmpd="sng" algn="ctr">
+                      <a:solidFill>
+                        <a:srgbClr val="C9B8F5"/>
+                      </a:solidFill>
+                      <a:prstDash val="solid"/>
+                      <a:round/>
+                      <a:headEnd type="none" w="med" len="med"/>
+                      <a:tailEnd type="none" w="med" len="med"/>
+                    </a:lnR>
+                    <a:lnT w="9525" cap="flat" cmpd="sng" algn="ctr">
+                      <a:solidFill>
+                        <a:srgbClr val="C9B8F5"/>
+                      </a:solidFill>
+                      <a:prstDash val="solid"/>
+                      <a:round/>
+                      <a:headEnd type="none" w="med" len="med"/>
+                      <a:tailEnd type="none" w="med" len="med"/>
+                    </a:lnT>
+                    <a:lnB w="9525" cap="flat" cmpd="sng" algn="ctr">
+                      <a:solidFill>
+                        <a:srgbClr val="C9B8F5"/>
+                      </a:solidFill>
+                      <a:prstDash val="solid"/>
+                      <a:round/>
+                      <a:headEnd type="none" w="med" len="med"/>
+                      <a:tailEnd type="none" w="med" len="med"/>
+                    </a:lnB>
+                  </a:tcPr>
+                </a:tc>
+              </a:tr>
+              <a:tr h="566928">
+                <a:tc>
+                  <a:txBody>
+                    <a:bodyPr/>
+                    <a:lstStyle/>
+                    <a:p>
+                      <a:pPr indent="0" marL="0">
+                        <a:buNone/>
+                      </a:pPr>
+                      <a:r>
+                        <a:rPr lang="en-US" sz="1300" dirty="0">
+                          <a:solidFill>
+                            <a:schemeClr val="tx1"/>
+                          </a:solidFill>
+                        </a:rPr>
+                        <a:t>16-22 nov.</a:t>
+                      </a:r>
+                      <a:endParaRPr lang="en-US" sz="1300" dirty="0"/>
+                    </a:p>
+                  </a:txBody>
+                  <a:tcPr marL="73152" marR="73152" marT="0" marB="0" anchor="ctr">
+                    <a:lnL w="9525" cap="flat" cmpd="sng" algn="ctr">
+                      <a:solidFill>
+                        <a:srgbClr val="C9B8F5"/>
+                      </a:solidFill>
+                      <a:prstDash val="solid"/>
+                      <a:round/>
+                      <a:headEnd type="none" w="med" len="med"/>
+                      <a:tailEnd type="none" w="med" len="med"/>
+                    </a:lnL>
+                    <a:lnR w="9525" cap="flat" cmpd="sng" algn="ctr">
+                      <a:solidFill>
+                        <a:srgbClr val="C9B8F5"/>
+                      </a:solidFill>
+                      <a:prstDash val="solid"/>
+                      <a:round/>
+                      <a:headEnd type="none" w="med" len="med"/>
+                      <a:tailEnd type="none" w="med" len="med"/>
+                    </a:lnR>
+                    <a:lnT w="9525" cap="flat" cmpd="sng" algn="ctr">
+                      <a:solidFill>
+                        <a:srgbClr val="C9B8F5"/>
+                      </a:solidFill>
+                      <a:prstDash val="solid"/>
+                      <a:round/>
+                      <a:headEnd type="none" w="med" len="med"/>
+                      <a:tailEnd type="none" w="med" len="med"/>
+                    </a:lnT>
+                    <a:lnB w="9525" cap="flat" cmpd="sng" algn="ctr">
+                      <a:solidFill>
+                        <a:srgbClr val="C9B8F5"/>
+                      </a:solidFill>
+                      <a:prstDash val="solid"/>
+                      <a:round/>
+                      <a:headEnd type="none" w="med" len="med"/>
+                      <a:tailEnd type="none" w="med" len="med"/>
+                    </a:lnB>
+                  </a:tcPr>
+                </a:tc>
+                <a:tc>
+                  <a:txBody>
+                    <a:bodyPr/>
+                    <a:lstStyle/>
+                    <a:p>
+                      <a:pPr indent="0" marL="0">
+                        <a:buNone/>
+                      </a:pPr>
+                      <a:r>
+                        <a:rPr lang="en-US" sz="1300" dirty="0">
+                          <a:solidFill>
+                            <a:schemeClr val="tx1"/>
+                          </a:solidFill>
+                        </a:rPr>
+                        <a:t>Teasing, constitution des audiences de reciblage</a:t>
+                      </a:r>
+                      <a:endParaRPr lang="en-US" sz="1300" dirty="0"/>
+                    </a:p>
+                  </a:txBody>
+                  <a:tcPr marL="73152" marR="73152" marT="0" marB="0" anchor="ctr">
+                    <a:lnL w="9525" cap="flat" cmpd="sng" algn="ctr">
+                      <a:solidFill>
+                        <a:srgbClr val="C9B8F5"/>
+                      </a:solidFill>
+                      <a:prstDash val="solid"/>
+                      <a:round/>
+                      <a:headEnd type="none" w="med" len="med"/>
+                      <a:tailEnd type="none" w="med" len="med"/>
+                    </a:lnL>
+                    <a:lnR w="9525" cap="flat" cmpd="sng" algn="ctr">
+                      <a:solidFill>
+                        <a:srgbClr val="C9B8F5"/>
+                      </a:solidFill>
+                      <a:prstDash val="solid"/>
+                      <a:round/>
+                      <a:headEnd type="none" w="med" len="med"/>
+                      <a:tailEnd type="none" w="med" len="med"/>
+                    </a:lnR>
+                    <a:lnT w="9525" cap="flat" cmpd="sng" algn="ctr">
+                      <a:solidFill>
+                        <a:srgbClr val="C9B8F5"/>
+                      </a:solidFill>
+                      <a:prstDash val="solid"/>
+                      <a:round/>
+                      <a:headEnd type="none" w="med" len="med"/>
+                      <a:tailEnd type="none" w="med" len="med"/>
+                    </a:lnT>
+                    <a:lnB w="9525" cap="flat" cmpd="sng" algn="ctr">
+                      <a:solidFill>
+                        <a:srgbClr val="C9B8F5"/>
+                      </a:solidFill>
+                      <a:prstDash val="solid"/>
+                      <a:round/>
+                      <a:headEnd type="none" w="med" len="med"/>
+                      <a:tailEnd type="none" w="med" len="med"/>
+                    </a:lnB>
+                  </a:tcPr>
+                </a:tc>
+                <a:tc>
+                  <a:txBody>
+                    <a:bodyPr/>
+                    <a:lstStyle/>
+                    <a:p>
+                      <a:pPr indent="0" marL="0">
+                        <a:buNone/>
+                      </a:pPr>
+                      <a:r>
+                        <a:rPr lang="en-US" sz="1300" dirty="0">
+                          <a:solidFill>
+                            <a:schemeClr val="tx1"/>
+                          </a:solidFill>
+                        </a:rPr>
+                        <a:t>10 000 DH</a:t>
+                      </a:r>
+                      <a:endParaRPr lang="en-US" sz="1300" dirty="0"/>
+                    </a:p>
+                  </a:txBody>
+                  <a:tcPr marL="73152" marR="73152" marT="0" marB="0" anchor="ctr">
+                    <a:lnL w="9525" cap="flat" cmpd="sng" algn="ctr">
+                      <a:solidFill>
+                        <a:srgbClr val="C9B8F5"/>
+                      </a:solidFill>
+                      <a:prstDash val="solid"/>
+                      <a:round/>
+                      <a:headEnd type="none" w="med" len="med"/>
+                      <a:tailEnd type="none" w="med" len="med"/>
+                    </a:lnL>
+                    <a:lnR w="9525" cap="flat" cmpd="sng" algn="ctr">
+                      <a:solidFill>
+                        <a:srgbClr val="C9B8F5"/>
+                      </a:solidFill>
+                      <a:prstDash val="solid"/>
+                      <a:round/>
+                      <a:headEnd type="none" w="med" len="med"/>
+                      <a:tailEnd type="none" w="med" len="med"/>
+                    </a:lnR>
+                    <a:lnT w="9525" cap="flat" cmpd="sng" algn="ctr">
+                      <a:solidFill>
+                        <a:srgbClr val="C9B8F5"/>
+                      </a:solidFill>
+                      <a:prstDash val="solid"/>
+                      <a:round/>
+                      <a:headEnd type="none" w="med" len="med"/>
+                      <a:tailEnd type="none" w="med" len="med"/>
+                    </a:lnT>
+                    <a:lnB w="9525" cap="flat" cmpd="sng" algn="ctr">
+                      <a:solidFill>
+                        <a:srgbClr val="C9B8F5"/>
+                      </a:solidFill>
+                      <a:prstDash val="solid"/>
+                      <a:round/>
+                      <a:headEnd type="none" w="med" len="med"/>
+                      <a:tailEnd type="none" w="med" len="med"/>
+                    </a:lnB>
+                  </a:tcPr>
+                </a:tc>
+              </a:tr>
+              <a:tr h="566928">
+                <a:tc>
+                  <a:txBody>
+                    <a:bodyPr/>
+                    <a:lstStyle/>
+                    <a:p>
+                      <a:pPr indent="0" marL="0">
+                        <a:buNone/>
+                      </a:pPr>
+                      <a:r>
+                        <a:rPr lang="en-US" sz="1300" dirty="0">
+                          <a:solidFill>
+                            <a:schemeClr val="tx1"/>
+                          </a:solidFill>
+                        </a:rPr>
+                        <a:t>23-29 nov.</a:t>
+                      </a:r>
+                      <a:endParaRPr lang="en-US" sz="1300" dirty="0"/>
+                    </a:p>
+                  </a:txBody>
+                  <a:tcPr marL="73152" marR="73152" marT="0" marB="0" anchor="ctr">
+                    <a:lnL w="9525" cap="flat" cmpd="sng" algn="ctr">
+                      <a:solidFill>
+                        <a:srgbClr val="C9B8F5"/>
+                      </a:solidFill>
+                      <a:prstDash val="solid"/>
+                      <a:round/>
+                      <a:headEnd type="none" w="med" len="med"/>
+                      <a:tailEnd type="none" w="med" len="med"/>
+                    </a:lnL>
+                    <a:lnR w="9525" cap="flat" cmpd="sng" algn="ctr">
+                      <a:solidFill>
+                        <a:srgbClr val="C9B8F5"/>
+                      </a:solidFill>
+                      <a:prstDash val="solid"/>
+                      <a:round/>
+                      <a:headEnd type="none" w="med" len="med"/>
+                      <a:tailEnd type="none" w="med" len="med"/>
+                    </a:lnR>
+                    <a:lnT w="9525" cap="flat" cmpd="sng" algn="ctr">
+                      <a:solidFill>
+                        <a:srgbClr val="C9B8F5"/>
+                      </a:solidFill>
+                      <a:prstDash val="solid"/>
+                      <a:round/>
+                      <a:headEnd type="none" w="med" len="med"/>
+                      <a:tailEnd type="none" w="med" len="med"/>
+                    </a:lnT>
+                    <a:lnB w="9525" cap="flat" cmpd="sng" algn="ctr">
+                      <a:solidFill>
+                        <a:srgbClr val="C9B8F5"/>
+                      </a:solidFill>
+                      <a:prstDash val="solid"/>
+                      <a:round/>
+                      <a:headEnd type="none" w="med" len="med"/>
+                      <a:tailEnd type="none" w="med" len="med"/>
+                    </a:lnB>
+                  </a:tcPr>
+                </a:tc>
+                <a:tc>
+                  <a:txBody>
+                    <a:bodyPr/>
+                    <a:lstStyle/>
+                    <a:p>
+                      <a:pPr indent="0" marL="0">
+                        <a:buNone/>
+                      </a:pPr>
+                      <a:r>
+                        <a:rPr lang="en-US" sz="1300" dirty="0">
+                          <a:solidFill>
+                            <a:schemeClr val="tx1"/>
+                          </a:solidFill>
+                        </a:rPr>
+                        <a:t>Yassir Friday : pic des ads et des notifications</a:t>
+                      </a:r>
+                      <a:endParaRPr lang="en-US" sz="1300" dirty="0"/>
+                    </a:p>
+                  </a:txBody>
+                  <a:tcPr marL="73152" marR="73152" marT="0" marB="0" anchor="ctr">
+                    <a:lnL w="9525" cap="flat" cmpd="sng" algn="ctr">
+                      <a:solidFill>
+                        <a:srgbClr val="C9B8F5"/>
+                      </a:solidFill>
+                      <a:prstDash val="solid"/>
+                      <a:round/>
+                      <a:headEnd type="none" w="med" len="med"/>
+                      <a:tailEnd type="none" w="med" len="med"/>
+                    </a:lnL>
+                    <a:lnR w="9525" cap="flat" cmpd="sng" algn="ctr">
+                      <a:solidFill>
+                        <a:srgbClr val="C9B8F5"/>
+                      </a:solidFill>
+                      <a:prstDash val="solid"/>
+                      <a:round/>
+                      <a:headEnd type="none" w="med" len="med"/>
+                      <a:tailEnd type="none" w="med" len="med"/>
+                    </a:lnR>
+                    <a:lnT w="9525" cap="flat" cmpd="sng" algn="ctr">
+                      <a:solidFill>
+                        <a:srgbClr val="C9B8F5"/>
+                      </a:solidFill>
+                      <a:prstDash val="solid"/>
+                      <a:round/>
+                      <a:headEnd type="none" w="med" len="med"/>
+                      <a:tailEnd type="none" w="med" len="med"/>
+                    </a:lnT>
+                    <a:lnB w="9525" cap="flat" cmpd="sng" algn="ctr">
+                      <a:solidFill>
+                        <a:srgbClr val="C9B8F5"/>
+                      </a:solidFill>
+                      <a:prstDash val="solid"/>
+                      <a:round/>
+                      <a:headEnd type="none" w="med" len="med"/>
+                      <a:tailEnd type="none" w="med" len="med"/>
+                    </a:lnB>
+                  </a:tcPr>
+                </a:tc>
+                <a:tc>
+                  <a:txBody>
+                    <a:bodyPr/>
+                    <a:lstStyle/>
+                    <a:p>
+                      <a:pPr indent="0" marL="0">
+                        <a:buNone/>
+                      </a:pPr>
+                      <a:r>
+                        <a:rPr lang="en-US" sz="1300" dirty="0">
+                          <a:solidFill>
+                            <a:schemeClr val="tx1"/>
+                          </a:solidFill>
+                        </a:rPr>
+                        <a:t>25 000 DH</a:t>
+                      </a:r>
+                      <a:endParaRPr lang="en-US" sz="1300" dirty="0"/>
+                    </a:p>
+                  </a:txBody>
+                  <a:tcPr marL="73152" marR="73152" marT="0" marB="0" anchor="ctr">
+                    <a:lnL w="9525" cap="flat" cmpd="sng" algn="ctr">
+                      <a:solidFill>
+                        <a:srgbClr val="C9B8F5"/>
+                      </a:solidFill>
+                      <a:prstDash val="solid"/>
+                      <a:round/>
+                      <a:headEnd type="none" w="med" len="med"/>
+                      <a:tailEnd type="none" w="med" len="med"/>
+                    </a:lnL>
+                    <a:lnR w="9525" cap="flat" cmpd="sng" algn="ctr">
+                      <a:solidFill>
+                        <a:srgbClr val="C9B8F5"/>
+                      </a:solidFill>
+                      <a:prstDash val="solid"/>
+                      <a:round/>
+                      <a:headEnd type="none" w="med" len="med"/>
+                      <a:tailEnd type="none" w="med" len="med"/>
+                    </a:lnR>
+                    <a:lnT w="9525" cap="flat" cmpd="sng" algn="ctr">
+                      <a:solidFill>
+                        <a:srgbClr val="C9B8F5"/>
+                      </a:solidFill>
+                      <a:prstDash val="solid"/>
+                      <a:round/>
+                      <a:headEnd type="none" w="med" len="med"/>
+                      <a:tailEnd type="none" w="med" len="med"/>
+                    </a:lnT>
+                    <a:lnB w="9525" cap="flat" cmpd="sng" algn="ctr">
+                      <a:solidFill>
+                        <a:srgbClr val="C9B8F5"/>
+                      </a:solidFill>
+                      <a:prstDash val="solid"/>
+                      <a:round/>
+                      <a:headEnd type="none" w="med" len="med"/>
+                      <a:tailEnd type="none" w="med" len="med"/>
+                    </a:lnB>
+                  </a:tcPr>
+                </a:tc>
+              </a:tr>
+              <a:tr h="566928">
+                <a:tc>
+                  <a:txBody>
+                    <a:bodyPr/>
+                    <a:lstStyle/>
+                    <a:p>
+                      <a:pPr indent="0" marL="0">
+                        <a:buNone/>
+                      </a:pPr>
+                      <a:r>
+                        <a:rPr lang="en-US" sz="1300" dirty="0">
+                          <a:solidFill>
+                            <a:schemeClr val="tx1"/>
+                          </a:solidFill>
+                        </a:rPr>
+                        <a:t>Fin nov.</a:t>
+                      </a:r>
+                      <a:endParaRPr lang="en-US" sz="1300" dirty="0"/>
+                    </a:p>
+                  </a:txBody>
+                  <a:tcPr marL="73152" marR="73152" marT="0" marB="0" anchor="ctr">
+                    <a:lnL w="9525" cap="flat" cmpd="sng" algn="ctr">
+                      <a:solidFill>
+                        <a:srgbClr val="C9B8F5"/>
+                      </a:solidFill>
+                      <a:prstDash val="solid"/>
+                      <a:round/>
+                      <a:headEnd type="none" w="med" len="med"/>
+                      <a:tailEnd type="none" w="med" len="med"/>
+                    </a:lnL>
+                    <a:lnR w="9525" cap="flat" cmpd="sng" algn="ctr">
+                      <a:solidFill>
+                        <a:srgbClr val="C9B8F5"/>
+                      </a:solidFill>
+                      <a:prstDash val="solid"/>
+                      <a:round/>
+                      <a:headEnd type="none" w="med" len="med"/>
+                      <a:tailEnd type="none" w="med" len="med"/>
+                    </a:lnR>
+                    <a:lnT w="9525" cap="flat" cmpd="sng" algn="ctr">
+                      <a:solidFill>
+                        <a:srgbClr val="C9B8F5"/>
+                      </a:solidFill>
+                      <a:prstDash val="solid"/>
+                      <a:round/>
+                      <a:headEnd type="none" w="med" len="med"/>
+                      <a:tailEnd type="none" w="med" len="med"/>
+                    </a:lnT>
+                    <a:lnB w="9525" cap="flat" cmpd="sng" algn="ctr">
+                      <a:solidFill>
+                        <a:srgbClr val="C9B8F5"/>
+                      </a:solidFill>
+                      <a:prstDash val="solid"/>
+                      <a:round/>
+                      <a:headEnd type="none" w="med" len="med"/>
+                      <a:tailEnd type="none" w="med" len="med"/>
+                    </a:lnB>
+                  </a:tcPr>
+                </a:tc>
+                <a:tc>
+                  <a:txBody>
+                    <a:bodyPr/>
+                    <a:lstStyle/>
+                    <a:p>
+                      <a:pPr indent="0" marL="0">
+                        <a:buNone/>
+                      </a:pPr>
+                      <a:r>
+                        <a:rPr lang="en-US" sz="1300" dirty="0">
+                          <a:solidFill>
+                            <a:schemeClr val="tx1"/>
+                          </a:solidFill>
+                        </a:rPr>
+                        <a:t>Relance des nouveaux clients pour une 2e commande</a:t>
+                      </a:r>
+                      <a:endParaRPr lang="en-US" sz="1300" dirty="0"/>
+                    </a:p>
+                  </a:txBody>
+                  <a:tcPr marL="73152" marR="73152" marT="0" marB="0" anchor="ctr">
+                    <a:lnL w="9525" cap="flat" cmpd="sng" algn="ctr">
+                      <a:solidFill>
+                        <a:srgbClr val="C9B8F5"/>
+                      </a:solidFill>
+                      <a:prstDash val="solid"/>
+                      <a:round/>
+                      <a:headEnd type="none" w="med" len="med"/>
+                      <a:tailEnd type="none" w="med" len="med"/>
+                    </a:lnL>
+                    <a:lnR w="9525" cap="flat" cmpd="sng" algn="ctr">
+                      <a:solidFill>
+                        <a:srgbClr val="C9B8F5"/>
+                      </a:solidFill>
+                      <a:prstDash val="solid"/>
+                      <a:round/>
+                      <a:headEnd type="none" w="med" len="med"/>
+                      <a:tailEnd type="none" w="med" len="med"/>
+                    </a:lnR>
+                    <a:lnT w="9525" cap="flat" cmpd="sng" algn="ctr">
+                      <a:solidFill>
+                        <a:srgbClr val="C9B8F5"/>
+                      </a:solidFill>
+                      <a:prstDash val="solid"/>
+                      <a:round/>
+                      <a:headEnd type="none" w="med" len="med"/>
+                      <a:tailEnd type="none" w="med" len="med"/>
+                    </a:lnT>
+                    <a:lnB w="9525" cap="flat" cmpd="sng" algn="ctr">
+                      <a:solidFill>
+                        <a:srgbClr val="C9B8F5"/>
+                      </a:solidFill>
+                      <a:prstDash val="solid"/>
+                      <a:round/>
+                      <a:headEnd type="none" w="med" len="med"/>
+                      <a:tailEnd type="none" w="med" len="med"/>
+                    </a:lnB>
+                  </a:tcPr>
+                </a:tc>
+                <a:tc>
+                  <a:txBody>
+                    <a:bodyPr/>
+                    <a:lstStyle/>
+                    <a:p>
+                      <a:pPr indent="0" marL="0">
+                        <a:buNone/>
+                      </a:pPr>
+                      <a:r>
+                        <a:rPr lang="en-US" sz="1300" dirty="0">
+                          <a:solidFill>
+                            <a:schemeClr val="tx1"/>
+                          </a:solidFill>
+                        </a:rPr>
+                        <a:t>7 000 DH</a:t>
+                      </a:r>
+                      <a:endParaRPr lang="en-US" sz="1300" dirty="0"/>
+                    </a:p>
+                  </a:txBody>
+                  <a:tcPr marL="73152" marR="73152" marT="0" marB="0" anchor="ctr">
+                    <a:lnL w="9525" cap="flat" cmpd="sng" algn="ctr">
+                      <a:solidFill>
+                        <a:srgbClr val="C9B8F5"/>
+                      </a:solidFill>
+                      <a:prstDash val="solid"/>
+                      <a:round/>
+                      <a:headEnd type="none" w="med" len="med"/>
+                      <a:tailEnd type="none" w="med" len="med"/>
+                    </a:lnL>
+                    <a:lnR w="9525" cap="flat" cmpd="sng" algn="ctr">
+                      <a:solidFill>
+                        <a:srgbClr val="C9B8F5"/>
+                      </a:solidFill>
+                      <a:prstDash val="solid"/>
+                      <a:round/>
+                      <a:headEnd type="none" w="med" len="med"/>
+                      <a:tailEnd type="none" w="med" len="med"/>
+                    </a:lnR>
+                    <a:lnT w="9525" cap="flat" cmpd="sng" algn="ctr">
+                      <a:solidFill>
+                        <a:srgbClr val="C9B8F5"/>
+                      </a:solidFill>
+                      <a:prstDash val="solid"/>
+                      <a:round/>
+                      <a:headEnd type="none" w="med" len="med"/>
+                      <a:tailEnd type="none" w="med" len="med"/>
+                    </a:lnT>
+                    <a:lnB w="9525" cap="flat" cmpd="sng" algn="ctr">
+                      <a:solidFill>
+                        <a:srgbClr val="C9B8F5"/>
+                      </a:solidFill>
+                      <a:prstDash val="solid"/>
+                      <a:round/>
+                      <a:headEnd type="none" w="med" len="med"/>
+                      <a:tailEnd type="none" w="med" len="med"/>
+                    </a:lnB>
+                  </a:tcPr>
+                </a:tc>
+              </a:tr>
+            </a:tbl>
+          </a:graphicData>
+        </a:graphic>
+      </p:graphicFrame>
+      <p:sp>
+        <p:nvSpPr>
+          <p:cNvPr id="7" name="Ramadan (février : 70 000 DH) circle"/>
           <p:cNvSpPr/>
           <p:nvPr/>
         </p:nvSpPr>
         <p:spPr>
           <a:xfrm>
-            <a:off x="6195060" y="1417320"/>
-            <a:ext cx="5417820" cy="2194560"/>
-          </a:xfrm>
-          <a:prstGeom prst="roundRect">
-            <a:avLst>
-              <a:gd name="adj" fmla="val 5000"/>
-            </a:avLst>
+            <a:off x="6217920" y="1371600"/>
+            <a:ext cx="502920" cy="502920"/>
+          </a:xfrm>
+          <a:prstGeom prst="ellipse">
+            <a:avLst/>
           </a:prstGeom>
           <a:solidFill>
-            <a:schemeClr val="bg2"/>
-          </a:solidFill>
-          <a:ln/>
-        </p:spPr>
-      </p:sp>
-      <p:sp>
-        <p:nvSpPr>
-          <p:cNvPr id="9" name="Relance des inactifs circle"/>
-          <p:cNvSpPr/>
-          <p:nvPr/>
-        </p:nvSpPr>
-        <p:spPr>
-          <a:xfrm>
-            <a:off x="6469380" y="1691640"/>
-            <a:ext cx="548640" cy="548640"/>
-          </a:xfrm>
-          <a:prstGeom prst="ellipse">
-            <a:avLst/>
-          </a:prstGeom>
-          <a:solidFill>
-            <a:schemeClr val="accent2"/>
+            <a:schemeClr val="accent1"/>
           </a:solidFill>
           <a:ln/>
         </p:spPr>
       </p:sp>
       <p:pic>
         <p:nvPicPr>
-          <p:cNvPr id="10" name="Relance des inactifs icon" descr="Relance des inactifs">    </p:cNvPr>
+          <p:cNvPr id="8" name="Ramadan (février : 70 000 DH) icon" descr="Ramadan (février : 70 000 DH)">    </p:cNvPr>
           <p:cNvPicPr>
             <a:picLocks noChangeAspect="1"/>
           </p:cNvPicPr>
@@ -4342,8 +5313,8 @@
         </p:blipFill>
         <p:spPr>
           <a:xfrm>
-            <a:off x="6612026" y="1834286"/>
-            <a:ext cx="263347" cy="263347"/>
+            <a:off x="6348679" y="1502359"/>
+            <a:ext cx="241402" cy="241402"/>
           </a:xfrm>
           <a:prstGeom prst="rect">
             <a:avLst/>
@@ -4352,14 +5323,14 @@
       </p:pic>
       <p:sp>
         <p:nvSpPr>
-          <p:cNvPr id="11" name="Text 7"/>
+          <p:cNvPr id="9" name="Text 4"/>
           <p:cNvSpPr txBox="1"/>
           <p:nvPr/>
         </p:nvSpPr>
         <p:spPr>
           <a:xfrm>
-            <a:off x="7155180" y="1645920"/>
-            <a:ext cx="4229100" cy="640080"/>
+            <a:off x="6858000" y="1371600"/>
+            <a:ext cx="4663440" cy="502920"/>
           </a:xfrm>
           <a:prstGeom prst="rect">
             <a:avLst/>
@@ -4375,27 +5346,947 @@
               <a:buNone/>
             </a:pPr>
             <a:r>
-              <a:rPr lang="en-US" sz="1700" b="1" dirty="0">
+              <a:rPr lang="en-US" sz="1800" b="1" dirty="0">
                 <a:solidFill>
                   <a:schemeClr val="tx2"/>
                 </a:solidFill>
               </a:rPr>
-              <a:t>Relance des inactifs</a:t>
+              <a:t>Ramadan (février : 70 000 DH)</a:t>
             </a:r>
-            <a:endParaRPr lang="en-US" sz="1700" dirty="0"/>
-          </a:p>
-        </p:txBody>
-      </p:sp>
-      <p:sp>
-        <p:nvSpPr>
-          <p:cNvPr id="12" name="Text 8"/>
+            <a:endParaRPr lang="en-US" sz="1800" dirty="0"/>
+          </a:p>
+        </p:txBody>
+      </p:sp>
+      <p:graphicFrame>
+        <p:nvGraphicFramePr>
+          <p:cNvPr id="23" name="Table 1"/>
+          <p:cNvGraphicFramePr>
+            <a:graphicFrameLocks noGrp="1"/>
+          </p:cNvGraphicFramePr>
+          <p:nvPr>
+            <p:extLst>
+              <p:ext uri="{D42A27DB-BD31-4B8C-83A1-F6EECF244321}">
+                <p14:modId xmlns:p14="http://schemas.microsoft.com/office/powerpoint/2010/main" val="1579011935"/>
+              </p:ext>
+            </p:extLst>
+          </p:nvPr>
+        </p:nvGraphicFramePr>
+        <p:xfrm>
+          <a:off x="6217920" y="2011680"/>
+          <a:ext cx="5394960" cy="914400"/>
+        </p:xfrm>
+        <a:graphic>
+          <a:graphicData uri="http://schemas.openxmlformats.org/drawingml/2006/table">
+            <a:tbl>
+              <a:tblPr/>
+              <a:tblGrid>
+                <a:gridCol w="1417320"/>
+                <a:gridCol w="2880360"/>
+                <a:gridCol w="1097280"/>
+              </a:tblGrid>
+              <a:tr h="566928">
+                <a:tc>
+                  <a:txBody>
+                    <a:bodyPr/>
+                    <a:lstStyle/>
+                    <a:p>
+                      <a:pPr indent="0" marL="0">
+                        <a:buNone/>
+                      </a:pPr>
+                      <a:r>
+                        <a:rPr lang="en-US" sz="1300" b="1" dirty="0">
+                          <a:solidFill>
+                            <a:schemeClr val="bg1"/>
+                          </a:solidFill>
+                        </a:rPr>
+                        <a:t>Période</a:t>
+                      </a:r>
+                      <a:endParaRPr lang="en-US" sz="1300" dirty="0"/>
+                    </a:p>
+                  </a:txBody>
+                  <a:tcPr marL="73152" marR="73152" marT="0" marB="0" anchor="ctr">
+                    <a:lnL w="9525" cap="flat" cmpd="sng" algn="ctr">
+                      <a:solidFill>
+                        <a:srgbClr val="C9B8F5"/>
+                      </a:solidFill>
+                      <a:prstDash val="solid"/>
+                      <a:round/>
+                      <a:headEnd type="none" w="med" len="med"/>
+                      <a:tailEnd type="none" w="med" len="med"/>
+                    </a:lnL>
+                    <a:lnR w="9525" cap="flat" cmpd="sng" algn="ctr">
+                      <a:solidFill>
+                        <a:srgbClr val="C9B8F5"/>
+                      </a:solidFill>
+                      <a:prstDash val="solid"/>
+                      <a:round/>
+                      <a:headEnd type="none" w="med" len="med"/>
+                      <a:tailEnd type="none" w="med" len="med"/>
+                    </a:lnR>
+                    <a:lnT w="9525" cap="flat" cmpd="sng" algn="ctr">
+                      <a:solidFill>
+                        <a:srgbClr val="C9B8F5"/>
+                      </a:solidFill>
+                      <a:prstDash val="solid"/>
+                      <a:round/>
+                      <a:headEnd type="none" w="med" len="med"/>
+                      <a:tailEnd type="none" w="med" len="med"/>
+                    </a:lnT>
+                    <a:lnB w="9525" cap="flat" cmpd="sng" algn="ctr">
+                      <a:solidFill>
+                        <a:srgbClr val="C9B8F5"/>
+                      </a:solidFill>
+                      <a:prstDash val="solid"/>
+                      <a:round/>
+                      <a:headEnd type="none" w="med" len="med"/>
+                      <a:tailEnd type="none" w="med" len="med"/>
+                    </a:lnB>
+                    <a:solidFill>
+                      <a:schemeClr val="tx2"/>
+                    </a:solidFill>
+                  </a:tcPr>
+                </a:tc>
+                <a:tc>
+                  <a:txBody>
+                    <a:bodyPr/>
+                    <a:lstStyle/>
+                    <a:p>
+                      <a:pPr indent="0" marL="0">
+                        <a:buNone/>
+                      </a:pPr>
+                      <a:r>
+                        <a:rPr lang="en-US" sz="1300" b="1" dirty="0">
+                          <a:solidFill>
+                            <a:schemeClr val="bg1"/>
+                          </a:solidFill>
+                        </a:rPr>
+                        <a:t>Action</a:t>
+                      </a:r>
+                      <a:endParaRPr lang="en-US" sz="1300" dirty="0"/>
+                    </a:p>
+                  </a:txBody>
+                  <a:tcPr marL="73152" marR="73152" marT="0" marB="0" anchor="ctr">
+                    <a:lnL w="9525" cap="flat" cmpd="sng" algn="ctr">
+                      <a:solidFill>
+                        <a:srgbClr val="C9B8F5"/>
+                      </a:solidFill>
+                      <a:prstDash val="solid"/>
+                      <a:round/>
+                      <a:headEnd type="none" w="med" len="med"/>
+                      <a:tailEnd type="none" w="med" len="med"/>
+                    </a:lnL>
+                    <a:lnR w="9525" cap="flat" cmpd="sng" algn="ctr">
+                      <a:solidFill>
+                        <a:srgbClr val="C9B8F5"/>
+                      </a:solidFill>
+                      <a:prstDash val="solid"/>
+                      <a:round/>
+                      <a:headEnd type="none" w="med" len="med"/>
+                      <a:tailEnd type="none" w="med" len="med"/>
+                    </a:lnR>
+                    <a:lnT w="9525" cap="flat" cmpd="sng" algn="ctr">
+                      <a:solidFill>
+                        <a:srgbClr val="C9B8F5"/>
+                      </a:solidFill>
+                      <a:prstDash val="solid"/>
+                      <a:round/>
+                      <a:headEnd type="none" w="med" len="med"/>
+                      <a:tailEnd type="none" w="med" len="med"/>
+                    </a:lnT>
+                    <a:lnB w="9525" cap="flat" cmpd="sng" algn="ctr">
+                      <a:solidFill>
+                        <a:srgbClr val="C9B8F5"/>
+                      </a:solidFill>
+                      <a:prstDash val="solid"/>
+                      <a:round/>
+                      <a:headEnd type="none" w="med" len="med"/>
+                      <a:tailEnd type="none" w="med" len="med"/>
+                    </a:lnB>
+                    <a:solidFill>
+                      <a:schemeClr val="tx2"/>
+                    </a:solidFill>
+                  </a:tcPr>
+                </a:tc>
+                <a:tc>
+                  <a:txBody>
+                    <a:bodyPr/>
+                    <a:lstStyle/>
+                    <a:p>
+                      <a:pPr indent="0" marL="0">
+                        <a:buNone/>
+                      </a:pPr>
+                      <a:r>
+                        <a:rPr lang="en-US" sz="1300" b="1" dirty="0">
+                          <a:solidFill>
+                            <a:schemeClr val="bg1"/>
+                          </a:solidFill>
+                        </a:rPr>
+                        <a:t>Budget</a:t>
+                      </a:r>
+                      <a:endParaRPr lang="en-US" sz="1300" dirty="0"/>
+                    </a:p>
+                  </a:txBody>
+                  <a:tcPr marL="73152" marR="73152" marT="0" marB="0" anchor="ctr">
+                    <a:lnL w="9525" cap="flat" cmpd="sng" algn="ctr">
+                      <a:solidFill>
+                        <a:srgbClr val="C9B8F5"/>
+                      </a:solidFill>
+                      <a:prstDash val="solid"/>
+                      <a:round/>
+                      <a:headEnd type="none" w="med" len="med"/>
+                      <a:tailEnd type="none" w="med" len="med"/>
+                    </a:lnL>
+                    <a:lnR w="9525" cap="flat" cmpd="sng" algn="ctr">
+                      <a:solidFill>
+                        <a:srgbClr val="C9B8F5"/>
+                      </a:solidFill>
+                      <a:prstDash val="solid"/>
+                      <a:round/>
+                      <a:headEnd type="none" w="med" len="med"/>
+                      <a:tailEnd type="none" w="med" len="med"/>
+                    </a:lnR>
+                    <a:lnT w="9525" cap="flat" cmpd="sng" algn="ctr">
+                      <a:solidFill>
+                        <a:srgbClr val="C9B8F5"/>
+                      </a:solidFill>
+                      <a:prstDash val="solid"/>
+                      <a:round/>
+                      <a:headEnd type="none" w="med" len="med"/>
+                      <a:tailEnd type="none" w="med" len="med"/>
+                    </a:lnT>
+                    <a:lnB w="9525" cap="flat" cmpd="sng" algn="ctr">
+                      <a:solidFill>
+                        <a:srgbClr val="C9B8F5"/>
+                      </a:solidFill>
+                      <a:prstDash val="solid"/>
+                      <a:round/>
+                      <a:headEnd type="none" w="med" len="med"/>
+                      <a:tailEnd type="none" w="med" len="med"/>
+                    </a:lnB>
+                    <a:solidFill>
+                      <a:schemeClr val="tx2"/>
+                    </a:solidFill>
+                  </a:tcPr>
+                </a:tc>
+              </a:tr>
+              <a:tr h="566928">
+                <a:tc>
+                  <a:txBody>
+                    <a:bodyPr/>
+                    <a:lstStyle/>
+                    <a:p>
+                      <a:pPr indent="0" marL="0">
+                        <a:buNone/>
+                      </a:pPr>
+                      <a:r>
+                        <a:rPr lang="en-US" sz="1300" dirty="0">
+                          <a:solidFill>
+                            <a:schemeClr val="tx1"/>
+                          </a:solidFill>
+                        </a:rPr>
+                        <a:t>18-31 janv.</a:t>
+                      </a:r>
+                      <a:endParaRPr lang="en-US" sz="1300" dirty="0"/>
+                    </a:p>
+                  </a:txBody>
+                  <a:tcPr marL="73152" marR="73152" marT="0" marB="0" anchor="ctr">
+                    <a:lnL w="9525" cap="flat" cmpd="sng" algn="ctr">
+                      <a:solidFill>
+                        <a:srgbClr val="C9B8F5"/>
+                      </a:solidFill>
+                      <a:prstDash val="solid"/>
+                      <a:round/>
+                      <a:headEnd type="none" w="med" len="med"/>
+                      <a:tailEnd type="none" w="med" len="med"/>
+                    </a:lnL>
+                    <a:lnR w="9525" cap="flat" cmpd="sng" algn="ctr">
+                      <a:solidFill>
+                        <a:srgbClr val="C9B8F5"/>
+                      </a:solidFill>
+                      <a:prstDash val="solid"/>
+                      <a:round/>
+                      <a:headEnd type="none" w="med" len="med"/>
+                      <a:tailEnd type="none" w="med" len="med"/>
+                    </a:lnR>
+                    <a:lnT w="9525" cap="flat" cmpd="sng" algn="ctr">
+                      <a:solidFill>
+                        <a:srgbClr val="C9B8F5"/>
+                      </a:solidFill>
+                      <a:prstDash val="solid"/>
+                      <a:round/>
+                      <a:headEnd type="none" w="med" len="med"/>
+                      <a:tailEnd type="none" w="med" len="med"/>
+                    </a:lnT>
+                    <a:lnB w="9525" cap="flat" cmpd="sng" algn="ctr">
+                      <a:solidFill>
+                        <a:srgbClr val="C9B8F5"/>
+                      </a:solidFill>
+                      <a:prstDash val="solid"/>
+                      <a:round/>
+                      <a:headEnd type="none" w="med" len="med"/>
+                      <a:tailEnd type="none" w="med" len="med"/>
+                    </a:lnB>
+                  </a:tcPr>
+                </a:tc>
+                <a:tc>
+                  <a:txBody>
+                    <a:bodyPr/>
+                    <a:lstStyle/>
+                    <a:p>
+                      <a:pPr indent="0" marL="0">
+                        <a:buNone/>
+                      </a:pPr>
+                      <a:r>
+                        <a:rPr lang="en-US" sz="1300" dirty="0">
+                          <a:solidFill>
+                            <a:schemeClr val="tx1"/>
+                          </a:solidFill>
+                        </a:rPr>
+                        <a:t>Tournage et validation des créatifs (sur le budget de janvier)</a:t>
+                      </a:r>
+                      <a:endParaRPr lang="en-US" sz="1300" dirty="0"/>
+                    </a:p>
+                  </a:txBody>
+                  <a:tcPr marL="73152" marR="73152" marT="0" marB="0" anchor="ctr">
+                    <a:lnL w="9525" cap="flat" cmpd="sng" algn="ctr">
+                      <a:solidFill>
+                        <a:srgbClr val="C9B8F5"/>
+                      </a:solidFill>
+                      <a:prstDash val="solid"/>
+                      <a:round/>
+                      <a:headEnd type="none" w="med" len="med"/>
+                      <a:tailEnd type="none" w="med" len="med"/>
+                    </a:lnL>
+                    <a:lnR w="9525" cap="flat" cmpd="sng" algn="ctr">
+                      <a:solidFill>
+                        <a:srgbClr val="C9B8F5"/>
+                      </a:solidFill>
+                      <a:prstDash val="solid"/>
+                      <a:round/>
+                      <a:headEnd type="none" w="med" len="med"/>
+                      <a:tailEnd type="none" w="med" len="med"/>
+                    </a:lnR>
+                    <a:lnT w="9525" cap="flat" cmpd="sng" algn="ctr">
+                      <a:solidFill>
+                        <a:srgbClr val="C9B8F5"/>
+                      </a:solidFill>
+                      <a:prstDash val="solid"/>
+                      <a:round/>
+                      <a:headEnd type="none" w="med" len="med"/>
+                      <a:tailEnd type="none" w="med" len="med"/>
+                    </a:lnT>
+                    <a:lnB w="9525" cap="flat" cmpd="sng" algn="ctr">
+                      <a:solidFill>
+                        <a:srgbClr val="C9B8F5"/>
+                      </a:solidFill>
+                      <a:prstDash val="solid"/>
+                      <a:round/>
+                      <a:headEnd type="none" w="med" len="med"/>
+                      <a:tailEnd type="none" w="med" len="med"/>
+                    </a:lnB>
+                  </a:tcPr>
+                </a:tc>
+                <a:tc>
+                  <a:txBody>
+                    <a:bodyPr/>
+                    <a:lstStyle/>
+                    <a:p>
+                      <a:pPr indent="0" marL="0">
+                        <a:buNone/>
+                      </a:pPr>
+                      <a:r>
+                        <a:rPr lang="en-US" sz="1300" dirty="0">
+                          <a:solidFill>
+                            <a:schemeClr val="tx1"/>
+                          </a:solidFill>
+                        </a:rPr>
+                        <a:t>inclus</a:t>
+                      </a:r>
+                      <a:endParaRPr lang="en-US" sz="1300" dirty="0"/>
+                    </a:p>
+                  </a:txBody>
+                  <a:tcPr marL="73152" marR="73152" marT="0" marB="0" anchor="ctr">
+                    <a:lnL w="9525" cap="flat" cmpd="sng" algn="ctr">
+                      <a:solidFill>
+                        <a:srgbClr val="C9B8F5"/>
+                      </a:solidFill>
+                      <a:prstDash val="solid"/>
+                      <a:round/>
+                      <a:headEnd type="none" w="med" len="med"/>
+                      <a:tailEnd type="none" w="med" len="med"/>
+                    </a:lnL>
+                    <a:lnR w="9525" cap="flat" cmpd="sng" algn="ctr">
+                      <a:solidFill>
+                        <a:srgbClr val="C9B8F5"/>
+                      </a:solidFill>
+                      <a:prstDash val="solid"/>
+                      <a:round/>
+                      <a:headEnd type="none" w="med" len="med"/>
+                      <a:tailEnd type="none" w="med" len="med"/>
+                    </a:lnR>
+                    <a:lnT w="9525" cap="flat" cmpd="sng" algn="ctr">
+                      <a:solidFill>
+                        <a:srgbClr val="C9B8F5"/>
+                      </a:solidFill>
+                      <a:prstDash val="solid"/>
+                      <a:round/>
+                      <a:headEnd type="none" w="med" len="med"/>
+                      <a:tailEnd type="none" w="med" len="med"/>
+                    </a:lnT>
+                    <a:lnB w="9525" cap="flat" cmpd="sng" algn="ctr">
+                      <a:solidFill>
+                        <a:srgbClr val="C9B8F5"/>
+                      </a:solidFill>
+                      <a:prstDash val="solid"/>
+                      <a:round/>
+                      <a:headEnd type="none" w="med" len="med"/>
+                      <a:tailEnd type="none" w="med" len="med"/>
+                    </a:lnB>
+                  </a:tcPr>
+                </a:tc>
+              </a:tr>
+              <a:tr h="566928">
+                <a:tc>
+                  <a:txBody>
+                    <a:bodyPr/>
+                    <a:lstStyle/>
+                    <a:p>
+                      <a:pPr indent="0" marL="0">
+                        <a:buNone/>
+                      </a:pPr>
+                      <a:r>
+                        <a:rPr lang="en-US" sz="1300" dirty="0">
+                          <a:solidFill>
+                            <a:schemeClr val="tx1"/>
+                          </a:solidFill>
+                        </a:rPr>
+                        <a:t>1-7 févr.</a:t>
+                      </a:r>
+                      <a:endParaRPr lang="en-US" sz="1300" dirty="0"/>
+                    </a:p>
+                  </a:txBody>
+                  <a:tcPr marL="73152" marR="73152" marT="0" marB="0" anchor="ctr">
+                    <a:lnL w="9525" cap="flat" cmpd="sng" algn="ctr">
+                      <a:solidFill>
+                        <a:srgbClr val="C9B8F5"/>
+                      </a:solidFill>
+                      <a:prstDash val="solid"/>
+                      <a:round/>
+                      <a:headEnd type="none" w="med" len="med"/>
+                      <a:tailEnd type="none" w="med" len="med"/>
+                    </a:lnL>
+                    <a:lnR w="9525" cap="flat" cmpd="sng" algn="ctr">
+                      <a:solidFill>
+                        <a:srgbClr val="C9B8F5"/>
+                      </a:solidFill>
+                      <a:prstDash val="solid"/>
+                      <a:round/>
+                      <a:headEnd type="none" w="med" len="med"/>
+                      <a:tailEnd type="none" w="med" len="med"/>
+                    </a:lnR>
+                    <a:lnT w="9525" cap="flat" cmpd="sng" algn="ctr">
+                      <a:solidFill>
+                        <a:srgbClr val="C9B8F5"/>
+                      </a:solidFill>
+                      <a:prstDash val="solid"/>
+                      <a:round/>
+                      <a:headEnd type="none" w="med" len="med"/>
+                      <a:tailEnd type="none" w="med" len="med"/>
+                    </a:lnT>
+                    <a:lnB w="9525" cap="flat" cmpd="sng" algn="ctr">
+                      <a:solidFill>
+                        <a:srgbClr val="C9B8F5"/>
+                      </a:solidFill>
+                      <a:prstDash val="solid"/>
+                      <a:round/>
+                      <a:headEnd type="none" w="med" len="med"/>
+                      <a:tailEnd type="none" w="med" len="med"/>
+                    </a:lnB>
+                  </a:tcPr>
+                </a:tc>
+                <a:tc>
+                  <a:txBody>
+                    <a:bodyPr/>
+                    <a:lstStyle/>
+                    <a:p>
+                      <a:pPr indent="0" marL="0">
+                        <a:buNone/>
+                      </a:pPr>
+                      <a:r>
+                        <a:rPr lang="en-US" sz="1300" dirty="0">
+                          <a:solidFill>
+                            <a:schemeClr val="tx1"/>
+                          </a:solidFill>
+                        </a:rPr>
+                        <a:t>« Préparez votre ftour » : teasing et courses</a:t>
+                      </a:r>
+                      <a:endParaRPr lang="en-US" sz="1300" dirty="0"/>
+                    </a:p>
+                  </a:txBody>
+                  <a:tcPr marL="73152" marR="73152" marT="0" marB="0" anchor="ctr">
+                    <a:lnL w="9525" cap="flat" cmpd="sng" algn="ctr">
+                      <a:solidFill>
+                        <a:srgbClr val="C9B8F5"/>
+                      </a:solidFill>
+                      <a:prstDash val="solid"/>
+                      <a:round/>
+                      <a:headEnd type="none" w="med" len="med"/>
+                      <a:tailEnd type="none" w="med" len="med"/>
+                    </a:lnL>
+                    <a:lnR w="9525" cap="flat" cmpd="sng" algn="ctr">
+                      <a:solidFill>
+                        <a:srgbClr val="C9B8F5"/>
+                      </a:solidFill>
+                      <a:prstDash val="solid"/>
+                      <a:round/>
+                      <a:headEnd type="none" w="med" len="med"/>
+                      <a:tailEnd type="none" w="med" len="med"/>
+                    </a:lnR>
+                    <a:lnT w="9525" cap="flat" cmpd="sng" algn="ctr">
+                      <a:solidFill>
+                        <a:srgbClr val="C9B8F5"/>
+                      </a:solidFill>
+                      <a:prstDash val="solid"/>
+                      <a:round/>
+                      <a:headEnd type="none" w="med" len="med"/>
+                      <a:tailEnd type="none" w="med" len="med"/>
+                    </a:lnT>
+                    <a:lnB w="9525" cap="flat" cmpd="sng" algn="ctr">
+                      <a:solidFill>
+                        <a:srgbClr val="C9B8F5"/>
+                      </a:solidFill>
+                      <a:prstDash val="solid"/>
+                      <a:round/>
+                      <a:headEnd type="none" w="med" len="med"/>
+                      <a:tailEnd type="none" w="med" len="med"/>
+                    </a:lnB>
+                  </a:tcPr>
+                </a:tc>
+                <a:tc>
+                  <a:txBody>
+                    <a:bodyPr/>
+                    <a:lstStyle/>
+                    <a:p>
+                      <a:pPr indent="0" marL="0">
+                        <a:buNone/>
+                      </a:pPr>
+                      <a:r>
+                        <a:rPr lang="en-US" sz="1300" dirty="0">
+                          <a:solidFill>
+                            <a:schemeClr val="tx1"/>
+                          </a:solidFill>
+                        </a:rPr>
+                        <a:t>10 000 DH</a:t>
+                      </a:r>
+                      <a:endParaRPr lang="en-US" sz="1300" dirty="0"/>
+                    </a:p>
+                  </a:txBody>
+                  <a:tcPr marL="73152" marR="73152" marT="0" marB="0" anchor="ctr">
+                    <a:lnL w="9525" cap="flat" cmpd="sng" algn="ctr">
+                      <a:solidFill>
+                        <a:srgbClr val="C9B8F5"/>
+                      </a:solidFill>
+                      <a:prstDash val="solid"/>
+                      <a:round/>
+                      <a:headEnd type="none" w="med" len="med"/>
+                      <a:tailEnd type="none" w="med" len="med"/>
+                    </a:lnL>
+                    <a:lnR w="9525" cap="flat" cmpd="sng" algn="ctr">
+                      <a:solidFill>
+                        <a:srgbClr val="C9B8F5"/>
+                      </a:solidFill>
+                      <a:prstDash val="solid"/>
+                      <a:round/>
+                      <a:headEnd type="none" w="med" len="med"/>
+                      <a:tailEnd type="none" w="med" len="med"/>
+                    </a:lnR>
+                    <a:lnT w="9525" cap="flat" cmpd="sng" algn="ctr">
+                      <a:solidFill>
+                        <a:srgbClr val="C9B8F5"/>
+                      </a:solidFill>
+                      <a:prstDash val="solid"/>
+                      <a:round/>
+                      <a:headEnd type="none" w="med" len="med"/>
+                      <a:tailEnd type="none" w="med" len="med"/>
+                    </a:lnT>
+                    <a:lnB w="9525" cap="flat" cmpd="sng" algn="ctr">
+                      <a:solidFill>
+                        <a:srgbClr val="C9B8F5"/>
+                      </a:solidFill>
+                      <a:prstDash val="solid"/>
+                      <a:round/>
+                      <a:headEnd type="none" w="med" len="med"/>
+                      <a:tailEnd type="none" w="med" len="med"/>
+                    </a:lnB>
+                  </a:tcPr>
+                </a:tc>
+              </a:tr>
+              <a:tr h="566928">
+                <a:tc>
+                  <a:txBody>
+                    <a:bodyPr/>
+                    <a:lstStyle/>
+                    <a:p>
+                      <a:pPr indent="0" marL="0">
+                        <a:buNone/>
+                      </a:pPr>
+                      <a:r>
+                        <a:rPr lang="en-US" sz="1300" dirty="0">
+                          <a:solidFill>
+                            <a:schemeClr val="tx1"/>
+                          </a:solidFill>
+                        </a:rPr>
+                        <a:t>8-21 févr.</a:t>
+                      </a:r>
+                      <a:endParaRPr lang="en-US" sz="1300" dirty="0"/>
+                    </a:p>
+                  </a:txBody>
+                  <a:tcPr marL="73152" marR="73152" marT="0" marB="0" anchor="ctr">
+                    <a:lnL w="9525" cap="flat" cmpd="sng" algn="ctr">
+                      <a:solidFill>
+                        <a:srgbClr val="C9B8F5"/>
+                      </a:solidFill>
+                      <a:prstDash val="solid"/>
+                      <a:round/>
+                      <a:headEnd type="none" w="med" len="med"/>
+                      <a:tailEnd type="none" w="med" len="med"/>
+                    </a:lnL>
+                    <a:lnR w="9525" cap="flat" cmpd="sng" algn="ctr">
+                      <a:solidFill>
+                        <a:srgbClr val="C9B8F5"/>
+                      </a:solidFill>
+                      <a:prstDash val="solid"/>
+                      <a:round/>
+                      <a:headEnd type="none" w="med" len="med"/>
+                      <a:tailEnd type="none" w="med" len="med"/>
+                    </a:lnR>
+                    <a:lnT w="9525" cap="flat" cmpd="sng" algn="ctr">
+                      <a:solidFill>
+                        <a:srgbClr val="C9B8F5"/>
+                      </a:solidFill>
+                      <a:prstDash val="solid"/>
+                      <a:round/>
+                      <a:headEnd type="none" w="med" len="med"/>
+                      <a:tailEnd type="none" w="med" len="med"/>
+                    </a:lnT>
+                    <a:lnB w="9525" cap="flat" cmpd="sng" algn="ctr">
+                      <a:solidFill>
+                        <a:srgbClr val="C9B8F5"/>
+                      </a:solidFill>
+                      <a:prstDash val="solid"/>
+                      <a:round/>
+                      <a:headEnd type="none" w="med" len="med"/>
+                      <a:tailEnd type="none" w="med" len="med"/>
+                    </a:lnB>
+                  </a:tcPr>
+                </a:tc>
+                <a:tc>
+                  <a:txBody>
+                    <a:bodyPr/>
+                    <a:lstStyle/>
+                    <a:p>
+                      <a:pPr indent="0" marL="0">
+                        <a:buNone/>
+                      </a:pPr>
+                      <a:r>
+                        <a:rPr lang="en-US" sz="1300" dirty="0">
+                          <a:solidFill>
+                            <a:schemeClr val="tx1"/>
+                          </a:solidFill>
+                        </a:rPr>
+                        <a:t>Pic : ftour et shour livrés</a:t>
+                      </a:r>
+                      <a:endParaRPr lang="en-US" sz="1300" dirty="0"/>
+                    </a:p>
+                  </a:txBody>
+                  <a:tcPr marL="73152" marR="73152" marT="0" marB="0" anchor="ctr">
+                    <a:lnL w="9525" cap="flat" cmpd="sng" algn="ctr">
+                      <a:solidFill>
+                        <a:srgbClr val="C9B8F5"/>
+                      </a:solidFill>
+                      <a:prstDash val="solid"/>
+                      <a:round/>
+                      <a:headEnd type="none" w="med" len="med"/>
+                      <a:tailEnd type="none" w="med" len="med"/>
+                    </a:lnL>
+                    <a:lnR w="9525" cap="flat" cmpd="sng" algn="ctr">
+                      <a:solidFill>
+                        <a:srgbClr val="C9B8F5"/>
+                      </a:solidFill>
+                      <a:prstDash val="solid"/>
+                      <a:round/>
+                      <a:headEnd type="none" w="med" len="med"/>
+                      <a:tailEnd type="none" w="med" len="med"/>
+                    </a:lnR>
+                    <a:lnT w="9525" cap="flat" cmpd="sng" algn="ctr">
+                      <a:solidFill>
+                        <a:srgbClr val="C9B8F5"/>
+                      </a:solidFill>
+                      <a:prstDash val="solid"/>
+                      <a:round/>
+                      <a:headEnd type="none" w="med" len="med"/>
+                      <a:tailEnd type="none" w="med" len="med"/>
+                    </a:lnT>
+                    <a:lnB w="9525" cap="flat" cmpd="sng" algn="ctr">
+                      <a:solidFill>
+                        <a:srgbClr val="C9B8F5"/>
+                      </a:solidFill>
+                      <a:prstDash val="solid"/>
+                      <a:round/>
+                      <a:headEnd type="none" w="med" len="med"/>
+                      <a:tailEnd type="none" w="med" len="med"/>
+                    </a:lnB>
+                  </a:tcPr>
+                </a:tc>
+                <a:tc>
+                  <a:txBody>
+                    <a:bodyPr/>
+                    <a:lstStyle/>
+                    <a:p>
+                      <a:pPr indent="0" marL="0">
+                        <a:buNone/>
+                      </a:pPr>
+                      <a:r>
+                        <a:rPr lang="en-US" sz="1300" dirty="0">
+                          <a:solidFill>
+                            <a:schemeClr val="tx1"/>
+                          </a:solidFill>
+                        </a:rPr>
+                        <a:t>35 000 DH</a:t>
+                      </a:r>
+                      <a:endParaRPr lang="en-US" sz="1300" dirty="0"/>
+                    </a:p>
+                  </a:txBody>
+                  <a:tcPr marL="73152" marR="73152" marT="0" marB="0" anchor="ctr">
+                    <a:lnL w="9525" cap="flat" cmpd="sng" algn="ctr">
+                      <a:solidFill>
+                        <a:srgbClr val="C9B8F5"/>
+                      </a:solidFill>
+                      <a:prstDash val="solid"/>
+                      <a:round/>
+                      <a:headEnd type="none" w="med" len="med"/>
+                      <a:tailEnd type="none" w="med" len="med"/>
+                    </a:lnL>
+                    <a:lnR w="9525" cap="flat" cmpd="sng" algn="ctr">
+                      <a:solidFill>
+                        <a:srgbClr val="C9B8F5"/>
+                      </a:solidFill>
+                      <a:prstDash val="solid"/>
+                      <a:round/>
+                      <a:headEnd type="none" w="med" len="med"/>
+                      <a:tailEnd type="none" w="med" len="med"/>
+                    </a:lnR>
+                    <a:lnT w="9525" cap="flat" cmpd="sng" algn="ctr">
+                      <a:solidFill>
+                        <a:srgbClr val="C9B8F5"/>
+                      </a:solidFill>
+                      <a:prstDash val="solid"/>
+                      <a:round/>
+                      <a:headEnd type="none" w="med" len="med"/>
+                      <a:tailEnd type="none" w="med" len="med"/>
+                    </a:lnT>
+                    <a:lnB w="9525" cap="flat" cmpd="sng" algn="ctr">
+                      <a:solidFill>
+                        <a:srgbClr val="C9B8F5"/>
+                      </a:solidFill>
+                      <a:prstDash val="solid"/>
+                      <a:round/>
+                      <a:headEnd type="none" w="med" len="med"/>
+                      <a:tailEnd type="none" w="med" len="med"/>
+                    </a:lnB>
+                  </a:tcPr>
+                </a:tc>
+              </a:tr>
+              <a:tr h="566928">
+                <a:tc>
+                  <a:txBody>
+                    <a:bodyPr/>
+                    <a:lstStyle/>
+                    <a:p>
+                      <a:pPr indent="0" marL="0">
+                        <a:buNone/>
+                      </a:pPr>
+                      <a:r>
+                        <a:rPr lang="en-US" sz="1300" dirty="0">
+                          <a:solidFill>
+                            <a:schemeClr val="tx1"/>
+                          </a:solidFill>
+                        </a:rPr>
+                        <a:t>22-28 févr.</a:t>
+                      </a:r>
+                      <a:endParaRPr lang="en-US" sz="1300" dirty="0"/>
+                    </a:p>
+                  </a:txBody>
+                  <a:tcPr marL="73152" marR="73152" marT="0" marB="0" anchor="ctr">
+                    <a:lnL w="9525" cap="flat" cmpd="sng" algn="ctr">
+                      <a:solidFill>
+                        <a:srgbClr val="C9B8F5"/>
+                      </a:solidFill>
+                      <a:prstDash val="solid"/>
+                      <a:round/>
+                      <a:headEnd type="none" w="med" len="med"/>
+                      <a:tailEnd type="none" w="med" len="med"/>
+                    </a:lnL>
+                    <a:lnR w="9525" cap="flat" cmpd="sng" algn="ctr">
+                      <a:solidFill>
+                        <a:srgbClr val="C9B8F5"/>
+                      </a:solidFill>
+                      <a:prstDash val="solid"/>
+                      <a:round/>
+                      <a:headEnd type="none" w="med" len="med"/>
+                      <a:tailEnd type="none" w="med" len="med"/>
+                    </a:lnR>
+                    <a:lnT w="9525" cap="flat" cmpd="sng" algn="ctr">
+                      <a:solidFill>
+                        <a:srgbClr val="C9B8F5"/>
+                      </a:solidFill>
+                      <a:prstDash val="solid"/>
+                      <a:round/>
+                      <a:headEnd type="none" w="med" len="med"/>
+                      <a:tailEnd type="none" w="med" len="med"/>
+                    </a:lnT>
+                    <a:lnB w="9525" cap="flat" cmpd="sng" algn="ctr">
+                      <a:solidFill>
+                        <a:srgbClr val="C9B8F5"/>
+                      </a:solidFill>
+                      <a:prstDash val="solid"/>
+                      <a:round/>
+                      <a:headEnd type="none" w="med" len="med"/>
+                      <a:tailEnd type="none" w="med" len="med"/>
+                    </a:lnB>
+                  </a:tcPr>
+                </a:tc>
+                <a:tc>
+                  <a:txBody>
+                    <a:bodyPr/>
+                    <a:lstStyle/>
+                    <a:p>
+                      <a:pPr indent="0" marL="0">
+                        <a:buNone/>
+                      </a:pPr>
+                      <a:r>
+                        <a:rPr lang="en-US" sz="1300" dirty="0">
+                          <a:solidFill>
+                            <a:schemeClr val="tx1"/>
+                          </a:solidFill>
+                        </a:rPr>
+                        <a:t>Maintien et relance des nouveaux clients</a:t>
+                      </a:r>
+                      <a:endParaRPr lang="en-US" sz="1300" dirty="0"/>
+                    </a:p>
+                  </a:txBody>
+                  <a:tcPr marL="73152" marR="73152" marT="0" marB="0" anchor="ctr">
+                    <a:lnL w="9525" cap="flat" cmpd="sng" algn="ctr">
+                      <a:solidFill>
+                        <a:srgbClr val="C9B8F5"/>
+                      </a:solidFill>
+                      <a:prstDash val="solid"/>
+                      <a:round/>
+                      <a:headEnd type="none" w="med" len="med"/>
+                      <a:tailEnd type="none" w="med" len="med"/>
+                    </a:lnL>
+                    <a:lnR w="9525" cap="flat" cmpd="sng" algn="ctr">
+                      <a:solidFill>
+                        <a:srgbClr val="C9B8F5"/>
+                      </a:solidFill>
+                      <a:prstDash val="solid"/>
+                      <a:round/>
+                      <a:headEnd type="none" w="med" len="med"/>
+                      <a:tailEnd type="none" w="med" len="med"/>
+                    </a:lnR>
+                    <a:lnT w="9525" cap="flat" cmpd="sng" algn="ctr">
+                      <a:solidFill>
+                        <a:srgbClr val="C9B8F5"/>
+                      </a:solidFill>
+                      <a:prstDash val="solid"/>
+                      <a:round/>
+                      <a:headEnd type="none" w="med" len="med"/>
+                      <a:tailEnd type="none" w="med" len="med"/>
+                    </a:lnT>
+                    <a:lnB w="9525" cap="flat" cmpd="sng" algn="ctr">
+                      <a:solidFill>
+                        <a:srgbClr val="C9B8F5"/>
+                      </a:solidFill>
+                      <a:prstDash val="solid"/>
+                      <a:round/>
+                      <a:headEnd type="none" w="med" len="med"/>
+                      <a:tailEnd type="none" w="med" len="med"/>
+                    </a:lnB>
+                  </a:tcPr>
+                </a:tc>
+                <a:tc>
+                  <a:txBody>
+                    <a:bodyPr/>
+                    <a:lstStyle/>
+                    <a:p>
+                      <a:pPr indent="0" marL="0">
+                        <a:buNone/>
+                      </a:pPr>
+                      <a:r>
+                        <a:rPr lang="en-US" sz="1300" dirty="0">
+                          <a:solidFill>
+                            <a:schemeClr val="tx1"/>
+                          </a:solidFill>
+                        </a:rPr>
+                        <a:t>25 000 DH</a:t>
+                      </a:r>
+                      <a:endParaRPr lang="en-US" sz="1300" dirty="0"/>
+                    </a:p>
+                  </a:txBody>
+                  <a:tcPr marL="73152" marR="73152" marT="0" marB="0" anchor="ctr">
+                    <a:lnL w="9525" cap="flat" cmpd="sng" algn="ctr">
+                      <a:solidFill>
+                        <a:srgbClr val="C9B8F5"/>
+                      </a:solidFill>
+                      <a:prstDash val="solid"/>
+                      <a:round/>
+                      <a:headEnd type="none" w="med" len="med"/>
+                      <a:tailEnd type="none" w="med" len="med"/>
+                    </a:lnL>
+                    <a:lnR w="9525" cap="flat" cmpd="sng" algn="ctr">
+                      <a:solidFill>
+                        <a:srgbClr val="C9B8F5"/>
+                      </a:solidFill>
+                      <a:prstDash val="solid"/>
+                      <a:round/>
+                      <a:headEnd type="none" w="med" len="med"/>
+                      <a:tailEnd type="none" w="med" len="med"/>
+                    </a:lnR>
+                    <a:lnT w="9525" cap="flat" cmpd="sng" algn="ctr">
+                      <a:solidFill>
+                        <a:srgbClr val="C9B8F5"/>
+                      </a:solidFill>
+                      <a:prstDash val="solid"/>
+                      <a:round/>
+                      <a:headEnd type="none" w="med" len="med"/>
+                      <a:tailEnd type="none" w="med" len="med"/>
+                    </a:lnT>
+                    <a:lnB w="9525" cap="flat" cmpd="sng" algn="ctr">
+                      <a:solidFill>
+                        <a:srgbClr val="C9B8F5"/>
+                      </a:solidFill>
+                      <a:prstDash val="solid"/>
+                      <a:round/>
+                      <a:headEnd type="none" w="med" len="med"/>
+                      <a:tailEnd type="none" w="med" len="med"/>
+                    </a:lnB>
+                  </a:tcPr>
+                </a:tc>
+              </a:tr>
+            </a:tbl>
+          </a:graphicData>
+        </a:graphic>
+      </p:graphicFrame>
+      <p:sp>
+        <p:nvSpPr>
+          <p:cNvPr id="11" name="Text 5"/>
           <p:cNvSpPr txBox="1"/>
           <p:nvPr/>
         </p:nvSpPr>
         <p:spPr>
           <a:xfrm>
-            <a:off x="6469380" y="2377440"/>
-            <a:ext cx="4869180" cy="1097280"/>
+            <a:off x="548640" y="5120640"/>
+            <a:ext cx="11064240" cy="320040"/>
           </a:xfrm>
           <a:prstGeom prst="rect">
             <a:avLst/>
@@ -4411,93 +6302,27 @@
               <a:buNone/>
             </a:pPr>
             <a:r>
-              <a:rPr lang="en-US" sz="1400" dirty="0">
-                <a:solidFill>
-                  <a:schemeClr val="tx1"/>
+              <a:rPr lang="en-US" sz="1200" b="1" dirty="0">
+                <a:solidFill>
+                  <a:schemeClr val="accent4"/>
                 </a:solidFill>
               </a:rPr>
-              <a:t>Notification ou SMS à J+14 et J+30 sans commande, avec une offre progressive. Mesurer contre un groupe témoin sans relance.</a:t>
+              <a:t>Ramadan estimé du 8-9 février à début mars : la dernière semaine n'est pas couverte par les 200 000 DH.</a:t>
             </a:r>
-            <a:endParaRPr lang="en-US" sz="1400" dirty="0"/>
-          </a:p>
-        </p:txBody>
-      </p:sp>
-      <p:sp>
-        <p:nvSpPr>
-          <p:cNvPr id="13" name="WhatsApp Business"/>
-          <p:cNvSpPr/>
-          <p:nvPr/>
-        </p:nvSpPr>
-        <p:spPr>
-          <a:xfrm>
-            <a:off x="548640" y="3840480"/>
-            <a:ext cx="5417820" cy="2194560"/>
-          </a:xfrm>
-          <a:prstGeom prst="roundRect">
-            <a:avLst>
-              <a:gd name="adj" fmla="val 5000"/>
-            </a:avLst>
-          </a:prstGeom>
-          <a:solidFill>
-            <a:schemeClr val="bg2"/>
-          </a:solidFill>
-          <a:ln/>
-        </p:spPr>
-      </p:sp>
-      <p:sp>
-        <p:nvSpPr>
-          <p:cNvPr id="14" name="WhatsApp Business circle"/>
-          <p:cNvSpPr/>
-          <p:nvPr/>
-        </p:nvSpPr>
-        <p:spPr>
-          <a:xfrm>
-            <a:off x="822960" y="4114800"/>
-            <a:ext cx="548640" cy="548640"/>
-          </a:xfrm>
-          <a:prstGeom prst="ellipse">
-            <a:avLst/>
-          </a:prstGeom>
-          <a:solidFill>
-            <a:schemeClr val="accent2"/>
-          </a:solidFill>
-          <a:ln/>
-        </p:spPr>
-      </p:sp>
-      <p:pic>
-        <p:nvPicPr>
-          <p:cNvPr id="15" name="WhatsApp Business icon" descr="WhatsApp Business">    </p:cNvPr>
-          <p:cNvPicPr>
-            <a:picLocks noChangeAspect="1"/>
-          </p:cNvPicPr>
-          <p:nvPr/>
-        </p:nvPicPr>
-        <p:blipFill>
-          <a:blip r:embed="rId3"/>
-          <a:stretch>
-            <a:fillRect/>
-          </a:stretch>
-        </p:blipFill>
-        <p:spPr>
-          <a:xfrm>
-            <a:off x="965606" y="4257446"/>
-            <a:ext cx="263347" cy="263347"/>
-          </a:xfrm>
-          <a:prstGeom prst="rect">
-            <a:avLst/>
-          </a:prstGeom>
-        </p:spPr>
-      </p:pic>
-      <p:sp>
-        <p:nvSpPr>
-          <p:cNvPr id="16" name="Text 11"/>
+            <a:endParaRPr lang="en-US" sz="1200" dirty="0"/>
+          </a:p>
+        </p:txBody>
+      </p:sp>
+      <p:sp>
+        <p:nvSpPr>
+          <p:cNvPr id="12" name="Text 6"/>
           <p:cNvSpPr txBox="1"/>
           <p:nvPr/>
         </p:nvSpPr>
         <p:spPr>
           <a:xfrm>
-            <a:off x="1508760" y="4069080"/>
-            <a:ext cx="4229100" cy="640080"/>
+            <a:off x="548640" y="5486400"/>
+            <a:ext cx="11064240" cy="274320"/>
           </a:xfrm>
           <a:prstGeom prst="rect">
             <a:avLst/>
@@ -4506,195 +6331,21 @@
           <a:ln/>
         </p:spPr>
         <p:txBody>
-          <a:bodyPr wrap="square" lIns="0" tIns="0" rIns="0" bIns="0" rtlCol="0" anchor="ctr"/>
+          <a:bodyPr wrap="square" lIns="0" tIns="0" rIns="0" bIns="0" rtlCol="0" anchor="t"/>
           <a:lstStyle/>
           <a:p>
             <a:pPr indent="0" marL="0">
               <a:buNone/>
             </a:pPr>
             <a:r>
-              <a:rPr lang="en-US" sz="1700" b="1" dirty="0">
-                <a:solidFill>
-                  <a:schemeClr val="tx2"/>
+              <a:rPr lang="en-US" sz="1100" dirty="0">
+                <a:solidFill>
+                  <a:schemeClr val="accent5"/>
                 </a:solidFill>
               </a:rPr>
-              <a:t>WhatsApp Business</a:t>
+              <a:t>Montants tous postes confondus (média, codes promo, influence, CRM).</a:t>
             </a:r>
-            <a:endParaRPr lang="en-US" sz="1700" dirty="0"/>
-          </a:p>
-        </p:txBody>
-      </p:sp>
-      <p:sp>
-        <p:nvSpPr>
-          <p:cNvPr id="17" name="Text 12"/>
-          <p:cNvSpPr txBox="1"/>
-          <p:nvPr/>
-        </p:nvSpPr>
-        <p:spPr>
-          <a:xfrm>
-            <a:off x="822960" y="4800600"/>
-            <a:ext cx="4869180" cy="1097280"/>
-          </a:xfrm>
-          <a:prstGeom prst="rect">
-            <a:avLst/>
-          </a:prstGeom>
-          <a:noFill/>
-          <a:ln/>
-        </p:spPr>
-        <p:txBody>
-          <a:bodyPr wrap="square" lIns="0" tIns="0" rIns="0" bIns="0" rtlCol="0" anchor="t"/>
-          <a:lstStyle/>
-          <a:p>
-            <a:pPr indent="0" marL="0">
-              <a:buNone/>
-            </a:pPr>
-            <a:r>
-              <a:rPr lang="en-US" sz="1400" dirty="0">
-                <a:solidFill>
-                  <a:schemeClr val="tx1"/>
-                </a:solidFill>
-              </a:rPr>
-              <a:t>Canal le plus utilisé au Maroc : suivi de commande, offres ciblées sur abonnement, service client.</a:t>
-            </a:r>
-            <a:endParaRPr lang="en-US" sz="1400" dirty="0"/>
-          </a:p>
-        </p:txBody>
-      </p:sp>
-      <p:sp>
-        <p:nvSpPr>
-          <p:cNvPr id="18" name="Passer de Ride à Food"/>
-          <p:cNvSpPr/>
-          <p:nvPr/>
-        </p:nvSpPr>
-        <p:spPr>
-          <a:xfrm>
-            <a:off x="6195060" y="3840480"/>
-            <a:ext cx="5417820" cy="2194560"/>
-          </a:xfrm>
-          <a:prstGeom prst="roundRect">
-            <a:avLst>
-              <a:gd name="adj" fmla="val 5000"/>
-            </a:avLst>
-          </a:prstGeom>
-          <a:solidFill>
-            <a:schemeClr val="bg2"/>
-          </a:solidFill>
-          <a:ln/>
-        </p:spPr>
-      </p:sp>
-      <p:sp>
-        <p:nvSpPr>
-          <p:cNvPr id="19" name="Passer de Ride à Food circle"/>
-          <p:cNvSpPr/>
-          <p:nvPr/>
-        </p:nvSpPr>
-        <p:spPr>
-          <a:xfrm>
-            <a:off x="6469380" y="4114800"/>
-            <a:ext cx="548640" cy="548640"/>
-          </a:xfrm>
-          <a:prstGeom prst="ellipse">
-            <a:avLst/>
-          </a:prstGeom>
-          <a:solidFill>
-            <a:schemeClr val="accent2"/>
-          </a:solidFill>
-          <a:ln/>
-        </p:spPr>
-      </p:sp>
-      <p:pic>
-        <p:nvPicPr>
-          <p:cNvPr id="20" name="Passer de Ride à Food icon" descr="Passer de Ride à Food">    </p:cNvPr>
-          <p:cNvPicPr>
-            <a:picLocks noChangeAspect="1"/>
-          </p:cNvPicPr>
-          <p:nvPr/>
-        </p:nvPicPr>
-        <p:blipFill>
-          <a:blip r:embed="rId4"/>
-          <a:stretch>
-            <a:fillRect/>
-          </a:stretch>
-        </p:blipFill>
-        <p:spPr>
-          <a:xfrm>
-            <a:off x="6612026" y="4257446"/>
-            <a:ext cx="263347" cy="263347"/>
-          </a:xfrm>
-          <a:prstGeom prst="rect">
-            <a:avLst/>
-          </a:prstGeom>
-        </p:spPr>
-      </p:pic>
-      <p:sp>
-        <p:nvSpPr>
-          <p:cNvPr id="21" name="Text 15"/>
-          <p:cNvSpPr txBox="1"/>
-          <p:nvPr/>
-        </p:nvSpPr>
-        <p:spPr>
-          <a:xfrm>
-            <a:off x="7155180" y="4069080"/>
-            <a:ext cx="4229100" cy="640080"/>
-          </a:xfrm>
-          <a:prstGeom prst="rect">
-            <a:avLst/>
-          </a:prstGeom>
-          <a:noFill/>
-          <a:ln/>
-        </p:spPr>
-        <p:txBody>
-          <a:bodyPr wrap="square" lIns="0" tIns="0" rIns="0" bIns="0" rtlCol="0" anchor="ctr"/>
-          <a:lstStyle/>
-          <a:p>
-            <a:pPr indent="0" marL="0">
-              <a:buNone/>
-            </a:pPr>
-            <a:r>
-              <a:rPr lang="en-US" sz="1700" b="1" dirty="0">
-                <a:solidFill>
-                  <a:schemeClr val="tx2"/>
-                </a:solidFill>
-              </a:rPr>
-              <a:t>Passer de Ride à Food</a:t>
-            </a:r>
-            <a:endParaRPr lang="en-US" sz="1700" dirty="0"/>
-          </a:p>
-        </p:txBody>
-      </p:sp>
-      <p:sp>
-        <p:nvSpPr>
-          <p:cNvPr id="22" name="Text 16"/>
-          <p:cNvSpPr txBox="1"/>
-          <p:nvPr/>
-        </p:nvSpPr>
-        <p:spPr>
-          <a:xfrm>
-            <a:off x="6469380" y="4800600"/>
-            <a:ext cx="4869180" cy="1097280"/>
-          </a:xfrm>
-          <a:prstGeom prst="rect">
-            <a:avLst/>
-          </a:prstGeom>
-          <a:noFill/>
-          <a:ln/>
-        </p:spPr>
-        <p:txBody>
-          <a:bodyPr wrap="square" lIns="0" tIns="0" rIns="0" bIns="0" rtlCol="0" anchor="t"/>
-          <a:lstStyle/>
-          <a:p>
-            <a:pPr indent="0" marL="0">
-              <a:buNone/>
-            </a:pPr>
-            <a:r>
-              <a:rPr lang="en-US" sz="1400" dirty="0">
-                <a:solidFill>
-                  <a:schemeClr val="tx1"/>
-                </a:solidFill>
-              </a:rPr>
-              <a:t>Proposer Food aux clients Ride et inversement : un client multi-services commande plus souvent et reste plus longtemps.</a:t>
-            </a:r>
-            <a:endParaRPr lang="en-US" sz="1400" dirty="0"/>
+            <a:endParaRPr lang="en-US" sz="1100" dirty="0"/>
           </a:p>
         </p:txBody>
       </p:sp>
@@ -4803,7 +6454,7 @@
                 <a:ea typeface="Arial" pitchFamily="34" charset="-122"/>
                 <a:cs typeface="Arial" pitchFamily="34" charset="-120"/>
               </a:rPr>
-              <a:t>Influence et communauté</a:t>
+              <a:t>CRM : faire revenir les clients</a:t>
             </a:r>
             <a:endParaRPr lang="en-US" sz="3600" dirty="0"/>
           </a:p>
@@ -4811,18 +6462,18 @@
       </p:sp>
       <p:sp>
         <p:nvSpPr>
-          <p:cNvPr id="3" name="Micro-influenceurs food"/>
+          <p:cNvPr id="3" name="Parrainage"/>
           <p:cNvSpPr/>
           <p:nvPr/>
         </p:nvSpPr>
         <p:spPr>
           <a:xfrm>
             <a:off x="548640" y="1417320"/>
-            <a:ext cx="3535680" cy="2743200"/>
+            <a:ext cx="5417820" cy="2194560"/>
           </a:xfrm>
           <a:prstGeom prst="roundRect">
             <a:avLst>
-              <a:gd name="adj" fmla="val 4000"/>
+              <a:gd name="adj" fmla="val 5000"/>
             </a:avLst>
           </a:prstGeom>
           <a:solidFill>
@@ -4833,7 +6484,7 @@
       </p:sp>
       <p:sp>
         <p:nvSpPr>
-          <p:cNvPr id="4" name="Micro-influenceurs food circle"/>
+          <p:cNvPr id="4" name="Parrainage circle"/>
           <p:cNvSpPr/>
           <p:nvPr/>
         </p:nvSpPr>
@@ -4846,14 +6497,14 @@
             <a:avLst/>
           </a:prstGeom>
           <a:solidFill>
-            <a:schemeClr val="accent1"/>
+            <a:schemeClr val="accent2"/>
           </a:solidFill>
           <a:ln/>
         </p:spPr>
       </p:sp>
       <p:pic>
         <p:nvPicPr>
-          <p:cNvPr id="5" name="Micro-influenceurs food icon" descr="Micro-influenceurs food">    </p:cNvPr>
+          <p:cNvPr id="5" name="Parrainage icon" descr="Parrainage">    </p:cNvPr>
           <p:cNvPicPr>
             <a:picLocks noChangeAspect="1"/>
           </p:cNvPicPr>
@@ -4884,7 +6535,7 @@
         <p:spPr>
           <a:xfrm>
             <a:off x="1508760" y="1645920"/>
-            <a:ext cx="2346960" cy="640080"/>
+            <a:ext cx="4229100" cy="640080"/>
           </a:xfrm>
           <a:prstGeom prst="rect">
             <a:avLst/>
@@ -4905,7 +6556,7 @@
                   <a:schemeClr val="tx2"/>
                 </a:solidFill>
               </a:rPr>
-              <a:t>Micro-influenceurs food</a:t>
+              <a:t>Parrainage</a:t>
             </a:r>
             <a:endParaRPr lang="en-US" sz="1700" dirty="0"/>
           </a:p>
@@ -4920,7 +6571,7 @@
         <p:spPr>
           <a:xfrm>
             <a:off x="822960" y="2377440"/>
-            <a:ext cx="2987040" cy="1645920"/>
+            <a:ext cx="4869180" cy="1097280"/>
           </a:xfrm>
           <a:prstGeom prst="rect">
             <a:avLst/>
@@ -4941,7 +6592,7 @@
                   <a:schemeClr val="tx1"/>
                 </a:solidFill>
               </a:rPr>
-              <a:t>8 à 10 créateurs de 10K à 100K abonnés, d'abord à Casablanca, chacun avec son code promo pour mesurer les ventes.</a:t>
+              <a:t>Un code par client : une réduction pour le parrain et pour le filleul. Le canal d'acquisition le moins cher à mettre en place.</a:t>
             </a:r>
             <a:endParaRPr lang="en-US" sz="1400" dirty="0"/>
           </a:p>
@@ -4949,18 +6600,18 @@
       </p:sp>
       <p:sp>
         <p:nvSpPr>
-          <p:cNvPr id="8" name="Contenus créateurs boostés"/>
+          <p:cNvPr id="8" name="Relance des inactifs"/>
           <p:cNvSpPr/>
           <p:nvPr/>
         </p:nvSpPr>
         <p:spPr>
           <a:xfrm>
-            <a:off x="4312920" y="1417320"/>
-            <a:ext cx="3535680" cy="2743200"/>
+            <a:off x="6195060" y="1417320"/>
+            <a:ext cx="5417820" cy="2194560"/>
           </a:xfrm>
           <a:prstGeom prst="roundRect">
             <a:avLst>
-              <a:gd name="adj" fmla="val 4000"/>
+              <a:gd name="adj" fmla="val 5000"/>
             </a:avLst>
           </a:prstGeom>
           <a:solidFill>
@@ -4971,27 +6622,27 @@
       </p:sp>
       <p:sp>
         <p:nvSpPr>
-          <p:cNvPr id="9" name="Contenus créateurs boostés circle"/>
+          <p:cNvPr id="9" name="Relance des inactifs circle"/>
           <p:cNvSpPr/>
           <p:nvPr/>
         </p:nvSpPr>
         <p:spPr>
           <a:xfrm>
-            <a:off x="4587240" y="1691640"/>
+            <a:off x="6469380" y="1691640"/>
             <a:ext cx="548640" cy="548640"/>
           </a:xfrm>
           <a:prstGeom prst="ellipse">
             <a:avLst/>
           </a:prstGeom>
           <a:solidFill>
-            <a:schemeClr val="accent1"/>
+            <a:schemeClr val="accent2"/>
           </a:solidFill>
           <a:ln/>
         </p:spPr>
       </p:sp>
       <p:pic>
         <p:nvPicPr>
-          <p:cNvPr id="10" name="Contenus créateurs boostés icon" descr="Contenus créateurs boostés">    </p:cNvPr>
+          <p:cNvPr id="10" name="Relance des inactifs icon" descr="Relance des inactifs">    </p:cNvPr>
           <p:cNvPicPr>
             <a:picLocks noChangeAspect="1"/>
           </p:cNvPicPr>
@@ -5005,7 +6656,7 @@
         </p:blipFill>
         <p:spPr>
           <a:xfrm>
-            <a:off x="4729886" y="1834286"/>
+            <a:off x="6612026" y="1834286"/>
             <a:ext cx="263347" cy="263347"/>
           </a:xfrm>
           <a:prstGeom prst="rect">
@@ -5021,8 +6672,8 @@
         </p:nvSpPr>
         <p:spPr>
           <a:xfrm>
-            <a:off x="5273040" y="1645920"/>
-            <a:ext cx="2346960" cy="640080"/>
+            <a:off x="7155180" y="1645920"/>
+            <a:ext cx="4229100" cy="640080"/>
           </a:xfrm>
           <a:prstGeom prst="rect">
             <a:avLst/>
@@ -5043,7 +6694,7 @@
                   <a:schemeClr val="tx2"/>
                 </a:solidFill>
               </a:rPr>
-              <a:t>Contenus créateurs boostés</a:t>
+              <a:t>Relance des inactifs</a:t>
             </a:r>
             <a:endParaRPr lang="en-US" sz="1700" dirty="0"/>
           </a:p>
@@ -5057,8 +6708,8 @@
         </p:nvSpPr>
         <p:spPr>
           <a:xfrm>
-            <a:off x="4587240" y="2377440"/>
-            <a:ext cx="2987040" cy="1645920"/>
+            <a:off x="6469380" y="2377440"/>
+            <a:ext cx="4869180" cy="1097280"/>
           </a:xfrm>
           <a:prstGeom prst="rect">
             <a:avLst/>
@@ -5079,7 +6730,7 @@
                   <a:schemeClr val="tx1"/>
                 </a:solidFill>
               </a:rPr>
-              <a:t>Republier les meilleures vidéos de créateurs comme pubs TikTok et Meta : souvent moins chères qu'un créatif produit en interne.</a:t>
+              <a:t>Notification ou SMS à J+14 et J+30 sans commande, avec une offre progressive. Mesurer contre un groupe témoin sans relance.</a:t>
             </a:r>
             <a:endParaRPr lang="en-US" sz="1400" dirty="0"/>
           </a:p>
@@ -5087,18 +6738,18 @@
       </p:sp>
       <p:sp>
         <p:nvSpPr>
-          <p:cNvPr id="13" name="Livreurs et chauffeurs ambassadeurs"/>
+          <p:cNvPr id="13" name="WhatsApp Business"/>
           <p:cNvSpPr/>
           <p:nvPr/>
         </p:nvSpPr>
         <p:spPr>
           <a:xfrm>
-            <a:off x="8077200" y="1417320"/>
-            <a:ext cx="3535680" cy="2743200"/>
+            <a:off x="548640" y="3840480"/>
+            <a:ext cx="5417820" cy="2194560"/>
           </a:xfrm>
           <a:prstGeom prst="roundRect">
             <a:avLst>
-              <a:gd name="adj" fmla="val 4000"/>
+              <a:gd name="adj" fmla="val 5000"/>
             </a:avLst>
           </a:prstGeom>
           <a:solidFill>
@@ -5109,27 +6760,27 @@
       </p:sp>
       <p:sp>
         <p:nvSpPr>
-          <p:cNvPr id="14" name="Livreurs et chauffeurs ambassadeurs circle"/>
+          <p:cNvPr id="14" name="WhatsApp Business circle"/>
           <p:cNvSpPr/>
           <p:nvPr/>
         </p:nvSpPr>
         <p:spPr>
           <a:xfrm>
-            <a:off x="8351520" y="1691640"/>
+            <a:off x="822960" y="4114800"/>
             <a:ext cx="548640" cy="548640"/>
           </a:xfrm>
           <a:prstGeom prst="ellipse">
             <a:avLst/>
           </a:prstGeom>
           <a:solidFill>
-            <a:schemeClr val="accent1"/>
+            <a:schemeClr val="accent2"/>
           </a:solidFill>
           <a:ln/>
         </p:spPr>
       </p:sp>
       <p:pic>
         <p:nvPicPr>
-          <p:cNvPr id="15" name="Livreurs et chauffeurs ambassadeurs icon" descr="Livreurs et chauffeurs ambassadeurs">    </p:cNvPr>
+          <p:cNvPr id="15" name="WhatsApp Business icon" descr="WhatsApp Business">    </p:cNvPr>
           <p:cNvPicPr>
             <a:picLocks noChangeAspect="1"/>
           </p:cNvPicPr>
@@ -5143,7 +6794,7 @@
         </p:blipFill>
         <p:spPr>
           <a:xfrm>
-            <a:off x="8494166" y="1834286"/>
+            <a:off x="965606" y="4257446"/>
             <a:ext cx="263347" cy="263347"/>
           </a:xfrm>
           <a:prstGeom prst="rect">
@@ -5159,8 +6810,8 @@
         </p:nvSpPr>
         <p:spPr>
           <a:xfrm>
-            <a:off x="9037320" y="1645920"/>
-            <a:ext cx="2346960" cy="640080"/>
+            <a:off x="1508760" y="4069080"/>
+            <a:ext cx="4229100" cy="640080"/>
           </a:xfrm>
           <a:prstGeom prst="rect">
             <a:avLst/>
@@ -5181,7 +6832,7 @@
                   <a:schemeClr val="tx2"/>
                 </a:solidFill>
               </a:rPr>
-              <a:t>Livreurs et chauffeurs ambassadeurs</a:t>
+              <a:t>WhatsApp Business</a:t>
             </a:r>
             <a:endParaRPr lang="en-US" sz="1700" dirty="0"/>
           </a:p>
@@ -5195,8 +6846,8 @@
         </p:nvSpPr>
         <p:spPr>
           <a:xfrm>
-            <a:off x="8351520" y="2377440"/>
-            <a:ext cx="2987040" cy="1645920"/>
+            <a:off x="822960" y="4800600"/>
+            <a:ext cx="4869180" cy="1097280"/>
           </a:xfrm>
           <a:prstGeom prst="rect">
             <a:avLst/>
@@ -5217,7 +6868,7 @@
                   <a:schemeClr val="tx1"/>
                 </a:solidFill>
               </a:rPr>
-              <a:t>Témoignages vidéo pour le recrutement et pour la confiance des clients. Sert aussi la marque employeur.</a:t>
+              <a:t>Canal le plus utilisé au Maroc : suivi de commande, offres ciblées sur abonnement, service client.</a:t>
             </a:r>
             <a:endParaRPr lang="en-US" sz="1400" dirty="0"/>
           </a:p>
@@ -5225,18 +6876,18 @@
       </p:sp>
       <p:sp>
         <p:nvSpPr>
-          <p:cNvPr id="18" name="Règle influence"/>
+          <p:cNvPr id="18" name="Passer de Ride à Food"/>
           <p:cNvSpPr/>
           <p:nvPr/>
         </p:nvSpPr>
         <p:spPr>
           <a:xfrm>
-            <a:off x="548640" y="4434840"/>
-            <a:ext cx="11064240" cy="1371600"/>
+            <a:off x="6195060" y="3840480"/>
+            <a:ext cx="5417820" cy="2194560"/>
           </a:xfrm>
           <a:prstGeom prst="roundRect">
             <a:avLst>
-              <a:gd name="adj" fmla="val 8000"/>
+              <a:gd name="adj" fmla="val 5000"/>
             </a:avLst>
           </a:prstGeom>
           <a:solidFill>
@@ -5247,27 +6898,27 @@
       </p:sp>
       <p:sp>
         <p:nvSpPr>
-          <p:cNvPr id="19" name="Règle circle"/>
+          <p:cNvPr id="19" name="Passer de Ride à Food circle"/>
           <p:cNvSpPr/>
           <p:nvPr/>
         </p:nvSpPr>
         <p:spPr>
           <a:xfrm>
-            <a:off x="822960" y="4800600"/>
-            <a:ext cx="594360" cy="594360"/>
+            <a:off x="6469380" y="4114800"/>
+            <a:ext cx="548640" cy="548640"/>
           </a:xfrm>
           <a:prstGeom prst="ellipse">
             <a:avLst/>
           </a:prstGeom>
           <a:solidFill>
-            <a:schemeClr val="accent3"/>
+            <a:schemeClr val="accent2"/>
           </a:solidFill>
           <a:ln/>
         </p:spPr>
       </p:sp>
       <p:pic>
         <p:nvPicPr>
-          <p:cNvPr id="20" name="Règle icon" descr="Règle">    </p:cNvPr>
+          <p:cNvPr id="20" name="Passer de Ride à Food icon" descr="Passer de Ride à Food">    </p:cNvPr>
           <p:cNvPicPr>
             <a:picLocks noChangeAspect="1"/>
           </p:cNvPicPr>
@@ -5281,8 +6932,8 @@
         </p:blipFill>
         <p:spPr>
           <a:xfrm>
-            <a:off x="977494" y="4955134"/>
-            <a:ext cx="285293" cy="285293"/>
+            <a:off x="6612026" y="4257446"/>
+            <a:ext cx="263347" cy="263347"/>
           </a:xfrm>
           <a:prstGeom prst="rect">
             <a:avLst/>
@@ -5297,8 +6948,8 @@
         </p:nvSpPr>
         <p:spPr>
           <a:xfrm>
-            <a:off x="1645920" y="4526280"/>
-            <a:ext cx="9692640" cy="1188720"/>
+            <a:off x="7155180" y="4069080"/>
+            <a:ext cx="4229100" cy="640080"/>
           </a:xfrm>
           <a:prstGeom prst="rect">
             <a:avLst/>
@@ -5314,25 +6965,50 @@
               <a:buNone/>
             </a:pPr>
             <a:r>
-              <a:rPr lang="en-US" sz="1600" b="1" dirty="0">
-                <a:solidFill>
-                  <a:schemeClr val="tx1"/>
+              <a:rPr lang="en-US" sz="1700" b="1" dirty="0">
+                <a:solidFill>
+                  <a:schemeClr val="tx2"/>
                 </a:solidFill>
               </a:rPr>
-              <a:t>Règle : </a:t>
+              <a:t>Passer de Ride à Food</a:t>
             </a:r>
+            <a:endParaRPr lang="en-US" sz="1700" dirty="0"/>
+          </a:p>
+        </p:txBody>
+      </p:sp>
+      <p:sp>
+        <p:nvSpPr>
+          <p:cNvPr id="22" name="Text 16"/>
+          <p:cNvSpPr txBox="1"/>
+          <p:nvPr/>
+        </p:nvSpPr>
+        <p:spPr>
+          <a:xfrm>
+            <a:off x="6469380" y="4800600"/>
+            <a:ext cx="4869180" cy="1097280"/>
+          </a:xfrm>
+          <a:prstGeom prst="rect">
+            <a:avLst/>
+          </a:prstGeom>
+          <a:noFill/>
+          <a:ln/>
+        </p:spPr>
+        <p:txBody>
+          <a:bodyPr wrap="square" lIns="0" tIns="0" rIns="0" bIns="0" rtlCol="0" anchor="t"/>
+          <a:lstStyle/>
+          <a:p>
             <a:pPr indent="0" marL="0">
               <a:buNone/>
             </a:pPr>
             <a:r>
-              <a:rPr lang="en-US" sz="1600" dirty="0">
+              <a:rPr lang="en-US" sz="1400" dirty="0">
                 <a:solidFill>
                   <a:schemeClr val="tx1"/>
                 </a:solidFill>
               </a:rPr>
-              <a:t>payer à la performance (code promo, commission) plutôt qu'au forfait, et valider chaque contenu avant publication, notamment sur les mentions « VTC » et les promesses de délai.</a:t>
+              <a:t>Proposer Food aux clients Ride et inversement : un client multi-services commande plus souvent et reste plus longtemps.</a:t>
             </a:r>
-            <a:endParaRPr lang="en-US" sz="1600" dirty="0"/>
+            <a:endParaRPr lang="en-US" sz="1400" dirty="0"/>
           </a:p>
         </p:txBody>
       </p:sp>
@@ -5441,7 +7117,7 @@
                 <a:ea typeface="Arial" pitchFamily="34" charset="-122"/>
                 <a:cs typeface="Arial" pitchFamily="34" charset="-120"/>
               </a:rPr>
-              <a:t>Plan à 30, 60 et 90 jours</a:t>
+              <a:t>Influence et communauté</a:t>
             </a:r>
             <a:endParaRPr lang="en-US" sz="3600" dirty="0"/>
           </a:p>
@@ -5449,18 +7125,18 @@
       </p:sp>
       <p:sp>
         <p:nvSpPr>
-          <p:cNvPr id="3" name="30 jours"/>
+          <p:cNvPr id="3" name="Micro-influenceurs food"/>
           <p:cNvSpPr/>
           <p:nvPr/>
         </p:nvSpPr>
         <p:spPr>
           <a:xfrm>
             <a:off x="548640" y="1417320"/>
-            <a:ext cx="3520440" cy="4572000"/>
+            <a:ext cx="3535680" cy="2743200"/>
           </a:xfrm>
           <a:prstGeom prst="roundRect">
             <a:avLst>
-              <a:gd name="adj" fmla="val 3117"/>
+              <a:gd name="adj" fmla="val 4000"/>
             </a:avLst>
           </a:prstGeom>
           <a:solidFill>
@@ -5471,72 +7147,58 @@
       </p:sp>
       <p:sp>
         <p:nvSpPr>
-          <p:cNvPr id="4" name="30 jours pastille"/>
+          <p:cNvPr id="4" name="Micro-influenceurs food circle"/>
           <p:cNvSpPr/>
           <p:nvPr/>
         </p:nvSpPr>
         <p:spPr>
           <a:xfrm>
-            <a:off x="822960" y="1645920"/>
-            <a:ext cx="1463040" cy="457200"/>
-          </a:xfrm>
-          <a:prstGeom prst="roundRect">
-            <a:avLst>
-              <a:gd name="adj" fmla="val 50000"/>
-            </a:avLst>
+            <a:off x="822960" y="1691640"/>
+            <a:ext cx="548640" cy="548640"/>
+          </a:xfrm>
+          <a:prstGeom prst="ellipse">
+            <a:avLst/>
           </a:prstGeom>
           <a:solidFill>
-            <a:schemeClr val="accent2"/>
+            <a:schemeClr val="accent1"/>
           </a:solidFill>
           <a:ln/>
         </p:spPr>
       </p:sp>
-      <p:sp>
-        <p:nvSpPr>
-          <p:cNvPr id="5" name="Text 3"/>
+      <p:pic>
+        <p:nvPicPr>
+          <p:cNvPr id="5" name="Micro-influenceurs food icon" descr="Micro-influenceurs food">    </p:cNvPr>
+          <p:cNvPicPr>
+            <a:picLocks noChangeAspect="1"/>
+          </p:cNvPicPr>
+          <p:nvPr/>
+        </p:nvPicPr>
+        <p:blipFill>
+          <a:blip r:embed="rId1"/>
+          <a:stretch>
+            <a:fillRect/>
+          </a:stretch>
+        </p:blipFill>
+        <p:spPr>
+          <a:xfrm>
+            <a:off x="965606" y="1834286"/>
+            <a:ext cx="263347" cy="263347"/>
+          </a:xfrm>
+          <a:prstGeom prst="rect">
+            <a:avLst/>
+          </a:prstGeom>
+        </p:spPr>
+      </p:pic>
+      <p:sp>
+        <p:nvSpPr>
+          <p:cNvPr id="6" name="Text 3"/>
           <p:cNvSpPr txBox="1"/>
           <p:nvPr/>
         </p:nvSpPr>
         <p:spPr>
           <a:xfrm>
-            <a:off x="822960" y="1645920"/>
-            <a:ext cx="1463040" cy="457200"/>
-          </a:xfrm>
-          <a:prstGeom prst="rect">
-            <a:avLst/>
-          </a:prstGeom>
-          <a:noFill/>
-          <a:ln/>
-        </p:spPr>
-        <p:txBody>
-          <a:bodyPr wrap="square" lIns="0" tIns="0" rIns="0" bIns="0" rtlCol="0" anchor="ctr"/>
-          <a:lstStyle/>
-          <a:p>
-            <a:pPr algn="ctr" indent="0" marL="0">
-              <a:buNone/>
-            </a:pPr>
-            <a:r>
-              <a:rPr lang="en-US" sz="1500" b="1" dirty="0">
-                <a:solidFill>
-                  <a:schemeClr val="bg1"/>
-                </a:solidFill>
-              </a:rPr>
-              <a:t>30 jours</a:t>
-            </a:r>
-            <a:endParaRPr lang="en-US" sz="1500" dirty="0"/>
-          </a:p>
-        </p:txBody>
-      </p:sp>
-      <p:sp>
-        <p:nvSpPr>
-          <p:cNvPr id="6" name="Text 4"/>
-          <p:cNvSpPr txBox="1"/>
-          <p:nvPr/>
-        </p:nvSpPr>
-        <p:spPr>
-          <a:xfrm>
-            <a:off x="2423160" y="1645920"/>
-            <a:ext cx="1463040" cy="457200"/>
+            <a:off x="1508760" y="1645920"/>
+            <a:ext cx="2346960" cy="640080"/>
           </a:xfrm>
           <a:prstGeom prst="rect">
             <a:avLst/>
@@ -5552,27 +7214,27 @@
               <a:buNone/>
             </a:pPr>
             <a:r>
-              <a:rPr lang="en-US" sz="1800" b="1" dirty="0">
+              <a:rPr lang="en-US" sz="1700" b="1" dirty="0">
                 <a:solidFill>
                   <a:schemeClr val="tx2"/>
                 </a:solidFill>
               </a:rPr>
-              <a:t>Lancer</a:t>
+              <a:t>Micro-influenceurs food</a:t>
             </a:r>
-            <a:endParaRPr lang="en-US" sz="1800" dirty="0"/>
-          </a:p>
-        </p:txBody>
-      </p:sp>
-      <p:sp>
-        <p:nvSpPr>
-          <p:cNvPr id="7" name="Text 5"/>
+            <a:endParaRPr lang="en-US" sz="1700" dirty="0"/>
+          </a:p>
+        </p:txBody>
+      </p:sp>
+      <p:sp>
+        <p:nvSpPr>
+          <p:cNvPr id="7" name="Text 4"/>
           <p:cNvSpPr txBox="1"/>
           <p:nvPr/>
         </p:nvSpPr>
         <p:spPr>
           <a:xfrm>
             <a:off x="822960" y="2377440"/>
-            <a:ext cx="3017520" cy="3474720"/>
+            <a:ext cx="2987040" cy="1645920"/>
           </a:xfrm>
           <a:prstGeom prst="rect">
             <a:avLst/>
@@ -5582,341 +7244,37 @@
         </p:spPr>
         <p:txBody>
           <a:bodyPr wrap="square" lIns="0" tIns="0" rIns="0" bIns="0" rtlCol="0" anchor="t"/>
-          <a:lstStyle/>
-          <a:p>
-            <a:pPr marL="342900" indent="-342900">
-              <a:spcAft>
-                <a:spcPts val="800"/>
-              </a:spcAft>
-              <a:buSzPct val="100000"/>
-              <a:buChar char="•"/>
-            </a:pPr>
-            <a:r>
-              <a:rPr lang="en-US" sz="1500" dirty="0">
-                <a:solidFill>
-                  <a:schemeClr val="tx1"/>
-                </a:solidFill>
-              </a:rPr>
-              <a:t>Mesure de référence : coût par commande, rétention</a:t>
-            </a:r>
-            <a:endParaRPr lang="en-US" sz="1500" dirty="0"/>
-          </a:p>
-          <a:p>
-            <a:pPr marL="342900" indent="-342900">
-              <a:spcAft>
-                <a:spcPts val="800"/>
-              </a:spcAft>
-              <a:buSzPct val="100000"/>
-              <a:buChar char="•"/>
-            </a:pPr>
-            <a:r>
-              <a:rPr lang="en-US" sz="1500" dirty="0">
-                <a:solidFill>
-                  <a:schemeClr val="tx1"/>
-                </a:solidFill>
-              </a:rPr>
-              <a:t>Campagnes Meta, TikTok et Google sur la 1re commande</a:t>
-            </a:r>
-            <a:endParaRPr lang="en-US" sz="1500" dirty="0"/>
-          </a:p>
-          <a:p>
-            <a:pPr marL="342900" indent="-342900">
-              <a:spcAft>
-                <a:spcPts val="800"/>
-              </a:spcAft>
-              <a:buSzPct val="100000"/>
-              <a:buChar char="•"/>
-            </a:pPr>
-            <a:r>
-              <a:rPr lang="en-US" sz="1500" dirty="0">
-                <a:solidFill>
-                  <a:schemeClr val="tx1"/>
-                </a:solidFill>
-              </a:rPr>
-              <a:t>Yassir Friday (Black Friday)</a:t>
-            </a:r>
-            <a:endParaRPr lang="en-US" sz="1500" dirty="0"/>
-          </a:p>
-          <a:p>
-            <a:pPr marL="342900" indent="-342900">
-              <a:spcAft>
-                <a:spcPts val="800"/>
-              </a:spcAft>
-              <a:buSzPct val="100000"/>
-              <a:buChar char="•"/>
-            </a:pPr>
-            <a:r>
-              <a:rPr lang="en-US" sz="1500" dirty="0">
-                <a:solidFill>
-                  <a:schemeClr val="tx1"/>
-                </a:solidFill>
-              </a:rPr>
-              <a:t>Page ville Casablanca et 2 guides food</a:t>
-            </a:r>
-            <a:endParaRPr lang="en-US" sz="1500" dirty="0"/>
-          </a:p>
-          <a:p>
-            <a:pPr marL="342900" indent="-342900">
-              <a:spcAft>
-                <a:spcPts val="800"/>
-              </a:spcAft>
-              <a:buSzPct val="100000"/>
-              <a:buChar char="•"/>
-            </a:pPr>
-            <a:r>
-              <a:rPr lang="en-US" sz="1500" dirty="0">
-                <a:solidFill>
-                  <a:schemeClr val="tx1"/>
-                </a:solidFill>
-              </a:rPr>
-              <a:t>Parrainage et relance des inactifs</a:t>
-            </a:r>
-            <a:endParaRPr lang="en-US" sz="1500" dirty="0"/>
-          </a:p>
-        </p:txBody>
-      </p:sp>
-      <p:sp>
-        <p:nvSpPr>
-          <p:cNvPr id="8" name="60 jours"/>
-          <p:cNvSpPr/>
-          <p:nvPr/>
-        </p:nvSpPr>
-        <p:spPr>
-          <a:xfrm>
-            <a:off x="4297680" y="1417320"/>
-            <a:ext cx="3520440" cy="4572000"/>
-          </a:xfrm>
-          <a:prstGeom prst="roundRect">
-            <a:avLst>
-              <a:gd name="adj" fmla="val 3117"/>
-            </a:avLst>
-          </a:prstGeom>
-          <a:solidFill>
-            <a:schemeClr val="bg2"/>
-          </a:solidFill>
-          <a:ln/>
-        </p:spPr>
-      </p:sp>
-      <p:sp>
-        <p:nvSpPr>
-          <p:cNvPr id="9" name="60 jours pastille"/>
-          <p:cNvSpPr/>
-          <p:nvPr/>
-        </p:nvSpPr>
-        <p:spPr>
-          <a:xfrm>
-            <a:off x="4572000" y="1645920"/>
-            <a:ext cx="1463040" cy="457200"/>
-          </a:xfrm>
-          <a:prstGeom prst="roundRect">
-            <a:avLst>
-              <a:gd name="adj" fmla="val 50000"/>
-            </a:avLst>
-          </a:prstGeom>
-          <a:solidFill>
-            <a:schemeClr val="accent1"/>
-          </a:solidFill>
-          <a:ln/>
-        </p:spPr>
-      </p:sp>
-      <p:sp>
-        <p:nvSpPr>
-          <p:cNvPr id="10" name="Text 8"/>
-          <p:cNvSpPr txBox="1"/>
-          <p:nvPr/>
-        </p:nvSpPr>
-        <p:spPr>
-          <a:xfrm>
-            <a:off x="4572000" y="1645920"/>
-            <a:ext cx="1463040" cy="457200"/>
-          </a:xfrm>
-          <a:prstGeom prst="rect">
-            <a:avLst/>
-          </a:prstGeom>
-          <a:noFill/>
-          <a:ln/>
-        </p:spPr>
-        <p:txBody>
-          <a:bodyPr wrap="square" lIns="0" tIns="0" rIns="0" bIns="0" rtlCol="0" anchor="ctr"/>
-          <a:lstStyle/>
-          <a:p>
-            <a:pPr algn="ctr" indent="0" marL="0">
-              <a:buNone/>
-            </a:pPr>
-            <a:r>
-              <a:rPr lang="en-US" sz="1500" b="1" dirty="0">
-                <a:solidFill>
-                  <a:schemeClr val="bg1"/>
-                </a:solidFill>
-              </a:rPr>
-              <a:t>60 jours</a:t>
-            </a:r>
-            <a:endParaRPr lang="en-US" sz="1500" dirty="0"/>
-          </a:p>
-        </p:txBody>
-      </p:sp>
-      <p:sp>
-        <p:nvSpPr>
-          <p:cNvPr id="11" name="Text 9"/>
-          <p:cNvSpPr txBox="1"/>
-          <p:nvPr/>
-        </p:nvSpPr>
-        <p:spPr>
-          <a:xfrm>
-            <a:off x="6172200" y="1645920"/>
-            <a:ext cx="1463040" cy="457200"/>
-          </a:xfrm>
-          <a:prstGeom prst="rect">
-            <a:avLst/>
-          </a:prstGeom>
-          <a:noFill/>
-          <a:ln/>
-        </p:spPr>
-        <p:txBody>
-          <a:bodyPr wrap="square" lIns="0" tIns="0" rIns="0" bIns="0" rtlCol="0" anchor="ctr"/>
           <a:lstStyle/>
           <a:p>
             <a:pPr indent="0" marL="0">
               <a:buNone/>
             </a:pPr>
             <a:r>
-              <a:rPr lang="en-US" sz="1800" b="1" dirty="0">
-                <a:solidFill>
-                  <a:schemeClr val="tx2"/>
+              <a:rPr lang="en-US" sz="1400" dirty="0">
+                <a:solidFill>
+                  <a:schemeClr val="tx1"/>
                 </a:solidFill>
               </a:rPr>
-              <a:t>Optimiser</a:t>
+              <a:t>6 à 8 créateurs de 10K à 100K abonnés, d'abord à Casablanca, chacun avec son code promo pour mesurer les ventes.</a:t>
             </a:r>
-            <a:endParaRPr lang="en-US" sz="1800" dirty="0"/>
-          </a:p>
-        </p:txBody>
-      </p:sp>
-      <p:sp>
-        <p:nvSpPr>
-          <p:cNvPr id="12" name="Text 10"/>
-          <p:cNvSpPr txBox="1"/>
-          <p:nvPr/>
-        </p:nvSpPr>
-        <p:spPr>
-          <a:xfrm>
-            <a:off x="4572000" y="2377440"/>
-            <a:ext cx="3017520" cy="3474720"/>
-          </a:xfrm>
-          <a:prstGeom prst="rect">
-            <a:avLst/>
-          </a:prstGeom>
-          <a:noFill/>
-          <a:ln/>
-        </p:spPr>
-        <p:txBody>
-          <a:bodyPr wrap="square" lIns="0" tIns="0" rIns="0" bIns="0" rtlCol="0" anchor="t"/>
-          <a:lstStyle/>
-          <a:p>
-            <a:pPr marL="342900" indent="-342900">
-              <a:spcAft>
-                <a:spcPts val="800"/>
-              </a:spcAft>
-              <a:buSzPct val="100000"/>
-              <a:buChar char="•"/>
-            </a:pPr>
-            <a:r>
-              <a:rPr lang="en-US" sz="1500" dirty="0">
-                <a:solidFill>
-                  <a:schemeClr val="tx1"/>
-                </a:solidFill>
-              </a:rPr>
-              <a:t>Réallouer le budget selon le coût par commande</a:t>
-            </a:r>
-            <a:endParaRPr lang="en-US" sz="1500" dirty="0"/>
-          </a:p>
-          <a:p>
-            <a:pPr marL="342900" indent="-342900">
-              <a:spcAft>
-                <a:spcPts val="800"/>
-              </a:spcAft>
-              <a:buSzPct val="100000"/>
-              <a:buChar char="•"/>
-            </a:pPr>
-            <a:r>
-              <a:rPr lang="en-US" sz="1500" dirty="0">
-                <a:solidFill>
-                  <a:schemeClr val="tx1"/>
-                </a:solidFill>
-              </a:rPr>
-              <a:t>Baromètre data et premier communiqué</a:t>
-            </a:r>
-            <a:endParaRPr lang="en-US" sz="1500" dirty="0"/>
-          </a:p>
-          <a:p>
-            <a:pPr marL="342900" indent="-342900">
-              <a:spcAft>
-                <a:spcPts val="800"/>
-              </a:spcAft>
-              <a:buSzPct val="100000"/>
-              <a:buChar char="•"/>
-            </a:pPr>
-            <a:r>
-              <a:rPr lang="en-US" sz="1500" dirty="0">
-                <a:solidFill>
-                  <a:schemeClr val="tx1"/>
-                </a:solidFill>
-              </a:rPr>
-              <a:t>Kit « Commandez sur Yassir » aux restaurants</a:t>
-            </a:r>
-            <a:endParaRPr lang="en-US" sz="1500" dirty="0"/>
-          </a:p>
-          <a:p>
-            <a:pPr marL="342900" indent="-342900">
-              <a:spcAft>
-                <a:spcPts val="800"/>
-              </a:spcAft>
-              <a:buSzPct val="100000"/>
-              <a:buChar char="•"/>
-            </a:pPr>
-            <a:r>
-              <a:rPr lang="en-US" sz="1500" dirty="0">
-                <a:solidFill>
-                  <a:schemeClr val="tx1"/>
-                </a:solidFill>
-              </a:rPr>
-              <a:t>Campagne pluie et fin d'année</a:t>
-            </a:r>
-            <a:endParaRPr lang="en-US" sz="1500" dirty="0"/>
-          </a:p>
-          <a:p>
-            <a:pPr marL="342900" indent="-342900">
-              <a:spcAft>
-                <a:spcPts val="800"/>
-              </a:spcAft>
-              <a:buSzPct val="100000"/>
-              <a:buChar char="•"/>
-            </a:pPr>
-            <a:r>
-              <a:rPr lang="en-US" sz="1500" dirty="0">
-                <a:solidFill>
-                  <a:schemeClr val="tx1"/>
-                </a:solidFill>
-              </a:rPr>
-              <a:t>Test de l'angle MRE</a:t>
-            </a:r>
-            <a:endParaRPr lang="en-US" sz="1500" dirty="0"/>
-          </a:p>
-        </p:txBody>
-      </p:sp>
-      <p:sp>
-        <p:nvSpPr>
-          <p:cNvPr id="13" name="90 jours"/>
+            <a:endParaRPr lang="en-US" sz="1400" dirty="0"/>
+          </a:p>
+        </p:txBody>
+      </p:sp>
+      <p:sp>
+        <p:nvSpPr>
+          <p:cNvPr id="8" name="Contenus créateurs boostés"/>
           <p:cNvSpPr/>
           <p:nvPr/>
         </p:nvSpPr>
         <p:spPr>
           <a:xfrm>
-            <a:off x="8046720" y="1417320"/>
-            <a:ext cx="3520440" cy="4572000"/>
+            <a:off x="4312920" y="1417320"/>
+            <a:ext cx="3535680" cy="2743200"/>
           </a:xfrm>
           <a:prstGeom prst="roundRect">
             <a:avLst>
-              <a:gd name="adj" fmla="val 3117"/>
+              <a:gd name="adj" fmla="val 4000"/>
             </a:avLst>
           </a:prstGeom>
           <a:solidFill>
@@ -5927,72 +7285,58 @@
       </p:sp>
       <p:sp>
         <p:nvSpPr>
-          <p:cNvPr id="14" name="90 jours pastille"/>
+          <p:cNvPr id="9" name="Contenus créateurs boostés circle"/>
           <p:cNvSpPr/>
           <p:nvPr/>
         </p:nvSpPr>
         <p:spPr>
           <a:xfrm>
-            <a:off x="8321040" y="1645920"/>
-            <a:ext cx="1463040" cy="457200"/>
-          </a:xfrm>
-          <a:prstGeom prst="roundRect">
-            <a:avLst>
-              <a:gd name="adj" fmla="val 50000"/>
-            </a:avLst>
+            <a:off x="4587240" y="1691640"/>
+            <a:ext cx="548640" cy="548640"/>
+          </a:xfrm>
+          <a:prstGeom prst="ellipse">
+            <a:avLst/>
           </a:prstGeom>
           <a:solidFill>
-            <a:schemeClr val="accent4"/>
+            <a:schemeClr val="accent1"/>
           </a:solidFill>
           <a:ln/>
         </p:spPr>
       </p:sp>
-      <p:sp>
-        <p:nvSpPr>
-          <p:cNvPr id="15" name="Text 13"/>
+      <p:pic>
+        <p:nvPicPr>
+          <p:cNvPr id="10" name="Contenus créateurs boostés icon" descr="Contenus créateurs boostés">    </p:cNvPr>
+          <p:cNvPicPr>
+            <a:picLocks noChangeAspect="1"/>
+          </p:cNvPicPr>
+          <p:nvPr/>
+        </p:nvPicPr>
+        <p:blipFill>
+          <a:blip r:embed="rId2"/>
+          <a:stretch>
+            <a:fillRect/>
+          </a:stretch>
+        </p:blipFill>
+        <p:spPr>
+          <a:xfrm>
+            <a:off x="4729886" y="1834286"/>
+            <a:ext cx="263347" cy="263347"/>
+          </a:xfrm>
+          <a:prstGeom prst="rect">
+            <a:avLst/>
+          </a:prstGeom>
+        </p:spPr>
+      </p:pic>
+      <p:sp>
+        <p:nvSpPr>
+          <p:cNvPr id="11" name="Text 7"/>
           <p:cNvSpPr txBox="1"/>
           <p:nvPr/>
         </p:nvSpPr>
         <p:spPr>
           <a:xfrm>
-            <a:off x="8321040" y="1645920"/>
-            <a:ext cx="1463040" cy="457200"/>
-          </a:xfrm>
-          <a:prstGeom prst="rect">
-            <a:avLst/>
-          </a:prstGeom>
-          <a:noFill/>
-          <a:ln/>
-        </p:spPr>
-        <p:txBody>
-          <a:bodyPr wrap="square" lIns="0" tIns="0" rIns="0" bIns="0" rtlCol="0" anchor="ctr"/>
-          <a:lstStyle/>
-          <a:p>
-            <a:pPr algn="ctr" indent="0" marL="0">
-              <a:buNone/>
-            </a:pPr>
-            <a:r>
-              <a:rPr lang="en-US" sz="1500" b="1" dirty="0">
-                <a:solidFill>
-                  <a:schemeClr val="bg1"/>
-                </a:solidFill>
-              </a:rPr>
-              <a:t>90 jours</a:t>
-            </a:r>
-            <a:endParaRPr lang="en-US" sz="1500" dirty="0"/>
-          </a:p>
-        </p:txBody>
-      </p:sp>
-      <p:sp>
-        <p:nvSpPr>
-          <p:cNvPr id="16" name="Text 14"/>
-          <p:cNvSpPr txBox="1"/>
-          <p:nvPr/>
-        </p:nvSpPr>
-        <p:spPr>
-          <a:xfrm>
-            <a:off x="9921240" y="1645920"/>
-            <a:ext cx="1463040" cy="457200"/>
+            <a:off x="5273040" y="1645920"/>
+            <a:ext cx="2346960" cy="640080"/>
           </a:xfrm>
           <a:prstGeom prst="rect">
             <a:avLst/>
@@ -6008,27 +7352,27 @@
               <a:buNone/>
             </a:pPr>
             <a:r>
-              <a:rPr lang="en-US" sz="1800" b="1" dirty="0">
+              <a:rPr lang="en-US" sz="1700" b="1" dirty="0">
                 <a:solidFill>
                   <a:schemeClr val="tx2"/>
                 </a:solidFill>
               </a:rPr>
-              <a:t>Accélérer</a:t>
+              <a:t>Contenus créateurs boostés</a:t>
             </a:r>
-            <a:endParaRPr lang="en-US" sz="1800" dirty="0"/>
-          </a:p>
-        </p:txBody>
-      </p:sp>
-      <p:sp>
-        <p:nvSpPr>
-          <p:cNvPr id="17" name="Text 15"/>
+            <a:endParaRPr lang="en-US" sz="1700" dirty="0"/>
+          </a:p>
+        </p:txBody>
+      </p:sp>
+      <p:sp>
+        <p:nvSpPr>
+          <p:cNvPr id="12" name="Text 8"/>
           <p:cNvSpPr txBox="1"/>
           <p:nvPr/>
         </p:nvSpPr>
         <p:spPr>
           <a:xfrm>
-            <a:off x="8321040" y="2377440"/>
-            <a:ext cx="3017520" cy="3474720"/>
+            <a:off x="4587240" y="2377440"/>
+            <a:ext cx="2987040" cy="1645920"/>
           </a:xfrm>
           <a:prstGeom prst="rect">
             <a:avLst/>
@@ -6040,94 +7384,269 @@
           <a:bodyPr wrap="square" lIns="0" tIns="0" rIns="0" bIns="0" rtlCol="0" anchor="t"/>
           <a:lstStyle/>
           <a:p>
-            <a:pPr marL="342900" indent="-342900">
-              <a:spcAft>
-                <a:spcPts val="800"/>
-              </a:spcAft>
-              <a:buSzPct val="100000"/>
-              <a:buChar char="•"/>
+            <a:pPr indent="0" marL="0">
+              <a:buNone/>
             </a:pPr>
             <a:r>
-              <a:rPr lang="en-US" sz="1500" dirty="0">
+              <a:rPr lang="en-US" sz="1400" dirty="0">
                 <a:solidFill>
                   <a:schemeClr val="tx1"/>
                 </a:solidFill>
               </a:rPr>
-              <a:t>Campagnes Ramadan prêtes et validées</a:t>
+              <a:t>Republier les meilleures vidéos de créateurs comme pubs TikTok et Meta : souvent moins chères qu'un créatif produit en interne.</a:t>
             </a:r>
-            <a:endParaRPr lang="en-US" sz="1500" dirty="0"/>
-          </a:p>
-          <a:p>
-            <a:pPr marL="342900" indent="-342900">
-              <a:spcAft>
-                <a:spcPts val="800"/>
-              </a:spcAft>
-              <a:buSzPct val="100000"/>
-              <a:buChar char="•"/>
+            <a:endParaRPr lang="en-US" sz="1400" dirty="0"/>
+          </a:p>
+        </p:txBody>
+      </p:sp>
+      <p:sp>
+        <p:nvSpPr>
+          <p:cNvPr id="13" name="Livreurs et chauffeurs ambassadeurs"/>
+          <p:cNvSpPr/>
+          <p:nvPr/>
+        </p:nvSpPr>
+        <p:spPr>
+          <a:xfrm>
+            <a:off x="8077200" y="1417320"/>
+            <a:ext cx="3535680" cy="2743200"/>
+          </a:xfrm>
+          <a:prstGeom prst="roundRect">
+            <a:avLst>
+              <a:gd name="adj" fmla="val 4000"/>
+            </a:avLst>
+          </a:prstGeom>
+          <a:solidFill>
+            <a:schemeClr val="bg2"/>
+          </a:solidFill>
+          <a:ln/>
+        </p:spPr>
+      </p:sp>
+      <p:sp>
+        <p:nvSpPr>
+          <p:cNvPr id="14" name="Livreurs et chauffeurs ambassadeurs circle"/>
+          <p:cNvSpPr/>
+          <p:nvPr/>
+        </p:nvSpPr>
+        <p:spPr>
+          <a:xfrm>
+            <a:off x="8351520" y="1691640"/>
+            <a:ext cx="548640" cy="548640"/>
+          </a:xfrm>
+          <a:prstGeom prst="ellipse">
+            <a:avLst/>
+          </a:prstGeom>
+          <a:solidFill>
+            <a:schemeClr val="accent1"/>
+          </a:solidFill>
+          <a:ln/>
+        </p:spPr>
+      </p:sp>
+      <p:pic>
+        <p:nvPicPr>
+          <p:cNvPr id="15" name="Livreurs et chauffeurs ambassadeurs icon" descr="Livreurs et chauffeurs ambassadeurs">    </p:cNvPr>
+          <p:cNvPicPr>
+            <a:picLocks noChangeAspect="1"/>
+          </p:cNvPicPr>
+          <p:nvPr/>
+        </p:nvPicPr>
+        <p:blipFill>
+          <a:blip r:embed="rId3"/>
+          <a:stretch>
+            <a:fillRect/>
+          </a:stretch>
+        </p:blipFill>
+        <p:spPr>
+          <a:xfrm>
+            <a:off x="8494166" y="1834286"/>
+            <a:ext cx="263347" cy="263347"/>
+          </a:xfrm>
+          <a:prstGeom prst="rect">
+            <a:avLst/>
+          </a:prstGeom>
+        </p:spPr>
+      </p:pic>
+      <p:sp>
+        <p:nvSpPr>
+          <p:cNvPr id="16" name="Text 11"/>
+          <p:cNvSpPr txBox="1"/>
+          <p:nvPr/>
+        </p:nvSpPr>
+        <p:spPr>
+          <a:xfrm>
+            <a:off x="9037320" y="1645920"/>
+            <a:ext cx="2346960" cy="640080"/>
+          </a:xfrm>
+          <a:prstGeom prst="rect">
+            <a:avLst/>
+          </a:prstGeom>
+          <a:noFill/>
+          <a:ln/>
+        </p:spPr>
+        <p:txBody>
+          <a:bodyPr wrap="square" lIns="0" tIns="0" rIns="0" bIns="0" rtlCol="0" anchor="ctr"/>
+          <a:lstStyle/>
+          <a:p>
+            <a:pPr indent="0" marL="0">
+              <a:buNone/>
             </a:pPr>
             <a:r>
-              <a:rPr lang="en-US" sz="1500" dirty="0">
-                <a:solidFill>
-                  <a:schemeClr val="tx1"/>
+              <a:rPr lang="en-US" sz="1700" b="1" dirty="0">
+                <a:solidFill>
+                  <a:schemeClr val="tx2"/>
                 </a:solidFill>
               </a:rPr>
-              <a:t>Pages Rabat et Marrakech</a:t>
+              <a:t>Livreurs et chauffeurs ambassadeurs</a:t>
             </a:r>
-            <a:endParaRPr lang="en-US" sz="1500" dirty="0"/>
-          </a:p>
-          <a:p>
-            <a:pPr marL="342900" indent="-342900">
-              <a:spcAft>
-                <a:spcPts val="800"/>
-              </a:spcAft>
-              <a:buSzPct val="100000"/>
-              <a:buChar char="•"/>
+            <a:endParaRPr lang="en-US" sz="1700" dirty="0"/>
+          </a:p>
+        </p:txBody>
+      </p:sp>
+      <p:sp>
+        <p:nvSpPr>
+          <p:cNvPr id="17" name="Text 12"/>
+          <p:cNvSpPr txBox="1"/>
+          <p:nvPr/>
+        </p:nvSpPr>
+        <p:spPr>
+          <a:xfrm>
+            <a:off x="8351520" y="2377440"/>
+            <a:ext cx="2987040" cy="1645920"/>
+          </a:xfrm>
+          <a:prstGeom prst="rect">
+            <a:avLst/>
+          </a:prstGeom>
+          <a:noFill/>
+          <a:ln/>
+        </p:spPr>
+        <p:txBody>
+          <a:bodyPr wrap="square" lIns="0" tIns="0" rIns="0" bIns="0" rtlCol="0" anchor="t"/>
+          <a:lstStyle/>
+          <a:p>
+            <a:pPr indent="0" marL="0">
+              <a:buNone/>
             </a:pPr>
             <a:r>
-              <a:rPr lang="en-US" sz="1500" dirty="0">
+              <a:rPr lang="en-US" sz="1400" dirty="0">
                 <a:solidFill>
                   <a:schemeClr val="tx1"/>
                 </a:solidFill>
               </a:rPr>
-              <a:t>Programme micro-influenceurs en place</a:t>
+              <a:t>Témoignages vidéo pour le recrutement et pour la confiance des clients. Sert aussi la marque employeur.</a:t>
             </a:r>
-            <a:endParaRPr lang="en-US" sz="1500" dirty="0"/>
-          </a:p>
-          <a:p>
-            <a:pPr marL="342900" indent="-342900">
-              <a:spcAft>
-                <a:spcPts val="800"/>
-              </a:spcAft>
-              <a:buSzPct val="100000"/>
-              <a:buChar char="•"/>
+            <a:endParaRPr lang="en-US" sz="1400" dirty="0"/>
+          </a:p>
+        </p:txBody>
+      </p:sp>
+      <p:sp>
+        <p:nvSpPr>
+          <p:cNvPr id="18" name="Règle influence"/>
+          <p:cNvSpPr/>
+          <p:nvPr/>
+        </p:nvSpPr>
+        <p:spPr>
+          <a:xfrm>
+            <a:off x="548640" y="4434840"/>
+            <a:ext cx="11064240" cy="1371600"/>
+          </a:xfrm>
+          <a:prstGeom prst="roundRect">
+            <a:avLst>
+              <a:gd name="adj" fmla="val 8000"/>
+            </a:avLst>
+          </a:prstGeom>
+          <a:solidFill>
+            <a:schemeClr val="bg2"/>
+          </a:solidFill>
+          <a:ln/>
+        </p:spPr>
+      </p:sp>
+      <p:sp>
+        <p:nvSpPr>
+          <p:cNvPr id="19" name="Règle circle"/>
+          <p:cNvSpPr/>
+          <p:nvPr/>
+        </p:nvSpPr>
+        <p:spPr>
+          <a:xfrm>
+            <a:off x="822960" y="4800600"/>
+            <a:ext cx="594360" cy="594360"/>
+          </a:xfrm>
+          <a:prstGeom prst="ellipse">
+            <a:avLst/>
+          </a:prstGeom>
+          <a:solidFill>
+            <a:schemeClr val="accent3"/>
+          </a:solidFill>
+          <a:ln/>
+        </p:spPr>
+      </p:sp>
+      <p:pic>
+        <p:nvPicPr>
+          <p:cNvPr id="20" name="Règle icon" descr="Règle">    </p:cNvPr>
+          <p:cNvPicPr>
+            <a:picLocks noChangeAspect="1"/>
+          </p:cNvPicPr>
+          <p:nvPr/>
+        </p:nvPicPr>
+        <p:blipFill>
+          <a:blip r:embed="rId4"/>
+          <a:stretch>
+            <a:fillRect/>
+          </a:stretch>
+        </p:blipFill>
+        <p:spPr>
+          <a:xfrm>
+            <a:off x="977494" y="4955134"/>
+            <a:ext cx="285293" cy="285293"/>
+          </a:xfrm>
+          <a:prstGeom prst="rect">
+            <a:avLst/>
+          </a:prstGeom>
+        </p:spPr>
+      </p:pic>
+      <p:sp>
+        <p:nvSpPr>
+          <p:cNvPr id="21" name="Text 15"/>
+          <p:cNvSpPr txBox="1"/>
+          <p:nvPr/>
+        </p:nvSpPr>
+        <p:spPr>
+          <a:xfrm>
+            <a:off x="1645920" y="4526280"/>
+            <a:ext cx="9692640" cy="1188720"/>
+          </a:xfrm>
+          <a:prstGeom prst="rect">
+            <a:avLst/>
+          </a:prstGeom>
+          <a:noFill/>
+          <a:ln/>
+        </p:spPr>
+        <p:txBody>
+          <a:bodyPr wrap="square" lIns="0" tIns="0" rIns="0" bIns="0" rtlCol="0" anchor="ctr"/>
+          <a:lstStyle/>
+          <a:p>
+            <a:pPr indent="0" marL="0">
+              <a:buNone/>
             </a:pPr>
             <a:r>
-              <a:rPr lang="en-US" sz="1500" dirty="0">
+              <a:rPr lang="en-US" sz="1600" b="1" dirty="0">
                 <a:solidFill>
                   <a:schemeClr val="tx1"/>
                 </a:solidFill>
               </a:rPr>
-              <a:t>Fiches stores optimisées FR et AR</a:t>
+              <a:t>Règle : </a:t>
             </a:r>
-            <a:endParaRPr lang="en-US" sz="1500" dirty="0"/>
-          </a:p>
-          <a:p>
-            <a:pPr marL="342900" indent="-342900">
-              <a:spcAft>
-                <a:spcPts val="800"/>
-              </a:spcAft>
-              <a:buSzPct val="100000"/>
-              <a:buChar char="•"/>
+            <a:pPr indent="0" marL="0">
+              <a:buNone/>
             </a:pPr>
             <a:r>
-              <a:rPr lang="en-US" sz="1500" dirty="0">
+              <a:rPr lang="en-US" sz="1600" dirty="0">
                 <a:solidFill>
                   <a:schemeClr val="tx1"/>
                 </a:solidFill>
               </a:rPr>
-              <a:t>Bilan : ce qu'on garde, ce qu'on coupe</a:t>
+              <a:t>payer à la performance (code promo, commission) plutôt qu'au forfait, et valider chaque contenu avant publication, notamment sur les mentions « VTC » et les promesses de délai.</a:t>
             </a:r>
-            <a:endParaRPr lang="en-US" sz="1500" dirty="0"/>
+            <a:endParaRPr lang="en-US" sz="1600" dirty="0"/>
           </a:p>
         </p:txBody>
       </p:sp>
@@ -6236,98 +7755,66 @@
                 <a:ea typeface="Arial" pitchFamily="34" charset="-122"/>
                 <a:cs typeface="Arial" pitchFamily="34" charset="-120"/>
               </a:rPr>
-              <a:t>Budget et pilotage</a:t>
+              <a:t>Plan à 30, 60 et 90 jours</a:t>
             </a:r>
             <a:endParaRPr lang="en-US" sz="3600" dirty="0"/>
           </a:p>
         </p:txBody>
       </p:sp>
-      <p:graphicFrame>
-        <p:nvGraphicFramePr>
-          <p:cNvPr id="3" name="Chart 0" descr=""/>
-          <p:cNvGraphicFramePr/>
-          <p:nvPr/>
-        </p:nvGraphicFramePr>
-        <p:xfrm>
-          <a:off x="365760" y="1280160"/>
-          <a:ext cx="5486400" cy="3657600"/>
-        </p:xfrm>
-        <a:graphic xmlns:a="http://schemas.openxmlformats.org/drawingml/2006/main">
-          <a:graphicData uri="http://schemas.openxmlformats.org/drawingml/2006/chart">
-            <c:chart xmlns:c="http://schemas.openxmlformats.org/drawingml/2006/chart" r:id="rId1"/>
-          </a:graphicData>
-        </a:graphic>
-      </p:graphicFrame>
-      <p:graphicFrame>
-        <p:nvGraphicFramePr>
-          <p:cNvPr id="4" name="Chart 1" descr=""/>
-          <p:cNvGraphicFramePr/>
-          <p:nvPr/>
-        </p:nvGraphicFramePr>
-        <p:xfrm>
-          <a:off x="6126480" y="1280160"/>
-          <a:ext cx="5486400" cy="3657600"/>
-        </p:xfrm>
-        <a:graphic xmlns:a="http://schemas.openxmlformats.org/drawingml/2006/main">
-          <a:graphicData uri="http://schemas.openxmlformats.org/drawingml/2006/chart">
-            <c:chart xmlns:c="http://schemas.openxmlformats.org/drawingml/2006/chart" r:id="rId2"/>
-          </a:graphicData>
-        </a:graphic>
-      </p:graphicFrame>
-      <p:sp>
-        <p:nvSpPr>
-          <p:cNvPr id="5" name="Tableau de bord hebdo circle"/>
+      <p:sp>
+        <p:nvSpPr>
+          <p:cNvPr id="3" name="30 jours"/>
           <p:cNvSpPr/>
           <p:nvPr/>
         </p:nvSpPr>
         <p:spPr>
           <a:xfrm>
-            <a:off x="548640" y="5166360"/>
-            <a:ext cx="548640" cy="548640"/>
-          </a:xfrm>
-          <a:prstGeom prst="ellipse">
-            <a:avLst/>
+            <a:off x="548640" y="1417320"/>
+            <a:ext cx="3520440" cy="4572000"/>
+          </a:xfrm>
+          <a:prstGeom prst="roundRect">
+            <a:avLst>
+              <a:gd name="adj" fmla="val 3117"/>
+            </a:avLst>
           </a:prstGeom>
           <a:solidFill>
-            <a:schemeClr val="accent1"/>
+            <a:schemeClr val="bg2"/>
           </a:solidFill>
           <a:ln/>
         </p:spPr>
       </p:sp>
-      <p:pic>
-        <p:nvPicPr>
-          <p:cNvPr id="6" name="Tableau de bord hebdo icon" descr="Tableau de bord hebdo">    </p:cNvPr>
-          <p:cNvPicPr>
-            <a:picLocks noChangeAspect="1"/>
-          </p:cNvPicPr>
-          <p:nvPr/>
-        </p:nvPicPr>
-        <p:blipFill>
-          <a:blip r:embed="rId3"/>
-          <a:stretch>
-            <a:fillRect/>
-          </a:stretch>
-        </p:blipFill>
-        <p:spPr>
-          <a:xfrm>
-            <a:off x="691286" y="5309006"/>
-            <a:ext cx="263347" cy="263347"/>
-          </a:xfrm>
-          <a:prstGeom prst="rect">
-            <a:avLst/>
-          </a:prstGeom>
-        </p:spPr>
-      </p:pic>
-      <p:sp>
-        <p:nvSpPr>
-          <p:cNvPr id="7" name="Text 2"/>
+      <p:sp>
+        <p:nvSpPr>
+          <p:cNvPr id="4" name="30 jours pastille"/>
+          <p:cNvSpPr/>
+          <p:nvPr/>
+        </p:nvSpPr>
+        <p:spPr>
+          <a:xfrm>
+            <a:off x="822960" y="1645920"/>
+            <a:ext cx="1463040" cy="457200"/>
+          </a:xfrm>
+          <a:prstGeom prst="roundRect">
+            <a:avLst>
+              <a:gd name="adj" fmla="val 50000"/>
+            </a:avLst>
+          </a:prstGeom>
+          <a:solidFill>
+            <a:schemeClr val="accent2"/>
+          </a:solidFill>
+          <a:ln/>
+        </p:spPr>
+      </p:sp>
+      <p:sp>
+        <p:nvSpPr>
+          <p:cNvPr id="5" name="Text 3"/>
           <p:cNvSpPr txBox="1"/>
           <p:nvPr/>
         </p:nvSpPr>
         <p:spPr>
           <a:xfrm>
-            <a:off x="1234440" y="5120640"/>
-            <a:ext cx="2880360" cy="365760"/>
+            <a:off x="822960" y="1645920"/>
+            <a:ext cx="1463040" cy="457200"/>
           </a:xfrm>
           <a:prstGeom prst="rect">
             <a:avLst/>
@@ -6336,34 +7823,70 @@
           <a:ln/>
         </p:spPr>
         <p:txBody>
-          <a:bodyPr wrap="square" lIns="0" tIns="0" rIns="0" bIns="0" rtlCol="0" anchor="t"/>
+          <a:bodyPr wrap="square" lIns="0" tIns="0" rIns="0" bIns="0" rtlCol="0" anchor="ctr"/>
+          <a:lstStyle/>
+          <a:p>
+            <a:pPr algn="ctr" indent="0" marL="0">
+              <a:buNone/>
+            </a:pPr>
+            <a:r>
+              <a:rPr lang="en-US" sz="1500" b="1" dirty="0">
+                <a:solidFill>
+                  <a:schemeClr val="bg1"/>
+                </a:solidFill>
+              </a:rPr>
+              <a:t>30 jours</a:t>
+            </a:r>
+            <a:endParaRPr lang="en-US" sz="1500" dirty="0"/>
+          </a:p>
+        </p:txBody>
+      </p:sp>
+      <p:sp>
+        <p:nvSpPr>
+          <p:cNvPr id="6" name="Text 4"/>
+          <p:cNvSpPr txBox="1"/>
+          <p:nvPr/>
+        </p:nvSpPr>
+        <p:spPr>
+          <a:xfrm>
+            <a:off x="2423160" y="1645920"/>
+            <a:ext cx="1463040" cy="457200"/>
+          </a:xfrm>
+          <a:prstGeom prst="rect">
+            <a:avLst/>
+          </a:prstGeom>
+          <a:noFill/>
+          <a:ln/>
+        </p:spPr>
+        <p:txBody>
+          <a:bodyPr wrap="square" lIns="0" tIns="0" rIns="0" bIns="0" rtlCol="0" anchor="ctr"/>
           <a:lstStyle/>
           <a:p>
             <a:pPr indent="0" marL="0">
               <a:buNone/>
             </a:pPr>
             <a:r>
-              <a:rPr lang="en-US" sz="1600" b="1" dirty="0">
+              <a:rPr lang="en-US" sz="1800" b="1" dirty="0">
                 <a:solidFill>
                   <a:schemeClr val="tx2"/>
                 </a:solidFill>
               </a:rPr>
-              <a:t>Tableau de bord hebdo</a:t>
+              <a:t>Lancer</a:t>
             </a:r>
-            <a:endParaRPr lang="en-US" sz="1600" dirty="0"/>
-          </a:p>
-        </p:txBody>
-      </p:sp>
-      <p:sp>
-        <p:nvSpPr>
-          <p:cNvPr id="8" name="Text 3"/>
+            <a:endParaRPr lang="en-US" sz="1800" dirty="0"/>
+          </a:p>
+        </p:txBody>
+      </p:sp>
+      <p:sp>
+        <p:nvSpPr>
+          <p:cNvPr id="7" name="Text 5"/>
           <p:cNvSpPr txBox="1"/>
           <p:nvPr/>
         </p:nvSpPr>
         <p:spPr>
           <a:xfrm>
-            <a:off x="1234440" y="5486400"/>
-            <a:ext cx="2880360" cy="594360"/>
+            <a:off x="822960" y="2377440"/>
+            <a:ext cx="3017520" cy="3474720"/>
           </a:xfrm>
           <a:prstGeom prst="rect">
             <a:avLst/>
@@ -6373,77 +7896,381 @@
         </p:spPr>
         <p:txBody>
           <a:bodyPr wrap="square" lIns="0" tIns="0" rIns="0" bIns="0" rtlCol="0" anchor="t"/>
+          <a:lstStyle/>
+          <a:p>
+            <a:pPr marL="342900" indent="-342900">
+              <a:spcAft>
+                <a:spcPts val="800"/>
+              </a:spcAft>
+              <a:buSzPct val="100000"/>
+              <a:buChar char="•"/>
+            </a:pPr>
+            <a:r>
+              <a:rPr lang="en-US" sz="1500" dirty="0">
+                <a:solidFill>
+                  <a:schemeClr val="tx1"/>
+                </a:solidFill>
+              </a:rPr>
+              <a:t>Mesure de référence : coût par commande, rétention</a:t>
+            </a:r>
+            <a:endParaRPr lang="en-US" sz="1500" dirty="0"/>
+          </a:p>
+          <a:p>
+            <a:pPr marL="342900" indent="-342900">
+              <a:spcAft>
+                <a:spcPts val="800"/>
+              </a:spcAft>
+              <a:buSzPct val="100000"/>
+              <a:buChar char="•"/>
+            </a:pPr>
+            <a:r>
+              <a:rPr lang="en-US" sz="1500" dirty="0">
+                <a:solidFill>
+                  <a:schemeClr val="tx1"/>
+                </a:solidFill>
+              </a:rPr>
+              <a:t>Campagnes Meta, TikTok et Google sur la 1re commande</a:t>
+            </a:r>
+            <a:endParaRPr lang="en-US" sz="1500" dirty="0"/>
+          </a:p>
+          <a:p>
+            <a:pPr marL="342900" indent="-342900">
+              <a:spcAft>
+                <a:spcPts val="800"/>
+              </a:spcAft>
+              <a:buSzPct val="100000"/>
+              <a:buChar char="•"/>
+            </a:pPr>
+            <a:r>
+              <a:rPr lang="en-US" sz="1500" dirty="0">
+                <a:solidFill>
+                  <a:schemeClr val="tx1"/>
+                </a:solidFill>
+              </a:rPr>
+              <a:t>Yassir Friday (Black Friday)</a:t>
+            </a:r>
+            <a:endParaRPr lang="en-US" sz="1500" dirty="0"/>
+          </a:p>
+          <a:p>
+            <a:pPr marL="342900" indent="-342900">
+              <a:spcAft>
+                <a:spcPts val="800"/>
+              </a:spcAft>
+              <a:buSzPct val="100000"/>
+              <a:buChar char="•"/>
+            </a:pPr>
+            <a:r>
+              <a:rPr lang="en-US" sz="1500" dirty="0">
+                <a:solidFill>
+                  <a:schemeClr val="tx1"/>
+                </a:solidFill>
+              </a:rPr>
+              <a:t>Page ville Casablanca et 2 guides food</a:t>
+            </a:r>
+            <a:endParaRPr lang="en-US" sz="1500" dirty="0"/>
+          </a:p>
+          <a:p>
+            <a:pPr marL="342900" indent="-342900">
+              <a:spcAft>
+                <a:spcPts val="800"/>
+              </a:spcAft>
+              <a:buSzPct val="100000"/>
+              <a:buChar char="•"/>
+            </a:pPr>
+            <a:r>
+              <a:rPr lang="en-US" sz="1500" dirty="0">
+                <a:solidFill>
+                  <a:schemeClr val="tx1"/>
+                </a:solidFill>
+              </a:rPr>
+              <a:t>Parrainage et relance des inactifs</a:t>
+            </a:r>
+            <a:endParaRPr lang="en-US" sz="1500" dirty="0"/>
+          </a:p>
+        </p:txBody>
+      </p:sp>
+      <p:sp>
+        <p:nvSpPr>
+          <p:cNvPr id="8" name="60 jours"/>
+          <p:cNvSpPr/>
+          <p:nvPr/>
+        </p:nvSpPr>
+        <p:spPr>
+          <a:xfrm>
+            <a:off x="4297680" y="1417320"/>
+            <a:ext cx="3520440" cy="4572000"/>
+          </a:xfrm>
+          <a:prstGeom prst="roundRect">
+            <a:avLst>
+              <a:gd name="adj" fmla="val 3117"/>
+            </a:avLst>
+          </a:prstGeom>
+          <a:solidFill>
+            <a:schemeClr val="bg2"/>
+          </a:solidFill>
+          <a:ln/>
+        </p:spPr>
+      </p:sp>
+      <p:sp>
+        <p:nvSpPr>
+          <p:cNvPr id="9" name="60 jours pastille"/>
+          <p:cNvSpPr/>
+          <p:nvPr/>
+        </p:nvSpPr>
+        <p:spPr>
+          <a:xfrm>
+            <a:off x="4572000" y="1645920"/>
+            <a:ext cx="1463040" cy="457200"/>
+          </a:xfrm>
+          <a:prstGeom prst="roundRect">
+            <a:avLst>
+              <a:gd name="adj" fmla="val 50000"/>
+            </a:avLst>
+          </a:prstGeom>
+          <a:solidFill>
+            <a:schemeClr val="accent1"/>
+          </a:solidFill>
+          <a:ln/>
+        </p:spPr>
+      </p:sp>
+      <p:sp>
+        <p:nvSpPr>
+          <p:cNvPr id="10" name="Text 8"/>
+          <p:cNvSpPr txBox="1"/>
+          <p:nvPr/>
+        </p:nvSpPr>
+        <p:spPr>
+          <a:xfrm>
+            <a:off x="4572000" y="1645920"/>
+            <a:ext cx="1463040" cy="457200"/>
+          </a:xfrm>
+          <a:prstGeom prst="rect">
+            <a:avLst/>
+          </a:prstGeom>
+          <a:noFill/>
+          <a:ln/>
+        </p:spPr>
+        <p:txBody>
+          <a:bodyPr wrap="square" lIns="0" tIns="0" rIns="0" bIns="0" rtlCol="0" anchor="ctr"/>
+          <a:lstStyle/>
+          <a:p>
+            <a:pPr algn="ctr" indent="0" marL="0">
+              <a:buNone/>
+            </a:pPr>
+            <a:r>
+              <a:rPr lang="en-US" sz="1500" b="1" dirty="0">
+                <a:solidFill>
+                  <a:schemeClr val="bg1"/>
+                </a:solidFill>
+              </a:rPr>
+              <a:t>60 jours</a:t>
+            </a:r>
+            <a:endParaRPr lang="en-US" sz="1500" dirty="0"/>
+          </a:p>
+        </p:txBody>
+      </p:sp>
+      <p:sp>
+        <p:nvSpPr>
+          <p:cNvPr id="11" name="Text 9"/>
+          <p:cNvSpPr txBox="1"/>
+          <p:nvPr/>
+        </p:nvSpPr>
+        <p:spPr>
+          <a:xfrm>
+            <a:off x="6172200" y="1645920"/>
+            <a:ext cx="1463040" cy="457200"/>
+          </a:xfrm>
+          <a:prstGeom prst="rect">
+            <a:avLst/>
+          </a:prstGeom>
+          <a:noFill/>
+          <a:ln/>
+        </p:spPr>
+        <p:txBody>
+          <a:bodyPr wrap="square" lIns="0" tIns="0" rIns="0" bIns="0" rtlCol="0" anchor="ctr"/>
           <a:lstStyle/>
           <a:p>
             <a:pPr indent="0" marL="0">
               <a:buNone/>
             </a:pPr>
             <a:r>
-              <a:rPr lang="en-US" sz="1300" dirty="0">
+              <a:rPr lang="en-US" sz="1800" b="1" dirty="0">
+                <a:solidFill>
+                  <a:schemeClr val="tx2"/>
+                </a:solidFill>
+              </a:rPr>
+              <a:t>Optimiser</a:t>
+            </a:r>
+            <a:endParaRPr lang="en-US" sz="1800" dirty="0"/>
+          </a:p>
+        </p:txBody>
+      </p:sp>
+      <p:sp>
+        <p:nvSpPr>
+          <p:cNvPr id="12" name="Text 10"/>
+          <p:cNvSpPr txBox="1"/>
+          <p:nvPr/>
+        </p:nvSpPr>
+        <p:spPr>
+          <a:xfrm>
+            <a:off x="4572000" y="2377440"/>
+            <a:ext cx="3017520" cy="3474720"/>
+          </a:xfrm>
+          <a:prstGeom prst="rect">
+            <a:avLst/>
+          </a:prstGeom>
+          <a:noFill/>
+          <a:ln/>
+        </p:spPr>
+        <p:txBody>
+          <a:bodyPr wrap="square" lIns="0" tIns="0" rIns="0" bIns="0" rtlCol="0" anchor="t"/>
+          <a:lstStyle/>
+          <a:p>
+            <a:pPr marL="342900" indent="-342900">
+              <a:spcAft>
+                <a:spcPts val="800"/>
+              </a:spcAft>
+              <a:buSzPct val="100000"/>
+              <a:buChar char="•"/>
+            </a:pPr>
+            <a:r>
+              <a:rPr lang="en-US" sz="1500" dirty="0">
                 <a:solidFill>
                   <a:schemeClr val="tx1"/>
                 </a:solidFill>
               </a:rPr>
-              <a:t>Coût par 1re commande et rétention, par plateforme.</a:t>
+              <a:t>Réallouer le budget selon le coût par commande</a:t>
             </a:r>
-            <a:endParaRPr lang="en-US" sz="1300" dirty="0"/>
-          </a:p>
-        </p:txBody>
-      </p:sp>
-      <p:sp>
-        <p:nvSpPr>
-          <p:cNvPr id="9" name="Nommage propre circle"/>
+            <a:endParaRPr lang="en-US" sz="1500" dirty="0"/>
+          </a:p>
+          <a:p>
+            <a:pPr marL="342900" indent="-342900">
+              <a:spcAft>
+                <a:spcPts val="800"/>
+              </a:spcAft>
+              <a:buSzPct val="100000"/>
+              <a:buChar char="•"/>
+            </a:pPr>
+            <a:r>
+              <a:rPr lang="en-US" sz="1500" dirty="0">
+                <a:solidFill>
+                  <a:schemeClr val="tx1"/>
+                </a:solidFill>
+              </a:rPr>
+              <a:t>Baromètre data et premier communiqué</a:t>
+            </a:r>
+            <a:endParaRPr lang="en-US" sz="1500" dirty="0"/>
+          </a:p>
+          <a:p>
+            <a:pPr marL="342900" indent="-342900">
+              <a:spcAft>
+                <a:spcPts val="800"/>
+              </a:spcAft>
+              <a:buSzPct val="100000"/>
+              <a:buChar char="•"/>
+            </a:pPr>
+            <a:r>
+              <a:rPr lang="en-US" sz="1500" dirty="0">
+                <a:solidFill>
+                  <a:schemeClr val="tx1"/>
+                </a:solidFill>
+              </a:rPr>
+              <a:t>Kit « Commandez sur Yassir » aux restaurants</a:t>
+            </a:r>
+            <a:endParaRPr lang="en-US" sz="1500" dirty="0"/>
+          </a:p>
+          <a:p>
+            <a:pPr marL="342900" indent="-342900">
+              <a:spcAft>
+                <a:spcPts val="800"/>
+              </a:spcAft>
+              <a:buSzPct val="100000"/>
+              <a:buChar char="•"/>
+            </a:pPr>
+            <a:r>
+              <a:rPr lang="en-US" sz="1500" dirty="0">
+                <a:solidFill>
+                  <a:schemeClr val="tx1"/>
+                </a:solidFill>
+              </a:rPr>
+              <a:t>Campagne pluie et fin d'année</a:t>
+            </a:r>
+            <a:endParaRPr lang="en-US" sz="1500" dirty="0"/>
+          </a:p>
+          <a:p>
+            <a:pPr marL="342900" indent="-342900">
+              <a:spcAft>
+                <a:spcPts val="800"/>
+              </a:spcAft>
+              <a:buSzPct val="100000"/>
+              <a:buChar char="•"/>
+            </a:pPr>
+            <a:r>
+              <a:rPr lang="en-US" sz="1500" dirty="0">
+                <a:solidFill>
+                  <a:schemeClr val="tx1"/>
+                </a:solidFill>
+              </a:rPr>
+              <a:t>Test de l'angle MRE</a:t>
+            </a:r>
+            <a:endParaRPr lang="en-US" sz="1500" dirty="0"/>
+          </a:p>
+        </p:txBody>
+      </p:sp>
+      <p:sp>
+        <p:nvSpPr>
+          <p:cNvPr id="13" name="90 jours"/>
           <p:cNvSpPr/>
           <p:nvPr/>
         </p:nvSpPr>
         <p:spPr>
           <a:xfrm>
-            <a:off x="4297680" y="5166360"/>
-            <a:ext cx="548640" cy="548640"/>
-          </a:xfrm>
-          <a:prstGeom prst="ellipse">
-            <a:avLst/>
+            <a:off x="8046720" y="1417320"/>
+            <a:ext cx="3520440" cy="4572000"/>
+          </a:xfrm>
+          <a:prstGeom prst="roundRect">
+            <a:avLst>
+              <a:gd name="adj" fmla="val 3117"/>
+            </a:avLst>
           </a:prstGeom>
           <a:solidFill>
-            <a:schemeClr val="accent1"/>
+            <a:schemeClr val="bg2"/>
           </a:solidFill>
           <a:ln/>
         </p:spPr>
       </p:sp>
-      <p:pic>
-        <p:nvPicPr>
-          <p:cNvPr id="10" name="Nommage propre icon" descr="Nommage propre">    </p:cNvPr>
-          <p:cNvPicPr>
-            <a:picLocks noChangeAspect="1"/>
-          </p:cNvPicPr>
-          <p:nvPr/>
-        </p:nvPicPr>
-        <p:blipFill>
-          <a:blip r:embed="rId4"/>
-          <a:stretch>
-            <a:fillRect/>
-          </a:stretch>
-        </p:blipFill>
-        <p:spPr>
-          <a:xfrm>
-            <a:off x="4440326" y="5309006"/>
-            <a:ext cx="263347" cy="263347"/>
-          </a:xfrm>
-          <a:prstGeom prst="rect">
-            <a:avLst/>
-          </a:prstGeom>
-        </p:spPr>
-      </p:pic>
-      <p:sp>
-        <p:nvSpPr>
-          <p:cNvPr id="11" name="Text 5"/>
+      <p:sp>
+        <p:nvSpPr>
+          <p:cNvPr id="14" name="90 jours pastille"/>
+          <p:cNvSpPr/>
+          <p:nvPr/>
+        </p:nvSpPr>
+        <p:spPr>
+          <a:xfrm>
+            <a:off x="8321040" y="1645920"/>
+            <a:ext cx="1463040" cy="457200"/>
+          </a:xfrm>
+          <a:prstGeom prst="roundRect">
+            <a:avLst>
+              <a:gd name="adj" fmla="val 50000"/>
+            </a:avLst>
+          </a:prstGeom>
+          <a:solidFill>
+            <a:schemeClr val="accent4"/>
+          </a:solidFill>
+          <a:ln/>
+        </p:spPr>
+      </p:sp>
+      <p:sp>
+        <p:nvSpPr>
+          <p:cNvPr id="15" name="Text 13"/>
           <p:cNvSpPr txBox="1"/>
           <p:nvPr/>
         </p:nvSpPr>
         <p:spPr>
           <a:xfrm>
-            <a:off x="4983480" y="5120640"/>
-            <a:ext cx="2880360" cy="365760"/>
+            <a:off x="8321040" y="1645920"/>
+            <a:ext cx="1463040" cy="457200"/>
           </a:xfrm>
           <a:prstGeom prst="rect">
             <a:avLst/>
@@ -6452,34 +8279,70 @@
           <a:ln/>
         </p:spPr>
         <p:txBody>
-          <a:bodyPr wrap="square" lIns="0" tIns="0" rIns="0" bIns="0" rtlCol="0" anchor="t"/>
+          <a:bodyPr wrap="square" lIns="0" tIns="0" rIns="0" bIns="0" rtlCol="0" anchor="ctr"/>
+          <a:lstStyle/>
+          <a:p>
+            <a:pPr algn="ctr" indent="0" marL="0">
+              <a:buNone/>
+            </a:pPr>
+            <a:r>
+              <a:rPr lang="en-US" sz="1500" b="1" dirty="0">
+                <a:solidFill>
+                  <a:schemeClr val="bg1"/>
+                </a:solidFill>
+              </a:rPr>
+              <a:t>90 jours</a:t>
+            </a:r>
+            <a:endParaRPr lang="en-US" sz="1500" dirty="0"/>
+          </a:p>
+        </p:txBody>
+      </p:sp>
+      <p:sp>
+        <p:nvSpPr>
+          <p:cNvPr id="16" name="Text 14"/>
+          <p:cNvSpPr txBox="1"/>
+          <p:nvPr/>
+        </p:nvSpPr>
+        <p:spPr>
+          <a:xfrm>
+            <a:off x="9921240" y="1645920"/>
+            <a:ext cx="1463040" cy="457200"/>
+          </a:xfrm>
+          <a:prstGeom prst="rect">
+            <a:avLst/>
+          </a:prstGeom>
+          <a:noFill/>
+          <a:ln/>
+        </p:spPr>
+        <p:txBody>
+          <a:bodyPr wrap="square" lIns="0" tIns="0" rIns="0" bIns="0" rtlCol="0" anchor="ctr"/>
           <a:lstStyle/>
           <a:p>
             <a:pPr indent="0" marL="0">
               <a:buNone/>
             </a:pPr>
             <a:r>
-              <a:rPr lang="en-US" sz="1600" b="1" dirty="0">
+              <a:rPr lang="en-US" sz="1800" b="1" dirty="0">
                 <a:solidFill>
                   <a:schemeClr val="tx2"/>
                 </a:solidFill>
               </a:rPr>
-              <a:t>Nommage propre</a:t>
+              <a:t>Accélérer</a:t>
             </a:r>
-            <a:endParaRPr lang="en-US" sz="1600" dirty="0"/>
-          </a:p>
-        </p:txBody>
-      </p:sp>
-      <p:sp>
-        <p:nvSpPr>
-          <p:cNvPr id="12" name="Text 6"/>
+            <a:endParaRPr lang="en-US" sz="1800" dirty="0"/>
+          </a:p>
+        </p:txBody>
+      </p:sp>
+      <p:sp>
+        <p:nvSpPr>
+          <p:cNvPr id="17" name="Text 15"/>
           <p:cNvSpPr txBox="1"/>
           <p:nvPr/>
         </p:nvSpPr>
         <p:spPr>
           <a:xfrm>
-            <a:off x="4983480" y="5486400"/>
-            <a:ext cx="2880360" cy="594360"/>
+            <a:off x="8321040" y="2377440"/>
+            <a:ext cx="3017520" cy="3474720"/>
           </a:xfrm>
           <a:prstGeom prst="rect">
             <a:avLst/>
@@ -6491,134 +8354,94 @@
           <a:bodyPr wrap="square" lIns="0" tIns="0" rIns="0" bIns="0" rtlCol="0" anchor="t"/>
           <a:lstStyle/>
           <a:p>
-            <a:pPr indent="0" marL="0">
-              <a:buNone/>
+            <a:pPr marL="342900" indent="-342900">
+              <a:spcAft>
+                <a:spcPts val="800"/>
+              </a:spcAft>
+              <a:buSzPct val="100000"/>
+              <a:buChar char="•"/>
             </a:pPr>
             <a:r>
-              <a:rPr lang="en-US" sz="1300" dirty="0">
+              <a:rPr lang="en-US" sz="1500" dirty="0">
                 <a:solidFill>
                   <a:schemeClr val="tx1"/>
                 </a:solidFill>
               </a:rPr>
-              <a:t>Corriger « genreic » dans Adjust, fixer une convention.</a:t>
+              <a:t>Campagnes Ramadan prêtes et validées</a:t>
             </a:r>
-            <a:endParaRPr lang="en-US" sz="1300" dirty="0"/>
-          </a:p>
-        </p:txBody>
-      </p:sp>
-      <p:sp>
-        <p:nvSpPr>
-          <p:cNvPr id="13" name="Règle de coupe circle"/>
-          <p:cNvSpPr/>
-          <p:nvPr/>
-        </p:nvSpPr>
-        <p:spPr>
-          <a:xfrm>
-            <a:off x="8046720" y="5166360"/>
-            <a:ext cx="548640" cy="548640"/>
-          </a:xfrm>
-          <a:prstGeom prst="ellipse">
-            <a:avLst/>
-          </a:prstGeom>
-          <a:solidFill>
-            <a:schemeClr val="accent1"/>
-          </a:solidFill>
-          <a:ln/>
-        </p:spPr>
-      </p:sp>
-      <p:pic>
-        <p:nvPicPr>
-          <p:cNvPr id="14" name="Règle de coupe icon" descr="Règle de coupe">    </p:cNvPr>
-          <p:cNvPicPr>
-            <a:picLocks noChangeAspect="1"/>
-          </p:cNvPicPr>
-          <p:nvPr/>
-        </p:nvPicPr>
-        <p:blipFill>
-          <a:blip r:embed="rId5"/>
-          <a:stretch>
-            <a:fillRect/>
-          </a:stretch>
-        </p:blipFill>
-        <p:spPr>
-          <a:xfrm>
-            <a:off x="8189366" y="5309006"/>
-            <a:ext cx="263347" cy="263347"/>
-          </a:xfrm>
-          <a:prstGeom prst="rect">
-            <a:avLst/>
-          </a:prstGeom>
-        </p:spPr>
-      </p:pic>
-      <p:sp>
-        <p:nvSpPr>
-          <p:cNvPr id="15" name="Text 8"/>
-          <p:cNvSpPr txBox="1"/>
-          <p:nvPr/>
-        </p:nvSpPr>
-        <p:spPr>
-          <a:xfrm>
-            <a:off x="8732520" y="5120640"/>
-            <a:ext cx="2880360" cy="365760"/>
-          </a:xfrm>
-          <a:prstGeom prst="rect">
-            <a:avLst/>
-          </a:prstGeom>
-          <a:noFill/>
-          <a:ln/>
-        </p:spPr>
-        <p:txBody>
-          <a:bodyPr wrap="square" lIns="0" tIns="0" rIns="0" bIns="0" rtlCol="0" anchor="t"/>
-          <a:lstStyle/>
-          <a:p>
-            <a:pPr indent="0" marL="0">
-              <a:buNone/>
+            <a:endParaRPr lang="en-US" sz="1500" dirty="0"/>
+          </a:p>
+          <a:p>
+            <a:pPr marL="342900" indent="-342900">
+              <a:spcAft>
+                <a:spcPts val="800"/>
+              </a:spcAft>
+              <a:buSzPct val="100000"/>
+              <a:buChar char="•"/>
             </a:pPr>
             <a:r>
-              <a:rPr lang="en-US" sz="1600" b="1" dirty="0">
-                <a:solidFill>
-                  <a:schemeClr val="tx2"/>
+              <a:rPr lang="en-US" sz="1500" dirty="0">
+                <a:solidFill>
+                  <a:schemeClr val="tx1"/>
                 </a:solidFill>
               </a:rPr>
-              <a:t>Règle de coupe</a:t>
+              <a:t>Pages Rabat et Marrakech</a:t>
             </a:r>
-            <a:endParaRPr lang="en-US" sz="1600" dirty="0"/>
-          </a:p>
-        </p:txBody>
-      </p:sp>
-      <p:sp>
-        <p:nvSpPr>
-          <p:cNvPr id="16" name="Text 9"/>
-          <p:cNvSpPr txBox="1"/>
-          <p:nvPr/>
-        </p:nvSpPr>
-        <p:spPr>
-          <a:xfrm>
-            <a:off x="8732520" y="5486400"/>
-            <a:ext cx="2880360" cy="594360"/>
-          </a:xfrm>
-          <a:prstGeom prst="rect">
-            <a:avLst/>
-          </a:prstGeom>
-          <a:noFill/>
-          <a:ln/>
-        </p:spPr>
-        <p:txBody>
-          <a:bodyPr wrap="square" lIns="0" tIns="0" rIns="0" bIns="0" rtlCol="0" anchor="t"/>
-          <a:lstStyle/>
-          <a:p>
-            <a:pPr indent="0" marL="0">
-              <a:buNone/>
+            <a:endParaRPr lang="en-US" sz="1500" dirty="0"/>
+          </a:p>
+          <a:p>
+            <a:pPr marL="342900" indent="-342900">
+              <a:spcAft>
+                <a:spcPts val="800"/>
+              </a:spcAft>
+              <a:buSzPct val="100000"/>
+              <a:buChar char="•"/>
             </a:pPr>
             <a:r>
-              <a:rPr lang="en-US" sz="1300" dirty="0">
+              <a:rPr lang="en-US" sz="1500" dirty="0">
                 <a:solidFill>
                   <a:schemeClr val="tx1"/>
                 </a:solidFill>
               </a:rPr>
-              <a:t>Au-dessus du coût cible 7 jours de suite : budget retiré.</a:t>
+              <a:t>Programme micro-influenceurs en place</a:t>
             </a:r>
-            <a:endParaRPr lang="en-US" sz="1300" dirty="0"/>
+            <a:endParaRPr lang="en-US" sz="1500" dirty="0"/>
+          </a:p>
+          <a:p>
+            <a:pPr marL="342900" indent="-342900">
+              <a:spcAft>
+                <a:spcPts val="800"/>
+              </a:spcAft>
+              <a:buSzPct val="100000"/>
+              <a:buChar char="•"/>
+            </a:pPr>
+            <a:r>
+              <a:rPr lang="en-US" sz="1500" dirty="0">
+                <a:solidFill>
+                  <a:schemeClr val="tx1"/>
+                </a:solidFill>
+              </a:rPr>
+              <a:t>Fiches stores optimisées FR et AR</a:t>
+            </a:r>
+            <a:endParaRPr lang="en-US" sz="1500" dirty="0"/>
+          </a:p>
+          <a:p>
+            <a:pPr marL="342900" indent="-342900">
+              <a:spcAft>
+                <a:spcPts val="800"/>
+              </a:spcAft>
+              <a:buSzPct val="100000"/>
+              <a:buChar char="•"/>
+            </a:pPr>
+            <a:r>
+              <a:rPr lang="en-US" sz="1500" dirty="0">
+                <a:solidFill>
+                  <a:schemeClr val="tx1"/>
+                </a:solidFill>
+              </a:rPr>
+              <a:t>Bilan : ce qu'on garde, ce qu'on coupe</a:t>
+            </a:r>
+            <a:endParaRPr lang="en-US" sz="1500" dirty="0"/>
           </a:p>
         </p:txBody>
       </p:sp>
@@ -6702,6 +8525,497 @@
         </p:nvSpPr>
         <p:spPr>
           <a:xfrm>
+            <a:off x="548640" y="320040"/>
+            <a:ext cx="11064240" cy="868680"/>
+          </a:xfrm>
+          <a:prstGeom prst="rect">
+            <a:avLst/>
+          </a:prstGeom>
+          <a:noFill/>
+          <a:ln/>
+        </p:spPr>
+        <p:txBody>
+          <a:bodyPr wrap="square" lIns="0" tIns="0" rIns="0" bIns="0" rtlCol="0" anchor="ctr"/>
+          <a:lstStyle/>
+          <a:p>
+            <a:pPr algn="l" indent="0" marL="0">
+              <a:buNone/>
+            </a:pPr>
+            <a:r>
+              <a:rPr lang="en-US" sz="3600" b="1" dirty="0">
+                <a:solidFill>
+                  <a:schemeClr val="tx2"/>
+                </a:solidFill>
+                <a:latin typeface="Arial" pitchFamily="34" charset="0"/>
+                <a:ea typeface="Arial" pitchFamily="34" charset="-122"/>
+                <a:cs typeface="Arial" pitchFamily="34" charset="-120"/>
+              </a:rPr>
+              <a:t>Budget et pilotage</a:t>
+            </a:r>
+            <a:endParaRPr lang="en-US" sz="3600" dirty="0"/>
+          </a:p>
+        </p:txBody>
+      </p:sp>
+      <p:graphicFrame>
+        <p:nvGraphicFramePr>
+          <p:cNvPr id="3" name="Chart 0" descr=""/>
+          <p:cNvGraphicFramePr/>
+          <p:nvPr/>
+        </p:nvGraphicFramePr>
+        <p:xfrm>
+          <a:off x="365760" y="1280160"/>
+          <a:ext cx="5486400" cy="3657600"/>
+        </p:xfrm>
+        <a:graphic xmlns:a="http://schemas.openxmlformats.org/drawingml/2006/main">
+          <a:graphicData uri="http://schemas.openxmlformats.org/drawingml/2006/chart">
+            <c:chart xmlns:c="http://schemas.openxmlformats.org/drawingml/2006/chart" r:id="rId1"/>
+          </a:graphicData>
+        </a:graphic>
+      </p:graphicFrame>
+      <p:graphicFrame>
+        <p:nvGraphicFramePr>
+          <p:cNvPr id="4" name="Chart 1" descr=""/>
+          <p:cNvGraphicFramePr/>
+          <p:nvPr/>
+        </p:nvGraphicFramePr>
+        <p:xfrm>
+          <a:off x="6126480" y="1280160"/>
+          <a:ext cx="5486400" cy="3657600"/>
+        </p:xfrm>
+        <a:graphic xmlns:a="http://schemas.openxmlformats.org/drawingml/2006/main">
+          <a:graphicData uri="http://schemas.openxmlformats.org/drawingml/2006/chart">
+            <c:chart xmlns:c="http://schemas.openxmlformats.org/drawingml/2006/chart" r:id="rId2"/>
+          </a:graphicData>
+        </a:graphic>
+      </p:graphicFrame>
+      <p:sp>
+        <p:nvSpPr>
+          <p:cNvPr id="5" name="Tableau de bord hebdo circle"/>
+          <p:cNvSpPr/>
+          <p:nvPr/>
+        </p:nvSpPr>
+        <p:spPr>
+          <a:xfrm>
+            <a:off x="548640" y="5166360"/>
+            <a:ext cx="548640" cy="548640"/>
+          </a:xfrm>
+          <a:prstGeom prst="ellipse">
+            <a:avLst/>
+          </a:prstGeom>
+          <a:solidFill>
+            <a:schemeClr val="accent1"/>
+          </a:solidFill>
+          <a:ln/>
+        </p:spPr>
+      </p:sp>
+      <p:pic>
+        <p:nvPicPr>
+          <p:cNvPr id="6" name="Tableau de bord hebdo icon" descr="Tableau de bord hebdo">    </p:cNvPr>
+          <p:cNvPicPr>
+            <a:picLocks noChangeAspect="1"/>
+          </p:cNvPicPr>
+          <p:nvPr/>
+        </p:nvPicPr>
+        <p:blipFill>
+          <a:blip r:embed="rId3"/>
+          <a:stretch>
+            <a:fillRect/>
+          </a:stretch>
+        </p:blipFill>
+        <p:spPr>
+          <a:xfrm>
+            <a:off x="691286" y="5309006"/>
+            <a:ext cx="263347" cy="263347"/>
+          </a:xfrm>
+          <a:prstGeom prst="rect">
+            <a:avLst/>
+          </a:prstGeom>
+        </p:spPr>
+      </p:pic>
+      <p:sp>
+        <p:nvSpPr>
+          <p:cNvPr id="7" name="Text 2"/>
+          <p:cNvSpPr txBox="1"/>
+          <p:nvPr/>
+        </p:nvSpPr>
+        <p:spPr>
+          <a:xfrm>
+            <a:off x="1234440" y="5120640"/>
+            <a:ext cx="2880360" cy="365760"/>
+          </a:xfrm>
+          <a:prstGeom prst="rect">
+            <a:avLst/>
+          </a:prstGeom>
+          <a:noFill/>
+          <a:ln/>
+        </p:spPr>
+        <p:txBody>
+          <a:bodyPr wrap="square" lIns="0" tIns="0" rIns="0" bIns="0" rtlCol="0" anchor="t"/>
+          <a:lstStyle/>
+          <a:p>
+            <a:pPr indent="0" marL="0">
+              <a:buNone/>
+            </a:pPr>
+            <a:r>
+              <a:rPr lang="en-US" sz="1600" b="1" dirty="0">
+                <a:solidFill>
+                  <a:schemeClr val="tx2"/>
+                </a:solidFill>
+              </a:rPr>
+              <a:t>Tableau de bord hebdo</a:t>
+            </a:r>
+            <a:endParaRPr lang="en-US" sz="1600" dirty="0"/>
+          </a:p>
+        </p:txBody>
+      </p:sp>
+      <p:sp>
+        <p:nvSpPr>
+          <p:cNvPr id="8" name="Text 3"/>
+          <p:cNvSpPr txBox="1"/>
+          <p:nvPr/>
+        </p:nvSpPr>
+        <p:spPr>
+          <a:xfrm>
+            <a:off x="1234440" y="5486400"/>
+            <a:ext cx="2880360" cy="594360"/>
+          </a:xfrm>
+          <a:prstGeom prst="rect">
+            <a:avLst/>
+          </a:prstGeom>
+          <a:noFill/>
+          <a:ln/>
+        </p:spPr>
+        <p:txBody>
+          <a:bodyPr wrap="square" lIns="0" tIns="0" rIns="0" bIns="0" rtlCol="0" anchor="t"/>
+          <a:lstStyle/>
+          <a:p>
+            <a:pPr indent="0" marL="0">
+              <a:buNone/>
+            </a:pPr>
+            <a:r>
+              <a:rPr lang="en-US" sz="1300" dirty="0">
+                <a:solidFill>
+                  <a:schemeClr val="tx1"/>
+                </a:solidFill>
+              </a:rPr>
+              <a:t>Coût par 1re commande et rétention, par plateforme.</a:t>
+            </a:r>
+            <a:endParaRPr lang="en-US" sz="1300" dirty="0"/>
+          </a:p>
+        </p:txBody>
+      </p:sp>
+      <p:sp>
+        <p:nvSpPr>
+          <p:cNvPr id="9" name="Nommage propre circle"/>
+          <p:cNvSpPr/>
+          <p:nvPr/>
+        </p:nvSpPr>
+        <p:spPr>
+          <a:xfrm>
+            <a:off x="4297680" y="5166360"/>
+            <a:ext cx="548640" cy="548640"/>
+          </a:xfrm>
+          <a:prstGeom prst="ellipse">
+            <a:avLst/>
+          </a:prstGeom>
+          <a:solidFill>
+            <a:schemeClr val="accent1"/>
+          </a:solidFill>
+          <a:ln/>
+        </p:spPr>
+      </p:sp>
+      <p:pic>
+        <p:nvPicPr>
+          <p:cNvPr id="10" name="Nommage propre icon" descr="Nommage propre">    </p:cNvPr>
+          <p:cNvPicPr>
+            <a:picLocks noChangeAspect="1"/>
+          </p:cNvPicPr>
+          <p:nvPr/>
+        </p:nvPicPr>
+        <p:blipFill>
+          <a:blip r:embed="rId4"/>
+          <a:stretch>
+            <a:fillRect/>
+          </a:stretch>
+        </p:blipFill>
+        <p:spPr>
+          <a:xfrm>
+            <a:off x="4440326" y="5309006"/>
+            <a:ext cx="263347" cy="263347"/>
+          </a:xfrm>
+          <a:prstGeom prst="rect">
+            <a:avLst/>
+          </a:prstGeom>
+        </p:spPr>
+      </p:pic>
+      <p:sp>
+        <p:nvSpPr>
+          <p:cNvPr id="11" name="Text 5"/>
+          <p:cNvSpPr txBox="1"/>
+          <p:nvPr/>
+        </p:nvSpPr>
+        <p:spPr>
+          <a:xfrm>
+            <a:off x="4983480" y="5120640"/>
+            <a:ext cx="2880360" cy="365760"/>
+          </a:xfrm>
+          <a:prstGeom prst="rect">
+            <a:avLst/>
+          </a:prstGeom>
+          <a:noFill/>
+          <a:ln/>
+        </p:spPr>
+        <p:txBody>
+          <a:bodyPr wrap="square" lIns="0" tIns="0" rIns="0" bIns="0" rtlCol="0" anchor="t"/>
+          <a:lstStyle/>
+          <a:p>
+            <a:pPr indent="0" marL="0">
+              <a:buNone/>
+            </a:pPr>
+            <a:r>
+              <a:rPr lang="en-US" sz="1600" b="1" dirty="0">
+                <a:solidFill>
+                  <a:schemeClr val="tx2"/>
+                </a:solidFill>
+              </a:rPr>
+              <a:t>Nommage propre</a:t>
+            </a:r>
+            <a:endParaRPr lang="en-US" sz="1600" dirty="0"/>
+          </a:p>
+        </p:txBody>
+      </p:sp>
+      <p:sp>
+        <p:nvSpPr>
+          <p:cNvPr id="12" name="Text 6"/>
+          <p:cNvSpPr txBox="1"/>
+          <p:nvPr/>
+        </p:nvSpPr>
+        <p:spPr>
+          <a:xfrm>
+            <a:off x="4983480" y="5486400"/>
+            <a:ext cx="2880360" cy="594360"/>
+          </a:xfrm>
+          <a:prstGeom prst="rect">
+            <a:avLst/>
+          </a:prstGeom>
+          <a:noFill/>
+          <a:ln/>
+        </p:spPr>
+        <p:txBody>
+          <a:bodyPr wrap="square" lIns="0" tIns="0" rIns="0" bIns="0" rtlCol="0" anchor="t"/>
+          <a:lstStyle/>
+          <a:p>
+            <a:pPr indent="0" marL="0">
+              <a:buNone/>
+            </a:pPr>
+            <a:r>
+              <a:rPr lang="en-US" sz="1300" dirty="0">
+                <a:solidFill>
+                  <a:schemeClr val="tx1"/>
+                </a:solidFill>
+              </a:rPr>
+              <a:t>Corriger « genreic » dans Adjust, fixer une convention.</a:t>
+            </a:r>
+            <a:endParaRPr lang="en-US" sz="1300" dirty="0"/>
+          </a:p>
+        </p:txBody>
+      </p:sp>
+      <p:sp>
+        <p:nvSpPr>
+          <p:cNvPr id="13" name="Règle de coupe circle"/>
+          <p:cNvSpPr/>
+          <p:nvPr/>
+        </p:nvSpPr>
+        <p:spPr>
+          <a:xfrm>
+            <a:off x="8046720" y="5166360"/>
+            <a:ext cx="548640" cy="548640"/>
+          </a:xfrm>
+          <a:prstGeom prst="ellipse">
+            <a:avLst/>
+          </a:prstGeom>
+          <a:solidFill>
+            <a:schemeClr val="accent1"/>
+          </a:solidFill>
+          <a:ln/>
+        </p:spPr>
+      </p:sp>
+      <p:pic>
+        <p:nvPicPr>
+          <p:cNvPr id="14" name="Règle de coupe icon" descr="Règle de coupe">    </p:cNvPr>
+          <p:cNvPicPr>
+            <a:picLocks noChangeAspect="1"/>
+          </p:cNvPicPr>
+          <p:nvPr/>
+        </p:nvPicPr>
+        <p:blipFill>
+          <a:blip r:embed="rId5"/>
+          <a:stretch>
+            <a:fillRect/>
+          </a:stretch>
+        </p:blipFill>
+        <p:spPr>
+          <a:xfrm>
+            <a:off x="8189366" y="5309006"/>
+            <a:ext cx="263347" cy="263347"/>
+          </a:xfrm>
+          <a:prstGeom prst="rect">
+            <a:avLst/>
+          </a:prstGeom>
+        </p:spPr>
+      </p:pic>
+      <p:sp>
+        <p:nvSpPr>
+          <p:cNvPr id="15" name="Text 8"/>
+          <p:cNvSpPr txBox="1"/>
+          <p:nvPr/>
+        </p:nvSpPr>
+        <p:spPr>
+          <a:xfrm>
+            <a:off x="8732520" y="5120640"/>
+            <a:ext cx="2880360" cy="365760"/>
+          </a:xfrm>
+          <a:prstGeom prst="rect">
+            <a:avLst/>
+          </a:prstGeom>
+          <a:noFill/>
+          <a:ln/>
+        </p:spPr>
+        <p:txBody>
+          <a:bodyPr wrap="square" lIns="0" tIns="0" rIns="0" bIns="0" rtlCol="0" anchor="t"/>
+          <a:lstStyle/>
+          <a:p>
+            <a:pPr indent="0" marL="0">
+              <a:buNone/>
+            </a:pPr>
+            <a:r>
+              <a:rPr lang="en-US" sz="1600" b="1" dirty="0">
+                <a:solidFill>
+                  <a:schemeClr val="tx2"/>
+                </a:solidFill>
+              </a:rPr>
+              <a:t>Règle de coupe</a:t>
+            </a:r>
+            <a:endParaRPr lang="en-US" sz="1600" dirty="0"/>
+          </a:p>
+        </p:txBody>
+      </p:sp>
+      <p:sp>
+        <p:nvSpPr>
+          <p:cNvPr id="16" name="Text 9"/>
+          <p:cNvSpPr txBox="1"/>
+          <p:nvPr/>
+        </p:nvSpPr>
+        <p:spPr>
+          <a:xfrm>
+            <a:off x="8732520" y="5486400"/>
+            <a:ext cx="2880360" cy="594360"/>
+          </a:xfrm>
+          <a:prstGeom prst="rect">
+            <a:avLst/>
+          </a:prstGeom>
+          <a:noFill/>
+          <a:ln/>
+        </p:spPr>
+        <p:txBody>
+          <a:bodyPr wrap="square" lIns="0" tIns="0" rIns="0" bIns="0" rtlCol="0" anchor="t"/>
+          <a:lstStyle/>
+          <a:p>
+            <a:pPr indent="0" marL="0">
+              <a:buNone/>
+            </a:pPr>
+            <a:r>
+              <a:rPr lang="en-US" sz="1300" dirty="0">
+                <a:solidFill>
+                  <a:schemeClr val="tx1"/>
+                </a:solidFill>
+              </a:rPr>
+              <a:t>Au-dessus de 80 DH par client 7 jours de suite : budget retiré.</a:t>
+            </a:r>
+            <a:endParaRPr lang="en-US" sz="1300" dirty="0"/>
+          </a:p>
+        </p:txBody>
+      </p:sp>
+      <p:sp>
+        <p:nvSpPr>
+          <p:cNvPr id="25" name="Slide Number Placeholder 0"/>
+          <p:cNvSpPr>
+            <a:spLocks noGrp="1"/>
+          </p:cNvSpPr>
+          <p:nvPr>
+            <p:ph type="sldNum" sz="quarter" idx="4294967295"/>
+          </p:nvPr>
+        </p:nvSpPr>
+        <p:spPr>
+          <a:xfrm>
+            <a:off x="11155680" y="6400800"/>
+            <a:ext cx="457200" cy="274320"/>
+          </a:xfrm>
+          <a:prstGeom prst="rect">
+            <a:avLst/>
+          </a:prstGeom>
+          <a:extLst>
+            <a:ext uri="{C572A759-6A51-4108-AA02-DFA0A04FC94B}">
+              <ma14:wrappingTextBoxFlag xmlns:ma14="http://schemas.microsoft.com/office/mac/drawingml/2011/main" val="0"/>
+            </a:ext>
+          </a:extLst>
+        </p:spPr>
+        <p:txBody>
+          <a:bodyPr/>
+          <a:lstStyle>
+            <a:lvl1pPr>
+              <a:defRPr sz="1000">
+                <a:solidFill>
+                  <a:schemeClr val="accent5"/>
+                </a:solidFill>
+              </a:defRPr>
+            </a:lvl1pPr>
+          </a:lstStyle>
+          <a:p>
+            <a:pPr algn="r"/>
+            <a:fld id="{F7021451-1387-4CA6-816F-3879F97B5CBC}" type="slidenum">
+              <a:rPr b="0" lang="en-US"/>
+              <a:t>15</a:t>
+            </a:fld>
+            <a:endParaRPr lang="en-US"/>
+          </a:p>
+        </p:txBody>
+      </p:sp>
+    </p:spTree>
+  </p:cSld>
+  <p:clrMapOvr>
+    <a:masterClrMapping/>
+  </p:clrMapOvr>
+</p:sld>
+</file>
+
+<file path=ppt/slides/slide16.xml><?xml version="1.0" encoding="utf-8"?>
+<p:sld xmlns:a="http://schemas.openxmlformats.org/drawingml/2006/main" xmlns:r="http://schemas.openxmlformats.org/officeDocument/2006/relationships" xmlns:p="http://schemas.openxmlformats.org/presentationml/2006/main">
+  <p:cSld name="Slide 16">
+    <p:spTree>
+      <p:nvGrpSpPr>
+        <p:cNvPr id="1" name=""/>
+        <p:cNvGrpSpPr/>
+        <p:nvPr/>
+      </p:nvGrpSpPr>
+      <p:grpSpPr>
+        <a:xfrm>
+          <a:off x="0" y="0"/>
+          <a:ext cx="0" cy="0"/>
+          <a:chOff x="0" y="0"/>
+          <a:chExt cx="0" cy="0"/>
+        </a:xfrm>
+      </p:grpSpPr>
+      <p:sp>
+        <p:nvSpPr>
+          <p:cNvPr id="2" name="Text 0"/>
+          <p:cNvSpPr/>
+          <p:nvPr>
+            <p:ph idx="100" type="title" hasCustomPrompt="1"/>
+          </p:nvPr>
+        </p:nvSpPr>
+        <p:spPr>
+          <a:xfrm>
             <a:off x="731520" y="1920240"/>
             <a:ext cx="10698480" cy="1645920"/>
           </a:xfrm>
@@ -6765,7 +9079,7 @@
                   <a:schemeClr val="accent6"/>
                 </a:solidFill>
               </a:rPr>
-              <a:t>1. Le coût cible par première commande, et qui finance les codes promo</a:t>
+              <a:t>1. Le montant du code de bienvenue (30 DH proposé) et le cofinancement des restaurants</a:t>
             </a:r>
             <a:endParaRPr lang="en-US" sz="1800" dirty="0"/>
           </a:p>
@@ -7049,7 +9363,7 @@
       </p:sp>
       <p:sp>
         <p:nvSpPr>
-          <p:cNvPr id="8" name="Le coût par commande reste inconnu"/>
+          <p:cNvPr id="8" name="Codes promo inclus dans les 200 000 DH"/>
           <p:cNvSpPr/>
           <p:nvPr/>
         </p:nvSpPr>
@@ -7071,7 +9385,7 @@
       </p:sp>
       <p:sp>
         <p:nvSpPr>
-          <p:cNvPr id="9" name="Le coût par commande reste inconnu circle"/>
+          <p:cNvPr id="9" name="Codes promo inclus dans les 200 000 DH circle"/>
           <p:cNvSpPr/>
           <p:nvPr/>
         </p:nvSpPr>
@@ -7091,7 +9405,7 @@
       </p:sp>
       <p:pic>
         <p:nvPicPr>
-          <p:cNvPr id="10" name="Le coût par commande reste inconnu icon" descr="Le coût par commande reste inconnu">    </p:cNvPr>
+          <p:cNvPr id="10" name="Codes promo inclus dans les 200 000 DH icon" descr="Codes promo inclus dans les 200 000 DH">    </p:cNvPr>
           <p:cNvPicPr>
             <a:picLocks noChangeAspect="1"/>
           </p:cNvPicPr>
@@ -7143,7 +9457,7 @@
                   <a:schemeClr val="tx2"/>
                 </a:solidFill>
               </a:rPr>
-              <a:t>Le coût par commande reste inconnu</a:t>
+              <a:t>Codes promo inclus dans les 200 000 DH</a:t>
             </a:r>
             <a:endParaRPr lang="en-US" sz="1700" dirty="0"/>
           </a:p>
@@ -7179,7 +9493,7 @@
                   <a:schemeClr val="tx1"/>
                 </a:solidFill>
               </a:rPr>
-              <a:t>Le budget est fixé (200 000 DH), mais sans coût cible ni historique des comptes ads, la répartition est un point de départ à recalibrer après 2 semaines.</a:t>
+              <a:t>Chaque code offert réduit le budget pub. Coût cible : 80 DH par nouveau client, code compris. Sans historique, la répartition est à recalibrer après 2 semaines.</a:t>
             </a:r>
             <a:endParaRPr lang="en-US" sz="1400" dirty="0"/>
           </a:p>
@@ -11059,8 +13373,8 @@
               <a:tblPr/>
               <a:tblGrid>
                 <a:gridCol w="2926080"/>
-                <a:gridCol w="2926080"/>
-                <a:gridCol w="3657600"/>
+                <a:gridCol w="2743200"/>
+                <a:gridCol w="3840480"/>
                 <a:gridCol w="1554480"/>
               </a:tblGrid>
               <a:tr h="566928">
@@ -11139,7 +13453,7 @@
                             <a:schemeClr val="bg1"/>
                           </a:solidFill>
                         </a:rPr>
-                        <a:t>Rôle</a:t>
+                        <a:t>Optimisation</a:t>
                       </a:r>
                       <a:endParaRPr lang="en-US" sz="1400" dirty="0"/>
                     </a:p>
@@ -11261,7 +13575,7 @@
                             <a:schemeClr val="bg1"/>
                           </a:solidFill>
                         </a:rPr>
-                        <a:t>Budget 4 mois</a:t>
+                        <a:t>Média 4 mois</a:t>
                       </a:r>
                       <a:endParaRPr lang="en-US" sz="1400" dirty="0"/>
                     </a:p>
@@ -11382,7 +13696,7 @@
                             <a:schemeClr val="tx1"/>
                           </a:solidFill>
                         </a:rPr>
-                        <a:t>Acquisition principale</a:t>
+                        <a:t>1re commande</a:t>
                       </a:r>
                       <a:endParaRPr lang="en-US" sz="1400" dirty="0"/>
                     </a:p>
@@ -11440,7 +13754,7 @@
                             <a:schemeClr val="tx1"/>
                           </a:solidFill>
                         </a:rPr>
-                        <a:t>App, optimisée sur la 1re commande</a:t>
+                        <a:t>App, un seul ensemble de pubs Casablanca</a:t>
                       </a:r>
                       <a:endParaRPr lang="en-US" sz="1400" dirty="0"/>
                     </a:p>
@@ -11498,7 +13812,7 @@
                             <a:schemeClr val="tx1"/>
                           </a:solidFill>
                         </a:rPr>
-                        <a:t>65 000 DH</a:t>
+                        <a:t>45 000 DH</a:t>
                       </a:r>
                       <a:endParaRPr lang="en-US" sz="1400" dirty="0"/>
                     </a:p>
@@ -11616,7 +13930,7 @@
                             <a:schemeClr val="tx1"/>
                           </a:solidFill>
                         </a:rPr>
-                        <a:t>Toucher les 18-30 ans</a:t>
+                        <a:t>Inscription, puis 1re commande</a:t>
                       </a:r>
                       <a:endParaRPr lang="en-US" sz="1400" dirty="0"/>
                     </a:p>
@@ -11732,7 +14046,7 @@
                             <a:schemeClr val="tx1"/>
                           </a:solidFill>
                         </a:rPr>
-                        <a:t>40 000 DH</a:t>
+                        <a:t>28 000 DH</a:t>
                       </a:r>
                       <a:endParaRPr lang="en-US" sz="1400" dirty="0"/>
                     </a:p>
@@ -11850,7 +14164,7 @@
                             <a:schemeClr val="tx1"/>
                           </a:solidFill>
                         </a:rPr>
-                        <a:t>Android : Play Store, YouTube</a:t>
+                        <a:t>1re commande</a:t>
                       </a:r>
                       <a:endParaRPr lang="en-US" sz="1400" dirty="0"/>
                     </a:p>
@@ -11908,7 +14222,7 @@
                             <a:schemeClr val="tx1"/>
                           </a:solidFill>
                         </a:rPr>
-                        <a:t>Optimisée sur la 1re commande</a:t>
+                        <a:t>Android : Play Store, YouTube</a:t>
                       </a:r>
                       <a:endParaRPr lang="en-US" sz="1400" dirty="0"/>
                     </a:p>
@@ -11966,7 +14280,7 @@
                             <a:schemeClr val="tx1"/>
                           </a:solidFill>
                         </a:rPr>
-                        <a:t>15 000 DH</a:t>
+                        <a:t>10 000 DH</a:t>
                       </a:r>
                       <a:endParaRPr lang="en-US" sz="1400" dirty="0"/>
                     </a:p>
@@ -12084,7 +14398,7 @@
                             <a:schemeClr val="tx1"/>
                           </a:solidFill>
                         </a:rPr>
-                        <a:t>Capter la demande existante</a:t>
+                        <a:t>Clic</a:t>
                       </a:r>
                       <a:endParaRPr lang="en-US" sz="1400" dirty="0"/>
                     </a:p>
@@ -12200,7 +14514,7 @@
                             <a:schemeClr val="tx1"/>
                           </a:solidFill>
                         </a:rPr>
-                        <a:t>10 000 DH</a:t>
+                        <a:t>7 000 DH</a:t>
                       </a:r>
                       <a:endParaRPr lang="en-US" sz="1400" dirty="0"/>
                     </a:p>
@@ -12260,7 +14574,7 @@
                             <a:schemeClr val="tx1"/>
                           </a:solidFill>
                         </a:rPr>
-                        <a:t>Total ads</a:t>
+                        <a:t>Total média</a:t>
                       </a:r>
                       <a:endParaRPr lang="en-US" sz="1400" dirty="0"/>
                     </a:p>
@@ -12418,7 +14732,7 @@
                             <a:schemeClr val="tx1"/>
                           </a:solidFill>
                         </a:rPr>
-                        <a:t>130 000 DH</a:t>
+                        <a:t>90 000 DH</a:t>
                       </a:r>
                       <a:endParaRPr lang="en-US" sz="1400" dirty="0"/>
                     </a:p>
@@ -12469,7 +14783,7 @@
       </p:graphicFrame>
       <p:sp>
         <p:nvSpPr>
-          <p:cNvPr id="4" name="Plateformes écartées"/>
+          <p:cNvPr id="4" name="Pourquoi si peu de plateformes"/>
           <p:cNvSpPr/>
           <p:nvPr/>
         </p:nvSpPr>
@@ -12491,7 +14805,7 @@
       </p:sp>
       <p:sp>
         <p:nvSpPr>
-          <p:cNvPr id="5" name="Écartées circle"/>
+          <p:cNvPr id="5" name="Apprentissage circle"/>
           <p:cNvSpPr/>
           <p:nvPr/>
         </p:nvSpPr>
@@ -12511,7 +14825,7 @@
       </p:sp>
       <p:pic>
         <p:nvPicPr>
-          <p:cNvPr id="6" name="Écartées icon" descr="Écartées">    </p:cNvPr>
+          <p:cNvPr id="6" name="Apprentissage icon" descr="Apprentissage">    </p:cNvPr>
           <p:cNvPicPr>
             <a:picLocks noChangeAspect="1"/>
           </p:cNvPicPr>
@@ -12563,7 +14877,7 @@
                   <a:schemeClr val="tx1"/>
                 </a:solidFill>
               </a:rPr>
-              <a:t>Écartés : </a:t>
+              <a:t>Pourquoi TikTok sur l'inscription : </a:t>
             </a:r>
             <a:pPr indent="0" marL="0">
               <a:buNone/>
@@ -12574,7 +14888,7 @@
                   <a:schemeClr val="tx1"/>
                 </a:solidFill>
               </a:rPr>
-              <a:t>Apple Search Ads, Snapchat, YouTube seul. À 32 500 DH d'ads par mois, chaque plateforme en plus divise les conversions dont les algorithmes ont besoin pour apprendre.</a:t>
+              <a:t>Meta et TikTok demandent environ 50 conversions par semaine pour apprendre. À 7 000 DH par mois, TikTok n'en aura pas assez sur la 1re commande au début.</a:t>
             </a:r>
             <a:endParaRPr lang="en-US" sz="1500" dirty="0"/>
           </a:p>
@@ -12685,7 +14999,7 @@
                 <a:ea typeface="Arial" pitchFamily="34" charset="-122"/>
                 <a:cs typeface="Arial" pitchFamily="34" charset="-120"/>
               </a:rPr>
-              <a:t>200 000 DH : ce que ça impose</a:t>
+              <a:t>80 DH par client : comment ça se répartit</a:t>
             </a:r>
             <a:endParaRPr lang="en-US" sz="3600" dirty="0"/>
           </a:p>
@@ -12693,18 +15007,18 @@
       </p:sp>
       <p:sp>
         <p:nvSpPr>
-          <p:cNvPr id="3" name="Casablanca d'abord"/>
+          <p:cNvPr id="3" name="Média maximum"/>
           <p:cNvSpPr/>
           <p:nvPr/>
         </p:nvSpPr>
         <p:spPr>
           <a:xfrm>
             <a:off x="548640" y="1417320"/>
-            <a:ext cx="5486400" cy="1325880"/>
+            <a:ext cx="3520440" cy="2103120"/>
           </a:xfrm>
           <a:prstGeom prst="roundRect">
             <a:avLst>
-              <a:gd name="adj" fmla="val 8276"/>
+              <a:gd name="adj" fmla="val 5217"/>
             </a:avLst>
           </a:prstGeom>
           <a:solidFill>
@@ -12715,14 +15029,391 @@
       </p:sp>
       <p:sp>
         <p:nvSpPr>
-          <p:cNvPr id="4" name="Casablanca d'abord circle"/>
+          <p:cNvPr id="4" name="Text 2"/>
+          <p:cNvSpPr txBox="1"/>
+          <p:nvPr/>
+        </p:nvSpPr>
+        <p:spPr>
+          <a:xfrm>
+            <a:off x="822960" y="1600200"/>
+            <a:ext cx="2971800" cy="868680"/>
+          </a:xfrm>
+          <a:prstGeom prst="rect">
+            <a:avLst/>
+          </a:prstGeom>
+          <a:noFill/>
+          <a:ln/>
+        </p:spPr>
+        <p:txBody>
+          <a:bodyPr wrap="square" lIns="0" tIns="0" rIns="0" bIns="0" rtlCol="0" anchor="t"/>
+          <a:lstStyle/>
+          <a:p>
+            <a:pPr indent="0" marL="0">
+              <a:buNone/>
+            </a:pPr>
+            <a:r>
+              <a:rPr lang="en-US" sz="5400" b="1" dirty="0">
+                <a:solidFill>
+                  <a:schemeClr val="accent1"/>
+                </a:solidFill>
+                <a:latin typeface="Arial" pitchFamily="34" charset="0"/>
+                <a:ea typeface="Arial" pitchFamily="34" charset="-122"/>
+                <a:cs typeface="Arial" pitchFamily="34" charset="-120"/>
+              </a:rPr>
+              <a:t>50 DH</a:t>
+            </a:r>
+            <a:endParaRPr lang="en-US" sz="5400" dirty="0"/>
+          </a:p>
+        </p:txBody>
+      </p:sp>
+      <p:sp>
+        <p:nvSpPr>
+          <p:cNvPr id="5" name="Text 3"/>
+          <p:cNvSpPr txBox="1"/>
+          <p:nvPr/>
+        </p:nvSpPr>
+        <p:spPr>
+          <a:xfrm>
+            <a:off x="822960" y="2514600"/>
+            <a:ext cx="2971800" cy="365760"/>
+          </a:xfrm>
+          <a:prstGeom prst="rect">
+            <a:avLst/>
+          </a:prstGeom>
+          <a:noFill/>
+          <a:ln/>
+        </p:spPr>
+        <p:txBody>
+          <a:bodyPr wrap="square" lIns="0" tIns="0" rIns="0" bIns="0" rtlCol="0" anchor="t"/>
+          <a:lstStyle/>
+          <a:p>
+            <a:pPr indent="0" marL="0">
+              <a:buNone/>
+            </a:pPr>
+            <a:r>
+              <a:rPr lang="en-US" sz="1700" b="1" dirty="0">
+                <a:solidFill>
+                  <a:schemeClr val="tx2"/>
+                </a:solidFill>
+              </a:rPr>
+              <a:t>Média maximum</a:t>
+            </a:r>
+            <a:endParaRPr lang="en-US" sz="1700" dirty="0"/>
+          </a:p>
+        </p:txBody>
+      </p:sp>
+      <p:sp>
+        <p:nvSpPr>
+          <p:cNvPr id="6" name="Text 4"/>
+          <p:cNvSpPr txBox="1"/>
+          <p:nvPr/>
+        </p:nvSpPr>
+        <p:spPr>
+          <a:xfrm>
+            <a:off x="822960" y="2926080"/>
+            <a:ext cx="2971800" cy="502920"/>
+          </a:xfrm>
+          <a:prstGeom prst="rect">
+            <a:avLst/>
+          </a:prstGeom>
+          <a:noFill/>
+          <a:ln/>
+        </p:spPr>
+        <p:txBody>
+          <a:bodyPr wrap="square" lIns="0" tIns="0" rIns="0" bIns="0" rtlCol="0" anchor="t"/>
+          <a:lstStyle/>
+          <a:p>
+            <a:pPr indent="0" marL="0">
+              <a:buNone/>
+            </a:pPr>
+            <a:r>
+              <a:rPr lang="en-US" sz="1300" dirty="0">
+                <a:solidFill>
+                  <a:schemeClr val="accent5"/>
+                </a:solidFill>
+              </a:rPr>
+              <a:t>Ce que les ads peuvent coûter par 1re commande</a:t>
+            </a:r>
+            <a:endParaRPr lang="en-US" sz="1300" dirty="0"/>
+          </a:p>
+        </p:txBody>
+      </p:sp>
+      <p:sp>
+        <p:nvSpPr>
+          <p:cNvPr id="7" name="Code de bienvenue"/>
           <p:cNvSpPr/>
           <p:nvPr/>
         </p:nvSpPr>
         <p:spPr>
           <a:xfrm>
-            <a:off x="777240" y="1645920"/>
-            <a:ext cx="548640" cy="548640"/>
+            <a:off x="4297680" y="1417320"/>
+            <a:ext cx="3520440" cy="2103120"/>
+          </a:xfrm>
+          <a:prstGeom prst="roundRect">
+            <a:avLst>
+              <a:gd name="adj" fmla="val 5217"/>
+            </a:avLst>
+          </a:prstGeom>
+          <a:solidFill>
+            <a:schemeClr val="bg2"/>
+          </a:solidFill>
+          <a:ln/>
+        </p:spPr>
+      </p:sp>
+      <p:sp>
+        <p:nvSpPr>
+          <p:cNvPr id="8" name="Text 6"/>
+          <p:cNvSpPr txBox="1"/>
+          <p:nvPr/>
+        </p:nvSpPr>
+        <p:spPr>
+          <a:xfrm>
+            <a:off x="4572000" y="1600200"/>
+            <a:ext cx="2971800" cy="868680"/>
+          </a:xfrm>
+          <a:prstGeom prst="rect">
+            <a:avLst/>
+          </a:prstGeom>
+          <a:noFill/>
+          <a:ln/>
+        </p:spPr>
+        <p:txBody>
+          <a:bodyPr wrap="square" lIns="0" tIns="0" rIns="0" bIns="0" rtlCol="0" anchor="t"/>
+          <a:lstStyle/>
+          <a:p>
+            <a:pPr indent="0" marL="0">
+              <a:buNone/>
+            </a:pPr>
+            <a:r>
+              <a:rPr lang="en-US" sz="5400" b="1" dirty="0">
+                <a:solidFill>
+                  <a:schemeClr val="accent1"/>
+                </a:solidFill>
+                <a:latin typeface="Arial" pitchFamily="34" charset="0"/>
+                <a:ea typeface="Arial" pitchFamily="34" charset="-122"/>
+                <a:cs typeface="Arial" pitchFamily="34" charset="-120"/>
+              </a:rPr>
+              <a:t>30 DH</a:t>
+            </a:r>
+            <a:endParaRPr lang="en-US" sz="5400" dirty="0"/>
+          </a:p>
+        </p:txBody>
+      </p:sp>
+      <p:sp>
+        <p:nvSpPr>
+          <p:cNvPr id="9" name="Text 7"/>
+          <p:cNvSpPr txBox="1"/>
+          <p:nvPr/>
+        </p:nvSpPr>
+        <p:spPr>
+          <a:xfrm>
+            <a:off x="4572000" y="2514600"/>
+            <a:ext cx="2971800" cy="365760"/>
+          </a:xfrm>
+          <a:prstGeom prst="rect">
+            <a:avLst/>
+          </a:prstGeom>
+          <a:noFill/>
+          <a:ln/>
+        </p:spPr>
+        <p:txBody>
+          <a:bodyPr wrap="square" lIns="0" tIns="0" rIns="0" bIns="0" rtlCol="0" anchor="t"/>
+          <a:lstStyle/>
+          <a:p>
+            <a:pPr indent="0" marL="0">
+              <a:buNone/>
+            </a:pPr>
+            <a:r>
+              <a:rPr lang="en-US" sz="1700" b="1" dirty="0">
+                <a:solidFill>
+                  <a:schemeClr val="tx2"/>
+                </a:solidFill>
+              </a:rPr>
+              <a:t>Code de bienvenue</a:t>
+            </a:r>
+            <a:endParaRPr lang="en-US" sz="1700" dirty="0"/>
+          </a:p>
+        </p:txBody>
+      </p:sp>
+      <p:sp>
+        <p:nvSpPr>
+          <p:cNvPr id="10" name="Text 8"/>
+          <p:cNvSpPr txBox="1"/>
+          <p:nvPr/>
+        </p:nvSpPr>
+        <p:spPr>
+          <a:xfrm>
+            <a:off x="4572000" y="2926080"/>
+            <a:ext cx="2971800" cy="502920"/>
+          </a:xfrm>
+          <a:prstGeom prst="rect">
+            <a:avLst/>
+          </a:prstGeom>
+          <a:noFill/>
+          <a:ln/>
+        </p:spPr>
+        <p:txBody>
+          <a:bodyPr wrap="square" lIns="0" tIns="0" rIns="0" bIns="0" rtlCol="0" anchor="t"/>
+          <a:lstStyle/>
+          <a:p>
+            <a:pPr indent="0" marL="0">
+              <a:buNone/>
+            </a:pPr>
+            <a:r>
+              <a:rPr lang="en-US" sz="1300" dirty="0">
+                <a:solidFill>
+                  <a:schemeClr val="accent5"/>
+                </a:solidFill>
+              </a:rPr>
+              <a:t>Réduction offerte sur la 1re commande</a:t>
+            </a:r>
+            <a:endParaRPr lang="en-US" sz="1300" dirty="0"/>
+          </a:p>
+        </p:txBody>
+      </p:sp>
+      <p:sp>
+        <p:nvSpPr>
+          <p:cNvPr id="11" name="Coût total cible"/>
+          <p:cNvSpPr/>
+          <p:nvPr/>
+        </p:nvSpPr>
+        <p:spPr>
+          <a:xfrm>
+            <a:off x="8046720" y="1417320"/>
+            <a:ext cx="3520440" cy="2103120"/>
+          </a:xfrm>
+          <a:prstGeom prst="roundRect">
+            <a:avLst>
+              <a:gd name="adj" fmla="val 5217"/>
+            </a:avLst>
+          </a:prstGeom>
+          <a:solidFill>
+            <a:schemeClr val="bg2"/>
+          </a:solidFill>
+          <a:ln/>
+        </p:spPr>
+      </p:sp>
+      <p:sp>
+        <p:nvSpPr>
+          <p:cNvPr id="12" name="Text 10"/>
+          <p:cNvSpPr txBox="1"/>
+          <p:nvPr/>
+        </p:nvSpPr>
+        <p:spPr>
+          <a:xfrm>
+            <a:off x="8321040" y="1600200"/>
+            <a:ext cx="2971800" cy="868680"/>
+          </a:xfrm>
+          <a:prstGeom prst="rect">
+            <a:avLst/>
+          </a:prstGeom>
+          <a:noFill/>
+          <a:ln/>
+        </p:spPr>
+        <p:txBody>
+          <a:bodyPr wrap="square" lIns="0" tIns="0" rIns="0" bIns="0" rtlCol="0" anchor="t"/>
+          <a:lstStyle/>
+          <a:p>
+            <a:pPr indent="0" marL="0">
+              <a:buNone/>
+            </a:pPr>
+            <a:r>
+              <a:rPr lang="en-US" sz="5400" b="1" dirty="0">
+                <a:solidFill>
+                  <a:schemeClr val="accent4"/>
+                </a:solidFill>
+                <a:latin typeface="Arial" pitchFamily="34" charset="0"/>
+                <a:ea typeface="Arial" pitchFamily="34" charset="-122"/>
+                <a:cs typeface="Arial" pitchFamily="34" charset="-120"/>
+              </a:rPr>
+              <a:t>80 DH</a:t>
+            </a:r>
+            <a:endParaRPr lang="en-US" sz="5400" dirty="0"/>
+          </a:p>
+        </p:txBody>
+      </p:sp>
+      <p:sp>
+        <p:nvSpPr>
+          <p:cNvPr id="13" name="Text 11"/>
+          <p:cNvSpPr txBox="1"/>
+          <p:nvPr/>
+        </p:nvSpPr>
+        <p:spPr>
+          <a:xfrm>
+            <a:off x="8321040" y="2514600"/>
+            <a:ext cx="2971800" cy="365760"/>
+          </a:xfrm>
+          <a:prstGeom prst="rect">
+            <a:avLst/>
+          </a:prstGeom>
+          <a:noFill/>
+          <a:ln/>
+        </p:spPr>
+        <p:txBody>
+          <a:bodyPr wrap="square" lIns="0" tIns="0" rIns="0" bIns="0" rtlCol="0" anchor="t"/>
+          <a:lstStyle/>
+          <a:p>
+            <a:pPr indent="0" marL="0">
+              <a:buNone/>
+            </a:pPr>
+            <a:r>
+              <a:rPr lang="en-US" sz="1700" b="1" dirty="0">
+                <a:solidFill>
+                  <a:schemeClr val="tx2"/>
+                </a:solidFill>
+              </a:rPr>
+              <a:t>Coût total cible</a:t>
+            </a:r>
+            <a:endParaRPr lang="en-US" sz="1700" dirty="0"/>
+          </a:p>
+        </p:txBody>
+      </p:sp>
+      <p:sp>
+        <p:nvSpPr>
+          <p:cNvPr id="14" name="Text 12"/>
+          <p:cNvSpPr txBox="1"/>
+          <p:nvPr/>
+        </p:nvSpPr>
+        <p:spPr>
+          <a:xfrm>
+            <a:off x="8321040" y="2926080"/>
+            <a:ext cx="2971800" cy="502920"/>
+          </a:xfrm>
+          <a:prstGeom prst="rect">
+            <a:avLst/>
+          </a:prstGeom>
+          <a:noFill/>
+          <a:ln/>
+        </p:spPr>
+        <p:txBody>
+          <a:bodyPr wrap="square" lIns="0" tIns="0" rIns="0" bIns="0" rtlCol="0" anchor="t"/>
+          <a:lstStyle/>
+          <a:p>
+            <a:pPr indent="0" marL="0">
+              <a:buNone/>
+            </a:pPr>
+            <a:r>
+              <a:rPr lang="en-US" sz="1300" dirty="0">
+                <a:solidFill>
+                  <a:schemeClr val="accent5"/>
+                </a:solidFill>
+              </a:rPr>
+              <a:t>Au-delà, la campagne perd son budget</a:t>
+            </a:r>
+            <a:endParaRPr lang="en-US" sz="1300" dirty="0"/>
+          </a:p>
+        </p:txBody>
+      </p:sp>
+      <p:sp>
+        <p:nvSpPr>
+          <p:cNvPr id="15" name="Objectif : environ 1 750 nouveaux clients circle"/>
+          <p:cNvSpPr/>
+          <p:nvPr/>
+        </p:nvSpPr>
+        <p:spPr>
+          <a:xfrm>
+            <a:off x="548640" y="3794760"/>
+            <a:ext cx="502920" cy="502920"/>
           </a:xfrm>
           <a:prstGeom prst="ellipse">
             <a:avLst/>
@@ -12735,7 +15426,7 @@
       </p:sp>
       <p:pic>
         <p:nvPicPr>
-          <p:cNvPr id="5" name="Casablanca d'abord icon" descr="Casablanca d'abord">    </p:cNvPr>
+          <p:cNvPr id="16" name="Objectif : environ 1 750 nouveaux clients icon" descr="Objectif : environ 1 750 nouveaux clients">    </p:cNvPr>
           <p:cNvPicPr>
             <a:picLocks noChangeAspect="1"/>
           </p:cNvPicPr>
@@ -12749,8 +15440,8 @@
         </p:blipFill>
         <p:spPr>
           <a:xfrm>
-            <a:off x="919886" y="1788566"/>
-            <a:ext cx="263347" cy="263347"/>
+            <a:off x="679399" y="3925519"/>
+            <a:ext cx="241402" cy="241402"/>
           </a:xfrm>
           <a:prstGeom prst="rect">
             <a:avLst/>
@@ -12759,14 +15450,14 @@
       </p:pic>
       <p:sp>
         <p:nvSpPr>
-          <p:cNvPr id="6" name="Text 3"/>
+          <p:cNvPr id="17" name="Text 14"/>
           <p:cNvSpPr txBox="1"/>
           <p:nvPr/>
         </p:nvSpPr>
         <p:spPr>
           <a:xfrm>
-            <a:off x="1508760" y="1600200"/>
-            <a:ext cx="4343400" cy="365760"/>
+            <a:off x="1234440" y="3749040"/>
+            <a:ext cx="10378440" cy="685800"/>
           </a:xfrm>
           <a:prstGeom prst="rect">
             <a:avLst/>
@@ -12775,45 +15466,20 @@
           <a:ln/>
         </p:spPr>
         <p:txBody>
-          <a:bodyPr wrap="square" lIns="0" tIns="0" rIns="0" bIns="0" rtlCol="0" anchor="t"/>
+          <a:bodyPr wrap="square" lIns="0" tIns="0" rIns="0" bIns="0" rtlCol="0" anchor="ctr"/>
           <a:lstStyle/>
           <a:p>
             <a:pPr indent="0" marL="0">
               <a:buNone/>
             </a:pPr>
             <a:r>
-              <a:rPr lang="en-US" sz="1700" b="1" dirty="0">
+              <a:rPr lang="en-US" sz="1400" b="1" dirty="0">
                 <a:solidFill>
                   <a:schemeClr val="tx2"/>
                 </a:solidFill>
               </a:rPr>
-              <a:t>Casablanca d'abord</a:t>
+              <a:t>Objectif : environ 1 750 nouveaux clients : </a:t>
             </a:r>
-            <a:endParaRPr lang="en-US" sz="1700" dirty="0"/>
-          </a:p>
-        </p:txBody>
-      </p:sp>
-      <p:sp>
-        <p:nvSpPr>
-          <p:cNvPr id="7" name="Text 4"/>
-          <p:cNvSpPr txBox="1"/>
-          <p:nvPr/>
-        </p:nvSpPr>
-        <p:spPr>
-          <a:xfrm>
-            <a:off x="1508760" y="1984248"/>
-            <a:ext cx="4343400" cy="731520"/>
-          </a:xfrm>
-          <a:prstGeom prst="rect">
-            <a:avLst/>
-          </a:prstGeom>
-          <a:noFill/>
-          <a:ln/>
-        </p:spPr>
-        <p:txBody>
-          <a:bodyPr wrap="square" lIns="0" tIns="0" rIns="0" bIns="0" rtlCol="0" anchor="t"/>
-          <a:lstStyle/>
-          <a:p>
             <a:pPr indent="0" marL="0">
               <a:buNone/>
             </a:pPr>
@@ -12823,7 +15489,7 @@
                   <a:schemeClr val="tx1"/>
                 </a:solidFill>
               </a:rPr>
-              <a:t>Novembre et décembre sur Casablanca seule. Rabat et Marrakech en janvier si le coût par commande tient.</a:t>
+              <a:t>140 000 DH d'acquisition (90 000 de média + 50 000 de codes de bienvenue) ÷ 80 DH.</a:t>
             </a:r>
             <a:endParaRPr lang="en-US" sz="1400" dirty="0"/>
           </a:p>
@@ -12831,36 +15497,14 @@
       </p:sp>
       <p:sp>
         <p:nvSpPr>
-          <p:cNvPr id="8" name="Trois plateformes, pas six"/>
+          <p:cNvPr id="18" name="Faire financer les promos Black Friday et Ramadan circle"/>
           <p:cNvSpPr/>
           <p:nvPr/>
         </p:nvSpPr>
         <p:spPr>
           <a:xfrm>
-            <a:off x="548640" y="2898648"/>
-            <a:ext cx="5486400" cy="1325880"/>
-          </a:xfrm>
-          <a:prstGeom prst="roundRect">
-            <a:avLst>
-              <a:gd name="adj" fmla="val 8276"/>
-            </a:avLst>
-          </a:prstGeom>
-          <a:solidFill>
-            <a:schemeClr val="bg2"/>
-          </a:solidFill>
-          <a:ln/>
-        </p:spPr>
-      </p:sp>
-      <p:sp>
-        <p:nvSpPr>
-          <p:cNvPr id="9" name="Trois plateformes, pas six circle"/>
-          <p:cNvSpPr/>
-          <p:nvPr/>
-        </p:nvSpPr>
-        <p:spPr>
-          <a:xfrm>
-            <a:off x="777240" y="3127248"/>
-            <a:ext cx="548640" cy="548640"/>
+            <a:off x="548640" y="4572000"/>
+            <a:ext cx="502920" cy="502920"/>
           </a:xfrm>
           <a:prstGeom prst="ellipse">
             <a:avLst/>
@@ -12873,7 +15517,7 @@
       </p:sp>
       <p:pic>
         <p:nvPicPr>
-          <p:cNvPr id="10" name="Trois plateformes, pas six icon" descr="Trois plateformes, pas six">    </p:cNvPr>
+          <p:cNvPr id="19" name="Faire financer les promos Black Friday et Ramadan icon" descr="Faire financer les promos Black Friday et Ramadan">    </p:cNvPr>
           <p:cNvPicPr>
             <a:picLocks noChangeAspect="1"/>
           </p:cNvPicPr>
@@ -12887,8 +15531,8 @@
         </p:blipFill>
         <p:spPr>
           <a:xfrm>
-            <a:off x="919886" y="3269894"/>
-            <a:ext cx="263347" cy="263347"/>
+            <a:off x="679399" y="4702759"/>
+            <a:ext cx="241402" cy="241402"/>
           </a:xfrm>
           <a:prstGeom prst="rect">
             <a:avLst/>
@@ -12897,14 +15541,14 @@
       </p:pic>
       <p:sp>
         <p:nvSpPr>
-          <p:cNvPr id="11" name="Text 7"/>
+          <p:cNvPr id="20" name="Text 16"/>
           <p:cNvSpPr txBox="1"/>
           <p:nvPr/>
         </p:nvSpPr>
         <p:spPr>
           <a:xfrm>
-            <a:off x="1508760" y="3081528"/>
-            <a:ext cx="4343400" cy="365760"/>
+            <a:off x="1234440" y="4526280"/>
+            <a:ext cx="10378440" cy="685800"/>
           </a:xfrm>
           <a:prstGeom prst="rect">
             <a:avLst/>
@@ -12913,45 +15557,20 @@
           <a:ln/>
         </p:spPr>
         <p:txBody>
-          <a:bodyPr wrap="square" lIns="0" tIns="0" rIns="0" bIns="0" rtlCol="0" anchor="t"/>
+          <a:bodyPr wrap="square" lIns="0" tIns="0" rIns="0" bIns="0" rtlCol="0" anchor="ctr"/>
           <a:lstStyle/>
           <a:p>
             <a:pPr indent="0" marL="0">
               <a:buNone/>
             </a:pPr>
             <a:r>
-              <a:rPr lang="en-US" sz="1700" b="1" dirty="0">
+              <a:rPr lang="en-US" sz="1400" b="1" dirty="0">
                 <a:solidFill>
                   <a:schemeClr val="tx2"/>
                 </a:solidFill>
               </a:rPr>
-              <a:t>Trois plateformes, pas six</a:t>
+              <a:t>Faire financer les promos Black Friday et Ramadan : </a:t>
             </a:r>
-            <a:endParaRPr lang="en-US" sz="1700" dirty="0"/>
-          </a:p>
-        </p:txBody>
-      </p:sp>
-      <p:sp>
-        <p:nvSpPr>
-          <p:cNvPr id="12" name="Text 8"/>
-          <p:cNvSpPr txBox="1"/>
-          <p:nvPr/>
-        </p:nvSpPr>
-        <p:spPr>
-          <a:xfrm>
-            <a:off x="1508760" y="3465576"/>
-            <a:ext cx="4343400" cy="731520"/>
-          </a:xfrm>
-          <a:prstGeom prst="rect">
-            <a:avLst/>
-          </a:prstGeom>
-          <a:noFill/>
-          <a:ln/>
-        </p:spPr>
-        <p:txBody>
-          <a:bodyPr wrap="square" lIns="0" tIns="0" rIns="0" bIns="0" rtlCol="0" anchor="t"/>
-          <a:lstStyle/>
-          <a:p>
             <a:pPr indent="0" marL="0">
               <a:buNone/>
             </a:pPr>
@@ -12961,7 +15580,7 @@
                   <a:schemeClr val="tx1"/>
                 </a:solidFill>
               </a:rPr>
-              <a:t>Meta, TikTok et Google concentrent 130 000 DH ; le reste va à l'influence, au CRM et au contenu.</a:t>
+              <a:t>Les codes promo étant dans le budget, les offres aux clients existants doivent être cofinancées par les restaurants partenaires.</a:t>
             </a:r>
             <a:endParaRPr lang="en-US" sz="1400" dirty="0"/>
           </a:p>
@@ -12969,36 +15588,14 @@
       </p:sp>
       <p:sp>
         <p:nvSpPr>
-          <p:cNvPr id="13" name="Garder 35 % pour février"/>
+          <p:cNvPr id="21" name="50 DH de média par commande est exigeant circle"/>
           <p:cNvSpPr/>
           <p:nvPr/>
         </p:nvSpPr>
         <p:spPr>
           <a:xfrm>
-            <a:off x="548640" y="4379976"/>
-            <a:ext cx="5486400" cy="1325880"/>
-          </a:xfrm>
-          <a:prstGeom prst="roundRect">
-            <a:avLst>
-              <a:gd name="adj" fmla="val 8276"/>
-            </a:avLst>
-          </a:prstGeom>
-          <a:solidFill>
-            <a:schemeClr val="bg2"/>
-          </a:solidFill>
-          <a:ln/>
-        </p:spPr>
-      </p:sp>
-      <p:sp>
-        <p:nvSpPr>
-          <p:cNvPr id="14" name="Garder 35 % pour février circle"/>
-          <p:cNvSpPr/>
-          <p:nvPr/>
-        </p:nvSpPr>
-        <p:spPr>
-          <a:xfrm>
-            <a:off x="777240" y="4608576"/>
-            <a:ext cx="548640" cy="548640"/>
+            <a:off x="548640" y="5349240"/>
+            <a:ext cx="502920" cy="502920"/>
           </a:xfrm>
           <a:prstGeom prst="ellipse">
             <a:avLst/>
@@ -13011,7 +15608,7 @@
       </p:sp>
       <p:pic>
         <p:nvPicPr>
-          <p:cNvPr id="15" name="Garder 35 % pour février icon" descr="Garder 35 % pour février">    </p:cNvPr>
+          <p:cNvPr id="22" name="50 DH de média par commande est exigeant icon" descr="50 DH de média par commande est exigeant">    </p:cNvPr>
           <p:cNvPicPr>
             <a:picLocks noChangeAspect="1"/>
           </p:cNvPicPr>
@@ -13025,8 +15622,8 @@
         </p:blipFill>
         <p:spPr>
           <a:xfrm>
-            <a:off x="919886" y="4751222"/>
-            <a:ext cx="263347" cy="263347"/>
+            <a:off x="679399" y="5479999"/>
+            <a:ext cx="241402" cy="241402"/>
           </a:xfrm>
           <a:prstGeom prst="rect">
             <a:avLst/>
@@ -13035,14 +15632,14 @@
       </p:pic>
       <p:sp>
         <p:nvSpPr>
-          <p:cNvPr id="16" name="Text 11"/>
+          <p:cNvPr id="23" name="Text 18"/>
           <p:cNvSpPr txBox="1"/>
           <p:nvPr/>
         </p:nvSpPr>
         <p:spPr>
           <a:xfrm>
-            <a:off x="1508760" y="4562856"/>
-            <a:ext cx="4343400" cy="365760"/>
+            <a:off x="1234440" y="5303520"/>
+            <a:ext cx="10378440" cy="685800"/>
           </a:xfrm>
           <a:prstGeom prst="rect">
             <a:avLst/>
@@ -13051,45 +15648,20 @@
           <a:ln/>
         </p:spPr>
         <p:txBody>
-          <a:bodyPr wrap="square" lIns="0" tIns="0" rIns="0" bIns="0" rtlCol="0" anchor="t"/>
+          <a:bodyPr wrap="square" lIns="0" tIns="0" rIns="0" bIns="0" rtlCol="0" anchor="ctr"/>
           <a:lstStyle/>
           <a:p>
             <a:pPr indent="0" marL="0">
               <a:buNone/>
             </a:pPr>
             <a:r>
-              <a:rPr lang="en-US" sz="1700" b="1" dirty="0">
+              <a:rPr lang="en-US" sz="1400" b="1" dirty="0">
                 <a:solidFill>
                   <a:schemeClr val="tx2"/>
                 </a:solidFill>
               </a:rPr>
-              <a:t>Garder 35 % pour février</a:t>
+              <a:t>50 DH de média par commande est exigeant : </a:t>
             </a:r>
-            <a:endParaRPr lang="en-US" sz="1700" dirty="0"/>
-          </a:p>
-        </p:txBody>
-      </p:sp>
-      <p:sp>
-        <p:nvSpPr>
-          <p:cNvPr id="17" name="Text 12"/>
-          <p:cNvSpPr txBox="1"/>
-          <p:nvPr/>
-        </p:nvSpPr>
-        <p:spPr>
-          <a:xfrm>
-            <a:off x="1508760" y="4946904"/>
-            <a:ext cx="4343400" cy="731520"/>
-          </a:xfrm>
-          <a:prstGeom prst="rect">
-            <a:avLst/>
-          </a:prstGeom>
-          <a:noFill/>
-          <a:ln/>
-        </p:spPr>
-        <p:txBody>
-          <a:bodyPr wrap="square" lIns="0" tIns="0" rIns="0" bIns="0" rtlCol="0" anchor="t"/>
-          <a:lstStyle/>
-          <a:p>
             <a:pPr indent="0" marL="0">
               <a:buNone/>
             </a:pPr>
@@ -13099,589 +15671,9 @@
                   <a:schemeClr val="tx1"/>
                 </a:solidFill>
               </a:rPr>
-              <a:t>70 000 DH en février pour le Ramadan. Attention : le Ramadan continue jusqu'à début mars, hors budget.</a:t>
+              <a:t>C'est un plafond, pas une prévision : il sera confirmé ou démenti après 2 semaines. S'il ne tient pas, baisser le code à 20 DH avant de couper les ads.</a:t>
             </a:r>
             <a:endParaRPr lang="en-US" sz="1400" dirty="0"/>
-          </a:p>
-        </p:txBody>
-      </p:sp>
-      <p:sp>
-        <p:nvSpPr>
-          <p:cNvPr id="18" name="Text 13"/>
-          <p:cNvSpPr txBox="1"/>
-          <p:nvPr/>
-        </p:nvSpPr>
-        <p:spPr>
-          <a:xfrm>
-            <a:off x="6400800" y="1417320"/>
-            <a:ext cx="5212080" cy="365760"/>
-          </a:xfrm>
-          <a:prstGeom prst="rect">
-            <a:avLst/>
-          </a:prstGeom>
-          <a:noFill/>
-          <a:ln/>
-        </p:spPr>
-        <p:txBody>
-          <a:bodyPr wrap="square" lIns="0" tIns="0" rIns="0" bIns="0" rtlCol="0" anchor="t"/>
-          <a:lstStyle/>
-          <a:p>
-            <a:pPr indent="0" marL="0">
-              <a:buNone/>
-            </a:pPr>
-            <a:r>
-              <a:rPr lang="en-US" sz="1700" b="1" dirty="0">
-                <a:solidFill>
-                  <a:schemeClr val="tx2"/>
-                </a:solidFill>
-              </a:rPr>
-              <a:t>Ordres de grandeur avec 130 000 DH d'ads</a:t>
-            </a:r>
-            <a:endParaRPr lang="en-US" sz="1700" dirty="0"/>
-          </a:p>
-        </p:txBody>
-      </p:sp>
-      <p:graphicFrame>
-        <p:nvGraphicFramePr>
-          <p:cNvPr id="9" name="Table 0"/>
-          <p:cNvGraphicFramePr>
-            <a:graphicFrameLocks noGrp="1"/>
-          </p:cNvGraphicFramePr>
-          <p:nvPr>
-            <p:extLst>
-              <p:ext uri="{D42A27DB-BD31-4B8C-83A1-F6EECF244321}">
-                <p14:modId xmlns:p14="http://schemas.microsoft.com/office/powerpoint/2010/main" val="1579011935"/>
-              </p:ext>
-            </p:extLst>
-          </p:nvPr>
-        </p:nvGraphicFramePr>
-        <p:xfrm>
-          <a:off x="6400800" y="1920240"/>
-          <a:ext cx="5212080" cy="914400"/>
-        </p:xfrm>
-        <a:graphic>
-          <a:graphicData uri="http://schemas.openxmlformats.org/drawingml/2006/table">
-            <a:tbl>
-              <a:tblPr/>
-              <a:tblGrid>
-                <a:gridCol w="2743200"/>
-                <a:gridCol w="2468880"/>
-              </a:tblGrid>
-              <a:tr h="548640">
-                <a:tc>
-                  <a:txBody>
-                    <a:bodyPr/>
-                    <a:lstStyle/>
-                    <a:p>
-                      <a:pPr indent="0" marL="0">
-                        <a:buNone/>
-                      </a:pPr>
-                      <a:r>
-                        <a:rPr lang="en-US" sz="1600" b="1" dirty="0">
-                          <a:solidFill>
-                            <a:schemeClr val="bg1"/>
-                          </a:solidFill>
-                        </a:rPr>
-                        <a:t>Coût par 1re commande</a:t>
-                      </a:r>
-                      <a:endParaRPr lang="en-US" sz="1600" dirty="0"/>
-                    </a:p>
-                  </a:txBody>
-                  <a:tcPr marL="137160" marR="137160" marT="0" marB="0" anchor="ctr">
-                    <a:lnL w="9525" cap="flat" cmpd="sng" algn="ctr">
-                      <a:solidFill>
-                        <a:srgbClr val="C9B8F5"/>
-                      </a:solidFill>
-                      <a:prstDash val="solid"/>
-                      <a:round/>
-                      <a:headEnd type="none" w="med" len="med"/>
-                      <a:tailEnd type="none" w="med" len="med"/>
-                    </a:lnL>
-                    <a:lnR w="9525" cap="flat" cmpd="sng" algn="ctr">
-                      <a:solidFill>
-                        <a:srgbClr val="C9B8F5"/>
-                      </a:solidFill>
-                      <a:prstDash val="solid"/>
-                      <a:round/>
-                      <a:headEnd type="none" w="med" len="med"/>
-                      <a:tailEnd type="none" w="med" len="med"/>
-                    </a:lnR>
-                    <a:lnT w="9525" cap="flat" cmpd="sng" algn="ctr">
-                      <a:solidFill>
-                        <a:srgbClr val="C9B8F5"/>
-                      </a:solidFill>
-                      <a:prstDash val="solid"/>
-                      <a:round/>
-                      <a:headEnd type="none" w="med" len="med"/>
-                      <a:tailEnd type="none" w="med" len="med"/>
-                    </a:lnT>
-                    <a:lnB w="9525" cap="flat" cmpd="sng" algn="ctr">
-                      <a:solidFill>
-                        <a:srgbClr val="C9B8F5"/>
-                      </a:solidFill>
-                      <a:prstDash val="solid"/>
-                      <a:round/>
-                      <a:headEnd type="none" w="med" len="med"/>
-                      <a:tailEnd type="none" w="med" len="med"/>
-                    </a:lnB>
-                    <a:solidFill>
-                      <a:schemeClr val="tx2"/>
-                    </a:solidFill>
-                  </a:tcPr>
-                </a:tc>
-                <a:tc>
-                  <a:txBody>
-                    <a:bodyPr/>
-                    <a:lstStyle/>
-                    <a:p>
-                      <a:pPr indent="0" marL="0">
-                        <a:buNone/>
-                      </a:pPr>
-                      <a:r>
-                        <a:rPr lang="en-US" sz="1600" b="1" dirty="0">
-                          <a:solidFill>
-                            <a:schemeClr val="bg1"/>
-                          </a:solidFill>
-                        </a:rPr>
-                        <a:t>1res commandes</a:t>
-                      </a:r>
-                      <a:endParaRPr lang="en-US" sz="1600" dirty="0"/>
-                    </a:p>
-                  </a:txBody>
-                  <a:tcPr marL="137160" marR="137160" marT="0" marB="0" anchor="ctr">
-                    <a:lnL w="9525" cap="flat" cmpd="sng" algn="ctr">
-                      <a:solidFill>
-                        <a:srgbClr val="C9B8F5"/>
-                      </a:solidFill>
-                      <a:prstDash val="solid"/>
-                      <a:round/>
-                      <a:headEnd type="none" w="med" len="med"/>
-                      <a:tailEnd type="none" w="med" len="med"/>
-                    </a:lnL>
-                    <a:lnR w="9525" cap="flat" cmpd="sng" algn="ctr">
-                      <a:solidFill>
-                        <a:srgbClr val="C9B8F5"/>
-                      </a:solidFill>
-                      <a:prstDash val="solid"/>
-                      <a:round/>
-                      <a:headEnd type="none" w="med" len="med"/>
-                      <a:tailEnd type="none" w="med" len="med"/>
-                    </a:lnR>
-                    <a:lnT w="9525" cap="flat" cmpd="sng" algn="ctr">
-                      <a:solidFill>
-                        <a:srgbClr val="C9B8F5"/>
-                      </a:solidFill>
-                      <a:prstDash val="solid"/>
-                      <a:round/>
-                      <a:headEnd type="none" w="med" len="med"/>
-                      <a:tailEnd type="none" w="med" len="med"/>
-                    </a:lnT>
-                    <a:lnB w="9525" cap="flat" cmpd="sng" algn="ctr">
-                      <a:solidFill>
-                        <a:srgbClr val="C9B8F5"/>
-                      </a:solidFill>
-                      <a:prstDash val="solid"/>
-                      <a:round/>
-                      <a:headEnd type="none" w="med" len="med"/>
-                      <a:tailEnd type="none" w="med" len="med"/>
-                    </a:lnB>
-                    <a:solidFill>
-                      <a:schemeClr val="tx2"/>
-                    </a:solidFill>
-                  </a:tcPr>
-                </a:tc>
-              </a:tr>
-              <a:tr h="548640">
-                <a:tc>
-                  <a:txBody>
-                    <a:bodyPr/>
-                    <a:lstStyle/>
-                    <a:p>
-                      <a:pPr indent="0" marL="0">
-                        <a:buNone/>
-                      </a:pPr>
-                      <a:r>
-                        <a:rPr lang="en-US" sz="1600" dirty="0">
-                          <a:solidFill>
-                            <a:schemeClr val="tx1"/>
-                          </a:solidFill>
-                        </a:rPr>
-                        <a:t>40 DH</a:t>
-                      </a:r>
-                      <a:endParaRPr lang="en-US" sz="1600" dirty="0"/>
-                    </a:p>
-                  </a:txBody>
-                  <a:tcPr marL="137160" marR="137160" marT="0" marB="0" anchor="ctr">
-                    <a:lnL w="9525" cap="flat" cmpd="sng" algn="ctr">
-                      <a:solidFill>
-                        <a:srgbClr val="C9B8F5"/>
-                      </a:solidFill>
-                      <a:prstDash val="solid"/>
-                      <a:round/>
-                      <a:headEnd type="none" w="med" len="med"/>
-                      <a:tailEnd type="none" w="med" len="med"/>
-                    </a:lnL>
-                    <a:lnR w="9525" cap="flat" cmpd="sng" algn="ctr">
-                      <a:solidFill>
-                        <a:srgbClr val="C9B8F5"/>
-                      </a:solidFill>
-                      <a:prstDash val="solid"/>
-                      <a:round/>
-                      <a:headEnd type="none" w="med" len="med"/>
-                      <a:tailEnd type="none" w="med" len="med"/>
-                    </a:lnR>
-                    <a:lnT w="9525" cap="flat" cmpd="sng" algn="ctr">
-                      <a:solidFill>
-                        <a:srgbClr val="C9B8F5"/>
-                      </a:solidFill>
-                      <a:prstDash val="solid"/>
-                      <a:round/>
-                      <a:headEnd type="none" w="med" len="med"/>
-                      <a:tailEnd type="none" w="med" len="med"/>
-                    </a:lnT>
-                    <a:lnB w="9525" cap="flat" cmpd="sng" algn="ctr">
-                      <a:solidFill>
-                        <a:srgbClr val="C9B8F5"/>
-                      </a:solidFill>
-                      <a:prstDash val="solid"/>
-                      <a:round/>
-                      <a:headEnd type="none" w="med" len="med"/>
-                      <a:tailEnd type="none" w="med" len="med"/>
-                    </a:lnB>
-                  </a:tcPr>
-                </a:tc>
-                <a:tc>
-                  <a:txBody>
-                    <a:bodyPr/>
-                    <a:lstStyle/>
-                    <a:p>
-                      <a:pPr indent="0" marL="0">
-                        <a:buNone/>
-                      </a:pPr>
-                      <a:r>
-                        <a:rPr lang="en-US" sz="1600" dirty="0">
-                          <a:solidFill>
-                            <a:schemeClr val="tx1"/>
-                          </a:solidFill>
-                        </a:rPr>
-                        <a:t>≈ 3 250</a:t>
-                      </a:r>
-                      <a:endParaRPr lang="en-US" sz="1600" dirty="0"/>
-                    </a:p>
-                  </a:txBody>
-                  <a:tcPr marL="137160" marR="137160" marT="0" marB="0" anchor="ctr">
-                    <a:lnL w="9525" cap="flat" cmpd="sng" algn="ctr">
-                      <a:solidFill>
-                        <a:srgbClr val="C9B8F5"/>
-                      </a:solidFill>
-                      <a:prstDash val="solid"/>
-                      <a:round/>
-                      <a:headEnd type="none" w="med" len="med"/>
-                      <a:tailEnd type="none" w="med" len="med"/>
-                    </a:lnL>
-                    <a:lnR w="9525" cap="flat" cmpd="sng" algn="ctr">
-                      <a:solidFill>
-                        <a:srgbClr val="C9B8F5"/>
-                      </a:solidFill>
-                      <a:prstDash val="solid"/>
-                      <a:round/>
-                      <a:headEnd type="none" w="med" len="med"/>
-                      <a:tailEnd type="none" w="med" len="med"/>
-                    </a:lnR>
-                    <a:lnT w="9525" cap="flat" cmpd="sng" algn="ctr">
-                      <a:solidFill>
-                        <a:srgbClr val="C9B8F5"/>
-                      </a:solidFill>
-                      <a:prstDash val="solid"/>
-                      <a:round/>
-                      <a:headEnd type="none" w="med" len="med"/>
-                      <a:tailEnd type="none" w="med" len="med"/>
-                    </a:lnT>
-                    <a:lnB w="9525" cap="flat" cmpd="sng" algn="ctr">
-                      <a:solidFill>
-                        <a:srgbClr val="C9B8F5"/>
-                      </a:solidFill>
-                      <a:prstDash val="solid"/>
-                      <a:round/>
-                      <a:headEnd type="none" w="med" len="med"/>
-                      <a:tailEnd type="none" w="med" len="med"/>
-                    </a:lnB>
-                  </a:tcPr>
-                </a:tc>
-              </a:tr>
-              <a:tr h="548640">
-                <a:tc>
-                  <a:txBody>
-                    <a:bodyPr/>
-                    <a:lstStyle/>
-                    <a:p>
-                      <a:pPr indent="0" marL="0">
-                        <a:buNone/>
-                      </a:pPr>
-                      <a:r>
-                        <a:rPr lang="en-US" sz="1600" dirty="0">
-                          <a:solidFill>
-                            <a:schemeClr val="tx1"/>
-                          </a:solidFill>
-                        </a:rPr>
-                        <a:t>70 DH</a:t>
-                      </a:r>
-                      <a:endParaRPr lang="en-US" sz="1600" dirty="0"/>
-                    </a:p>
-                  </a:txBody>
-                  <a:tcPr marL="137160" marR="137160" marT="0" marB="0" anchor="ctr">
-                    <a:lnL w="9525" cap="flat" cmpd="sng" algn="ctr">
-                      <a:solidFill>
-                        <a:srgbClr val="C9B8F5"/>
-                      </a:solidFill>
-                      <a:prstDash val="solid"/>
-                      <a:round/>
-                      <a:headEnd type="none" w="med" len="med"/>
-                      <a:tailEnd type="none" w="med" len="med"/>
-                    </a:lnL>
-                    <a:lnR w="9525" cap="flat" cmpd="sng" algn="ctr">
-                      <a:solidFill>
-                        <a:srgbClr val="C9B8F5"/>
-                      </a:solidFill>
-                      <a:prstDash val="solid"/>
-                      <a:round/>
-                      <a:headEnd type="none" w="med" len="med"/>
-                      <a:tailEnd type="none" w="med" len="med"/>
-                    </a:lnR>
-                    <a:lnT w="9525" cap="flat" cmpd="sng" algn="ctr">
-                      <a:solidFill>
-                        <a:srgbClr val="C9B8F5"/>
-                      </a:solidFill>
-                      <a:prstDash val="solid"/>
-                      <a:round/>
-                      <a:headEnd type="none" w="med" len="med"/>
-                      <a:tailEnd type="none" w="med" len="med"/>
-                    </a:lnT>
-                    <a:lnB w="9525" cap="flat" cmpd="sng" algn="ctr">
-                      <a:solidFill>
-                        <a:srgbClr val="C9B8F5"/>
-                      </a:solidFill>
-                      <a:prstDash val="solid"/>
-                      <a:round/>
-                      <a:headEnd type="none" w="med" len="med"/>
-                      <a:tailEnd type="none" w="med" len="med"/>
-                    </a:lnB>
-                  </a:tcPr>
-                </a:tc>
-                <a:tc>
-                  <a:txBody>
-                    <a:bodyPr/>
-                    <a:lstStyle/>
-                    <a:p>
-                      <a:pPr indent="0" marL="0">
-                        <a:buNone/>
-                      </a:pPr>
-                      <a:r>
-                        <a:rPr lang="en-US" sz="1600" dirty="0">
-                          <a:solidFill>
-                            <a:schemeClr val="tx1"/>
-                          </a:solidFill>
-                        </a:rPr>
-                        <a:t>≈ 1 860</a:t>
-                      </a:r>
-                      <a:endParaRPr lang="en-US" sz="1600" dirty="0"/>
-                    </a:p>
-                  </a:txBody>
-                  <a:tcPr marL="137160" marR="137160" marT="0" marB="0" anchor="ctr">
-                    <a:lnL w="9525" cap="flat" cmpd="sng" algn="ctr">
-                      <a:solidFill>
-                        <a:srgbClr val="C9B8F5"/>
-                      </a:solidFill>
-                      <a:prstDash val="solid"/>
-                      <a:round/>
-                      <a:headEnd type="none" w="med" len="med"/>
-                      <a:tailEnd type="none" w="med" len="med"/>
-                    </a:lnL>
-                    <a:lnR w="9525" cap="flat" cmpd="sng" algn="ctr">
-                      <a:solidFill>
-                        <a:srgbClr val="C9B8F5"/>
-                      </a:solidFill>
-                      <a:prstDash val="solid"/>
-                      <a:round/>
-                      <a:headEnd type="none" w="med" len="med"/>
-                      <a:tailEnd type="none" w="med" len="med"/>
-                    </a:lnR>
-                    <a:lnT w="9525" cap="flat" cmpd="sng" algn="ctr">
-                      <a:solidFill>
-                        <a:srgbClr val="C9B8F5"/>
-                      </a:solidFill>
-                      <a:prstDash val="solid"/>
-                      <a:round/>
-                      <a:headEnd type="none" w="med" len="med"/>
-                      <a:tailEnd type="none" w="med" len="med"/>
-                    </a:lnT>
-                    <a:lnB w="9525" cap="flat" cmpd="sng" algn="ctr">
-                      <a:solidFill>
-                        <a:srgbClr val="C9B8F5"/>
-                      </a:solidFill>
-                      <a:prstDash val="solid"/>
-                      <a:round/>
-                      <a:headEnd type="none" w="med" len="med"/>
-                      <a:tailEnd type="none" w="med" len="med"/>
-                    </a:lnB>
-                  </a:tcPr>
-                </a:tc>
-              </a:tr>
-              <a:tr h="548640">
-                <a:tc>
-                  <a:txBody>
-                    <a:bodyPr/>
-                    <a:lstStyle/>
-                    <a:p>
-                      <a:pPr indent="0" marL="0">
-                        <a:buNone/>
-                      </a:pPr>
-                      <a:r>
-                        <a:rPr lang="en-US" sz="1600" dirty="0">
-                          <a:solidFill>
-                            <a:schemeClr val="tx1"/>
-                          </a:solidFill>
-                        </a:rPr>
-                        <a:t>100 DH</a:t>
-                      </a:r>
-                      <a:endParaRPr lang="en-US" sz="1600" dirty="0"/>
-                    </a:p>
-                  </a:txBody>
-                  <a:tcPr marL="137160" marR="137160" marT="0" marB="0" anchor="ctr">
-                    <a:lnL w="9525" cap="flat" cmpd="sng" algn="ctr">
-                      <a:solidFill>
-                        <a:srgbClr val="C9B8F5"/>
-                      </a:solidFill>
-                      <a:prstDash val="solid"/>
-                      <a:round/>
-                      <a:headEnd type="none" w="med" len="med"/>
-                      <a:tailEnd type="none" w="med" len="med"/>
-                    </a:lnL>
-                    <a:lnR w="9525" cap="flat" cmpd="sng" algn="ctr">
-                      <a:solidFill>
-                        <a:srgbClr val="C9B8F5"/>
-                      </a:solidFill>
-                      <a:prstDash val="solid"/>
-                      <a:round/>
-                      <a:headEnd type="none" w="med" len="med"/>
-                      <a:tailEnd type="none" w="med" len="med"/>
-                    </a:lnR>
-                    <a:lnT w="9525" cap="flat" cmpd="sng" algn="ctr">
-                      <a:solidFill>
-                        <a:srgbClr val="C9B8F5"/>
-                      </a:solidFill>
-                      <a:prstDash val="solid"/>
-                      <a:round/>
-                      <a:headEnd type="none" w="med" len="med"/>
-                      <a:tailEnd type="none" w="med" len="med"/>
-                    </a:lnT>
-                    <a:lnB w="9525" cap="flat" cmpd="sng" algn="ctr">
-                      <a:solidFill>
-                        <a:srgbClr val="C9B8F5"/>
-                      </a:solidFill>
-                      <a:prstDash val="solid"/>
-                      <a:round/>
-                      <a:headEnd type="none" w="med" len="med"/>
-                      <a:tailEnd type="none" w="med" len="med"/>
-                    </a:lnB>
-                  </a:tcPr>
-                </a:tc>
-                <a:tc>
-                  <a:txBody>
-                    <a:bodyPr/>
-                    <a:lstStyle/>
-                    <a:p>
-                      <a:pPr indent="0" marL="0">
-                        <a:buNone/>
-                      </a:pPr>
-                      <a:r>
-                        <a:rPr lang="en-US" sz="1600" dirty="0">
-                          <a:solidFill>
-                            <a:schemeClr val="tx1"/>
-                          </a:solidFill>
-                        </a:rPr>
-                        <a:t>≈ 1 300</a:t>
-                      </a:r>
-                      <a:endParaRPr lang="en-US" sz="1600" dirty="0"/>
-                    </a:p>
-                  </a:txBody>
-                  <a:tcPr marL="137160" marR="137160" marT="0" marB="0" anchor="ctr">
-                    <a:lnL w="9525" cap="flat" cmpd="sng" algn="ctr">
-                      <a:solidFill>
-                        <a:srgbClr val="C9B8F5"/>
-                      </a:solidFill>
-                      <a:prstDash val="solid"/>
-                      <a:round/>
-                      <a:headEnd type="none" w="med" len="med"/>
-                      <a:tailEnd type="none" w="med" len="med"/>
-                    </a:lnL>
-                    <a:lnR w="9525" cap="flat" cmpd="sng" algn="ctr">
-                      <a:solidFill>
-                        <a:srgbClr val="C9B8F5"/>
-                      </a:solidFill>
-                      <a:prstDash val="solid"/>
-                      <a:round/>
-                      <a:headEnd type="none" w="med" len="med"/>
-                      <a:tailEnd type="none" w="med" len="med"/>
-                    </a:lnR>
-                    <a:lnT w="9525" cap="flat" cmpd="sng" algn="ctr">
-                      <a:solidFill>
-                        <a:srgbClr val="C9B8F5"/>
-                      </a:solidFill>
-                      <a:prstDash val="solid"/>
-                      <a:round/>
-                      <a:headEnd type="none" w="med" len="med"/>
-                      <a:tailEnd type="none" w="med" len="med"/>
-                    </a:lnT>
-                    <a:lnB w="9525" cap="flat" cmpd="sng" algn="ctr">
-                      <a:solidFill>
-                        <a:srgbClr val="C9B8F5"/>
-                      </a:solidFill>
-                      <a:prstDash val="solid"/>
-                      <a:round/>
-                      <a:headEnd type="none" w="med" len="med"/>
-                      <a:tailEnd type="none" w="med" len="med"/>
-                    </a:lnB>
-                  </a:tcPr>
-                </a:tc>
-              </a:tr>
-            </a:tbl>
-          </a:graphicData>
-        </a:graphic>
-      </p:graphicFrame>
-      <p:sp>
-        <p:nvSpPr>
-          <p:cNvPr id="20" name="Text 14"/>
-          <p:cNvSpPr txBox="1"/>
-          <p:nvPr/>
-        </p:nvSpPr>
-        <p:spPr>
-          <a:xfrm>
-            <a:off x="6400800" y="4343400"/>
-            <a:ext cx="5212080" cy="914400"/>
-          </a:xfrm>
-          <a:prstGeom prst="rect">
-            <a:avLst/>
-          </a:prstGeom>
-          <a:noFill/>
-          <a:ln/>
-        </p:spPr>
-        <p:txBody>
-          <a:bodyPr wrap="square" lIns="0" tIns="0" rIns="0" bIns="0" rtlCol="0" anchor="t"/>
-          <a:lstStyle/>
-          <a:p>
-            <a:pPr indent="0" marL="0">
-              <a:buNone/>
-            </a:pPr>
-            <a:r>
-              <a:rPr lang="en-US" sz="1300" dirty="0">
-                <a:solidFill>
-                  <a:schemeClr val="accent5"/>
-                </a:solidFill>
-              </a:rPr>
-              <a:t>Scénarios illustratifs, pas une prévision : le vrai coût sera connu après 2 semaines de campagne. Hors coût des codes promo, s'ils sont financés à part.</a:t>
-            </a:r>
-            <a:endParaRPr lang="en-US" sz="1300" dirty="0"/>
           </a:p>
         </p:txBody>
       </p:sp>
